--- a/IHFC PPT AgriTech Synapse PPT.pptx
+++ b/IHFC PPT AgriTech Synapse PPT.pptx
@@ -4,15 +4,15 @@
   <p:sldMasterIdLst>
     <p:sldMasterId id="2147483648" r:id="rId2"/>
     <p:sldMasterId id="2147483650" r:id="rId3"/>
-    <p:sldMasterId id="2147483652" r:id="rId4"/>
-    <p:sldMasterId id="2147483654" r:id="rId5"/>
-    <p:sldMasterId id="2147483659" r:id="rId6"/>
-    <p:sldMasterId id="2147483661" r:id="rId7"/>
-    <p:sldMasterId id="2147483663" r:id="rId8"/>
-    <p:sldMasterId id="2147483665" r:id="rId9"/>
-    <p:sldMasterId id="2147483667" r:id="rId10"/>
-    <p:sldMasterId id="2147483669" r:id="rId11"/>
-    <p:sldMasterId id="2147483671" r:id="rId12"/>
+    <p:sldMasterId id="2147483651" r:id="rId4"/>
+    <p:sldMasterId id="2147483652" r:id="rId5"/>
+    <p:sldMasterId id="2147483654" r:id="rId6"/>
+    <p:sldMasterId id="2147483655" r:id="rId7"/>
+    <p:sldMasterId id="2147483656" r:id="rId8"/>
+    <p:sldMasterId id="2147483657" r:id="rId9"/>
+    <p:sldMasterId id="2147483658" r:id="rId10"/>
+    <p:sldMasterId id="2147483659" r:id="rId11"/>
+    <p:sldMasterId id="2147483660" r:id="rId12"/>
   </p:sldMasterIdLst>
   <p:sldIdLst>
     <p:sldId id="256" r:id="rId13"/>
@@ -33,2480 +33,6 @@
   <p:sldSz cx="12192000" cy="6858000"/>
   <p:notesSz cx="6858000" cy="9144000"/>
 </p:presentation>
-</file>
-
-<file path=ppt/diagrams/colors1.xml><?xml version="1.0" encoding="utf-8"?>
-<dgm:colorsDef xmlns:dgm="http://schemas.openxmlformats.org/drawingml/2006/diagram" xmlns:a="http://schemas.openxmlformats.org/drawingml/2006/main" uniqueId="urn:microsoft.com/office/officeart/2005/8/colors/colorful5">
-  <dgm:title val=""/>
-  <dgm:desc val=""/>
-  <dgm:catLst>
-    <dgm:cat type="colorful" pri="10500"/>
-  </dgm:catLst>
-  <dgm:styleLbl name="node0">
-    <dgm:fillClrLst meth="repeat">
-      <a:schemeClr val="accent4"/>
-    </dgm:fillClrLst>
-    <dgm:linClrLst meth="repeat">
-      <a:schemeClr val="lt1"/>
-    </dgm:linClrLst>
-    <dgm:effectClrLst/>
-    <dgm:txLinClrLst/>
-    <dgm:txFillClrLst/>
-    <dgm:txEffectClrLst/>
-  </dgm:styleLbl>
-  <dgm:styleLbl name="node1">
-    <dgm:fillClrLst>
-      <a:schemeClr val="accent5"/>
-      <a:schemeClr val="accent6"/>
-    </dgm:fillClrLst>
-    <dgm:linClrLst meth="repeat">
-      <a:schemeClr val="lt1"/>
-    </dgm:linClrLst>
-    <dgm:effectClrLst/>
-    <dgm:txLinClrLst/>
-    <dgm:txFillClrLst/>
-    <dgm:txEffectClrLst/>
-  </dgm:styleLbl>
-  <dgm:styleLbl name="alignNode1">
-    <dgm:fillClrLst>
-      <a:schemeClr val="accent5"/>
-      <a:schemeClr val="accent6"/>
-    </dgm:fillClrLst>
-    <dgm:linClrLst>
-      <a:schemeClr val="accent5"/>
-      <a:schemeClr val="accent6"/>
-    </dgm:linClrLst>
-    <dgm:effectClrLst/>
-    <dgm:txLinClrLst/>
-    <dgm:txFillClrLst/>
-    <dgm:txEffectClrLst/>
-  </dgm:styleLbl>
-  <dgm:styleLbl name="lnNode1">
-    <dgm:fillClrLst>
-      <a:schemeClr val="accent5"/>
-      <a:schemeClr val="accent6"/>
-    </dgm:fillClrLst>
-    <dgm:linClrLst meth="repeat">
-      <a:schemeClr val="lt1"/>
-    </dgm:linClrLst>
-    <dgm:effectClrLst/>
-    <dgm:txLinClrLst/>
-    <dgm:txFillClrLst/>
-    <dgm:txEffectClrLst/>
-  </dgm:styleLbl>
-  <dgm:styleLbl name="vennNode1">
-    <dgm:fillClrLst>
-      <a:schemeClr val="accent5">
-        <a:alpha val="50000"/>
-      </a:schemeClr>
-      <a:schemeClr val="accent6">
-        <a:alpha val="50000"/>
-      </a:schemeClr>
-    </dgm:fillClrLst>
-    <dgm:linClrLst meth="repeat">
-      <a:schemeClr val="lt1"/>
-    </dgm:linClrLst>
-    <dgm:effectClrLst/>
-    <dgm:txLinClrLst/>
-    <dgm:txFillClrLst/>
-    <dgm:txEffectClrLst/>
-  </dgm:styleLbl>
-  <dgm:styleLbl name="node2">
-    <dgm:fillClrLst>
-      <a:schemeClr val="accent6"/>
-    </dgm:fillClrLst>
-    <dgm:linClrLst meth="repeat">
-      <a:schemeClr val="lt1"/>
-    </dgm:linClrLst>
-    <dgm:effectClrLst/>
-    <dgm:txLinClrLst/>
-    <dgm:txFillClrLst/>
-    <dgm:txEffectClrLst/>
-  </dgm:styleLbl>
-  <dgm:styleLbl name="node3">
-    <dgm:fillClrLst>
-      <a:schemeClr val="accent1"/>
-    </dgm:fillClrLst>
-    <dgm:linClrLst meth="repeat">
-      <a:schemeClr val="lt1"/>
-    </dgm:linClrLst>
-    <dgm:effectClrLst/>
-    <dgm:txLinClrLst/>
-    <dgm:txFillClrLst/>
-    <dgm:txEffectClrLst/>
-  </dgm:styleLbl>
-  <dgm:styleLbl name="node4">
-    <dgm:fillClrLst>
-      <a:schemeClr val="accent2"/>
-    </dgm:fillClrLst>
-    <dgm:linClrLst meth="repeat">
-      <a:schemeClr val="lt1"/>
-    </dgm:linClrLst>
-    <dgm:effectClrLst/>
-    <dgm:txLinClrLst/>
-    <dgm:txFillClrLst/>
-    <dgm:txEffectClrLst/>
-  </dgm:styleLbl>
-  <dgm:styleLbl name="fgImgPlace1">
-    <dgm:fillClrLst>
-      <a:schemeClr val="accent5">
-        <a:tint val="50000"/>
-      </a:schemeClr>
-      <a:schemeClr val="accent6">
-        <a:tint val="50000"/>
-      </a:schemeClr>
-    </dgm:fillClrLst>
-    <dgm:linClrLst meth="repeat">
-      <a:schemeClr val="lt1"/>
-    </dgm:linClrLst>
-    <dgm:effectClrLst/>
-    <dgm:txLinClrLst/>
-    <dgm:txFillClrLst meth="repeat">
-      <a:schemeClr val="lt1"/>
-    </dgm:txFillClrLst>
-    <dgm:txEffectClrLst/>
-  </dgm:styleLbl>
-  <dgm:styleLbl name="alignImgPlace1">
-    <dgm:fillClrLst>
-      <a:schemeClr val="accent5">
-        <a:tint val="50000"/>
-      </a:schemeClr>
-      <a:schemeClr val="accent6">
-        <a:tint val="20000"/>
-      </a:schemeClr>
-    </dgm:fillClrLst>
-    <dgm:linClrLst meth="repeat">
-      <a:schemeClr val="lt1"/>
-    </dgm:linClrLst>
-    <dgm:effectClrLst/>
-    <dgm:txLinClrLst/>
-    <dgm:txFillClrLst meth="repeat">
-      <a:schemeClr val="lt1"/>
-    </dgm:txFillClrLst>
-    <dgm:txEffectClrLst/>
-  </dgm:styleLbl>
-  <dgm:styleLbl name="bgImgPlace1">
-    <dgm:fillClrLst>
-      <a:schemeClr val="accent5">
-        <a:tint val="50000"/>
-      </a:schemeClr>
-      <a:schemeClr val="accent6">
-        <a:tint val="20000"/>
-      </a:schemeClr>
-    </dgm:fillClrLst>
-    <dgm:linClrLst meth="repeat">
-      <a:schemeClr val="lt1"/>
-    </dgm:linClrLst>
-    <dgm:effectClrLst/>
-    <dgm:txLinClrLst/>
-    <dgm:txFillClrLst meth="repeat">
-      <a:schemeClr val="lt1"/>
-    </dgm:txFillClrLst>
-    <dgm:txEffectClrLst/>
-  </dgm:styleLbl>
-  <dgm:styleLbl name="sibTrans2D1">
-    <dgm:fillClrLst>
-      <a:schemeClr val="accent5"/>
-      <a:schemeClr val="accent6"/>
-    </dgm:fillClrLst>
-    <dgm:linClrLst meth="repeat">
-      <a:schemeClr val="lt1"/>
-    </dgm:linClrLst>
-    <dgm:effectClrLst/>
-    <dgm:txLinClrLst/>
-    <dgm:txFillClrLst/>
-    <dgm:txEffectClrLst/>
-  </dgm:styleLbl>
-  <dgm:styleLbl name="fgSibTrans2D1">
-    <dgm:fillClrLst>
-      <a:schemeClr val="accent5"/>
-      <a:schemeClr val="accent6"/>
-    </dgm:fillClrLst>
-    <dgm:linClrLst meth="repeat">
-      <a:schemeClr val="lt1"/>
-    </dgm:linClrLst>
-    <dgm:effectClrLst/>
-    <dgm:txLinClrLst/>
-    <dgm:txFillClrLst meth="repeat">
-      <a:schemeClr val="lt1"/>
-    </dgm:txFillClrLst>
-    <dgm:txEffectClrLst/>
-  </dgm:styleLbl>
-  <dgm:styleLbl name="bgSibTrans2D1">
-    <dgm:fillClrLst>
-      <a:schemeClr val="accent5"/>
-      <a:schemeClr val="accent6"/>
-    </dgm:fillClrLst>
-    <dgm:linClrLst meth="repeat">
-      <a:schemeClr val="lt1"/>
-    </dgm:linClrLst>
-    <dgm:effectClrLst/>
-    <dgm:txLinClrLst/>
-    <dgm:txFillClrLst meth="repeat">
-      <a:schemeClr val="lt1"/>
-    </dgm:txFillClrLst>
-    <dgm:txEffectClrLst/>
-  </dgm:styleLbl>
-  <dgm:styleLbl name="sibTrans1D1">
-    <dgm:fillClrLst/>
-    <dgm:linClrLst>
-      <a:schemeClr val="accent5"/>
-      <a:schemeClr val="accent6"/>
-    </dgm:linClrLst>
-    <dgm:effectClrLst/>
-    <dgm:txLinClrLst/>
-    <dgm:txFillClrLst meth="repeat">
-      <a:schemeClr val="tx1"/>
-    </dgm:txFillClrLst>
-    <dgm:txEffectClrLst/>
-  </dgm:styleLbl>
-  <dgm:styleLbl name="callout">
-    <dgm:fillClrLst meth="repeat">
-      <a:schemeClr val="accent5"/>
-    </dgm:fillClrLst>
-    <dgm:linClrLst meth="repeat">
-      <a:schemeClr val="accent5">
-        <a:tint val="50000"/>
-      </a:schemeClr>
-    </dgm:linClrLst>
-    <dgm:effectClrLst/>
-    <dgm:txLinClrLst/>
-    <dgm:txFillClrLst meth="repeat">
-      <a:schemeClr val="tx1"/>
-    </dgm:txFillClrLst>
-    <dgm:txEffectClrLst/>
-  </dgm:styleLbl>
-  <dgm:styleLbl name="asst0">
-    <dgm:fillClrLst meth="repeat">
-      <a:schemeClr val="accent5"/>
-    </dgm:fillClrLst>
-    <dgm:linClrLst meth="repeat">
-      <a:schemeClr val="lt1">
-        <a:shade val="80000"/>
-      </a:schemeClr>
-    </dgm:linClrLst>
-    <dgm:effectClrLst/>
-    <dgm:txLinClrLst/>
-    <dgm:txFillClrLst/>
-    <dgm:txEffectClrLst/>
-  </dgm:styleLbl>
-  <dgm:styleLbl name="asst1">
-    <dgm:fillClrLst meth="repeat">
-      <a:schemeClr val="accent6"/>
-    </dgm:fillClrLst>
-    <dgm:linClrLst meth="repeat">
-      <a:schemeClr val="lt1">
-        <a:shade val="80000"/>
-      </a:schemeClr>
-    </dgm:linClrLst>
-    <dgm:effectClrLst/>
-    <dgm:txLinClrLst/>
-    <dgm:txFillClrLst/>
-    <dgm:txEffectClrLst/>
-  </dgm:styleLbl>
-  <dgm:styleLbl name="asst2">
-    <dgm:fillClrLst>
-      <a:schemeClr val="accent1"/>
-    </dgm:fillClrLst>
-    <dgm:linClrLst meth="repeat">
-      <a:schemeClr val="lt1"/>
-    </dgm:linClrLst>
-    <dgm:effectClrLst/>
-    <dgm:txLinClrLst/>
-    <dgm:txFillClrLst/>
-    <dgm:txEffectClrLst/>
-  </dgm:styleLbl>
-  <dgm:styleLbl name="asst3">
-    <dgm:fillClrLst>
-      <a:schemeClr val="accent2"/>
-    </dgm:fillClrLst>
-    <dgm:linClrLst meth="repeat">
-      <a:schemeClr val="lt1"/>
-    </dgm:linClrLst>
-    <dgm:effectClrLst/>
-    <dgm:txLinClrLst/>
-    <dgm:txFillClrLst/>
-    <dgm:txEffectClrLst/>
-  </dgm:styleLbl>
-  <dgm:styleLbl name="asst4">
-    <dgm:fillClrLst>
-      <a:schemeClr val="accent3"/>
-    </dgm:fillClrLst>
-    <dgm:linClrLst meth="repeat">
-      <a:schemeClr val="lt1"/>
-    </dgm:linClrLst>
-    <dgm:effectClrLst/>
-    <dgm:txLinClrLst/>
-    <dgm:txFillClrLst/>
-    <dgm:txEffectClrLst/>
-  </dgm:styleLbl>
-  <dgm:styleLbl name="parChTrans2D1">
-    <dgm:fillClrLst meth="repeat">
-      <a:schemeClr val="accent5"/>
-    </dgm:fillClrLst>
-    <dgm:linClrLst meth="repeat">
-      <a:schemeClr val="lt1"/>
-    </dgm:linClrLst>
-    <dgm:effectClrLst/>
-    <dgm:txLinClrLst/>
-    <dgm:txFillClrLst meth="repeat">
-      <a:schemeClr val="lt1"/>
-    </dgm:txFillClrLst>
-    <dgm:txEffectClrLst/>
-  </dgm:styleLbl>
-  <dgm:styleLbl name="parChTrans2D2">
-    <dgm:fillClrLst meth="repeat">
-      <a:schemeClr val="accent6"/>
-    </dgm:fillClrLst>
-    <dgm:linClrLst meth="repeat">
-      <a:schemeClr val="lt1"/>
-    </dgm:linClrLst>
-    <dgm:effectClrLst/>
-    <dgm:txLinClrLst/>
-    <dgm:txFillClrLst/>
-    <dgm:txEffectClrLst/>
-  </dgm:styleLbl>
-  <dgm:styleLbl name="parChTrans2D3">
-    <dgm:fillClrLst meth="repeat">
-      <a:schemeClr val="accent6"/>
-    </dgm:fillClrLst>
-    <dgm:linClrLst meth="repeat">
-      <a:schemeClr val="lt1"/>
-    </dgm:linClrLst>
-    <dgm:effectClrLst/>
-    <dgm:txLinClrLst/>
-    <dgm:txFillClrLst/>
-    <dgm:txEffectClrLst/>
-  </dgm:styleLbl>
-  <dgm:styleLbl name="parChTrans2D4">
-    <dgm:fillClrLst meth="repeat">
-      <a:schemeClr val="accent1"/>
-    </dgm:fillClrLst>
-    <dgm:linClrLst meth="repeat">
-      <a:schemeClr val="lt1"/>
-    </dgm:linClrLst>
-    <dgm:effectClrLst/>
-    <dgm:txLinClrLst/>
-    <dgm:txFillClrLst meth="repeat">
-      <a:schemeClr val="lt1"/>
-    </dgm:txFillClrLst>
-    <dgm:txEffectClrLst/>
-  </dgm:styleLbl>
-  <dgm:styleLbl name="parChTrans1D1">
-    <dgm:fillClrLst meth="repeat">
-      <a:schemeClr val="accent5"/>
-    </dgm:fillClrLst>
-    <dgm:linClrLst meth="repeat">
-      <a:schemeClr val="accent5"/>
-    </dgm:linClrLst>
-    <dgm:effectClrLst/>
-    <dgm:txLinClrLst/>
-    <dgm:txFillClrLst meth="repeat">
-      <a:schemeClr val="tx1"/>
-    </dgm:txFillClrLst>
-    <dgm:txEffectClrLst/>
-  </dgm:styleLbl>
-  <dgm:styleLbl name="parChTrans1D2">
-    <dgm:fillClrLst meth="repeat">
-      <a:schemeClr val="accent6">
-        <a:tint val="90000"/>
-      </a:schemeClr>
-    </dgm:fillClrLst>
-    <dgm:linClrLst meth="repeat">
-      <a:schemeClr val="accent6"/>
-    </dgm:linClrLst>
-    <dgm:effectClrLst/>
-    <dgm:txLinClrLst/>
-    <dgm:txFillClrLst meth="repeat">
-      <a:schemeClr val="tx1"/>
-    </dgm:txFillClrLst>
-    <dgm:txEffectClrLst/>
-  </dgm:styleLbl>
-  <dgm:styleLbl name="parChTrans1D3">
-    <dgm:fillClrLst meth="repeat">
-      <a:schemeClr val="accent6">
-        <a:tint val="70000"/>
-      </a:schemeClr>
-    </dgm:fillClrLst>
-    <dgm:linClrLst meth="repeat">
-      <a:schemeClr val="accent1"/>
-    </dgm:linClrLst>
-    <dgm:effectClrLst/>
-    <dgm:txLinClrLst/>
-    <dgm:txFillClrLst meth="repeat">
-      <a:schemeClr val="tx1"/>
-    </dgm:txFillClrLst>
-    <dgm:txEffectClrLst/>
-  </dgm:styleLbl>
-  <dgm:styleLbl name="parChTrans1D4">
-    <dgm:fillClrLst meth="repeat">
-      <a:schemeClr val="accent6">
-        <a:tint val="50000"/>
-      </a:schemeClr>
-    </dgm:fillClrLst>
-    <dgm:linClrLst meth="repeat">
-      <a:schemeClr val="accent2"/>
-    </dgm:linClrLst>
-    <dgm:effectClrLst/>
-    <dgm:txLinClrLst/>
-    <dgm:txFillClrLst meth="repeat">
-      <a:schemeClr val="tx1"/>
-    </dgm:txFillClrLst>
-    <dgm:txEffectClrLst/>
-  </dgm:styleLbl>
-  <dgm:styleLbl name="fgAcc1">
-    <dgm:fillClrLst meth="repeat">
-      <a:schemeClr val="lt1">
-        <a:alpha val="90000"/>
-      </a:schemeClr>
-    </dgm:fillClrLst>
-    <dgm:linClrLst>
-      <a:schemeClr val="accent5"/>
-      <a:schemeClr val="accent6"/>
-    </dgm:linClrLst>
-    <dgm:effectClrLst/>
-    <dgm:txLinClrLst/>
-    <dgm:txFillClrLst meth="repeat">
-      <a:schemeClr val="dk1"/>
-    </dgm:txFillClrLst>
-    <dgm:txEffectClrLst/>
-  </dgm:styleLbl>
-  <dgm:styleLbl name="conFgAcc1">
-    <dgm:fillClrLst meth="repeat">
-      <a:schemeClr val="lt1">
-        <a:alpha val="90000"/>
-      </a:schemeClr>
-    </dgm:fillClrLst>
-    <dgm:linClrLst>
-      <a:schemeClr val="accent5"/>
-      <a:schemeClr val="accent6"/>
-    </dgm:linClrLst>
-    <dgm:effectClrLst/>
-    <dgm:txLinClrLst/>
-    <dgm:txFillClrLst meth="repeat">
-      <a:schemeClr val="dk1"/>
-    </dgm:txFillClrLst>
-    <dgm:txEffectClrLst/>
-  </dgm:styleLbl>
-  <dgm:styleLbl name="alignAcc1">
-    <dgm:fillClrLst meth="repeat">
-      <a:schemeClr val="lt1">
-        <a:alpha val="90000"/>
-      </a:schemeClr>
-    </dgm:fillClrLst>
-    <dgm:linClrLst>
-      <a:schemeClr val="accent5"/>
-      <a:schemeClr val="accent6"/>
-    </dgm:linClrLst>
-    <dgm:effectClrLst/>
-    <dgm:txLinClrLst/>
-    <dgm:txFillClrLst meth="repeat">
-      <a:schemeClr val="dk1"/>
-    </dgm:txFillClrLst>
-    <dgm:txEffectClrLst/>
-  </dgm:styleLbl>
-  <dgm:styleLbl name="trAlignAcc1">
-    <dgm:fillClrLst meth="repeat">
-      <a:schemeClr val="lt1">
-        <a:alpha val="40000"/>
-      </a:schemeClr>
-    </dgm:fillClrLst>
-    <dgm:linClrLst meth="repeat">
-      <a:schemeClr val="accent5"/>
-    </dgm:linClrLst>
-    <dgm:effectClrLst/>
-    <dgm:txLinClrLst/>
-    <dgm:txFillClrLst meth="repeat">
-      <a:schemeClr val="dk1"/>
-    </dgm:txFillClrLst>
-    <dgm:txEffectClrLst/>
-  </dgm:styleLbl>
-  <dgm:styleLbl name="bgAcc1">
-    <dgm:fillClrLst meth="repeat">
-      <a:schemeClr val="lt1">
-        <a:alpha val="90000"/>
-      </a:schemeClr>
-    </dgm:fillClrLst>
-    <dgm:linClrLst>
-      <a:schemeClr val="accent5"/>
-      <a:schemeClr val="accent6"/>
-    </dgm:linClrLst>
-    <dgm:effectClrLst/>
-    <dgm:txLinClrLst/>
-    <dgm:txFillClrLst meth="repeat">
-      <a:schemeClr val="dk1"/>
-    </dgm:txFillClrLst>
-    <dgm:txEffectClrLst/>
-  </dgm:styleLbl>
-  <dgm:styleLbl name="solidFgAcc1">
-    <dgm:fillClrLst meth="repeat">
-      <a:schemeClr val="lt1"/>
-    </dgm:fillClrLst>
-    <dgm:linClrLst>
-      <a:schemeClr val="accent5"/>
-      <a:schemeClr val="accent6"/>
-    </dgm:linClrLst>
-    <dgm:effectClrLst/>
-    <dgm:txLinClrLst/>
-    <dgm:txFillClrLst meth="repeat">
-      <a:schemeClr val="dk1"/>
-    </dgm:txFillClrLst>
-    <dgm:txEffectClrLst/>
-  </dgm:styleLbl>
-  <dgm:styleLbl name="solidAlignAcc1">
-    <dgm:fillClrLst meth="repeat">
-      <a:schemeClr val="lt1"/>
-    </dgm:fillClrLst>
-    <dgm:linClrLst>
-      <a:schemeClr val="accent5"/>
-      <a:schemeClr val="accent6"/>
-    </dgm:linClrLst>
-    <dgm:effectClrLst/>
-    <dgm:txLinClrLst/>
-    <dgm:txFillClrLst meth="repeat">
-      <a:schemeClr val="dk1"/>
-    </dgm:txFillClrLst>
-    <dgm:txEffectClrLst/>
-  </dgm:styleLbl>
-  <dgm:styleLbl name="solidBgAcc1">
-    <dgm:fillClrLst meth="repeat">
-      <a:schemeClr val="lt1"/>
-    </dgm:fillClrLst>
-    <dgm:linClrLst>
-      <a:schemeClr val="accent5"/>
-      <a:schemeClr val="accent6"/>
-    </dgm:linClrLst>
-    <dgm:effectClrLst/>
-    <dgm:txLinClrLst/>
-    <dgm:txFillClrLst meth="repeat">
-      <a:schemeClr val="dk1"/>
-    </dgm:txFillClrLst>
-    <dgm:txEffectClrLst/>
-  </dgm:styleLbl>
-  <dgm:styleLbl name="fgAccFollowNode1">
-    <dgm:fillClrLst>
-      <a:schemeClr val="accent5">
-        <a:tint val="40000"/>
-        <a:alpha val="90000"/>
-      </a:schemeClr>
-      <a:schemeClr val="accent6">
-        <a:tint val="40000"/>
-        <a:alpha val="90000"/>
-      </a:schemeClr>
-    </dgm:fillClrLst>
-    <dgm:linClrLst>
-      <a:schemeClr val="accent5">
-        <a:tint val="40000"/>
-        <a:alpha val="90000"/>
-      </a:schemeClr>
-      <a:schemeClr val="accent5">
-        <a:tint val="40000"/>
-        <a:alpha val="90000"/>
-      </a:schemeClr>
-    </dgm:linClrLst>
-    <dgm:effectClrLst/>
-    <dgm:txLinClrLst/>
-    <dgm:txFillClrLst meth="repeat">
-      <a:schemeClr val="dk1"/>
-    </dgm:txFillClrLst>
-    <dgm:txEffectClrLst/>
-  </dgm:styleLbl>
-  <dgm:styleLbl name="alignAccFollowNode1">
-    <dgm:fillClrLst>
-      <a:schemeClr val="accent5">
-        <a:tint val="40000"/>
-        <a:alpha val="90000"/>
-      </a:schemeClr>
-      <a:schemeClr val="accent6">
-        <a:tint val="40000"/>
-        <a:alpha val="90000"/>
-      </a:schemeClr>
-    </dgm:fillClrLst>
-    <dgm:linClrLst>
-      <a:schemeClr val="accent5">
-        <a:tint val="40000"/>
-        <a:alpha val="90000"/>
-      </a:schemeClr>
-      <a:schemeClr val="accent6">
-        <a:tint val="40000"/>
-        <a:alpha val="90000"/>
-      </a:schemeClr>
-    </dgm:linClrLst>
-    <dgm:effectClrLst/>
-    <dgm:txLinClrLst/>
-    <dgm:txFillClrLst meth="repeat">
-      <a:schemeClr val="dk1"/>
-    </dgm:txFillClrLst>
-    <dgm:txEffectClrLst/>
-  </dgm:styleLbl>
-  <dgm:styleLbl name="bgAccFollowNode1">
-    <dgm:fillClrLst>
-      <a:schemeClr val="accent5">
-        <a:tint val="40000"/>
-        <a:alpha val="90000"/>
-      </a:schemeClr>
-      <a:schemeClr val="accent6">
-        <a:tint val="40000"/>
-        <a:alpha val="90000"/>
-      </a:schemeClr>
-    </dgm:fillClrLst>
-    <dgm:linClrLst>
-      <a:schemeClr val="accent5">
-        <a:tint val="40000"/>
-        <a:alpha val="90000"/>
-      </a:schemeClr>
-      <a:schemeClr val="accent6">
-        <a:tint val="40000"/>
-        <a:alpha val="90000"/>
-      </a:schemeClr>
-    </dgm:linClrLst>
-    <dgm:effectClrLst/>
-    <dgm:txLinClrLst/>
-    <dgm:txFillClrLst meth="repeat">
-      <a:schemeClr val="dk1"/>
-    </dgm:txFillClrLst>
-    <dgm:txEffectClrLst/>
-  </dgm:styleLbl>
-  <dgm:styleLbl name="fgAcc0">
-    <dgm:fillClrLst meth="repeat">
-      <a:schemeClr val="lt1">
-        <a:alpha val="90000"/>
-      </a:schemeClr>
-    </dgm:fillClrLst>
-    <dgm:linClrLst>
-      <a:schemeClr val="accent4"/>
-    </dgm:linClrLst>
-    <dgm:effectClrLst/>
-    <dgm:txLinClrLst/>
-    <dgm:txFillClrLst meth="repeat">
-      <a:schemeClr val="dk1"/>
-    </dgm:txFillClrLst>
-    <dgm:txEffectClrLst/>
-  </dgm:styleLbl>
-  <dgm:styleLbl name="fgAcc2">
-    <dgm:fillClrLst meth="repeat">
-      <a:schemeClr val="lt1">
-        <a:alpha val="90000"/>
-      </a:schemeClr>
-    </dgm:fillClrLst>
-    <dgm:linClrLst>
-      <a:schemeClr val="accent6"/>
-    </dgm:linClrLst>
-    <dgm:effectClrLst/>
-    <dgm:txLinClrLst/>
-    <dgm:txFillClrLst meth="repeat">
-      <a:schemeClr val="dk1"/>
-    </dgm:txFillClrLst>
-    <dgm:txEffectClrLst/>
-  </dgm:styleLbl>
-  <dgm:styleLbl name="fgAcc3">
-    <dgm:fillClrLst meth="repeat">
-      <a:schemeClr val="lt1">
-        <a:alpha val="90000"/>
-      </a:schemeClr>
-    </dgm:fillClrLst>
-    <dgm:linClrLst>
-      <a:schemeClr val="accent1"/>
-    </dgm:linClrLst>
-    <dgm:effectClrLst/>
-    <dgm:txLinClrLst/>
-    <dgm:txFillClrLst meth="repeat">
-      <a:schemeClr val="dk1"/>
-    </dgm:txFillClrLst>
-    <dgm:txEffectClrLst/>
-  </dgm:styleLbl>
-  <dgm:styleLbl name="fgAcc4">
-    <dgm:fillClrLst meth="repeat">
-      <a:schemeClr val="lt1">
-        <a:alpha val="90000"/>
-      </a:schemeClr>
-    </dgm:fillClrLst>
-    <dgm:linClrLst>
-      <a:schemeClr val="accent2"/>
-    </dgm:linClrLst>
-    <dgm:effectClrLst/>
-    <dgm:txLinClrLst/>
-    <dgm:txFillClrLst meth="repeat">
-      <a:schemeClr val="dk1"/>
-    </dgm:txFillClrLst>
-    <dgm:txEffectClrLst/>
-  </dgm:styleLbl>
-  <dgm:styleLbl name="bgShp">
-    <dgm:fillClrLst meth="repeat">
-      <a:schemeClr val="accent5">
-        <a:tint val="40000"/>
-      </a:schemeClr>
-    </dgm:fillClrLst>
-    <dgm:linClrLst meth="repeat">
-      <a:schemeClr val="dk1"/>
-    </dgm:linClrLst>
-    <dgm:effectClrLst/>
-    <dgm:txLinClrLst/>
-    <dgm:txFillClrLst meth="repeat">
-      <a:schemeClr val="dk1"/>
-    </dgm:txFillClrLst>
-    <dgm:txEffectClrLst/>
-  </dgm:styleLbl>
-  <dgm:styleLbl name="dkBgShp">
-    <dgm:fillClrLst meth="repeat">
-      <a:schemeClr val="accent5">
-        <a:shade val="90000"/>
-      </a:schemeClr>
-    </dgm:fillClrLst>
-    <dgm:linClrLst meth="repeat">
-      <a:schemeClr val="dk1"/>
-    </dgm:linClrLst>
-    <dgm:effectClrLst/>
-    <dgm:txLinClrLst/>
-    <dgm:txFillClrLst meth="repeat">
-      <a:schemeClr val="lt1"/>
-    </dgm:txFillClrLst>
-    <dgm:txEffectClrLst/>
-  </dgm:styleLbl>
-  <dgm:styleLbl name="trBgShp">
-    <dgm:fillClrLst meth="repeat">
-      <a:schemeClr val="accent5">
-        <a:tint val="50000"/>
-        <a:alpha val="40000"/>
-      </a:schemeClr>
-    </dgm:fillClrLst>
-    <dgm:linClrLst meth="repeat">
-      <a:schemeClr val="accent5"/>
-    </dgm:linClrLst>
-    <dgm:effectClrLst/>
-    <dgm:txLinClrLst/>
-    <dgm:txFillClrLst meth="repeat">
-      <a:schemeClr val="lt1"/>
-    </dgm:txFillClrLst>
-    <dgm:txEffectClrLst/>
-  </dgm:styleLbl>
-  <dgm:styleLbl name="fgShp">
-    <dgm:fillClrLst meth="repeat">
-      <a:schemeClr val="accent5">
-        <a:tint val="40000"/>
-      </a:schemeClr>
-    </dgm:fillClrLst>
-    <dgm:linClrLst meth="repeat">
-      <a:schemeClr val="lt1"/>
-    </dgm:linClrLst>
-    <dgm:effectClrLst/>
-    <dgm:txLinClrLst/>
-    <dgm:txFillClrLst meth="repeat">
-      <a:schemeClr val="dk1"/>
-    </dgm:txFillClrLst>
-    <dgm:txEffectClrLst/>
-  </dgm:styleLbl>
-  <dgm:styleLbl name="revTx">
-    <dgm:fillClrLst meth="repeat">
-      <a:schemeClr val="lt1">
-        <a:alpha val="0"/>
-      </a:schemeClr>
-    </dgm:fillClrLst>
-    <dgm:linClrLst meth="repeat">
-      <a:schemeClr val="dk1">
-        <a:alpha val="0"/>
-      </a:schemeClr>
-    </dgm:linClrLst>
-    <dgm:effectClrLst/>
-    <dgm:txLinClrLst/>
-    <dgm:txFillClrLst meth="repeat">
-      <a:schemeClr val="tx1"/>
-    </dgm:txFillClrLst>
-    <dgm:txEffectClrLst/>
-  </dgm:styleLbl>
-</dgm:colorsDef>
-</file>
-
-<file path=ppt/diagrams/data1.xml><?xml version="1.0" encoding="utf-8"?>
-<dgm:dataModel xmlns:dgm="http://schemas.openxmlformats.org/drawingml/2006/diagram" xmlns:a="http://schemas.openxmlformats.org/drawingml/2006/main">
-  <dgm:ptLst>
-    <dgm:pt modelId="{F71AE383-955A-4E7D-B19F-BB6ED8A2D251}" type="doc">
-      <dgm:prSet loTypeId="urn:microsoft.com/office/officeart/2005/8/layout/vList2" loCatId="list" qsTypeId="urn:microsoft.com/office/officeart/2005/8/quickstyle/simple4" qsCatId="simple" csTypeId="urn:microsoft.com/office/officeart/2005/8/colors/colorful5" csCatId="colorful"/>
-      <dgm:spPr/>
-      <dgm:t>
-        <a:bodyPr/>
-        <a:lstStyle/>
-        <a:p>
-          <a:endParaRPr lang="en-US"/>
-        </a:p>
-      </dgm:t>
-    </dgm:pt>
-    <dgm:pt modelId="{22007071-22C9-44B7-8210-E03D625D911D}">
-      <dgm:prSet/>
-      <dgm:spPr/>
-      <dgm:t>
-        <a:bodyPr/>
-        <a:lstStyle/>
-        <a:p>
-          <a:r>
-            <a:rPr lang="en-IN" b="0" i="0"/>
-            <a:t>Details of technology/prototype with Video</a:t>
-          </a:r>
-          <a:endParaRPr lang="en-US"/>
-        </a:p>
-      </dgm:t>
-    </dgm:pt>
-    <dgm:pt modelId="{4418859D-EE6E-42C5-BA27-1CBF92E796D6}" type="parTrans" cxnId="{B6FA2161-276C-4896-976A-51F68CF27710}">
-      <dgm:prSet/>
-      <dgm:spPr/>
-      <dgm:t>
-        <a:bodyPr/>
-        <a:lstStyle/>
-        <a:p>
-          <a:endParaRPr lang="en-US"/>
-        </a:p>
-      </dgm:t>
-    </dgm:pt>
-    <dgm:pt modelId="{221F1121-06C4-4C30-897F-ED7E8B660464}" type="sibTrans" cxnId="{B6FA2161-276C-4896-976A-51F68CF27710}">
-      <dgm:prSet/>
-      <dgm:spPr/>
-      <dgm:t>
-        <a:bodyPr/>
-        <a:lstStyle/>
-        <a:p>
-          <a:endParaRPr lang="en-US"/>
-        </a:p>
-      </dgm:t>
-    </dgm:pt>
-    <dgm:pt modelId="{6CF04B8B-A0A2-4116-ADEF-1C55803A5CC9}">
-      <dgm:prSet/>
-      <dgm:spPr/>
-      <dgm:t>
-        <a:bodyPr/>
-        <a:lstStyle/>
-        <a:p>
-          <a:r>
-            <a:rPr lang="en-IN" b="0" i="0"/>
-            <a:t>Comparison with existing such technologies/patents/prototypes</a:t>
-          </a:r>
-          <a:endParaRPr lang="en-US"/>
-        </a:p>
-      </dgm:t>
-    </dgm:pt>
-    <dgm:pt modelId="{FAD32E15-C316-4B74-BB2C-4102460D9D4B}" type="parTrans" cxnId="{BF4F3E85-6A7B-4729-AC4E-BEC848359F7B}">
-      <dgm:prSet/>
-      <dgm:spPr/>
-      <dgm:t>
-        <a:bodyPr/>
-        <a:lstStyle/>
-        <a:p>
-          <a:endParaRPr lang="en-US"/>
-        </a:p>
-      </dgm:t>
-    </dgm:pt>
-    <dgm:pt modelId="{8BF018AE-A18E-4417-8769-EAF20CBF7037}" type="sibTrans" cxnId="{BF4F3E85-6A7B-4729-AC4E-BEC848359F7B}">
-      <dgm:prSet/>
-      <dgm:spPr/>
-      <dgm:t>
-        <a:bodyPr/>
-        <a:lstStyle/>
-        <a:p>
-          <a:endParaRPr lang="en-US"/>
-        </a:p>
-      </dgm:t>
-    </dgm:pt>
-    <dgm:pt modelId="{4CEDBFBE-66CF-4BE7-BFC9-1C985FA9DDB1}">
-      <dgm:prSet/>
-      <dgm:spPr/>
-      <dgm:t>
-        <a:bodyPr/>
-        <a:lstStyle/>
-        <a:p>
-          <a:r>
-            <a:rPr lang="en-IN" b="0" i="0"/>
-            <a:t>Environmental impact/Sustainability of the technology</a:t>
-          </a:r>
-          <a:endParaRPr lang="en-US"/>
-        </a:p>
-      </dgm:t>
-    </dgm:pt>
-    <dgm:pt modelId="{A21B5119-8CD9-4C80-B36B-46F453BF677E}" type="parTrans" cxnId="{9EFE7E7D-54E3-4F5F-96BD-1E746D5B45A2}">
-      <dgm:prSet/>
-      <dgm:spPr/>
-      <dgm:t>
-        <a:bodyPr/>
-        <a:lstStyle/>
-        <a:p>
-          <a:endParaRPr lang="en-US"/>
-        </a:p>
-      </dgm:t>
-    </dgm:pt>
-    <dgm:pt modelId="{B8FEC836-5B13-4C8F-BEBD-F40988BCB4FE}" type="sibTrans" cxnId="{9EFE7E7D-54E3-4F5F-96BD-1E746D5B45A2}">
-      <dgm:prSet/>
-      <dgm:spPr/>
-      <dgm:t>
-        <a:bodyPr/>
-        <a:lstStyle/>
-        <a:p>
-          <a:endParaRPr lang="en-US"/>
-        </a:p>
-      </dgm:t>
-    </dgm:pt>
-    <dgm:pt modelId="{1C478759-9060-42C8-81C4-AD7EAA0EF223}" type="pres">
-      <dgm:prSet presAssocID="{F71AE383-955A-4E7D-B19F-BB6ED8A2D251}" presName="linear" presStyleCnt="0">
-        <dgm:presLayoutVars>
-          <dgm:animLvl val="lvl"/>
-          <dgm:resizeHandles val="exact"/>
-        </dgm:presLayoutVars>
-      </dgm:prSet>
-      <dgm:spPr/>
-    </dgm:pt>
-    <dgm:pt modelId="{BEF2BD36-539B-4481-92B6-DDA3C555CF33}" type="pres">
-      <dgm:prSet presAssocID="{22007071-22C9-44B7-8210-E03D625D911D}" presName="parentText" presStyleLbl="node1" presStyleIdx="0" presStyleCnt="3">
-        <dgm:presLayoutVars>
-          <dgm:chMax val="0"/>
-          <dgm:bulletEnabled val="1"/>
-        </dgm:presLayoutVars>
-      </dgm:prSet>
-      <dgm:spPr/>
-    </dgm:pt>
-    <dgm:pt modelId="{98C03371-C6AA-4299-8CA3-697FDF2B52BB}" type="pres">
-      <dgm:prSet presAssocID="{221F1121-06C4-4C30-897F-ED7E8B660464}" presName="spacer" presStyleCnt="0"/>
-      <dgm:spPr/>
-    </dgm:pt>
-    <dgm:pt modelId="{155EBB7D-8180-4039-BEBF-3840B20969ED}" type="pres">
-      <dgm:prSet presAssocID="{6CF04B8B-A0A2-4116-ADEF-1C55803A5CC9}" presName="parentText" presStyleLbl="node1" presStyleIdx="1" presStyleCnt="3">
-        <dgm:presLayoutVars>
-          <dgm:chMax val="0"/>
-          <dgm:bulletEnabled val="1"/>
-        </dgm:presLayoutVars>
-      </dgm:prSet>
-      <dgm:spPr/>
-    </dgm:pt>
-    <dgm:pt modelId="{751839B0-FB22-4488-8164-AFDF25BA9C41}" type="pres">
-      <dgm:prSet presAssocID="{8BF018AE-A18E-4417-8769-EAF20CBF7037}" presName="spacer" presStyleCnt="0"/>
-      <dgm:spPr/>
-    </dgm:pt>
-    <dgm:pt modelId="{A945BD8B-7D16-43F1-B6CB-6BC080C313EE}" type="pres">
-      <dgm:prSet presAssocID="{4CEDBFBE-66CF-4BE7-BFC9-1C985FA9DDB1}" presName="parentText" presStyleLbl="node1" presStyleIdx="2" presStyleCnt="3">
-        <dgm:presLayoutVars>
-          <dgm:chMax val="0"/>
-          <dgm:bulletEnabled val="1"/>
-        </dgm:presLayoutVars>
-      </dgm:prSet>
-      <dgm:spPr/>
-    </dgm:pt>
-  </dgm:ptLst>
-  <dgm:cxnLst>
-    <dgm:cxn modelId="{4482D510-B6C1-4F6E-AF98-A92CC04F16B0}" type="presOf" srcId="{22007071-22C9-44B7-8210-E03D625D911D}" destId="{BEF2BD36-539B-4481-92B6-DDA3C555CF33}" srcOrd="0" destOrd="0" presId="urn:microsoft.com/office/officeart/2005/8/layout/vList2"/>
-    <dgm:cxn modelId="{9CA5CE2A-36FE-4B76-A561-8045736234D4}" type="presOf" srcId="{F71AE383-955A-4E7D-B19F-BB6ED8A2D251}" destId="{1C478759-9060-42C8-81C4-AD7EAA0EF223}" srcOrd="0" destOrd="0" presId="urn:microsoft.com/office/officeart/2005/8/layout/vList2"/>
-    <dgm:cxn modelId="{B6FA2161-276C-4896-976A-51F68CF27710}" srcId="{F71AE383-955A-4E7D-B19F-BB6ED8A2D251}" destId="{22007071-22C9-44B7-8210-E03D625D911D}" srcOrd="0" destOrd="0" parTransId="{4418859D-EE6E-42C5-BA27-1CBF92E796D6}" sibTransId="{221F1121-06C4-4C30-897F-ED7E8B660464}"/>
-    <dgm:cxn modelId="{9EFE7E7D-54E3-4F5F-96BD-1E746D5B45A2}" srcId="{F71AE383-955A-4E7D-B19F-BB6ED8A2D251}" destId="{4CEDBFBE-66CF-4BE7-BFC9-1C985FA9DDB1}" srcOrd="2" destOrd="0" parTransId="{A21B5119-8CD9-4C80-B36B-46F453BF677E}" sibTransId="{B8FEC836-5B13-4C8F-BEBD-F40988BCB4FE}"/>
-    <dgm:cxn modelId="{BF4F3E85-6A7B-4729-AC4E-BEC848359F7B}" srcId="{F71AE383-955A-4E7D-B19F-BB6ED8A2D251}" destId="{6CF04B8B-A0A2-4116-ADEF-1C55803A5CC9}" srcOrd="1" destOrd="0" parTransId="{FAD32E15-C316-4B74-BB2C-4102460D9D4B}" sibTransId="{8BF018AE-A18E-4417-8769-EAF20CBF7037}"/>
-    <dgm:cxn modelId="{E30E91D2-313F-4FA0-A396-4B7306B19FBB}" type="presOf" srcId="{4CEDBFBE-66CF-4BE7-BFC9-1C985FA9DDB1}" destId="{A945BD8B-7D16-43F1-B6CB-6BC080C313EE}" srcOrd="0" destOrd="0" presId="urn:microsoft.com/office/officeart/2005/8/layout/vList2"/>
-    <dgm:cxn modelId="{FE32B7FC-8F7A-4166-987C-DF96C74E92B3}" type="presOf" srcId="{6CF04B8B-A0A2-4116-ADEF-1C55803A5CC9}" destId="{155EBB7D-8180-4039-BEBF-3840B20969ED}" srcOrd="0" destOrd="0" presId="urn:microsoft.com/office/officeart/2005/8/layout/vList2"/>
-    <dgm:cxn modelId="{B95D3CFE-2142-4724-8D2E-9D5BCD1AC937}" type="presParOf" srcId="{1C478759-9060-42C8-81C4-AD7EAA0EF223}" destId="{BEF2BD36-539B-4481-92B6-DDA3C555CF33}" srcOrd="0" destOrd="0" presId="urn:microsoft.com/office/officeart/2005/8/layout/vList2"/>
-    <dgm:cxn modelId="{BB607013-8B55-4FF6-99C8-D4704B5DF346}" type="presParOf" srcId="{1C478759-9060-42C8-81C4-AD7EAA0EF223}" destId="{98C03371-C6AA-4299-8CA3-697FDF2B52BB}" srcOrd="1" destOrd="0" presId="urn:microsoft.com/office/officeart/2005/8/layout/vList2"/>
-    <dgm:cxn modelId="{CB60E1CC-E792-44BA-B1BC-4BF62D379AC3}" type="presParOf" srcId="{1C478759-9060-42C8-81C4-AD7EAA0EF223}" destId="{155EBB7D-8180-4039-BEBF-3840B20969ED}" srcOrd="2" destOrd="0" presId="urn:microsoft.com/office/officeart/2005/8/layout/vList2"/>
-    <dgm:cxn modelId="{603F630D-2210-438C-A34D-902E0E09D7BE}" type="presParOf" srcId="{1C478759-9060-42C8-81C4-AD7EAA0EF223}" destId="{751839B0-FB22-4488-8164-AFDF25BA9C41}" srcOrd="3" destOrd="0" presId="urn:microsoft.com/office/officeart/2005/8/layout/vList2"/>
-    <dgm:cxn modelId="{13B3402E-9905-4378-A5C0-AC8754CE303A}" type="presParOf" srcId="{1C478759-9060-42C8-81C4-AD7EAA0EF223}" destId="{A945BD8B-7D16-43F1-B6CB-6BC080C313EE}" srcOrd="4" destOrd="0" presId="urn:microsoft.com/office/officeart/2005/8/layout/vList2"/>
-  </dgm:cxnLst>
-  <dgm:bg/>
-  <dgm:whole/>
-  <dgm:extLst>
-    <a:ext uri="http://schemas.microsoft.com/office/drawing/2008/diagram">
-      <dsp:dataModelExt xmlns:dsp="http://schemas.microsoft.com/office/drawing/2008/diagram" relId="rId6" minVer="http://schemas.openxmlformats.org/drawingml/2006/diagram"/>
-    </a:ext>
-  </dgm:extLst>
-</dgm:dataModel>
-</file>
-
-<file path=ppt/diagrams/drawing1.xml><?xml version="1.0" encoding="utf-8"?>
-<dsp:drawing xmlns:dgm="http://schemas.openxmlformats.org/drawingml/2006/diagram" xmlns:dsp="http://schemas.microsoft.com/office/drawing/2008/diagram" xmlns:a="http://schemas.openxmlformats.org/drawingml/2006/main">
-  <dsp:spTree>
-    <dsp:nvGrpSpPr>
-      <dsp:cNvPr id="0" name=""/>
-      <dsp:cNvGrpSpPr/>
-    </dsp:nvGrpSpPr>
-    <dsp:grpSpPr/>
-    <dsp:sp modelId="{BEF2BD36-539B-4481-92B6-DDA3C555CF33}">
-      <dsp:nvSpPr>
-        <dsp:cNvPr id="0" name=""/>
-        <dsp:cNvSpPr/>
-      </dsp:nvSpPr>
-      <dsp:spPr>
-        <a:xfrm>
-          <a:off x="0" y="4026"/>
-          <a:ext cx="6666833" cy="1751928"/>
-        </a:xfrm>
-        <a:prstGeom prst="roundRect">
-          <a:avLst/>
-        </a:prstGeom>
-        <a:gradFill rotWithShape="0">
-          <a:gsLst>
-            <a:gs pos="0">
-              <a:schemeClr val="accent5">
-                <a:hueOff val="0"/>
-                <a:satOff val="0"/>
-                <a:lumOff val="0"/>
-                <a:alphaOff val="0"/>
-                <a:tint val="100000"/>
-                <a:shade val="100000"/>
-                <a:satMod val="130000"/>
-              </a:schemeClr>
-            </a:gs>
-            <a:gs pos="100000">
-              <a:schemeClr val="accent5">
-                <a:hueOff val="0"/>
-                <a:satOff val="0"/>
-                <a:lumOff val="0"/>
-                <a:alphaOff val="0"/>
-                <a:tint val="50000"/>
-                <a:shade val="100000"/>
-                <a:satMod val="350000"/>
-              </a:schemeClr>
-            </a:gs>
-          </a:gsLst>
-          <a:lin ang="16200000" scaled="0"/>
-        </a:gradFill>
-        <a:ln>
-          <a:noFill/>
-        </a:ln>
-        <a:effectLst>
-          <a:outerShdw blurRad="40000" dist="23000" dir="5400000" rotWithShape="0">
-            <a:srgbClr val="000000">
-              <a:alpha val="35000"/>
-            </a:srgbClr>
-          </a:outerShdw>
-        </a:effectLst>
-      </dsp:spPr>
-      <dsp:style>
-        <a:lnRef idx="0">
-          <a:scrgbClr r="0" g="0" b="0"/>
-        </a:lnRef>
-        <a:fillRef idx="3">
-          <a:scrgbClr r="0" g="0" b="0"/>
-        </a:fillRef>
-        <a:effectRef idx="2">
-          <a:scrgbClr r="0" g="0" b="0"/>
-        </a:effectRef>
-        <a:fontRef idx="minor">
-          <a:schemeClr val="lt1"/>
-        </a:fontRef>
-      </dsp:style>
-      <dsp:txBody>
-        <a:bodyPr spcFirstLastPara="0" vert="horz" wrap="square" lIns="125730" tIns="125730" rIns="125730" bIns="125730" numCol="1" spcCol="1270" anchor="ctr" anchorCtr="0">
-          <a:noAutofit/>
-        </a:bodyPr>
-        <a:lstStyle/>
-        <a:p>
-          <a:pPr marL="0" lvl="0" indent="0" algn="l" defTabSz="1466850">
-            <a:lnSpc>
-              <a:spcPct val="90000"/>
-            </a:lnSpc>
-            <a:spcBef>
-              <a:spcPct val="0"/>
-            </a:spcBef>
-            <a:spcAft>
-              <a:spcPct val="35000"/>
-            </a:spcAft>
-            <a:buNone/>
-          </a:pPr>
-          <a:r>
-            <a:rPr lang="en-IN" sz="3300" b="0" i="0" kern="1200"/>
-            <a:t>Details of technology/prototype with Video</a:t>
-          </a:r>
-          <a:endParaRPr lang="en-US" sz="3300" kern="1200"/>
-        </a:p>
-      </dsp:txBody>
-      <dsp:txXfrm>
-        <a:off x="85522" y="89548"/>
-        <a:ext cx="6495789" cy="1580884"/>
-      </dsp:txXfrm>
-    </dsp:sp>
-    <dsp:sp modelId="{155EBB7D-8180-4039-BEBF-3840B20969ED}">
-      <dsp:nvSpPr>
-        <dsp:cNvPr id="0" name=""/>
-        <dsp:cNvSpPr/>
-      </dsp:nvSpPr>
-      <dsp:spPr>
-        <a:xfrm>
-          <a:off x="0" y="1850995"/>
-          <a:ext cx="6666833" cy="1751928"/>
-        </a:xfrm>
-        <a:prstGeom prst="roundRect">
-          <a:avLst/>
-        </a:prstGeom>
-        <a:gradFill rotWithShape="0">
-          <a:gsLst>
-            <a:gs pos="0">
-              <a:schemeClr val="accent5">
-                <a:hueOff val="-3379271"/>
-                <a:satOff val="-8710"/>
-                <a:lumOff val="-5883"/>
-                <a:alphaOff val="0"/>
-                <a:tint val="100000"/>
-                <a:shade val="100000"/>
-                <a:satMod val="130000"/>
-              </a:schemeClr>
-            </a:gs>
-            <a:gs pos="100000">
-              <a:schemeClr val="accent5">
-                <a:hueOff val="-3379271"/>
-                <a:satOff val="-8710"/>
-                <a:lumOff val="-5883"/>
-                <a:alphaOff val="0"/>
-                <a:tint val="50000"/>
-                <a:shade val="100000"/>
-                <a:satMod val="350000"/>
-              </a:schemeClr>
-            </a:gs>
-          </a:gsLst>
-          <a:lin ang="16200000" scaled="0"/>
-        </a:gradFill>
-        <a:ln>
-          <a:noFill/>
-        </a:ln>
-        <a:effectLst>
-          <a:outerShdw blurRad="40000" dist="23000" dir="5400000" rotWithShape="0">
-            <a:srgbClr val="000000">
-              <a:alpha val="35000"/>
-            </a:srgbClr>
-          </a:outerShdw>
-        </a:effectLst>
-      </dsp:spPr>
-      <dsp:style>
-        <a:lnRef idx="0">
-          <a:scrgbClr r="0" g="0" b="0"/>
-        </a:lnRef>
-        <a:fillRef idx="3">
-          <a:scrgbClr r="0" g="0" b="0"/>
-        </a:fillRef>
-        <a:effectRef idx="2">
-          <a:scrgbClr r="0" g="0" b="0"/>
-        </a:effectRef>
-        <a:fontRef idx="minor">
-          <a:schemeClr val="lt1"/>
-        </a:fontRef>
-      </dsp:style>
-      <dsp:txBody>
-        <a:bodyPr spcFirstLastPara="0" vert="horz" wrap="square" lIns="125730" tIns="125730" rIns="125730" bIns="125730" numCol="1" spcCol="1270" anchor="ctr" anchorCtr="0">
-          <a:noAutofit/>
-        </a:bodyPr>
-        <a:lstStyle/>
-        <a:p>
-          <a:pPr marL="0" lvl="0" indent="0" algn="l" defTabSz="1466850">
-            <a:lnSpc>
-              <a:spcPct val="90000"/>
-            </a:lnSpc>
-            <a:spcBef>
-              <a:spcPct val="0"/>
-            </a:spcBef>
-            <a:spcAft>
-              <a:spcPct val="35000"/>
-            </a:spcAft>
-            <a:buNone/>
-          </a:pPr>
-          <a:r>
-            <a:rPr lang="en-IN" sz="3300" b="0" i="0" kern="1200"/>
-            <a:t>Comparison with existing such technologies/patents/prototypes</a:t>
-          </a:r>
-          <a:endParaRPr lang="en-US" sz="3300" kern="1200"/>
-        </a:p>
-      </dsp:txBody>
-      <dsp:txXfrm>
-        <a:off x="85522" y="1936517"/>
-        <a:ext cx="6495789" cy="1580884"/>
-      </dsp:txXfrm>
-    </dsp:sp>
-    <dsp:sp modelId="{A945BD8B-7D16-43F1-B6CB-6BC080C313EE}">
-      <dsp:nvSpPr>
-        <dsp:cNvPr id="0" name=""/>
-        <dsp:cNvSpPr/>
-      </dsp:nvSpPr>
-      <dsp:spPr>
-        <a:xfrm>
-          <a:off x="0" y="3697964"/>
-          <a:ext cx="6666833" cy="1751928"/>
-        </a:xfrm>
-        <a:prstGeom prst="roundRect">
-          <a:avLst/>
-        </a:prstGeom>
-        <a:gradFill rotWithShape="0">
-          <a:gsLst>
-            <a:gs pos="0">
-              <a:schemeClr val="accent5">
-                <a:hueOff val="-6758543"/>
-                <a:satOff val="-17419"/>
-                <a:lumOff val="-11765"/>
-                <a:alphaOff val="0"/>
-                <a:tint val="100000"/>
-                <a:shade val="100000"/>
-                <a:satMod val="130000"/>
-              </a:schemeClr>
-            </a:gs>
-            <a:gs pos="100000">
-              <a:schemeClr val="accent5">
-                <a:hueOff val="-6758543"/>
-                <a:satOff val="-17419"/>
-                <a:lumOff val="-11765"/>
-                <a:alphaOff val="0"/>
-                <a:tint val="50000"/>
-                <a:shade val="100000"/>
-                <a:satMod val="350000"/>
-              </a:schemeClr>
-            </a:gs>
-          </a:gsLst>
-          <a:lin ang="16200000" scaled="0"/>
-        </a:gradFill>
-        <a:ln>
-          <a:noFill/>
-        </a:ln>
-        <a:effectLst>
-          <a:outerShdw blurRad="40000" dist="23000" dir="5400000" rotWithShape="0">
-            <a:srgbClr val="000000">
-              <a:alpha val="35000"/>
-            </a:srgbClr>
-          </a:outerShdw>
-        </a:effectLst>
-      </dsp:spPr>
-      <dsp:style>
-        <a:lnRef idx="0">
-          <a:scrgbClr r="0" g="0" b="0"/>
-        </a:lnRef>
-        <a:fillRef idx="3">
-          <a:scrgbClr r="0" g="0" b="0"/>
-        </a:fillRef>
-        <a:effectRef idx="2">
-          <a:scrgbClr r="0" g="0" b="0"/>
-        </a:effectRef>
-        <a:fontRef idx="minor">
-          <a:schemeClr val="lt1"/>
-        </a:fontRef>
-      </dsp:style>
-      <dsp:txBody>
-        <a:bodyPr spcFirstLastPara="0" vert="horz" wrap="square" lIns="125730" tIns="125730" rIns="125730" bIns="125730" numCol="1" spcCol="1270" anchor="ctr" anchorCtr="0">
-          <a:noAutofit/>
-        </a:bodyPr>
-        <a:lstStyle/>
-        <a:p>
-          <a:pPr marL="0" lvl="0" indent="0" algn="l" defTabSz="1466850">
-            <a:lnSpc>
-              <a:spcPct val="90000"/>
-            </a:lnSpc>
-            <a:spcBef>
-              <a:spcPct val="0"/>
-            </a:spcBef>
-            <a:spcAft>
-              <a:spcPct val="35000"/>
-            </a:spcAft>
-            <a:buNone/>
-          </a:pPr>
-          <a:r>
-            <a:rPr lang="en-IN" sz="3300" b="0" i="0" kern="1200"/>
-            <a:t>Environmental impact/Sustainability of the technology</a:t>
-          </a:r>
-          <a:endParaRPr lang="en-US" sz="3300" kern="1200"/>
-        </a:p>
-      </dsp:txBody>
-      <dsp:txXfrm>
-        <a:off x="85522" y="3783486"/>
-        <a:ext cx="6495789" cy="1580884"/>
-      </dsp:txXfrm>
-    </dsp:sp>
-  </dsp:spTree>
-</dsp:drawing>
-</file>
-
-<file path=ppt/diagrams/layout1.xml><?xml version="1.0" encoding="utf-8"?>
-<dgm:layoutDef xmlns:dgm="http://schemas.openxmlformats.org/drawingml/2006/diagram" xmlns:a="http://schemas.openxmlformats.org/drawingml/2006/main" uniqueId="urn:microsoft.com/office/officeart/2005/8/layout/vList2">
-  <dgm:title val=""/>
-  <dgm:desc val=""/>
-  <dgm:catLst>
-    <dgm:cat type="list" pri="3000"/>
-    <dgm:cat type="convert" pri="1000"/>
-  </dgm:catLst>
-  <dgm:sampData>
-    <dgm:dataModel>
-      <dgm:ptLst>
-        <dgm:pt modelId="0" type="doc"/>
-        <dgm:pt modelId="1">
-          <dgm:prSet phldr="1"/>
-        </dgm:pt>
-        <dgm:pt modelId="11">
-          <dgm:prSet phldr="1"/>
-        </dgm:pt>
-        <dgm:pt modelId="2">
-          <dgm:prSet phldr="1"/>
-        </dgm:pt>
-        <dgm:pt modelId="21">
-          <dgm:prSet phldr="1"/>
-        </dgm:pt>
-      </dgm:ptLst>
-      <dgm:cxnLst>
-        <dgm:cxn modelId="4" srcId="0" destId="1" srcOrd="0" destOrd="0"/>
-        <dgm:cxn modelId="5" srcId="0" destId="2" srcOrd="1" destOrd="0"/>
-        <dgm:cxn modelId="12" srcId="1" destId="11" srcOrd="0" destOrd="0"/>
-        <dgm:cxn modelId="23" srcId="2" destId="21" srcOrd="0" destOrd="0"/>
-      </dgm:cxnLst>
-      <dgm:bg/>
-      <dgm:whole/>
-    </dgm:dataModel>
-  </dgm:sampData>
-  <dgm:styleData>
-    <dgm:dataModel>
-      <dgm:ptLst>
-        <dgm:pt modelId="0" type="doc"/>
-        <dgm:pt modelId="1"/>
-        <dgm:pt modelId="2"/>
-      </dgm:ptLst>
-      <dgm:cxnLst>
-        <dgm:cxn modelId="3" srcId="0" destId="1" srcOrd="0" destOrd="0"/>
-        <dgm:cxn modelId="4" srcId="0" destId="2" srcOrd="1" destOrd="0"/>
-      </dgm:cxnLst>
-      <dgm:bg/>
-      <dgm:whole/>
-    </dgm:dataModel>
-  </dgm:styleData>
-  <dgm:clrData>
-    <dgm:dataModel>
-      <dgm:ptLst>
-        <dgm:pt modelId="0" type="doc"/>
-        <dgm:pt modelId="1"/>
-        <dgm:pt modelId="2"/>
-        <dgm:pt modelId="3"/>
-        <dgm:pt modelId="4"/>
-      </dgm:ptLst>
-      <dgm:cxnLst>
-        <dgm:cxn modelId="5" srcId="0" destId="1" srcOrd="0" destOrd="0"/>
-        <dgm:cxn modelId="6" srcId="0" destId="2" srcOrd="1" destOrd="0"/>
-        <dgm:cxn modelId="7" srcId="0" destId="3" srcOrd="2" destOrd="0"/>
-        <dgm:cxn modelId="8" srcId="0" destId="4" srcOrd="3" destOrd="0"/>
-      </dgm:cxnLst>
-      <dgm:bg/>
-      <dgm:whole/>
-    </dgm:dataModel>
-  </dgm:clrData>
-  <dgm:layoutNode name="linear">
-    <dgm:varLst>
-      <dgm:animLvl val="lvl"/>
-      <dgm:resizeHandles val="exact"/>
-    </dgm:varLst>
-    <dgm:alg type="lin">
-      <dgm:param type="linDir" val="fromT"/>
-      <dgm:param type="vertAlign" val="mid"/>
-    </dgm:alg>
-    <dgm:shape xmlns:r="http://schemas.openxmlformats.org/officeDocument/2006/relationships" r:blip="">
-      <dgm:adjLst/>
-    </dgm:shape>
-    <dgm:presOf/>
-    <dgm:constrLst>
-      <dgm:constr type="w" for="ch" forName="parentText" refType="w"/>
-      <dgm:constr type="h" for="ch" forName="parentText" refType="primFontSz" refFor="ch" refForName="parentText" fact="0.52"/>
-      <dgm:constr type="w" for="ch" forName="childText" refType="w"/>
-      <dgm:constr type="h" for="ch" forName="childText" refType="primFontSz" refFor="ch" refForName="parentText" fact="0.46"/>
-      <dgm:constr type="h" for="ch" forName="parentText" op="equ"/>
-      <dgm:constr type="primFontSz" for="ch" forName="parentText" op="equ" val="65"/>
-      <dgm:constr type="primFontSz" for="ch" forName="childText" refType="primFontSz" refFor="ch" refForName="parentText" op="equ"/>
-      <dgm:constr type="h" for="ch" forName="spacer" refType="primFontSz" refFor="ch" refForName="parentText" fact="0.08"/>
-    </dgm:constrLst>
-    <dgm:ruleLst>
-      <dgm:rule type="primFontSz" for="ch" forName="parentText" val="5" fact="NaN" max="NaN"/>
-    </dgm:ruleLst>
-    <dgm:forEach name="Name0" axis="ch" ptType="node">
-      <dgm:layoutNode name="parentText" styleLbl="node1">
-        <dgm:varLst>
-          <dgm:chMax val="0"/>
-          <dgm:bulletEnabled val="1"/>
-        </dgm:varLst>
-        <dgm:alg type="tx">
-          <dgm:param type="parTxLTRAlign" val="l"/>
-          <dgm:param type="parTxRTLAlign" val="r"/>
-        </dgm:alg>
-        <dgm:shape xmlns:r="http://schemas.openxmlformats.org/officeDocument/2006/relationships" type="roundRect" r:blip="">
-          <dgm:adjLst/>
-        </dgm:shape>
-        <dgm:presOf axis="self"/>
-        <dgm:constrLst>
-          <dgm:constr type="tMarg" refType="primFontSz" fact="0.3"/>
-          <dgm:constr type="bMarg" refType="primFontSz" fact="0.3"/>
-          <dgm:constr type="lMarg" refType="primFontSz" fact="0.3"/>
-          <dgm:constr type="rMarg" refType="primFontSz" fact="0.3"/>
-        </dgm:constrLst>
-        <dgm:ruleLst>
-          <dgm:rule type="h" val="INF" fact="NaN" max="NaN"/>
-        </dgm:ruleLst>
-      </dgm:layoutNode>
-      <dgm:choose name="Name1">
-        <dgm:if name="Name2" axis="ch" ptType="node" func="cnt" op="gte" val="1">
-          <dgm:layoutNode name="childText" styleLbl="revTx">
-            <dgm:varLst>
-              <dgm:bulletEnabled val="1"/>
-            </dgm:varLst>
-            <dgm:alg type="tx">
-              <dgm:param type="stBulletLvl" val="1"/>
-              <dgm:param type="lnSpAfChP" val="20"/>
-            </dgm:alg>
-            <dgm:shape xmlns:r="http://schemas.openxmlformats.org/officeDocument/2006/relationships" type="rect" r:blip="">
-              <dgm:adjLst/>
-            </dgm:shape>
-            <dgm:presOf axis="des" ptType="node"/>
-            <dgm:constrLst>
-              <dgm:constr type="tMarg" refType="primFontSz" fact="0.1"/>
-              <dgm:constr type="bMarg" refType="primFontSz" fact="0.1"/>
-              <dgm:constr type="lMarg" refType="w" fact="0.09"/>
-            </dgm:constrLst>
-            <dgm:ruleLst>
-              <dgm:rule type="h" val="INF" fact="NaN" max="NaN"/>
-            </dgm:ruleLst>
-          </dgm:layoutNode>
-        </dgm:if>
-        <dgm:else name="Name3">
-          <dgm:choose name="Name4">
-            <dgm:if name="Name5" axis="par ch" ptType="doc node" func="cnt" op="gte" val="2">
-              <dgm:forEach name="Name6" axis="followSib" ptType="sibTrans" cnt="1">
-                <dgm:layoutNode name="spacer">
-                  <dgm:alg type="sp"/>
-                  <dgm:shape xmlns:r="http://schemas.openxmlformats.org/officeDocument/2006/relationships" r:blip="">
-                    <dgm:adjLst/>
-                  </dgm:shape>
-                  <dgm:presOf/>
-                  <dgm:constrLst/>
-                  <dgm:ruleLst/>
-                </dgm:layoutNode>
-              </dgm:forEach>
-            </dgm:if>
-            <dgm:else name="Name7"/>
-          </dgm:choose>
-        </dgm:else>
-      </dgm:choose>
-    </dgm:forEach>
-  </dgm:layoutNode>
-</dgm:layoutDef>
-</file>
-
-<file path=ppt/diagrams/quickStyle1.xml><?xml version="1.0" encoding="utf-8"?>
-<dgm:styleDef xmlns:dgm="http://schemas.openxmlformats.org/drawingml/2006/diagram" xmlns:a="http://schemas.openxmlformats.org/drawingml/2006/main" uniqueId="urn:microsoft.com/office/officeart/2005/8/quickstyle/simple4">
-  <dgm:title val=""/>
-  <dgm:desc val=""/>
-  <dgm:catLst>
-    <dgm:cat type="simple" pri="10400"/>
-  </dgm:catLst>
-  <dgm:scene3d>
-    <a:camera prst="orthographicFront"/>
-    <a:lightRig rig="threePt" dir="t"/>
-  </dgm:scene3d>
-  <dgm:styleLbl name="node0">
-    <dgm:scene3d>
-      <a:camera prst="orthographicFront"/>
-      <a:lightRig rig="threePt" dir="t"/>
-    </dgm:scene3d>
-    <dgm:sp3d/>
-    <dgm:txPr/>
-    <dgm:style>
-      <a:lnRef idx="0">
-        <a:scrgbClr r="0" g="0" b="0"/>
-      </a:lnRef>
-      <a:fillRef idx="3">
-        <a:scrgbClr r="0" g="0" b="0"/>
-      </a:fillRef>
-      <a:effectRef idx="2">
-        <a:scrgbClr r="0" g="0" b="0"/>
-      </a:effectRef>
-      <a:fontRef idx="minor">
-        <a:schemeClr val="lt1"/>
-      </a:fontRef>
-    </dgm:style>
-  </dgm:styleLbl>
-  <dgm:styleLbl name="lnNode1">
-    <dgm:scene3d>
-      <a:camera prst="orthographicFront"/>
-      <a:lightRig rig="threePt" dir="t"/>
-    </dgm:scene3d>
-    <dgm:sp3d/>
-    <dgm:txPr/>
-    <dgm:style>
-      <a:lnRef idx="1">
-        <a:scrgbClr r="0" g="0" b="0"/>
-      </a:lnRef>
-      <a:fillRef idx="3">
-        <a:scrgbClr r="0" g="0" b="0"/>
-      </a:fillRef>
-      <a:effectRef idx="2">
-        <a:scrgbClr r="0" g="0" b="0"/>
-      </a:effectRef>
-      <a:fontRef idx="minor">
-        <a:schemeClr val="lt1"/>
-      </a:fontRef>
-    </dgm:style>
-  </dgm:styleLbl>
-  <dgm:styleLbl name="vennNode1">
-    <dgm:scene3d>
-      <a:camera prst="orthographicFront"/>
-      <a:lightRig rig="threePt" dir="t"/>
-    </dgm:scene3d>
-    <dgm:sp3d/>
-    <dgm:txPr/>
-    <dgm:style>
-      <a:lnRef idx="0">
-        <a:scrgbClr r="0" g="0" b="0"/>
-      </a:lnRef>
-      <a:fillRef idx="3">
-        <a:scrgbClr r="0" g="0" b="0"/>
-      </a:fillRef>
-      <a:effectRef idx="0">
-        <a:scrgbClr r="0" g="0" b="0"/>
-      </a:effectRef>
-      <a:fontRef idx="minor">
-        <a:schemeClr val="tx1"/>
-      </a:fontRef>
-    </dgm:style>
-  </dgm:styleLbl>
-  <dgm:styleLbl name="alignNode1">
-    <dgm:scene3d>
-      <a:camera prst="orthographicFront"/>
-      <a:lightRig rig="threePt" dir="t"/>
-    </dgm:scene3d>
-    <dgm:sp3d/>
-    <dgm:txPr/>
-    <dgm:style>
-      <a:lnRef idx="1">
-        <a:scrgbClr r="0" g="0" b="0"/>
-      </a:lnRef>
-      <a:fillRef idx="3">
-        <a:scrgbClr r="0" g="0" b="0"/>
-      </a:fillRef>
-      <a:effectRef idx="2">
-        <a:scrgbClr r="0" g="0" b="0"/>
-      </a:effectRef>
-      <a:fontRef idx="minor">
-        <a:schemeClr val="lt1"/>
-      </a:fontRef>
-    </dgm:style>
-  </dgm:styleLbl>
-  <dgm:styleLbl name="node1">
-    <dgm:scene3d>
-      <a:camera prst="orthographicFront"/>
-      <a:lightRig rig="threePt" dir="t"/>
-    </dgm:scene3d>
-    <dgm:sp3d/>
-    <dgm:txPr/>
-    <dgm:style>
-      <a:lnRef idx="0">
-        <a:scrgbClr r="0" g="0" b="0"/>
-      </a:lnRef>
-      <a:fillRef idx="3">
-        <a:scrgbClr r="0" g="0" b="0"/>
-      </a:fillRef>
-      <a:effectRef idx="2">
-        <a:scrgbClr r="0" g="0" b="0"/>
-      </a:effectRef>
-      <a:fontRef idx="minor">
-        <a:schemeClr val="lt1"/>
-      </a:fontRef>
-    </dgm:style>
-  </dgm:styleLbl>
-  <dgm:styleLbl name="node2">
-    <dgm:scene3d>
-      <a:camera prst="orthographicFront"/>
-      <a:lightRig rig="threePt" dir="t"/>
-    </dgm:scene3d>
-    <dgm:sp3d/>
-    <dgm:txPr/>
-    <dgm:style>
-      <a:lnRef idx="0">
-        <a:scrgbClr r="0" g="0" b="0"/>
-      </a:lnRef>
-      <a:fillRef idx="3">
-        <a:scrgbClr r="0" g="0" b="0"/>
-      </a:fillRef>
-      <a:effectRef idx="2">
-        <a:scrgbClr r="0" g="0" b="0"/>
-      </a:effectRef>
-      <a:fontRef idx="minor">
-        <a:schemeClr val="lt1"/>
-      </a:fontRef>
-    </dgm:style>
-  </dgm:styleLbl>
-  <dgm:styleLbl name="node3">
-    <dgm:scene3d>
-      <a:camera prst="orthographicFront"/>
-      <a:lightRig rig="threePt" dir="t"/>
-    </dgm:scene3d>
-    <dgm:sp3d/>
-    <dgm:txPr/>
-    <dgm:style>
-      <a:lnRef idx="0">
-        <a:scrgbClr r="0" g="0" b="0"/>
-      </a:lnRef>
-      <a:fillRef idx="3">
-        <a:scrgbClr r="0" g="0" b="0"/>
-      </a:fillRef>
-      <a:effectRef idx="2">
-        <a:scrgbClr r="0" g="0" b="0"/>
-      </a:effectRef>
-      <a:fontRef idx="minor">
-        <a:schemeClr val="lt1"/>
-      </a:fontRef>
-    </dgm:style>
-  </dgm:styleLbl>
-  <dgm:styleLbl name="node4">
-    <dgm:scene3d>
-      <a:camera prst="orthographicFront"/>
-      <a:lightRig rig="threePt" dir="t"/>
-    </dgm:scene3d>
-    <dgm:sp3d/>
-    <dgm:txPr/>
-    <dgm:style>
-      <a:lnRef idx="0">
-        <a:scrgbClr r="0" g="0" b="0"/>
-      </a:lnRef>
-      <a:fillRef idx="3">
-        <a:scrgbClr r="0" g="0" b="0"/>
-      </a:fillRef>
-      <a:effectRef idx="2">
-        <a:scrgbClr r="0" g="0" b="0"/>
-      </a:effectRef>
-      <a:fontRef idx="minor">
-        <a:schemeClr val="lt1"/>
-      </a:fontRef>
-    </dgm:style>
-  </dgm:styleLbl>
-  <dgm:styleLbl name="fgImgPlace1">
-    <dgm:scene3d>
-      <a:camera prst="orthographicFront"/>
-      <a:lightRig rig="threePt" dir="t"/>
-    </dgm:scene3d>
-    <dgm:sp3d/>
-    <dgm:txPr/>
-    <dgm:style>
-      <a:lnRef idx="0">
-        <a:scrgbClr r="0" g="0" b="0"/>
-      </a:lnRef>
-      <a:fillRef idx="1">
-        <a:scrgbClr r="0" g="0" b="0"/>
-      </a:fillRef>
-      <a:effectRef idx="2">
-        <a:scrgbClr r="0" g="0" b="0"/>
-      </a:effectRef>
-      <a:fontRef idx="minor"/>
-    </dgm:style>
-  </dgm:styleLbl>
-  <dgm:styleLbl name="alignImgPlace1">
-    <dgm:scene3d>
-      <a:camera prst="orthographicFront"/>
-      <a:lightRig rig="threePt" dir="t"/>
-    </dgm:scene3d>
-    <dgm:sp3d/>
-    <dgm:txPr/>
-    <dgm:style>
-      <a:lnRef idx="0">
-        <a:scrgbClr r="0" g="0" b="0"/>
-      </a:lnRef>
-      <a:fillRef idx="1">
-        <a:scrgbClr r="0" g="0" b="0"/>
-      </a:fillRef>
-      <a:effectRef idx="2">
-        <a:scrgbClr r="0" g="0" b="0"/>
-      </a:effectRef>
-      <a:fontRef idx="minor"/>
-    </dgm:style>
-  </dgm:styleLbl>
-  <dgm:styleLbl name="bgImgPlace1">
-    <dgm:scene3d>
-      <a:camera prst="orthographicFront"/>
-      <a:lightRig rig="threePt" dir="t"/>
-    </dgm:scene3d>
-    <dgm:sp3d/>
-    <dgm:txPr/>
-    <dgm:style>
-      <a:lnRef idx="0">
-        <a:scrgbClr r="0" g="0" b="0"/>
-      </a:lnRef>
-      <a:fillRef idx="1">
-        <a:scrgbClr r="0" g="0" b="0"/>
-      </a:fillRef>
-      <a:effectRef idx="2">
-        <a:scrgbClr r="0" g="0" b="0"/>
-      </a:effectRef>
-      <a:fontRef idx="minor"/>
-    </dgm:style>
-  </dgm:styleLbl>
-  <dgm:styleLbl name="sibTrans2D1">
-    <dgm:scene3d>
-      <a:camera prst="orthographicFront"/>
-      <a:lightRig rig="threePt" dir="t"/>
-    </dgm:scene3d>
-    <dgm:sp3d/>
-    <dgm:txPr/>
-    <dgm:style>
-      <a:lnRef idx="0">
-        <a:scrgbClr r="0" g="0" b="0"/>
-      </a:lnRef>
-      <a:fillRef idx="3">
-        <a:scrgbClr r="0" g="0" b="0"/>
-      </a:fillRef>
-      <a:effectRef idx="2">
-        <a:scrgbClr r="0" g="0" b="0"/>
-      </a:effectRef>
-      <a:fontRef idx="minor">
-        <a:schemeClr val="lt1"/>
-      </a:fontRef>
-    </dgm:style>
-  </dgm:styleLbl>
-  <dgm:styleLbl name="fgSibTrans2D1">
-    <dgm:scene3d>
-      <a:camera prst="orthographicFront"/>
-      <a:lightRig rig="threePt" dir="t"/>
-    </dgm:scene3d>
-    <dgm:sp3d/>
-    <dgm:txPr/>
-    <dgm:style>
-      <a:lnRef idx="0">
-        <a:scrgbClr r="0" g="0" b="0"/>
-      </a:lnRef>
-      <a:fillRef idx="3">
-        <a:scrgbClr r="0" g="0" b="0"/>
-      </a:fillRef>
-      <a:effectRef idx="2">
-        <a:scrgbClr r="0" g="0" b="0"/>
-      </a:effectRef>
-      <a:fontRef idx="minor">
-        <a:schemeClr val="lt1"/>
-      </a:fontRef>
-    </dgm:style>
-  </dgm:styleLbl>
-  <dgm:styleLbl name="bgSibTrans2D1">
-    <dgm:scene3d>
-      <a:camera prst="orthographicFront"/>
-      <a:lightRig rig="threePt" dir="t"/>
-    </dgm:scene3d>
-    <dgm:sp3d/>
-    <dgm:txPr/>
-    <dgm:style>
-      <a:lnRef idx="0">
-        <a:scrgbClr r="0" g="0" b="0"/>
-      </a:lnRef>
-      <a:fillRef idx="3">
-        <a:scrgbClr r="0" g="0" b="0"/>
-      </a:fillRef>
-      <a:effectRef idx="2">
-        <a:scrgbClr r="0" g="0" b="0"/>
-      </a:effectRef>
-      <a:fontRef idx="minor">
-        <a:schemeClr val="lt1"/>
-      </a:fontRef>
-    </dgm:style>
-  </dgm:styleLbl>
-  <dgm:styleLbl name="sibTrans1D1">
-    <dgm:scene3d>
-      <a:camera prst="orthographicFront"/>
-      <a:lightRig rig="threePt" dir="t"/>
-    </dgm:scene3d>
-    <dgm:sp3d/>
-    <dgm:txPr/>
-    <dgm:style>
-      <a:lnRef idx="1">
-        <a:scrgbClr r="0" g="0" b="0"/>
-      </a:lnRef>
-      <a:fillRef idx="0">
-        <a:scrgbClr r="0" g="0" b="0"/>
-      </a:fillRef>
-      <a:effectRef idx="0">
-        <a:scrgbClr r="0" g="0" b="0"/>
-      </a:effectRef>
-      <a:fontRef idx="minor"/>
-    </dgm:style>
-  </dgm:styleLbl>
-  <dgm:styleLbl name="callout">
-    <dgm:scene3d>
-      <a:camera prst="orthographicFront"/>
-      <a:lightRig rig="threePt" dir="t"/>
-    </dgm:scene3d>
-    <dgm:sp3d/>
-    <dgm:txPr/>
-    <dgm:style>
-      <a:lnRef idx="2">
-        <a:scrgbClr r="0" g="0" b="0"/>
-      </a:lnRef>
-      <a:fillRef idx="1">
-        <a:scrgbClr r="0" g="0" b="0"/>
-      </a:fillRef>
-      <a:effectRef idx="1">
-        <a:scrgbClr r="0" g="0" b="0"/>
-      </a:effectRef>
-      <a:fontRef idx="minor"/>
-    </dgm:style>
-  </dgm:styleLbl>
-  <dgm:styleLbl name="asst0">
-    <dgm:scene3d>
-      <a:camera prst="orthographicFront"/>
-      <a:lightRig rig="threePt" dir="t"/>
-    </dgm:scene3d>
-    <dgm:sp3d/>
-    <dgm:txPr/>
-    <dgm:style>
-      <a:lnRef idx="0">
-        <a:scrgbClr r="0" g="0" b="0"/>
-      </a:lnRef>
-      <a:fillRef idx="3">
-        <a:scrgbClr r="0" g="0" b="0"/>
-      </a:fillRef>
-      <a:effectRef idx="2">
-        <a:scrgbClr r="0" g="0" b="0"/>
-      </a:effectRef>
-      <a:fontRef idx="minor">
-        <a:schemeClr val="lt1"/>
-      </a:fontRef>
-    </dgm:style>
-  </dgm:styleLbl>
-  <dgm:styleLbl name="asst1">
-    <dgm:scene3d>
-      <a:camera prst="orthographicFront"/>
-      <a:lightRig rig="threePt" dir="t"/>
-    </dgm:scene3d>
-    <dgm:sp3d/>
-    <dgm:txPr/>
-    <dgm:style>
-      <a:lnRef idx="0">
-        <a:scrgbClr r="0" g="0" b="0"/>
-      </a:lnRef>
-      <a:fillRef idx="3">
-        <a:scrgbClr r="0" g="0" b="0"/>
-      </a:fillRef>
-      <a:effectRef idx="2">
-        <a:scrgbClr r="0" g="0" b="0"/>
-      </a:effectRef>
-      <a:fontRef idx="minor">
-        <a:schemeClr val="lt1"/>
-      </a:fontRef>
-    </dgm:style>
-  </dgm:styleLbl>
-  <dgm:styleLbl name="asst2">
-    <dgm:scene3d>
-      <a:camera prst="orthographicFront"/>
-      <a:lightRig rig="threePt" dir="t"/>
-    </dgm:scene3d>
-    <dgm:sp3d/>
-    <dgm:txPr/>
-    <dgm:style>
-      <a:lnRef idx="0">
-        <a:scrgbClr r="0" g="0" b="0"/>
-      </a:lnRef>
-      <a:fillRef idx="3">
-        <a:scrgbClr r="0" g="0" b="0"/>
-      </a:fillRef>
-      <a:effectRef idx="2">
-        <a:scrgbClr r="0" g="0" b="0"/>
-      </a:effectRef>
-      <a:fontRef idx="minor">
-        <a:schemeClr val="lt1"/>
-      </a:fontRef>
-    </dgm:style>
-  </dgm:styleLbl>
-  <dgm:styleLbl name="asst3">
-    <dgm:scene3d>
-      <a:camera prst="orthographicFront"/>
-      <a:lightRig rig="threePt" dir="t"/>
-    </dgm:scene3d>
-    <dgm:sp3d/>
-    <dgm:txPr/>
-    <dgm:style>
-      <a:lnRef idx="0">
-        <a:scrgbClr r="0" g="0" b="0"/>
-      </a:lnRef>
-      <a:fillRef idx="3">
-        <a:scrgbClr r="0" g="0" b="0"/>
-      </a:fillRef>
-      <a:effectRef idx="2">
-        <a:scrgbClr r="0" g="0" b="0"/>
-      </a:effectRef>
-      <a:fontRef idx="minor">
-        <a:schemeClr val="lt1"/>
-      </a:fontRef>
-    </dgm:style>
-  </dgm:styleLbl>
-  <dgm:styleLbl name="asst4">
-    <dgm:scene3d>
-      <a:camera prst="orthographicFront"/>
-      <a:lightRig rig="threePt" dir="t"/>
-    </dgm:scene3d>
-    <dgm:sp3d/>
-    <dgm:txPr/>
-    <dgm:style>
-      <a:lnRef idx="0">
-        <a:scrgbClr r="0" g="0" b="0"/>
-      </a:lnRef>
-      <a:fillRef idx="3">
-        <a:scrgbClr r="0" g="0" b="0"/>
-      </a:fillRef>
-      <a:effectRef idx="2">
-        <a:scrgbClr r="0" g="0" b="0"/>
-      </a:effectRef>
-      <a:fontRef idx="minor">
-        <a:schemeClr val="lt1"/>
-      </a:fontRef>
-    </dgm:style>
-  </dgm:styleLbl>
-  <dgm:styleLbl name="parChTrans2D1">
-    <dgm:scene3d>
-      <a:camera prst="orthographicFront"/>
-      <a:lightRig rig="threePt" dir="t"/>
-    </dgm:scene3d>
-    <dgm:sp3d/>
-    <dgm:txPr/>
-    <dgm:style>
-      <a:lnRef idx="0">
-        <a:scrgbClr r="0" g="0" b="0"/>
-      </a:lnRef>
-      <a:fillRef idx="3">
-        <a:scrgbClr r="0" g="0" b="0"/>
-      </a:fillRef>
-      <a:effectRef idx="2">
-        <a:scrgbClr r="0" g="0" b="0"/>
-      </a:effectRef>
-      <a:fontRef idx="minor">
-        <a:schemeClr val="lt1"/>
-      </a:fontRef>
-    </dgm:style>
-  </dgm:styleLbl>
-  <dgm:styleLbl name="parChTrans2D2">
-    <dgm:scene3d>
-      <a:camera prst="orthographicFront"/>
-      <a:lightRig rig="threePt" dir="t"/>
-    </dgm:scene3d>
-    <dgm:sp3d/>
-    <dgm:txPr/>
-    <dgm:style>
-      <a:lnRef idx="0">
-        <a:scrgbClr r="0" g="0" b="0"/>
-      </a:lnRef>
-      <a:fillRef idx="3">
-        <a:scrgbClr r="0" g="0" b="0"/>
-      </a:fillRef>
-      <a:effectRef idx="2">
-        <a:scrgbClr r="0" g="0" b="0"/>
-      </a:effectRef>
-      <a:fontRef idx="minor">
-        <a:schemeClr val="lt1"/>
-      </a:fontRef>
-    </dgm:style>
-  </dgm:styleLbl>
-  <dgm:styleLbl name="parChTrans2D3">
-    <dgm:scene3d>
-      <a:camera prst="orthographicFront"/>
-      <a:lightRig rig="threePt" dir="t"/>
-    </dgm:scene3d>
-    <dgm:sp3d/>
-    <dgm:txPr/>
-    <dgm:style>
-      <a:lnRef idx="1">
-        <a:scrgbClr r="0" g="0" b="0"/>
-      </a:lnRef>
-      <a:fillRef idx="3">
-        <a:scrgbClr r="0" g="0" b="0"/>
-      </a:fillRef>
-      <a:effectRef idx="2">
-        <a:scrgbClr r="0" g="0" b="0"/>
-      </a:effectRef>
-      <a:fontRef idx="minor">
-        <a:schemeClr val="lt1"/>
-      </a:fontRef>
-    </dgm:style>
-  </dgm:styleLbl>
-  <dgm:styleLbl name="parChTrans2D4">
-    <dgm:scene3d>
-      <a:camera prst="orthographicFront"/>
-      <a:lightRig rig="threePt" dir="t"/>
-    </dgm:scene3d>
-    <dgm:sp3d/>
-    <dgm:txPr/>
-    <dgm:style>
-      <a:lnRef idx="1">
-        <a:scrgbClr r="0" g="0" b="0"/>
-      </a:lnRef>
-      <a:fillRef idx="3">
-        <a:scrgbClr r="0" g="0" b="0"/>
-      </a:fillRef>
-      <a:effectRef idx="2">
-        <a:scrgbClr r="0" g="0" b="0"/>
-      </a:effectRef>
-      <a:fontRef idx="minor">
-        <a:schemeClr val="lt1"/>
-      </a:fontRef>
-    </dgm:style>
-  </dgm:styleLbl>
-  <dgm:styleLbl name="parChTrans1D1">
-    <dgm:scene3d>
-      <a:camera prst="orthographicFront"/>
-      <a:lightRig rig="threePt" dir="t"/>
-    </dgm:scene3d>
-    <dgm:sp3d/>
-    <dgm:txPr/>
-    <dgm:style>
-      <a:lnRef idx="1">
-        <a:scrgbClr r="0" g="0" b="0"/>
-      </a:lnRef>
-      <a:fillRef idx="0">
-        <a:scrgbClr r="0" g="0" b="0"/>
-      </a:fillRef>
-      <a:effectRef idx="0">
-        <a:scrgbClr r="0" g="0" b="0"/>
-      </a:effectRef>
-      <a:fontRef idx="minor"/>
-    </dgm:style>
-  </dgm:styleLbl>
-  <dgm:styleLbl name="parChTrans1D2">
-    <dgm:scene3d>
-      <a:camera prst="orthographicFront"/>
-      <a:lightRig rig="threePt" dir="t"/>
-    </dgm:scene3d>
-    <dgm:sp3d/>
-    <dgm:txPr/>
-    <dgm:style>
-      <a:lnRef idx="1">
-        <a:scrgbClr r="0" g="0" b="0"/>
-      </a:lnRef>
-      <a:fillRef idx="0">
-        <a:scrgbClr r="0" g="0" b="0"/>
-      </a:fillRef>
-      <a:effectRef idx="0">
-        <a:scrgbClr r="0" g="0" b="0"/>
-      </a:effectRef>
-      <a:fontRef idx="minor"/>
-    </dgm:style>
-  </dgm:styleLbl>
-  <dgm:styleLbl name="parChTrans1D3">
-    <dgm:scene3d>
-      <a:camera prst="orthographicFront"/>
-      <a:lightRig rig="threePt" dir="t"/>
-    </dgm:scene3d>
-    <dgm:sp3d/>
-    <dgm:txPr/>
-    <dgm:style>
-      <a:lnRef idx="1">
-        <a:scrgbClr r="0" g="0" b="0"/>
-      </a:lnRef>
-      <a:fillRef idx="0">
-        <a:scrgbClr r="0" g="0" b="0"/>
-      </a:fillRef>
-      <a:effectRef idx="0">
-        <a:scrgbClr r="0" g="0" b="0"/>
-      </a:effectRef>
-      <a:fontRef idx="minor"/>
-    </dgm:style>
-  </dgm:styleLbl>
-  <dgm:styleLbl name="parChTrans1D4">
-    <dgm:scene3d>
-      <a:camera prst="orthographicFront"/>
-      <a:lightRig rig="threePt" dir="t"/>
-    </dgm:scene3d>
-    <dgm:sp3d/>
-    <dgm:txPr/>
-    <dgm:style>
-      <a:lnRef idx="1">
-        <a:scrgbClr r="0" g="0" b="0"/>
-      </a:lnRef>
-      <a:fillRef idx="0">
-        <a:scrgbClr r="0" g="0" b="0"/>
-      </a:fillRef>
-      <a:effectRef idx="0">
-        <a:scrgbClr r="0" g="0" b="0"/>
-      </a:effectRef>
-      <a:fontRef idx="minor"/>
-    </dgm:style>
-  </dgm:styleLbl>
-  <dgm:styleLbl name="fgAcc1">
-    <dgm:scene3d>
-      <a:camera prst="orthographicFront"/>
-      <a:lightRig rig="threePt" dir="t"/>
-    </dgm:scene3d>
-    <dgm:sp3d/>
-    <dgm:txPr/>
-    <dgm:style>
-      <a:lnRef idx="1">
-        <a:scrgbClr r="0" g="0" b="0"/>
-      </a:lnRef>
-      <a:fillRef idx="1">
-        <a:scrgbClr r="0" g="0" b="0"/>
-      </a:fillRef>
-      <a:effectRef idx="0">
-        <a:scrgbClr r="0" g="0" b="0"/>
-      </a:effectRef>
-      <a:fontRef idx="minor"/>
-    </dgm:style>
-  </dgm:styleLbl>
-  <dgm:styleLbl name="conFgAcc1">
-    <dgm:scene3d>
-      <a:camera prst="orthographicFront"/>
-      <a:lightRig rig="threePt" dir="t"/>
-    </dgm:scene3d>
-    <dgm:sp3d/>
-    <dgm:txPr/>
-    <dgm:style>
-      <a:lnRef idx="1">
-        <a:scrgbClr r="0" g="0" b="0"/>
-      </a:lnRef>
-      <a:fillRef idx="1">
-        <a:scrgbClr r="0" g="0" b="0"/>
-      </a:fillRef>
-      <a:effectRef idx="0">
-        <a:scrgbClr r="0" g="0" b="0"/>
-      </a:effectRef>
-      <a:fontRef idx="minor"/>
-    </dgm:style>
-  </dgm:styleLbl>
-  <dgm:styleLbl name="alignAcc1">
-    <dgm:scene3d>
-      <a:camera prst="orthographicFront"/>
-      <a:lightRig rig="threePt" dir="t"/>
-    </dgm:scene3d>
-    <dgm:sp3d/>
-    <dgm:txPr/>
-    <dgm:style>
-      <a:lnRef idx="1">
-        <a:scrgbClr r="0" g="0" b="0"/>
-      </a:lnRef>
-      <a:fillRef idx="1">
-        <a:scrgbClr r="0" g="0" b="0"/>
-      </a:fillRef>
-      <a:effectRef idx="0">
-        <a:scrgbClr r="0" g="0" b="0"/>
-      </a:effectRef>
-      <a:fontRef idx="minor"/>
-    </dgm:style>
-  </dgm:styleLbl>
-  <dgm:styleLbl name="trAlignAcc1">
-    <dgm:scene3d>
-      <a:camera prst="orthographicFront"/>
-      <a:lightRig rig="threePt" dir="t"/>
-    </dgm:scene3d>
-    <dgm:sp3d/>
-    <dgm:txPr/>
-    <dgm:style>
-      <a:lnRef idx="1">
-        <a:scrgbClr r="0" g="0" b="0"/>
-      </a:lnRef>
-      <a:fillRef idx="1">
-        <a:scrgbClr r="0" g="0" b="0"/>
-      </a:fillRef>
-      <a:effectRef idx="0">
-        <a:scrgbClr r="0" g="0" b="0"/>
-      </a:effectRef>
-      <a:fontRef idx="minor"/>
-    </dgm:style>
-  </dgm:styleLbl>
-  <dgm:styleLbl name="bgAcc1">
-    <dgm:scene3d>
-      <a:camera prst="orthographicFront"/>
-      <a:lightRig rig="threePt" dir="t"/>
-    </dgm:scene3d>
-    <dgm:sp3d/>
-    <dgm:txPr/>
-    <dgm:style>
-      <a:lnRef idx="1">
-        <a:scrgbClr r="0" g="0" b="0"/>
-      </a:lnRef>
-      <a:fillRef idx="1">
-        <a:scrgbClr r="0" g="0" b="0"/>
-      </a:fillRef>
-      <a:effectRef idx="0">
-        <a:scrgbClr r="0" g="0" b="0"/>
-      </a:effectRef>
-      <a:fontRef idx="minor"/>
-    </dgm:style>
-  </dgm:styleLbl>
-  <dgm:styleLbl name="solidFgAcc1">
-    <dgm:scene3d>
-      <a:camera prst="orthographicFront"/>
-      <a:lightRig rig="threePt" dir="t"/>
-    </dgm:scene3d>
-    <dgm:sp3d/>
-    <dgm:txPr/>
-    <dgm:style>
-      <a:lnRef idx="1">
-        <a:scrgbClr r="0" g="0" b="0"/>
-      </a:lnRef>
-      <a:fillRef idx="1">
-        <a:scrgbClr r="0" g="0" b="0"/>
-      </a:fillRef>
-      <a:effectRef idx="0">
-        <a:scrgbClr r="0" g="0" b="0"/>
-      </a:effectRef>
-      <a:fontRef idx="minor"/>
-    </dgm:style>
-  </dgm:styleLbl>
-  <dgm:styleLbl name="solidAlignAcc1">
-    <dgm:scene3d>
-      <a:camera prst="orthographicFront"/>
-      <a:lightRig rig="threePt" dir="t"/>
-    </dgm:scene3d>
-    <dgm:sp3d/>
-    <dgm:txPr/>
-    <dgm:style>
-      <a:lnRef idx="1">
-        <a:scrgbClr r="0" g="0" b="0"/>
-      </a:lnRef>
-      <a:fillRef idx="1">
-        <a:scrgbClr r="0" g="0" b="0"/>
-      </a:fillRef>
-      <a:effectRef idx="0">
-        <a:scrgbClr r="0" g="0" b="0"/>
-      </a:effectRef>
-      <a:fontRef idx="minor"/>
-    </dgm:style>
-  </dgm:styleLbl>
-  <dgm:styleLbl name="solidBgAcc1">
-    <dgm:scene3d>
-      <a:camera prst="orthographicFront"/>
-      <a:lightRig rig="threePt" dir="t"/>
-    </dgm:scene3d>
-    <dgm:sp3d/>
-    <dgm:txPr/>
-    <dgm:style>
-      <a:lnRef idx="1">
-        <a:scrgbClr r="0" g="0" b="0"/>
-      </a:lnRef>
-      <a:fillRef idx="1">
-        <a:scrgbClr r="0" g="0" b="0"/>
-      </a:fillRef>
-      <a:effectRef idx="0">
-        <a:scrgbClr r="0" g="0" b="0"/>
-      </a:effectRef>
-      <a:fontRef idx="minor"/>
-    </dgm:style>
-  </dgm:styleLbl>
-  <dgm:styleLbl name="fgAccFollowNode1">
-    <dgm:scene3d>
-      <a:camera prst="orthographicFront"/>
-      <a:lightRig rig="threePt" dir="t"/>
-    </dgm:scene3d>
-    <dgm:sp3d/>
-    <dgm:txPr/>
-    <dgm:style>
-      <a:lnRef idx="1">
-        <a:scrgbClr r="0" g="0" b="0"/>
-      </a:lnRef>
-      <a:fillRef idx="1">
-        <a:scrgbClr r="0" g="0" b="0"/>
-      </a:fillRef>
-      <a:effectRef idx="0">
-        <a:scrgbClr r="0" g="0" b="0"/>
-      </a:effectRef>
-      <a:fontRef idx="minor"/>
-    </dgm:style>
-  </dgm:styleLbl>
-  <dgm:styleLbl name="alignAccFollowNode1">
-    <dgm:scene3d>
-      <a:camera prst="orthographicFront"/>
-      <a:lightRig rig="threePt" dir="t"/>
-    </dgm:scene3d>
-    <dgm:sp3d/>
-    <dgm:txPr/>
-    <dgm:style>
-      <a:lnRef idx="1">
-        <a:scrgbClr r="0" g="0" b="0"/>
-      </a:lnRef>
-      <a:fillRef idx="1">
-        <a:scrgbClr r="0" g="0" b="0"/>
-      </a:fillRef>
-      <a:effectRef idx="0">
-        <a:scrgbClr r="0" g="0" b="0"/>
-      </a:effectRef>
-      <a:fontRef idx="minor"/>
-    </dgm:style>
-  </dgm:styleLbl>
-  <dgm:styleLbl name="bgAccFollowNode1">
-    <dgm:scene3d>
-      <a:camera prst="orthographicFront"/>
-      <a:lightRig rig="threePt" dir="t"/>
-    </dgm:scene3d>
-    <dgm:sp3d/>
-    <dgm:txPr/>
-    <dgm:style>
-      <a:lnRef idx="1">
-        <a:scrgbClr r="0" g="0" b="0"/>
-      </a:lnRef>
-      <a:fillRef idx="1">
-        <a:scrgbClr r="0" g="0" b="0"/>
-      </a:fillRef>
-      <a:effectRef idx="0">
-        <a:scrgbClr r="0" g="0" b="0"/>
-      </a:effectRef>
-      <a:fontRef idx="minor"/>
-    </dgm:style>
-  </dgm:styleLbl>
-  <dgm:styleLbl name="fgAcc0">
-    <dgm:scene3d>
-      <a:camera prst="orthographicFront"/>
-      <a:lightRig rig="threePt" dir="t"/>
-    </dgm:scene3d>
-    <dgm:sp3d/>
-    <dgm:txPr/>
-    <dgm:style>
-      <a:lnRef idx="1">
-        <a:scrgbClr r="0" g="0" b="0"/>
-      </a:lnRef>
-      <a:fillRef idx="1">
-        <a:scrgbClr r="0" g="0" b="0"/>
-      </a:fillRef>
-      <a:effectRef idx="0">
-        <a:scrgbClr r="0" g="0" b="0"/>
-      </a:effectRef>
-      <a:fontRef idx="minor"/>
-    </dgm:style>
-  </dgm:styleLbl>
-  <dgm:styleLbl name="fgAcc2">
-    <dgm:scene3d>
-      <a:camera prst="orthographicFront"/>
-      <a:lightRig rig="threePt" dir="t"/>
-    </dgm:scene3d>
-    <dgm:sp3d/>
-    <dgm:txPr/>
-    <dgm:style>
-      <a:lnRef idx="1">
-        <a:scrgbClr r="0" g="0" b="0"/>
-      </a:lnRef>
-      <a:fillRef idx="1">
-        <a:scrgbClr r="0" g="0" b="0"/>
-      </a:fillRef>
-      <a:effectRef idx="0">
-        <a:scrgbClr r="0" g="0" b="0"/>
-      </a:effectRef>
-      <a:fontRef idx="minor"/>
-    </dgm:style>
-  </dgm:styleLbl>
-  <dgm:styleLbl name="fgAcc3">
-    <dgm:scene3d>
-      <a:camera prst="orthographicFront"/>
-      <a:lightRig rig="threePt" dir="t"/>
-    </dgm:scene3d>
-    <dgm:sp3d/>
-    <dgm:txPr/>
-    <dgm:style>
-      <a:lnRef idx="1">
-        <a:scrgbClr r="0" g="0" b="0"/>
-      </a:lnRef>
-      <a:fillRef idx="1">
-        <a:scrgbClr r="0" g="0" b="0"/>
-      </a:fillRef>
-      <a:effectRef idx="0">
-        <a:scrgbClr r="0" g="0" b="0"/>
-      </a:effectRef>
-      <a:fontRef idx="minor"/>
-    </dgm:style>
-  </dgm:styleLbl>
-  <dgm:styleLbl name="fgAcc4">
-    <dgm:scene3d>
-      <a:camera prst="orthographicFront"/>
-      <a:lightRig rig="threePt" dir="t"/>
-    </dgm:scene3d>
-    <dgm:sp3d/>
-    <dgm:txPr/>
-    <dgm:style>
-      <a:lnRef idx="1">
-        <a:scrgbClr r="0" g="0" b="0"/>
-      </a:lnRef>
-      <a:fillRef idx="1">
-        <a:scrgbClr r="0" g="0" b="0"/>
-      </a:fillRef>
-      <a:effectRef idx="0">
-        <a:scrgbClr r="0" g="0" b="0"/>
-      </a:effectRef>
-      <a:fontRef idx="minor"/>
-    </dgm:style>
-  </dgm:styleLbl>
-  <dgm:styleLbl name="bgShp">
-    <dgm:scene3d>
-      <a:camera prst="orthographicFront"/>
-      <a:lightRig rig="threePt" dir="t"/>
-    </dgm:scene3d>
-    <dgm:sp3d/>
-    <dgm:txPr/>
-    <dgm:style>
-      <a:lnRef idx="0">
-        <a:scrgbClr r="0" g="0" b="0"/>
-      </a:lnRef>
-      <a:fillRef idx="1">
-        <a:scrgbClr r="0" g="0" b="0"/>
-      </a:fillRef>
-      <a:effectRef idx="2">
-        <a:scrgbClr r="0" g="0" b="0"/>
-      </a:effectRef>
-      <a:fontRef idx="minor"/>
-    </dgm:style>
-  </dgm:styleLbl>
-  <dgm:styleLbl name="dkBgShp">
-    <dgm:scene3d>
-      <a:camera prst="orthographicFront"/>
-      <a:lightRig rig="threePt" dir="t"/>
-    </dgm:scene3d>
-    <dgm:sp3d/>
-    <dgm:txPr/>
-    <dgm:style>
-      <a:lnRef idx="0">
-        <a:scrgbClr r="0" g="0" b="0"/>
-      </a:lnRef>
-      <a:fillRef idx="1">
-        <a:scrgbClr r="0" g="0" b="0"/>
-      </a:fillRef>
-      <a:effectRef idx="2">
-        <a:scrgbClr r="0" g="0" b="0"/>
-      </a:effectRef>
-      <a:fontRef idx="minor"/>
-    </dgm:style>
-  </dgm:styleLbl>
-  <dgm:styleLbl name="trBgShp">
-    <dgm:scene3d>
-      <a:camera prst="orthographicFront"/>
-      <a:lightRig rig="threePt" dir="t"/>
-    </dgm:scene3d>
-    <dgm:sp3d/>
-    <dgm:txPr/>
-    <dgm:style>
-      <a:lnRef idx="0">
-        <a:scrgbClr r="0" g="0" b="0"/>
-      </a:lnRef>
-      <a:fillRef idx="1">
-        <a:scrgbClr r="0" g="0" b="0"/>
-      </a:fillRef>
-      <a:effectRef idx="0">
-        <a:scrgbClr r="0" g="0" b="0"/>
-      </a:effectRef>
-      <a:fontRef idx="minor"/>
-    </dgm:style>
-  </dgm:styleLbl>
-  <dgm:styleLbl name="fgShp">
-    <dgm:scene3d>
-      <a:camera prst="orthographicFront"/>
-      <a:lightRig rig="threePt" dir="t"/>
-    </dgm:scene3d>
-    <dgm:sp3d/>
-    <dgm:txPr/>
-    <dgm:style>
-      <a:lnRef idx="0">
-        <a:scrgbClr r="0" g="0" b="0"/>
-      </a:lnRef>
-      <a:fillRef idx="3">
-        <a:scrgbClr r="0" g="0" b="0"/>
-      </a:fillRef>
-      <a:effectRef idx="2">
-        <a:scrgbClr r="0" g="0" b="0"/>
-      </a:effectRef>
-      <a:fontRef idx="minor"/>
-    </dgm:style>
-  </dgm:styleLbl>
-  <dgm:styleLbl name="revTx">
-    <dgm:scene3d>
-      <a:camera prst="orthographicFront"/>
-      <a:lightRig rig="threePt" dir="t"/>
-    </dgm:scene3d>
-    <dgm:sp3d/>
-    <dgm:txPr/>
-    <dgm:style>
-      <a:lnRef idx="0">
-        <a:scrgbClr r="0" g="0" b="0"/>
-      </a:lnRef>
-      <a:fillRef idx="0">
-        <a:scrgbClr r="0" g="0" b="0"/>
-      </a:fillRef>
-      <a:effectRef idx="0">
-        <a:scrgbClr r="0" g="0" b="0"/>
-      </a:effectRef>
-      <a:fontRef idx="minor"/>
-    </dgm:style>
-  </dgm:styleLbl>
-</dgm:styleDef>
 </file>
 
 <file path=ppt/slideLayouts/slideLayout1.xml><?xml version="1.0" encoding="utf-8"?>
@@ -2645,7 +171,7 @@
         <p:txBody>
           <a:bodyPr/>
           <a:p>
-            <a:fld id="{EB97BEA0-7D08-4745-8ECA-32859F56918A}" type="slidenum">
+            <a:fld id="{68CE4DDF-BF7A-47AA-9465-9104B71C2679}" type="slidenum">
               <a:t>&lt;#&gt;</a:t>
             </a:fld>
           </a:p>
@@ -2677,1092 +203,7 @@
 </p:sldLayout>
 </file>
 
-<file path=ppt/slideLayouts/slideLayout10.xml><?xml version="1.0" encoding="utf-8"?>
-<p:sldLayout xmlns:a="http://schemas.openxmlformats.org/drawingml/2006/main" xmlns:p="http://schemas.openxmlformats.org/presentationml/2006/main" xmlns:r="http://schemas.openxmlformats.org/officeDocument/2006/relationships" xmlns:p14="http://schemas.microsoft.com/office/powerpoint/2010/main" xmlns:p15="http://schemas.microsoft.com/office/powerpoint/2012/main" xmlns:mc="http://schemas.openxmlformats.org/markup-compatibility/2006" type="twoObj" preserve="1">
-  <p:cSld name="TWO_OBJECTS">
-    <p:spTree>
-      <p:nvGrpSpPr>
-        <p:cNvPr id="1" name=""/>
-        <p:cNvGrpSpPr/>
-        <p:nvPr/>
-      </p:nvGrpSpPr>
-      <p:grpSpPr>
-        <a:xfrm>
-          <a:off x="0" y="0"/>
-          <a:ext cx="0" cy="0"/>
-          <a:chOff x="0" y="0"/>
-          <a:chExt cx="0" cy="0"/>
-        </a:xfrm>
-      </p:grpSpPr>
-      <p:sp>
-        <p:nvSpPr>
-          <p:cNvPr id="48" name="PlaceHolder 1"/>
-          <p:cNvSpPr>
-            <a:spLocks noGrp="1"/>
-          </p:cNvSpPr>
-          <p:nvPr>
-            <p:ph type="title"/>
-          </p:nvPr>
-        </p:nvSpPr>
-        <p:spPr>
-          <a:xfrm>
-            <a:off x="609480" y="273600"/>
-            <a:ext cx="10972440" cy="1144800"/>
-          </a:xfrm>
-          <a:prstGeom prst="rect">
-            <a:avLst/>
-          </a:prstGeom>
-          <a:noFill/>
-          <a:ln w="0">
-            <a:noFill/>
-          </a:ln>
-        </p:spPr>
-        <p:txBody>
-          <a:bodyPr lIns="0" rIns="0" tIns="0" bIns="0" anchor="ctr">
-            <a:noAutofit/>
-          </a:bodyPr>
-          <a:p>
-            <a:pPr indent="0">
-              <a:buNone/>
-            </a:pPr>
-            <a:endParaRPr b="0" lang="en-IN" sz="1400" strike="noStrike" u="none">
-              <a:solidFill>
-                <a:srgbClr val="000000"/>
-              </a:solidFill>
-              <a:uFillTx/>
-              <a:latin typeface="Arial"/>
-            </a:endParaRPr>
-          </a:p>
-        </p:txBody>
-      </p:sp>
-      <p:sp>
-        <p:nvSpPr>
-          <p:cNvPr id="49" name="PlaceHolder 2"/>
-          <p:cNvSpPr>
-            <a:spLocks noGrp="1"/>
-          </p:cNvSpPr>
-          <p:nvPr>
-            <p:ph/>
-          </p:nvPr>
-        </p:nvSpPr>
-        <p:spPr>
-          <a:xfrm>
-            <a:off x="609480" y="1604520"/>
-            <a:ext cx="5354280" cy="3977280"/>
-          </a:xfrm>
-          <a:prstGeom prst="rect">
-            <a:avLst/>
-          </a:prstGeom>
-          <a:noFill/>
-          <a:ln w="0">
-            <a:noFill/>
-          </a:ln>
-        </p:spPr>
-        <p:txBody>
-          <a:bodyPr lIns="0" rIns="0" tIns="0" bIns="0" anchor="t">
-            <a:normAutofit/>
-          </a:bodyPr>
-          <a:p>
-            <a:pPr indent="0">
-              <a:spcBef>
-                <a:spcPts val="1417"/>
-              </a:spcBef>
-              <a:buNone/>
-            </a:pPr>
-            <a:endParaRPr b="0" lang="en-IN" sz="1400" strike="noStrike" u="none">
-              <a:solidFill>
-                <a:srgbClr val="000000"/>
-              </a:solidFill>
-              <a:uFillTx/>
-              <a:latin typeface="Arial"/>
-            </a:endParaRPr>
-          </a:p>
-        </p:txBody>
-      </p:sp>
-      <p:sp>
-        <p:nvSpPr>
-          <p:cNvPr id="50" name="PlaceHolder 3"/>
-          <p:cNvSpPr>
-            <a:spLocks noGrp="1"/>
-          </p:cNvSpPr>
-          <p:nvPr>
-            <p:ph/>
-          </p:nvPr>
-        </p:nvSpPr>
-        <p:spPr>
-          <a:xfrm>
-            <a:off x="6231960" y="1604520"/>
-            <a:ext cx="5354280" cy="3977280"/>
-          </a:xfrm>
-          <a:prstGeom prst="rect">
-            <a:avLst/>
-          </a:prstGeom>
-          <a:noFill/>
-          <a:ln w="0">
-            <a:noFill/>
-          </a:ln>
-        </p:spPr>
-        <p:txBody>
-          <a:bodyPr lIns="0" rIns="0" tIns="0" bIns="0" anchor="t">
-            <a:normAutofit/>
-          </a:bodyPr>
-          <a:p>
-            <a:pPr indent="0">
-              <a:spcBef>
-                <a:spcPts val="1417"/>
-              </a:spcBef>
-              <a:buNone/>
-            </a:pPr>
-            <a:endParaRPr b="0" lang="en-IN" sz="1400" strike="noStrike" u="none">
-              <a:solidFill>
-                <a:srgbClr val="000000"/>
-              </a:solidFill>
-              <a:uFillTx/>
-              <a:latin typeface="Arial"/>
-            </a:endParaRPr>
-          </a:p>
-        </p:txBody>
-      </p:sp>
-      <p:sp>
-        <p:nvSpPr>
-          <p:cNvPr id="5" name="PlaceHolder 4"/>
-          <p:cNvSpPr>
-            <a:spLocks noGrp="1"/>
-          </p:cNvSpPr>
-          <p:nvPr>
-            <p:ph type="ftr" idx="20"/>
-          </p:nvPr>
-        </p:nvSpPr>
-        <p:spPr/>
-        <p:txBody>
-          <a:bodyPr/>
-          <a:p>
-            <a:r>
-              <a:t>Footer</a:t>
-            </a:r>
-          </a:p>
-        </p:txBody>
-      </p:sp>
-      <p:sp>
-        <p:nvSpPr>
-          <p:cNvPr id="6" name="PlaceHolder 5"/>
-          <p:cNvSpPr>
-            <a:spLocks noGrp="1"/>
-          </p:cNvSpPr>
-          <p:nvPr>
-            <p:ph type="sldNum" idx="21"/>
-          </p:nvPr>
-        </p:nvSpPr>
-        <p:spPr/>
-        <p:txBody>
-          <a:bodyPr/>
-          <a:p>
-            <a:fld id="{2AD33511-2C4C-4EBF-A461-F429871FA845}" type="slidenum">
-              <a:t>&lt;#&gt;</a:t>
-            </a:fld>
-          </a:p>
-        </p:txBody>
-      </p:sp>
-      <p:sp>
-        <p:nvSpPr>
-          <p:cNvPr id="7" name="PlaceHolder 6"/>
-          <p:cNvSpPr>
-            <a:spLocks noGrp="1"/>
-          </p:cNvSpPr>
-          <p:nvPr>
-            <p:ph type="dt" idx="19"/>
-          </p:nvPr>
-        </p:nvSpPr>
-        <p:spPr/>
-        <p:txBody>
-          <a:bodyPr/>
-          <a:p>
-            <a:r>
-              <a:rPr lang="en-IN"/>
-              <a:t/>
-            </a:r>
-          </a:p>
-        </p:txBody>
-      </p:sp>
-    </p:spTree>
-  </p:cSld>
-</p:sldLayout>
-</file>
-
-<file path=ppt/slideLayouts/slideLayout11.xml><?xml version="1.0" encoding="utf-8"?>
-<p:sldLayout xmlns:a="http://schemas.openxmlformats.org/drawingml/2006/main" xmlns:p="http://schemas.openxmlformats.org/presentationml/2006/main" xmlns:r="http://schemas.openxmlformats.org/officeDocument/2006/relationships" xmlns:p14="http://schemas.microsoft.com/office/powerpoint/2010/main" xmlns:p15="http://schemas.microsoft.com/office/powerpoint/2012/main" xmlns:mc="http://schemas.openxmlformats.org/markup-compatibility/2006" type="blank" preserve="1">
-  <p:cSld name="TWO_OBJECTS_WITH_TEXT">
-    <p:spTree>
-      <p:nvGrpSpPr>
-        <p:cNvPr id="1" name=""/>
-        <p:cNvGrpSpPr/>
-        <p:nvPr/>
-      </p:nvGrpSpPr>
-      <p:grpSpPr>
-        <a:xfrm>
-          <a:off x="0" y="0"/>
-          <a:ext cx="0" cy="0"/>
-          <a:chOff x="0" y="0"/>
-          <a:chExt cx="0" cy="0"/>
-        </a:xfrm>
-      </p:grpSpPr>
-      <p:sp>
-        <p:nvSpPr>
-          <p:cNvPr id="2" name="PlaceHolder 1"/>
-          <p:cNvSpPr>
-            <a:spLocks noGrp="1"/>
-          </p:cNvSpPr>
-          <p:nvPr>
-            <p:ph type="ftr" idx="23"/>
-          </p:nvPr>
-        </p:nvSpPr>
-        <p:spPr/>
-        <p:txBody>
-          <a:bodyPr/>
-          <a:p>
-            <a:r>
-              <a:t>Footer</a:t>
-            </a:r>
-          </a:p>
-        </p:txBody>
-      </p:sp>
-      <p:sp>
-        <p:nvSpPr>
-          <p:cNvPr id="3" name="PlaceHolder 2"/>
-          <p:cNvSpPr>
-            <a:spLocks noGrp="1"/>
-          </p:cNvSpPr>
-          <p:nvPr>
-            <p:ph type="sldNum" idx="24"/>
-          </p:nvPr>
-        </p:nvSpPr>
-        <p:spPr/>
-        <p:txBody>
-          <a:bodyPr/>
-          <a:p>
-            <a:fld id="{486920E1-0889-4B58-8000-63E308F5383B}" type="slidenum">
-              <a:t>&lt;#&gt;</a:t>
-            </a:fld>
-          </a:p>
-        </p:txBody>
-      </p:sp>
-      <p:sp>
-        <p:nvSpPr>
-          <p:cNvPr id="4" name="PlaceHolder 3"/>
-          <p:cNvSpPr>
-            <a:spLocks noGrp="1"/>
-          </p:cNvSpPr>
-          <p:nvPr>
-            <p:ph type="dt" idx="22"/>
-          </p:nvPr>
-        </p:nvSpPr>
-        <p:spPr/>
-        <p:txBody>
-          <a:bodyPr/>
-          <a:p>
-            <a:r>
-              <a:rPr lang="en-IN"/>
-              <a:t/>
-            </a:r>
-          </a:p>
-        </p:txBody>
-      </p:sp>
-    </p:spTree>
-  </p:cSld>
-</p:sldLayout>
-</file>
-
-<file path=ppt/slideLayouts/slideLayout12.xml><?xml version="1.0" encoding="utf-8"?>
-<p:sldLayout xmlns:a="http://schemas.openxmlformats.org/drawingml/2006/main" xmlns:p="http://schemas.openxmlformats.org/presentationml/2006/main" xmlns:r="http://schemas.openxmlformats.org/officeDocument/2006/relationships" xmlns:p14="http://schemas.microsoft.com/office/powerpoint/2010/main" xmlns:p15="http://schemas.microsoft.com/office/powerpoint/2012/main" xmlns:mc="http://schemas.openxmlformats.org/markup-compatibility/2006" type="titleOnly" preserve="1">
-  <p:cSld name="TITLE_ONLY">
-    <p:spTree>
-      <p:nvGrpSpPr>
-        <p:cNvPr id="1" name=""/>
-        <p:cNvGrpSpPr/>
-        <p:nvPr/>
-      </p:nvGrpSpPr>
-      <p:grpSpPr>
-        <a:xfrm>
-          <a:off x="0" y="0"/>
-          <a:ext cx="0" cy="0"/>
-          <a:chOff x="0" y="0"/>
-          <a:chExt cx="0" cy="0"/>
-        </a:xfrm>
-      </p:grpSpPr>
-      <p:sp>
-        <p:nvSpPr>
-          <p:cNvPr id="65" name="PlaceHolder 1"/>
-          <p:cNvSpPr>
-            <a:spLocks noGrp="1"/>
-          </p:cNvSpPr>
-          <p:nvPr>
-            <p:ph type="title"/>
-          </p:nvPr>
-        </p:nvSpPr>
-        <p:spPr>
-          <a:xfrm>
-            <a:off x="609480" y="273600"/>
-            <a:ext cx="10972440" cy="1144800"/>
-          </a:xfrm>
-          <a:prstGeom prst="rect">
-            <a:avLst/>
-          </a:prstGeom>
-          <a:noFill/>
-          <a:ln w="0">
-            <a:noFill/>
-          </a:ln>
-        </p:spPr>
-        <p:txBody>
-          <a:bodyPr lIns="0" rIns="0" tIns="0" bIns="0" anchor="ctr">
-            <a:noAutofit/>
-          </a:bodyPr>
-          <a:p>
-            <a:pPr indent="0">
-              <a:buNone/>
-            </a:pPr>
-            <a:endParaRPr b="0" lang="en-IN" sz="1400" strike="noStrike" u="none">
-              <a:solidFill>
-                <a:srgbClr val="000000"/>
-              </a:solidFill>
-              <a:uFillTx/>
-              <a:latin typeface="Arial"/>
-            </a:endParaRPr>
-          </a:p>
-        </p:txBody>
-      </p:sp>
-      <p:sp>
-        <p:nvSpPr>
-          <p:cNvPr id="3" name="PlaceHolder 2"/>
-          <p:cNvSpPr>
-            <a:spLocks noGrp="1"/>
-          </p:cNvSpPr>
-          <p:nvPr>
-            <p:ph type="ftr" idx="26"/>
-          </p:nvPr>
-        </p:nvSpPr>
-        <p:spPr/>
-        <p:txBody>
-          <a:bodyPr/>
-          <a:p>
-            <a:r>
-              <a:t>Footer</a:t>
-            </a:r>
-          </a:p>
-        </p:txBody>
-      </p:sp>
-      <p:sp>
-        <p:nvSpPr>
-          <p:cNvPr id="4" name="PlaceHolder 3"/>
-          <p:cNvSpPr>
-            <a:spLocks noGrp="1"/>
-          </p:cNvSpPr>
-          <p:nvPr>
-            <p:ph type="sldNum" idx="27"/>
-          </p:nvPr>
-        </p:nvSpPr>
-        <p:spPr/>
-        <p:txBody>
-          <a:bodyPr/>
-          <a:p>
-            <a:fld id="{4F6F97B9-DAFF-437E-881D-39146D6B041E}" type="slidenum">
-              <a:t>&lt;#&gt;</a:t>
-            </a:fld>
-          </a:p>
-        </p:txBody>
-      </p:sp>
-      <p:sp>
-        <p:nvSpPr>
-          <p:cNvPr id="5" name="PlaceHolder 4"/>
-          <p:cNvSpPr>
-            <a:spLocks noGrp="1"/>
-          </p:cNvSpPr>
-          <p:nvPr>
-            <p:ph type="dt" idx="25"/>
-          </p:nvPr>
-        </p:nvSpPr>
-        <p:spPr/>
-        <p:txBody>
-          <a:bodyPr/>
-          <a:p>
-            <a:r>
-              <a:rPr lang="en-IN"/>
-              <a:t/>
-            </a:r>
-          </a:p>
-        </p:txBody>
-      </p:sp>
-    </p:spTree>
-  </p:cSld>
-</p:sldLayout>
-</file>
-
-<file path=ppt/slideLayouts/slideLayout13.xml><?xml version="1.0" encoding="utf-8"?>
-<p:sldLayout xmlns:a="http://schemas.openxmlformats.org/drawingml/2006/main" xmlns:p="http://schemas.openxmlformats.org/presentationml/2006/main" xmlns:r="http://schemas.openxmlformats.org/officeDocument/2006/relationships" xmlns:p14="http://schemas.microsoft.com/office/powerpoint/2010/main" xmlns:p15="http://schemas.microsoft.com/office/powerpoint/2012/main" xmlns:mc="http://schemas.openxmlformats.org/markup-compatibility/2006" type="blank" preserve="1">
-  <p:cSld name="OBJECT_WITH_CAPTION_TEXT">
-    <p:spTree>
-      <p:nvGrpSpPr>
-        <p:cNvPr id="1" name=""/>
-        <p:cNvGrpSpPr/>
-        <p:nvPr/>
-      </p:nvGrpSpPr>
-      <p:grpSpPr>
-        <a:xfrm>
-          <a:off x="0" y="0"/>
-          <a:ext cx="0" cy="0"/>
-          <a:chOff x="0" y="0"/>
-          <a:chExt cx="0" cy="0"/>
-        </a:xfrm>
-      </p:grpSpPr>
-      <p:sp>
-        <p:nvSpPr>
-          <p:cNvPr id="2" name="PlaceHolder 1"/>
-          <p:cNvSpPr>
-            <a:spLocks noGrp="1"/>
-          </p:cNvSpPr>
-          <p:nvPr>
-            <p:ph type="ftr" idx="29"/>
-          </p:nvPr>
-        </p:nvSpPr>
-        <p:spPr/>
-        <p:txBody>
-          <a:bodyPr/>
-          <a:p>
-            <a:r>
-              <a:t>Footer</a:t>
-            </a:r>
-          </a:p>
-        </p:txBody>
-      </p:sp>
-      <p:sp>
-        <p:nvSpPr>
-          <p:cNvPr id="3" name="PlaceHolder 2"/>
-          <p:cNvSpPr>
-            <a:spLocks noGrp="1"/>
-          </p:cNvSpPr>
-          <p:nvPr>
-            <p:ph type="sldNum" idx="30"/>
-          </p:nvPr>
-        </p:nvSpPr>
-        <p:spPr/>
-        <p:txBody>
-          <a:bodyPr/>
-          <a:p>
-            <a:fld id="{294665D0-4AC4-4A7E-B17E-94E84CF8F924}" type="slidenum">
-              <a:t>&lt;#&gt;</a:t>
-            </a:fld>
-          </a:p>
-        </p:txBody>
-      </p:sp>
-      <p:sp>
-        <p:nvSpPr>
-          <p:cNvPr id="4" name="PlaceHolder 3"/>
-          <p:cNvSpPr>
-            <a:spLocks noGrp="1"/>
-          </p:cNvSpPr>
-          <p:nvPr>
-            <p:ph type="dt" idx="28"/>
-          </p:nvPr>
-        </p:nvSpPr>
-        <p:spPr/>
-        <p:txBody>
-          <a:bodyPr/>
-          <a:p>
-            <a:r>
-              <a:rPr lang="en-IN"/>
-              <a:t/>
-            </a:r>
-          </a:p>
-        </p:txBody>
-      </p:sp>
-    </p:spTree>
-  </p:cSld>
-</p:sldLayout>
-</file>
-
-<file path=ppt/slideLayouts/slideLayout14.xml><?xml version="1.0" encoding="utf-8"?>
-<p:sldLayout xmlns:a="http://schemas.openxmlformats.org/drawingml/2006/main" xmlns:p="http://schemas.openxmlformats.org/presentationml/2006/main" xmlns:r="http://schemas.openxmlformats.org/officeDocument/2006/relationships" xmlns:p14="http://schemas.microsoft.com/office/powerpoint/2010/main" xmlns:p15="http://schemas.microsoft.com/office/powerpoint/2012/main" xmlns:mc="http://schemas.openxmlformats.org/markup-compatibility/2006" type="blank" preserve="1">
-  <p:cSld name="PICTURE_WITH_CAPTION_TEXT">
-    <p:spTree>
-      <p:nvGrpSpPr>
-        <p:cNvPr id="1" name=""/>
-        <p:cNvGrpSpPr/>
-        <p:nvPr/>
-      </p:nvGrpSpPr>
-      <p:grpSpPr>
-        <a:xfrm>
-          <a:off x="0" y="0"/>
-          <a:ext cx="0" cy="0"/>
-          <a:chOff x="0" y="0"/>
-          <a:chExt cx="0" cy="0"/>
-        </a:xfrm>
-      </p:grpSpPr>
-      <p:sp>
-        <p:nvSpPr>
-          <p:cNvPr id="2" name="PlaceHolder 1"/>
-          <p:cNvSpPr>
-            <a:spLocks noGrp="1"/>
-          </p:cNvSpPr>
-          <p:nvPr>
-            <p:ph type="ftr" idx="32"/>
-          </p:nvPr>
-        </p:nvSpPr>
-        <p:spPr/>
-        <p:txBody>
-          <a:bodyPr/>
-          <a:p>
-            <a:r>
-              <a:t>Footer</a:t>
-            </a:r>
-          </a:p>
-        </p:txBody>
-      </p:sp>
-      <p:sp>
-        <p:nvSpPr>
-          <p:cNvPr id="3" name="PlaceHolder 2"/>
-          <p:cNvSpPr>
-            <a:spLocks noGrp="1"/>
-          </p:cNvSpPr>
-          <p:nvPr>
-            <p:ph type="sldNum" idx="33"/>
-          </p:nvPr>
-        </p:nvSpPr>
-        <p:spPr/>
-        <p:txBody>
-          <a:bodyPr/>
-          <a:p>
-            <a:fld id="{86D6B8FC-80DE-4328-B68A-BE1F7AD5BD82}" type="slidenum">
-              <a:t>&lt;#&gt;</a:t>
-            </a:fld>
-          </a:p>
-        </p:txBody>
-      </p:sp>
-      <p:sp>
-        <p:nvSpPr>
-          <p:cNvPr id="4" name="PlaceHolder 3"/>
-          <p:cNvSpPr>
-            <a:spLocks noGrp="1"/>
-          </p:cNvSpPr>
-          <p:nvPr>
-            <p:ph type="dt" idx="31"/>
-          </p:nvPr>
-        </p:nvSpPr>
-        <p:spPr/>
-        <p:txBody>
-          <a:bodyPr/>
-          <a:p>
-            <a:r>
-              <a:rPr lang="en-IN"/>
-              <a:t/>
-            </a:r>
-          </a:p>
-        </p:txBody>
-      </p:sp>
-    </p:spTree>
-  </p:cSld>
-</p:sldLayout>
-</file>
-
 <file path=ppt/slideLayouts/slideLayout2.xml><?xml version="1.0" encoding="utf-8"?>
-<p:sldLayout xmlns:a="http://schemas.openxmlformats.org/drawingml/2006/main" xmlns:p="http://schemas.openxmlformats.org/presentationml/2006/main" xmlns:r="http://schemas.openxmlformats.org/officeDocument/2006/relationships" xmlns:p14="http://schemas.microsoft.com/office/powerpoint/2010/main" xmlns:p15="http://schemas.microsoft.com/office/powerpoint/2012/main" xmlns:mc="http://schemas.openxmlformats.org/markup-compatibility/2006" type="vertTx" preserve="1">
-  <p:cSld name="VERTICAL_TEXT">
-    <p:spTree>
-      <p:nvGrpSpPr>
-        <p:cNvPr id="1" name=""/>
-        <p:cNvGrpSpPr/>
-        <p:nvPr/>
-      </p:nvGrpSpPr>
-      <p:grpSpPr>
-        <a:xfrm>
-          <a:off x="0" y="0"/>
-          <a:ext cx="0" cy="0"/>
-          <a:chOff x="0" y="0"/>
-          <a:chExt cx="0" cy="0"/>
-        </a:xfrm>
-      </p:grpSpPr>
-      <p:sp>
-        <p:nvSpPr>
-          <p:cNvPr id="2" name="PlaceHolder 1"/>
-          <p:cNvSpPr>
-            <a:spLocks noGrp="1"/>
-          </p:cNvSpPr>
-          <p:nvPr>
-            <p:ph type="ftr" idx="5"/>
-          </p:nvPr>
-        </p:nvSpPr>
-        <p:spPr/>
-        <p:txBody>
-          <a:bodyPr/>
-          <a:p>
-            <a:r>
-              <a:t>Footer</a:t>
-            </a:r>
-          </a:p>
-        </p:txBody>
-      </p:sp>
-      <p:sp>
-        <p:nvSpPr>
-          <p:cNvPr id="3" name="PlaceHolder 2"/>
-          <p:cNvSpPr>
-            <a:spLocks noGrp="1"/>
-          </p:cNvSpPr>
-          <p:nvPr>
-            <p:ph type="sldNum" idx="6"/>
-          </p:nvPr>
-        </p:nvSpPr>
-        <p:spPr/>
-        <p:txBody>
-          <a:bodyPr/>
-          <a:p>
-            <a:fld id="{F6EA7212-6130-4020-B51D-6C803C31558D}" type="slidenum">
-              <a:t>&lt;#&gt;</a:t>
-            </a:fld>
-          </a:p>
-        </p:txBody>
-      </p:sp>
-      <p:sp>
-        <p:nvSpPr>
-          <p:cNvPr id="4" name="PlaceHolder 3"/>
-          <p:cNvSpPr>
-            <a:spLocks noGrp="1"/>
-          </p:cNvSpPr>
-          <p:nvPr>
-            <p:ph type="dt" idx="4"/>
-          </p:nvPr>
-        </p:nvSpPr>
-        <p:spPr/>
-        <p:txBody>
-          <a:bodyPr/>
-          <a:p>
-            <a:r>
-              <a:rPr lang="en-IN"/>
-              <a:t/>
-            </a:r>
-          </a:p>
-        </p:txBody>
-      </p:sp>
-    </p:spTree>
-  </p:cSld>
-</p:sldLayout>
-</file>
-
-<file path=ppt/slideLayouts/slideLayout3.xml><?xml version="1.0" encoding="utf-8"?>
-<p:sldLayout xmlns:a="http://schemas.openxmlformats.org/drawingml/2006/main" xmlns:p="http://schemas.openxmlformats.org/presentationml/2006/main" xmlns:r="http://schemas.openxmlformats.org/officeDocument/2006/relationships" xmlns:p14="http://schemas.microsoft.com/office/powerpoint/2010/main" xmlns:p15="http://schemas.microsoft.com/office/powerpoint/2012/main" xmlns:mc="http://schemas.openxmlformats.org/markup-compatibility/2006" type="vertTitleAndTx" preserve="1">
-  <p:cSld name="VERTICAL_TITLE_AND_VERTICAL_TEXT">
-    <p:spTree>
-      <p:nvGrpSpPr>
-        <p:cNvPr id="1" name=""/>
-        <p:cNvGrpSpPr/>
-        <p:nvPr/>
-      </p:nvGrpSpPr>
-      <p:grpSpPr>
-        <a:xfrm>
-          <a:off x="0" y="0"/>
-          <a:ext cx="0" cy="0"/>
-          <a:chOff x="0" y="0"/>
-          <a:chExt cx="0" cy="0"/>
-        </a:xfrm>
-      </p:grpSpPr>
-      <p:sp>
-        <p:nvSpPr>
-          <p:cNvPr id="2" name="PlaceHolder 1"/>
-          <p:cNvSpPr>
-            <a:spLocks noGrp="1"/>
-          </p:cNvSpPr>
-          <p:nvPr>
-            <p:ph type="ftr" idx="8"/>
-          </p:nvPr>
-        </p:nvSpPr>
-        <p:spPr/>
-        <p:txBody>
-          <a:bodyPr/>
-          <a:p>
-            <a:r>
-              <a:t>Footer</a:t>
-            </a:r>
-          </a:p>
-        </p:txBody>
-      </p:sp>
-      <p:sp>
-        <p:nvSpPr>
-          <p:cNvPr id="3" name="PlaceHolder 2"/>
-          <p:cNvSpPr>
-            <a:spLocks noGrp="1"/>
-          </p:cNvSpPr>
-          <p:nvPr>
-            <p:ph type="sldNum" idx="9"/>
-          </p:nvPr>
-        </p:nvSpPr>
-        <p:spPr/>
-        <p:txBody>
-          <a:bodyPr/>
-          <a:p>
-            <a:fld id="{6B202DE6-25E2-40AA-AF10-14BA2F121FE5}" type="slidenum">
-              <a:t>&lt;#&gt;</a:t>
-            </a:fld>
-          </a:p>
-        </p:txBody>
-      </p:sp>
-      <p:sp>
-        <p:nvSpPr>
-          <p:cNvPr id="4" name="PlaceHolder 3"/>
-          <p:cNvSpPr>
-            <a:spLocks noGrp="1"/>
-          </p:cNvSpPr>
-          <p:nvPr>
-            <p:ph type="dt" idx="7"/>
-          </p:nvPr>
-        </p:nvSpPr>
-        <p:spPr/>
-        <p:txBody>
-          <a:bodyPr/>
-          <a:p>
-            <a:r>
-              <a:rPr lang="en-IN"/>
-              <a:t/>
-            </a:r>
-          </a:p>
-        </p:txBody>
-      </p:sp>
-    </p:spTree>
-  </p:cSld>
-</p:sldLayout>
-</file>
-
-<file path=ppt/slideLayouts/slideLayout4.xml><?xml version="1.0" encoding="utf-8"?>
-<p:sldLayout xmlns:a="http://schemas.openxmlformats.org/drawingml/2006/main" xmlns:p="http://schemas.openxmlformats.org/presentationml/2006/main" xmlns:r="http://schemas.openxmlformats.org/officeDocument/2006/relationships" xmlns:p14="http://schemas.microsoft.com/office/powerpoint/2010/main" xmlns:p15="http://schemas.microsoft.com/office/powerpoint/2012/main" xmlns:mc="http://schemas.openxmlformats.org/markup-compatibility/2006" type="vertTitleAndTx" preserve="1">
-  <p:cSld name="BLANK">
-    <p:spTree>
-      <p:nvGrpSpPr>
-        <p:cNvPr id="1" name=""/>
-        <p:cNvGrpSpPr/>
-        <p:nvPr/>
-      </p:nvGrpSpPr>
-      <p:grpSpPr>
-        <a:xfrm>
-          <a:off x="0" y="0"/>
-          <a:ext cx="0" cy="0"/>
-          <a:chOff x="0" y="0"/>
-          <a:chExt cx="0" cy="0"/>
-        </a:xfrm>
-      </p:grpSpPr>
-      <p:sp>
-        <p:nvSpPr>
-          <p:cNvPr id="2" name="PlaceHolder 1"/>
-          <p:cNvSpPr>
-            <a:spLocks noGrp="1"/>
-          </p:cNvSpPr>
-          <p:nvPr>
-            <p:ph type="ftr" idx="11"/>
-          </p:nvPr>
-        </p:nvSpPr>
-        <p:spPr/>
-        <p:txBody>
-          <a:bodyPr/>
-          <a:p>
-            <a:r>
-              <a:t>Footer</a:t>
-            </a:r>
-          </a:p>
-        </p:txBody>
-      </p:sp>
-      <p:sp>
-        <p:nvSpPr>
-          <p:cNvPr id="3" name="PlaceHolder 2"/>
-          <p:cNvSpPr>
-            <a:spLocks noGrp="1"/>
-          </p:cNvSpPr>
-          <p:nvPr>
-            <p:ph type="sldNum" idx="12"/>
-          </p:nvPr>
-        </p:nvSpPr>
-        <p:spPr/>
-        <p:txBody>
-          <a:bodyPr/>
-          <a:p>
-            <a:fld id="{0DFC4399-19D8-492D-B0AF-0FCB93FCB80A}" type="slidenum">
-              <a:t>&lt;#&gt;</a:t>
-            </a:fld>
-          </a:p>
-        </p:txBody>
-      </p:sp>
-      <p:sp>
-        <p:nvSpPr>
-          <p:cNvPr id="4" name="PlaceHolder 3"/>
-          <p:cNvSpPr>
-            <a:spLocks noGrp="1"/>
-          </p:cNvSpPr>
-          <p:nvPr>
-            <p:ph type="dt" idx="10"/>
-          </p:nvPr>
-        </p:nvSpPr>
-        <p:spPr/>
-        <p:txBody>
-          <a:bodyPr/>
-          <a:p>
-            <a:r>
-              <a:rPr lang="en-IN"/>
-              <a:t/>
-            </a:r>
-          </a:p>
-        </p:txBody>
-      </p:sp>
-    </p:spTree>
-  </p:cSld>
-</p:sldLayout>
-</file>
-
-<file path=ppt/slideLayouts/slideLayout5.xml><?xml version="1.0" encoding="utf-8"?>
-<p:sldLayout xmlns:a="http://schemas.openxmlformats.org/drawingml/2006/main" xmlns:p="http://schemas.openxmlformats.org/presentationml/2006/main" xmlns:r="http://schemas.openxmlformats.org/officeDocument/2006/relationships" xmlns:p14="http://schemas.microsoft.com/office/powerpoint/2010/main" xmlns:p15="http://schemas.microsoft.com/office/powerpoint/2012/main" xmlns:mc="http://schemas.openxmlformats.org/markup-compatibility/2006" type="vertTx" preserve="1">
-  <p:cSld name="BLANK">
-    <p:spTree>
-      <p:nvGrpSpPr>
-        <p:cNvPr id="1" name=""/>
-        <p:cNvGrpSpPr/>
-        <p:nvPr/>
-      </p:nvGrpSpPr>
-      <p:grpSpPr>
-        <a:xfrm>
-          <a:off x="0" y="0"/>
-          <a:ext cx="0" cy="0"/>
-          <a:chOff x="0" y="0"/>
-          <a:chExt cx="0" cy="0"/>
-        </a:xfrm>
-      </p:grpSpPr>
-      <p:sp>
-        <p:nvSpPr>
-          <p:cNvPr id="2" name="PlaceHolder 1"/>
-          <p:cNvSpPr>
-            <a:spLocks noGrp="1"/>
-          </p:cNvSpPr>
-          <p:nvPr>
-            <p:ph type="ftr" idx="11"/>
-          </p:nvPr>
-        </p:nvSpPr>
-        <p:spPr/>
-        <p:txBody>
-          <a:bodyPr/>
-          <a:p>
-            <a:r>
-              <a:t>Footer</a:t>
-            </a:r>
-          </a:p>
-        </p:txBody>
-      </p:sp>
-      <p:sp>
-        <p:nvSpPr>
-          <p:cNvPr id="3" name="PlaceHolder 2"/>
-          <p:cNvSpPr>
-            <a:spLocks noGrp="1"/>
-          </p:cNvSpPr>
-          <p:nvPr>
-            <p:ph type="sldNum" idx="12"/>
-          </p:nvPr>
-        </p:nvSpPr>
-        <p:spPr/>
-        <p:txBody>
-          <a:bodyPr/>
-          <a:p>
-            <a:fld id="{1ABF2C99-4BF1-4D6A-9589-AF10CE686F3B}" type="slidenum">
-              <a:t>&lt;#&gt;</a:t>
-            </a:fld>
-          </a:p>
-        </p:txBody>
-      </p:sp>
-      <p:sp>
-        <p:nvSpPr>
-          <p:cNvPr id="4" name="PlaceHolder 3"/>
-          <p:cNvSpPr>
-            <a:spLocks noGrp="1"/>
-          </p:cNvSpPr>
-          <p:nvPr>
-            <p:ph type="dt" idx="10"/>
-          </p:nvPr>
-        </p:nvSpPr>
-        <p:spPr/>
-        <p:txBody>
-          <a:bodyPr/>
-          <a:p>
-            <a:r>
-              <a:rPr lang="en-IN"/>
-              <a:t/>
-            </a:r>
-          </a:p>
-        </p:txBody>
-      </p:sp>
-    </p:spTree>
-  </p:cSld>
-</p:sldLayout>
-</file>
-
-<file path=ppt/slideLayouts/slideLayout6.xml><?xml version="1.0" encoding="utf-8"?>
-<p:sldLayout xmlns:a="http://schemas.openxmlformats.org/drawingml/2006/main" xmlns:p="http://schemas.openxmlformats.org/presentationml/2006/main" xmlns:r="http://schemas.openxmlformats.org/officeDocument/2006/relationships" xmlns:p14="http://schemas.microsoft.com/office/powerpoint/2010/main" xmlns:p15="http://schemas.microsoft.com/office/powerpoint/2012/main" xmlns:mc="http://schemas.openxmlformats.org/markup-compatibility/2006" type="tx" preserve="1">
-  <p:cSld name="BLANK">
-    <p:spTree>
-      <p:nvGrpSpPr>
-        <p:cNvPr id="1" name=""/>
-        <p:cNvGrpSpPr/>
-        <p:nvPr/>
-      </p:nvGrpSpPr>
-      <p:grpSpPr>
-        <a:xfrm>
-          <a:off x="0" y="0"/>
-          <a:ext cx="0" cy="0"/>
-          <a:chOff x="0" y="0"/>
-          <a:chExt cx="0" cy="0"/>
-        </a:xfrm>
-      </p:grpSpPr>
-      <p:sp>
-        <p:nvSpPr>
-          <p:cNvPr id="26" name="PlaceHolder 1"/>
-          <p:cNvSpPr>
-            <a:spLocks noGrp="1"/>
-          </p:cNvSpPr>
-          <p:nvPr>
-            <p:ph type="title"/>
-          </p:nvPr>
-        </p:nvSpPr>
-        <p:spPr>
-          <a:xfrm>
-            <a:off x="609480" y="273600"/>
-            <a:ext cx="10972440" cy="1144800"/>
-          </a:xfrm>
-          <a:prstGeom prst="rect">
-            <a:avLst/>
-          </a:prstGeom>
-          <a:noFill/>
-          <a:ln w="0">
-            <a:noFill/>
-          </a:ln>
-        </p:spPr>
-        <p:txBody>
-          <a:bodyPr lIns="0" rIns="0" tIns="0" bIns="0" anchor="ctr">
-            <a:noAutofit/>
-          </a:bodyPr>
-          <a:p>
-            <a:pPr indent="0">
-              <a:buNone/>
-            </a:pPr>
-            <a:endParaRPr b="0" lang="en-IN" sz="1400" strike="noStrike" u="none">
-              <a:solidFill>
-                <a:srgbClr val="000000"/>
-              </a:solidFill>
-              <a:uFillTx/>
-              <a:latin typeface="Arial"/>
-            </a:endParaRPr>
-          </a:p>
-        </p:txBody>
-      </p:sp>
-      <p:sp>
-        <p:nvSpPr>
-          <p:cNvPr id="27" name="PlaceHolder 2"/>
-          <p:cNvSpPr>
-            <a:spLocks noGrp="1"/>
-          </p:cNvSpPr>
-          <p:nvPr>
-            <p:ph/>
-          </p:nvPr>
-        </p:nvSpPr>
-        <p:spPr>
-          <a:xfrm>
-            <a:off x="609480" y="1604520"/>
-            <a:ext cx="10972440" cy="3977280"/>
-          </a:xfrm>
-          <a:prstGeom prst="rect">
-            <a:avLst/>
-          </a:prstGeom>
-          <a:noFill/>
-          <a:ln w="0">
-            <a:noFill/>
-          </a:ln>
-        </p:spPr>
-        <p:txBody>
-          <a:bodyPr lIns="0" rIns="0" tIns="0" bIns="0" anchor="t">
-            <a:normAutofit/>
-          </a:bodyPr>
-          <a:p>
-            <a:pPr indent="0">
-              <a:spcBef>
-                <a:spcPts val="1417"/>
-              </a:spcBef>
-              <a:buNone/>
-            </a:pPr>
-            <a:endParaRPr b="0" lang="en-IN" sz="1400" strike="noStrike" u="none">
-              <a:solidFill>
-                <a:srgbClr val="000000"/>
-              </a:solidFill>
-              <a:uFillTx/>
-              <a:latin typeface="Arial"/>
-            </a:endParaRPr>
-          </a:p>
-        </p:txBody>
-      </p:sp>
-      <p:sp>
-        <p:nvSpPr>
-          <p:cNvPr id="4" name="PlaceHolder 3"/>
-          <p:cNvSpPr>
-            <a:spLocks noGrp="1"/>
-          </p:cNvSpPr>
-          <p:nvPr>
-            <p:ph type="ftr" idx="11"/>
-          </p:nvPr>
-        </p:nvSpPr>
-        <p:spPr/>
-        <p:txBody>
-          <a:bodyPr/>
-          <a:p>
-            <a:r>
-              <a:t>Footer</a:t>
-            </a:r>
-          </a:p>
-        </p:txBody>
-      </p:sp>
-      <p:sp>
-        <p:nvSpPr>
-          <p:cNvPr id="5" name="PlaceHolder 4"/>
-          <p:cNvSpPr>
-            <a:spLocks noGrp="1"/>
-          </p:cNvSpPr>
-          <p:nvPr>
-            <p:ph type="sldNum" idx="12"/>
-          </p:nvPr>
-        </p:nvSpPr>
-        <p:spPr/>
-        <p:txBody>
-          <a:bodyPr/>
-          <a:p>
-            <a:fld id="{6C014EBD-0C43-49E8-9265-E1AD4ABFA4DF}" type="slidenum">
-              <a:t>&lt;#&gt;</a:t>
-            </a:fld>
-          </a:p>
-        </p:txBody>
-      </p:sp>
-      <p:sp>
-        <p:nvSpPr>
-          <p:cNvPr id="6" name="PlaceHolder 5"/>
-          <p:cNvSpPr>
-            <a:spLocks noGrp="1"/>
-          </p:cNvSpPr>
-          <p:nvPr>
-            <p:ph type="dt" idx="10"/>
-          </p:nvPr>
-        </p:nvSpPr>
-        <p:spPr/>
-        <p:txBody>
-          <a:bodyPr/>
-          <a:p>
-            <a:r>
-              <a:rPr lang="en-IN"/>
-              <a:t/>
-            </a:r>
-          </a:p>
-        </p:txBody>
-      </p:sp>
-    </p:spTree>
-  </p:cSld>
-</p:sldLayout>
-</file>
-
-<file path=ppt/slideLayouts/slideLayout7.xml><?xml version="1.0" encoding="utf-8"?>
 <p:sldLayout xmlns:a="http://schemas.openxmlformats.org/drawingml/2006/main" xmlns:p="http://schemas.openxmlformats.org/presentationml/2006/main" xmlns:r="http://schemas.openxmlformats.org/officeDocument/2006/relationships" xmlns:p14="http://schemas.microsoft.com/office/powerpoint/2010/main" xmlns:p15="http://schemas.microsoft.com/office/powerpoint/2012/main" xmlns:mc="http://schemas.openxmlformats.org/markup-compatibility/2006" type="blank" preserve="1">
   <p:cSld name="BLANK">
     <p:spTree>
@@ -3813,7 +254,7 @@
         <p:txBody>
           <a:bodyPr/>
           <a:p>
-            <a:fld id="{4180DB08-65BF-4E00-A8D3-4B23BDB32849}" type="slidenum">
+            <a:fld id="{6A75D31F-0156-4E19-B8F7-9A4C78D2277C}" type="slidenum">
               <a:t>&lt;#&gt;</a:t>
             </a:fld>
           </a:p>
@@ -3827,254 +268,6 @@
           </p:cNvSpPr>
           <p:nvPr>
             <p:ph type="dt" idx="10"/>
-          </p:nvPr>
-        </p:nvSpPr>
-        <p:spPr/>
-        <p:txBody>
-          <a:bodyPr/>
-          <a:p>
-            <a:r>
-              <a:rPr lang="en-IN"/>
-              <a:t/>
-            </a:r>
-          </a:p>
-        </p:txBody>
-      </p:sp>
-    </p:spTree>
-  </p:cSld>
-</p:sldLayout>
-</file>
-
-<file path=ppt/slideLayouts/slideLayout8.xml><?xml version="1.0" encoding="utf-8"?>
-<p:sldLayout xmlns:a="http://schemas.openxmlformats.org/drawingml/2006/main" xmlns:p="http://schemas.openxmlformats.org/presentationml/2006/main" xmlns:r="http://schemas.openxmlformats.org/officeDocument/2006/relationships" xmlns:p14="http://schemas.microsoft.com/office/powerpoint/2010/main" xmlns:p15="http://schemas.microsoft.com/office/powerpoint/2012/main" xmlns:mc="http://schemas.openxmlformats.org/markup-compatibility/2006" type="title" preserve="1">
-  <p:cSld name="TITLE">
-    <p:spTree>
-      <p:nvGrpSpPr>
-        <p:cNvPr id="1" name=""/>
-        <p:cNvGrpSpPr/>
-        <p:nvPr/>
-      </p:nvGrpSpPr>
-      <p:grpSpPr>
-        <a:xfrm>
-          <a:off x="0" y="0"/>
-          <a:ext cx="0" cy="0"/>
-          <a:chOff x="0" y="0"/>
-          <a:chExt cx="0" cy="0"/>
-        </a:xfrm>
-      </p:grpSpPr>
-      <p:sp>
-        <p:nvSpPr>
-          <p:cNvPr id="33" name="PlaceHolder 1"/>
-          <p:cNvSpPr>
-            <a:spLocks noGrp="1"/>
-          </p:cNvSpPr>
-          <p:nvPr>
-            <p:ph type="title"/>
-          </p:nvPr>
-        </p:nvSpPr>
-        <p:spPr>
-          <a:xfrm>
-            <a:off x="609480" y="273600"/>
-            <a:ext cx="10972440" cy="1144800"/>
-          </a:xfrm>
-          <a:prstGeom prst="rect">
-            <a:avLst/>
-          </a:prstGeom>
-          <a:noFill/>
-          <a:ln w="0">
-            <a:noFill/>
-          </a:ln>
-        </p:spPr>
-        <p:txBody>
-          <a:bodyPr lIns="0" rIns="0" tIns="0" bIns="0" anchor="ctr">
-            <a:noAutofit/>
-          </a:bodyPr>
-          <a:p>
-            <a:pPr indent="0">
-              <a:buNone/>
-            </a:pPr>
-            <a:endParaRPr b="0" lang="en-IN" sz="1400" strike="noStrike" u="none">
-              <a:solidFill>
-                <a:srgbClr val="000000"/>
-              </a:solidFill>
-              <a:uFillTx/>
-              <a:latin typeface="Arial"/>
-            </a:endParaRPr>
-          </a:p>
-        </p:txBody>
-      </p:sp>
-      <p:sp>
-        <p:nvSpPr>
-          <p:cNvPr id="34" name="PlaceHolder 2"/>
-          <p:cNvSpPr>
-            <a:spLocks noGrp="1"/>
-          </p:cNvSpPr>
-          <p:nvPr>
-            <p:ph type="subTitle"/>
-          </p:nvPr>
-        </p:nvSpPr>
-        <p:spPr>
-          <a:xfrm>
-            <a:off x="609480" y="1604520"/>
-            <a:ext cx="10972440" cy="3977280"/>
-          </a:xfrm>
-          <a:prstGeom prst="rect">
-            <a:avLst/>
-          </a:prstGeom>
-          <a:noFill/>
-          <a:ln w="0">
-            <a:noFill/>
-          </a:ln>
-        </p:spPr>
-        <p:txBody>
-          <a:bodyPr lIns="0" rIns="0" tIns="0" bIns="0" anchor="ctr">
-            <a:noAutofit/>
-          </a:bodyPr>
-          <a:p>
-            <a:pPr indent="0" algn="ctr">
-              <a:buNone/>
-            </a:pPr>
-            <a:endParaRPr b="0" lang="en-IN" sz="3200" strike="noStrike" u="none">
-              <a:solidFill>
-                <a:srgbClr val="000000"/>
-              </a:solidFill>
-              <a:uFillTx/>
-              <a:latin typeface="Arial"/>
-            </a:endParaRPr>
-          </a:p>
-        </p:txBody>
-      </p:sp>
-      <p:sp>
-        <p:nvSpPr>
-          <p:cNvPr id="4" name="PlaceHolder 3"/>
-          <p:cNvSpPr>
-            <a:spLocks noGrp="1"/>
-          </p:cNvSpPr>
-          <p:nvPr>
-            <p:ph type="ftr" idx="14"/>
-          </p:nvPr>
-        </p:nvSpPr>
-        <p:spPr/>
-        <p:txBody>
-          <a:bodyPr/>
-          <a:p>
-            <a:r>
-              <a:t>Footer</a:t>
-            </a:r>
-          </a:p>
-        </p:txBody>
-      </p:sp>
-      <p:sp>
-        <p:nvSpPr>
-          <p:cNvPr id="5" name="PlaceHolder 4"/>
-          <p:cNvSpPr>
-            <a:spLocks noGrp="1"/>
-          </p:cNvSpPr>
-          <p:nvPr>
-            <p:ph type="sldNum" idx="15"/>
-          </p:nvPr>
-        </p:nvSpPr>
-        <p:spPr/>
-        <p:txBody>
-          <a:bodyPr/>
-          <a:p>
-            <a:fld id="{5840B949-6BB6-4D17-8E52-54E5D5B4D210}" type="slidenum">
-              <a:t>&lt;#&gt;</a:t>
-            </a:fld>
-          </a:p>
-        </p:txBody>
-      </p:sp>
-      <p:sp>
-        <p:nvSpPr>
-          <p:cNvPr id="6" name="PlaceHolder 5"/>
-          <p:cNvSpPr>
-            <a:spLocks noGrp="1"/>
-          </p:cNvSpPr>
-          <p:nvPr>
-            <p:ph type="dt" idx="13"/>
-          </p:nvPr>
-        </p:nvSpPr>
-        <p:spPr/>
-        <p:txBody>
-          <a:bodyPr/>
-          <a:p>
-            <a:r>
-              <a:rPr lang="en-IN"/>
-              <a:t/>
-            </a:r>
-          </a:p>
-        </p:txBody>
-      </p:sp>
-    </p:spTree>
-  </p:cSld>
-</p:sldLayout>
-</file>
-
-<file path=ppt/slideLayouts/slideLayout9.xml><?xml version="1.0" encoding="utf-8"?>
-<p:sldLayout xmlns:a="http://schemas.openxmlformats.org/drawingml/2006/main" xmlns:p="http://schemas.openxmlformats.org/presentationml/2006/main" xmlns:r="http://schemas.openxmlformats.org/officeDocument/2006/relationships" xmlns:p14="http://schemas.microsoft.com/office/powerpoint/2010/main" xmlns:p15="http://schemas.microsoft.com/office/powerpoint/2012/main" xmlns:mc="http://schemas.openxmlformats.org/markup-compatibility/2006" type="blank" preserve="1">
-  <p:cSld name="SECTION_HEADER">
-    <p:spTree>
-      <p:nvGrpSpPr>
-        <p:cNvPr id="1" name=""/>
-        <p:cNvGrpSpPr/>
-        <p:nvPr/>
-      </p:nvGrpSpPr>
-      <p:grpSpPr>
-        <a:xfrm>
-          <a:off x="0" y="0"/>
-          <a:ext cx="0" cy="0"/>
-          <a:chOff x="0" y="0"/>
-          <a:chExt cx="0" cy="0"/>
-        </a:xfrm>
-      </p:grpSpPr>
-      <p:sp>
-        <p:nvSpPr>
-          <p:cNvPr id="2" name="PlaceHolder 1"/>
-          <p:cNvSpPr>
-            <a:spLocks noGrp="1"/>
-          </p:cNvSpPr>
-          <p:nvPr>
-            <p:ph type="ftr" idx="17"/>
-          </p:nvPr>
-        </p:nvSpPr>
-        <p:spPr/>
-        <p:txBody>
-          <a:bodyPr/>
-          <a:p>
-            <a:r>
-              <a:t>Footer</a:t>
-            </a:r>
-          </a:p>
-        </p:txBody>
-      </p:sp>
-      <p:sp>
-        <p:nvSpPr>
-          <p:cNvPr id="3" name="PlaceHolder 2"/>
-          <p:cNvSpPr>
-            <a:spLocks noGrp="1"/>
-          </p:cNvSpPr>
-          <p:nvPr>
-            <p:ph type="sldNum" idx="18"/>
-          </p:nvPr>
-        </p:nvSpPr>
-        <p:spPr/>
-        <p:txBody>
-          <a:bodyPr/>
-          <a:p>
-            <a:fld id="{C5289A3A-6D0E-47E4-BD2C-61BBE03A623E}" type="slidenum">
-              <a:t>&lt;#&gt;</a:t>
-            </a:fld>
-          </a:p>
-        </p:txBody>
-      </p:sp>
-      <p:sp>
-        <p:nvSpPr>
-          <p:cNvPr id="4" name="PlaceHolder 3"/>
-          <p:cNvSpPr>
-            <a:spLocks noGrp="1"/>
-          </p:cNvSpPr>
-          <p:nvPr>
-            <p:ph type="dt" idx="16"/>
           </p:nvPr>
         </p:nvSpPr>
         <p:spPr/>
@@ -4164,15 +357,15 @@
           </a:ln>
         </p:spPr>
         <p:txBody>
-          <a:bodyPr lIns="91440" rIns="91440" tIns="45720" bIns="45720" anchor="ctr">
-            <a:normAutofit/>
+          <a:bodyPr lIns="0" rIns="0" tIns="0" bIns="0" anchor="ctr">
+            <a:noAutofit/>
           </a:bodyPr>
           <a:p>
             <a:pPr indent="0">
               <a:buNone/>
             </a:pPr>
             <a:r>
-              <a:rPr b="0" lang="en-IN" sz="4400" strike="noStrike" u="none">
+              <a:rPr b="0" lang="en-IN" sz="1400" strike="noStrike" u="none">
                 <a:solidFill>
                   <a:srgbClr val="000000"/>
                 </a:solidFill>
@@ -4181,7 +374,7 @@
               </a:rPr>
               <a:t>Click to edit the title text format</a:t>
             </a:r>
-            <a:endParaRPr b="0" lang="en-IN" sz="4400" strike="noStrike" u="none">
+            <a:endParaRPr b="0" lang="en-IN" sz="1400" strike="noStrike" u="none">
               <a:solidFill>
                 <a:srgbClr val="000000"/>
               </a:solidFill>
@@ -4215,7 +408,7 @@
           </a:ln>
         </p:spPr>
         <p:txBody>
-          <a:bodyPr lIns="91440" rIns="91440" tIns="45720" bIns="45720" anchor="t">
+          <a:bodyPr lIns="0" rIns="0" tIns="0" bIns="0" anchor="t">
             <a:normAutofit/>
           </a:bodyPr>
           <a:p>
@@ -4231,7 +424,7 @@
               <a:buChar char=""/>
             </a:pPr>
             <a:r>
-              <a:rPr b="0" lang="en-IN" sz="2800" strike="noStrike" u="none">
+              <a:rPr b="0" lang="en-IN" sz="1400" strike="noStrike" u="none">
                 <a:solidFill>
                   <a:srgbClr val="000000"/>
                 </a:solidFill>
@@ -4240,7 +433,7 @@
               </a:rPr>
               <a:t>Click to edit the outline text format</a:t>
             </a:r>
-            <a:endParaRPr b="0" lang="en-IN" sz="2800" strike="noStrike" u="none">
+            <a:endParaRPr b="0" lang="en-IN" sz="1400" strike="noStrike" u="none">
               <a:solidFill>
                 <a:srgbClr val="000000"/>
               </a:solidFill>
@@ -4261,7 +454,7 @@
               <a:buChar char=""/>
             </a:pPr>
             <a:r>
-              <a:rPr b="0" lang="en-IN" sz="2800" strike="noStrike" u="none">
+              <a:rPr b="0" lang="en-IN" sz="1400" strike="noStrike" u="none">
                 <a:solidFill>
                   <a:srgbClr val="000000"/>
                 </a:solidFill>
@@ -4270,7 +463,7 @@
               </a:rPr>
               <a:t>Second Outline Level</a:t>
             </a:r>
-            <a:endParaRPr b="0" lang="en-IN" sz="2800" strike="noStrike" u="none">
+            <a:endParaRPr b="0" lang="en-IN" sz="1400" strike="noStrike" u="none">
               <a:solidFill>
                 <a:srgbClr val="000000"/>
               </a:solidFill>
@@ -4291,7 +484,7 @@
               <a:buChar char=""/>
             </a:pPr>
             <a:r>
-              <a:rPr b="0" lang="en-IN" sz="2800" strike="noStrike" u="none">
+              <a:rPr b="0" lang="en-IN" sz="1400" strike="noStrike" u="none">
                 <a:solidFill>
                   <a:srgbClr val="000000"/>
                 </a:solidFill>
@@ -4300,7 +493,7 @@
               </a:rPr>
               <a:t>Third Outline Level</a:t>
             </a:r>
-            <a:endParaRPr b="0" lang="en-IN" sz="2800" strike="noStrike" u="none">
+            <a:endParaRPr b="0" lang="en-IN" sz="1400" strike="noStrike" u="none">
               <a:solidFill>
                 <a:srgbClr val="000000"/>
               </a:solidFill>
@@ -4321,7 +514,7 @@
               <a:buChar char=""/>
             </a:pPr>
             <a:r>
-              <a:rPr b="0" lang="en-IN" sz="2800" strike="noStrike" u="none">
+              <a:rPr b="0" lang="en-IN" sz="1400" strike="noStrike" u="none">
                 <a:solidFill>
                   <a:srgbClr val="000000"/>
                 </a:solidFill>
@@ -4330,7 +523,7 @@
               </a:rPr>
               <a:t>Fourth Outline Level</a:t>
             </a:r>
-            <a:endParaRPr b="0" lang="en-IN" sz="2800" strike="noStrike" u="none">
+            <a:endParaRPr b="0" lang="en-IN" sz="1400" strike="noStrike" u="none">
               <a:solidFill>
                 <a:srgbClr val="000000"/>
               </a:solidFill>
@@ -4351,7 +544,7 @@
               <a:buChar char=""/>
             </a:pPr>
             <a:r>
-              <a:rPr b="0" lang="en-IN" sz="2800" strike="noStrike" u="none">
+              <a:rPr b="0" lang="en-IN" sz="2000" strike="noStrike" u="none">
                 <a:solidFill>
                   <a:srgbClr val="000000"/>
                 </a:solidFill>
@@ -4360,7 +553,7 @@
               </a:rPr>
               <a:t>Fifth Outline Level</a:t>
             </a:r>
-            <a:endParaRPr b="0" lang="en-IN" sz="2800" strike="noStrike" u="none">
+            <a:endParaRPr b="0" lang="en-IN" sz="2000" strike="noStrike" u="none">
               <a:solidFill>
                 <a:srgbClr val="000000"/>
               </a:solidFill>
@@ -4381,7 +574,7 @@
               <a:buChar char=""/>
             </a:pPr>
             <a:r>
-              <a:rPr b="0" lang="en-IN" sz="2800" strike="noStrike" u="none">
+              <a:rPr b="0" lang="en-IN" sz="2000" strike="noStrike" u="none">
                 <a:solidFill>
                   <a:srgbClr val="000000"/>
                 </a:solidFill>
@@ -4390,7 +583,7 @@
               </a:rPr>
               <a:t>Sixth Outline Level</a:t>
             </a:r>
-            <a:endParaRPr b="0" lang="en-IN" sz="2800" strike="noStrike" u="none">
+            <a:endParaRPr b="0" lang="en-IN" sz="2000" strike="noStrike" u="none">
               <a:solidFill>
                 <a:srgbClr val="000000"/>
               </a:solidFill>
@@ -4411,7 +604,7 @@
               <a:buChar char=""/>
             </a:pPr>
             <a:r>
-              <a:rPr b="0" lang="en-IN" sz="2800" strike="noStrike" u="none">
+              <a:rPr b="0" lang="en-IN" sz="2000" strike="noStrike" u="none">
                 <a:solidFill>
                   <a:srgbClr val="000000"/>
                 </a:solidFill>
@@ -4420,7 +613,7 @@
               </a:rPr>
               <a:t>Seventh Outline Level</a:t>
             </a:r>
-            <a:endParaRPr b="0" lang="en-IN" sz="2800" strike="noStrike" u="none">
+            <a:endParaRPr b="0" lang="en-IN" sz="2000" strike="noStrike" u="none">
               <a:solidFill>
                 <a:srgbClr val="000000"/>
               </a:solidFill>
@@ -4612,7 +805,7 @@
                 <a:tab algn="l" pos="0"/>
               </a:tabLst>
             </a:pPr>
-            <a:fld id="{E9731AAD-AA9A-4B14-84C3-5BCA4C057619}" type="slidenum">
+            <a:fld id="{15751C05-B01D-4938-B3E0-DDF41E395D40}" type="slidenum">
               <a:rPr b="0" lang="en-IN" sz="1200" strike="noStrike" u="none">
                 <a:solidFill>
                   <a:srgbClr val="888888"/>
@@ -4635,7 +828,7 @@
       </p:sp>
     </p:spTree>
   </p:cSld>
-  <p:clrMap bg1="lt1" tx1="dk1" bg2="dk2" tx2="lt2" accent1="accent1" accent2="accent2" accent3="accent3" accent4="accent4" accent5="accent5" accent6="accent6" hlink="hlink" folHlink="folHlink"/>
+  <p:clrMap bg1="lt1" tx1="dk1" bg2="lt2" tx2="dk2" accent1="accent1" accent2="accent2" accent3="accent3" accent4="accent4" accent5="accent5" accent6="accent6" hlink="hlink" folHlink="folHlink"/>
   <p:sldLayoutIdLst>
     <p:sldLayoutId id="2147483649" r:id="rId3"/>
   </p:sldLayoutIdLst>
@@ -4668,7 +861,7 @@
       </p:grpSpPr>
       <p:pic>
         <p:nvPicPr>
-          <p:cNvPr id="66" name="Google Shape;15;p12" descr=""/>
+          <p:cNvPr id="58" name="Google Shape;15;p12" descr=""/>
           <p:cNvPicPr/>
           <p:nvPr/>
         </p:nvPicPr>
@@ -4691,7 +884,7 @@
       </p:pic>
       <p:sp>
         <p:nvSpPr>
-          <p:cNvPr id="67" name="PlaceHolder 1"/>
+          <p:cNvPr id="59" name="PlaceHolder 1"/>
           <p:cNvSpPr>
             <a:spLocks noGrp="1"/>
           </p:cNvSpPr>
@@ -4713,15 +906,15 @@
           </a:ln>
         </p:spPr>
         <p:txBody>
-          <a:bodyPr lIns="91440" rIns="91440" tIns="45720" bIns="45720" anchor="b">
-            <a:normAutofit/>
+          <a:bodyPr lIns="0" rIns="0" tIns="0" bIns="0" anchor="ctr">
+            <a:noAutofit/>
           </a:bodyPr>
           <a:p>
             <a:pPr indent="0">
               <a:buNone/>
             </a:pPr>
             <a:r>
-              <a:rPr b="0" lang="en-IN" sz="3200" strike="noStrike" u="none">
+              <a:rPr b="0" lang="en-IN" sz="1400" strike="noStrike" u="none">
                 <a:solidFill>
                   <a:srgbClr val="000000"/>
                 </a:solidFill>
@@ -4730,7 +923,7 @@
               </a:rPr>
               <a:t>Click to edit the title text format</a:t>
             </a:r>
-            <a:endParaRPr b="0" lang="en-IN" sz="3200" strike="noStrike" u="none">
+            <a:endParaRPr b="0" lang="en-IN" sz="1400" strike="noStrike" u="none">
               <a:solidFill>
                 <a:srgbClr val="000000"/>
               </a:solidFill>
@@ -4742,7 +935,7 @@
       </p:sp>
       <p:sp>
         <p:nvSpPr>
-          <p:cNvPr id="68" name="PlaceHolder 2"/>
+          <p:cNvPr id="60" name="PlaceHolder 2"/>
           <p:cNvSpPr>
             <a:spLocks noGrp="1"/>
           </p:cNvSpPr>
@@ -4764,8 +957,8 @@
           </a:ln>
         </p:spPr>
         <p:txBody>
-          <a:bodyPr lIns="91440" rIns="91440" tIns="45720" bIns="45720" anchor="t">
-            <a:normAutofit lnSpcReduction="9999"/>
+          <a:bodyPr lIns="0" rIns="0" tIns="0" bIns="0" anchor="t">
+            <a:normAutofit/>
           </a:bodyPr>
           <a:p>
             <a:pPr marL="432000" indent="-324000">
@@ -4780,7 +973,7 @@
               <a:buChar char=""/>
             </a:pPr>
             <a:r>
-              <a:rPr b="0" lang="en-IN" sz="3200" strike="noStrike" u="none">
+              <a:rPr b="0" lang="en-IN" sz="1400" strike="noStrike" u="none">
                 <a:solidFill>
                   <a:srgbClr val="000000"/>
                 </a:solidFill>
@@ -4789,7 +982,7 @@
               </a:rPr>
               <a:t>Click to edit the outline text format</a:t>
             </a:r>
-            <a:endParaRPr b="0" lang="en-IN" sz="3200" strike="noStrike" u="none">
+            <a:endParaRPr b="0" lang="en-IN" sz="1400" strike="noStrike" u="none">
               <a:solidFill>
                 <a:srgbClr val="000000"/>
               </a:solidFill>
@@ -4810,7 +1003,7 @@
               <a:buChar char=""/>
             </a:pPr>
             <a:r>
-              <a:rPr b="0" lang="en-IN" sz="3200" strike="noStrike" u="none">
+              <a:rPr b="0" lang="en-IN" sz="1400" strike="noStrike" u="none">
                 <a:solidFill>
                   <a:srgbClr val="000000"/>
                 </a:solidFill>
@@ -4819,7 +1012,7 @@
               </a:rPr>
               <a:t>Second Outline Level</a:t>
             </a:r>
-            <a:endParaRPr b="0" lang="en-IN" sz="3200" strike="noStrike" u="none">
+            <a:endParaRPr b="0" lang="en-IN" sz="1400" strike="noStrike" u="none">
               <a:solidFill>
                 <a:srgbClr val="000000"/>
               </a:solidFill>
@@ -4840,7 +1033,7 @@
               <a:buChar char=""/>
             </a:pPr>
             <a:r>
-              <a:rPr b="0" lang="en-IN" sz="3200" strike="noStrike" u="none">
+              <a:rPr b="0" lang="en-IN" sz="1400" strike="noStrike" u="none">
                 <a:solidFill>
                   <a:srgbClr val="000000"/>
                 </a:solidFill>
@@ -4849,7 +1042,7 @@
               </a:rPr>
               <a:t>Third Outline Level</a:t>
             </a:r>
-            <a:endParaRPr b="0" lang="en-IN" sz="3200" strike="noStrike" u="none">
+            <a:endParaRPr b="0" lang="en-IN" sz="1400" strike="noStrike" u="none">
               <a:solidFill>
                 <a:srgbClr val="000000"/>
               </a:solidFill>
@@ -4870,7 +1063,7 @@
               <a:buChar char=""/>
             </a:pPr>
             <a:r>
-              <a:rPr b="0" lang="en-IN" sz="3200" strike="noStrike" u="none">
+              <a:rPr b="0" lang="en-IN" sz="1400" strike="noStrike" u="none">
                 <a:solidFill>
                   <a:srgbClr val="000000"/>
                 </a:solidFill>
@@ -4879,7 +1072,7 @@
               </a:rPr>
               <a:t>Fourth Outline Level</a:t>
             </a:r>
-            <a:endParaRPr b="0" lang="en-IN" sz="3200" strike="noStrike" u="none">
+            <a:endParaRPr b="0" lang="en-IN" sz="1400" strike="noStrike" u="none">
               <a:solidFill>
                 <a:srgbClr val="000000"/>
               </a:solidFill>
@@ -4900,7 +1093,7 @@
               <a:buChar char=""/>
             </a:pPr>
             <a:r>
-              <a:rPr b="0" lang="en-IN" sz="3200" strike="noStrike" u="none">
+              <a:rPr b="0" lang="en-IN" sz="2000" strike="noStrike" u="none">
                 <a:solidFill>
                   <a:srgbClr val="000000"/>
                 </a:solidFill>
@@ -4909,7 +1102,7 @@
               </a:rPr>
               <a:t>Fifth Outline Level</a:t>
             </a:r>
-            <a:endParaRPr b="0" lang="en-IN" sz="3200" strike="noStrike" u="none">
+            <a:endParaRPr b="0" lang="en-IN" sz="2000" strike="noStrike" u="none">
               <a:solidFill>
                 <a:srgbClr val="000000"/>
               </a:solidFill>
@@ -4930,7 +1123,7 @@
               <a:buChar char=""/>
             </a:pPr>
             <a:r>
-              <a:rPr b="0" lang="en-IN" sz="3200" strike="noStrike" u="none">
+              <a:rPr b="0" lang="en-IN" sz="2000" strike="noStrike" u="none">
                 <a:solidFill>
                   <a:srgbClr val="000000"/>
                 </a:solidFill>
@@ -4939,7 +1132,7 @@
               </a:rPr>
               <a:t>Sixth Outline Level</a:t>
             </a:r>
-            <a:endParaRPr b="0" lang="en-IN" sz="3200" strike="noStrike" u="none">
+            <a:endParaRPr b="0" lang="en-IN" sz="2000" strike="noStrike" u="none">
               <a:solidFill>
                 <a:srgbClr val="000000"/>
               </a:solidFill>
@@ -4960,7 +1153,7 @@
               <a:buChar char=""/>
             </a:pPr>
             <a:r>
-              <a:rPr b="0" lang="en-IN" sz="3200" strike="noStrike" u="none">
+              <a:rPr b="0" lang="en-IN" sz="2000" strike="noStrike" u="none">
                 <a:solidFill>
                   <a:srgbClr val="000000"/>
                 </a:solidFill>
@@ -4969,7 +1162,7 @@
               </a:rPr>
               <a:t>Seventh Outline Level</a:t>
             </a:r>
-            <a:endParaRPr b="0" lang="en-IN" sz="3200" strike="noStrike" u="none">
+            <a:endParaRPr b="0" lang="en-IN" sz="2000" strike="noStrike" u="none">
               <a:solidFill>
                 <a:srgbClr val="000000"/>
               </a:solidFill>
@@ -4981,7 +1174,7 @@
       </p:sp>
       <p:sp>
         <p:nvSpPr>
-          <p:cNvPr id="69" name="PlaceHolder 3"/>
+          <p:cNvPr id="61" name="PlaceHolder 3"/>
           <p:cNvSpPr>
             <a:spLocks noGrp="1"/>
           </p:cNvSpPr>
@@ -5003,7 +1196,7 @@
           </a:ln>
         </p:spPr>
         <p:txBody>
-          <a:bodyPr lIns="91440" rIns="91440" tIns="45720" bIns="45720" anchor="t">
+          <a:bodyPr lIns="0" rIns="0" tIns="0" bIns="0" anchor="t">
             <a:normAutofit/>
           </a:bodyPr>
           <a:p>
@@ -5019,7 +1212,7 @@
               <a:buChar char=""/>
             </a:pPr>
             <a:r>
-              <a:rPr b="0" lang="en-IN" sz="1600" strike="noStrike" u="none">
+              <a:rPr b="0" lang="en-IN" sz="1400" strike="noStrike" u="none">
                 <a:solidFill>
                   <a:srgbClr val="000000"/>
                 </a:solidFill>
@@ -5028,7 +1221,7 @@
               </a:rPr>
               <a:t>Click to edit the outline text format</a:t>
             </a:r>
-            <a:endParaRPr b="0" lang="en-IN" sz="1600" strike="noStrike" u="none">
+            <a:endParaRPr b="0" lang="en-IN" sz="1400" strike="noStrike" u="none">
               <a:solidFill>
                 <a:srgbClr val="000000"/>
               </a:solidFill>
@@ -5049,7 +1242,7 @@
               <a:buChar char=""/>
             </a:pPr>
             <a:r>
-              <a:rPr b="0" lang="en-IN" sz="1600" strike="noStrike" u="none">
+              <a:rPr b="0" lang="en-IN" sz="1400" strike="noStrike" u="none">
                 <a:solidFill>
                   <a:srgbClr val="000000"/>
                 </a:solidFill>
@@ -5058,7 +1251,7 @@
               </a:rPr>
               <a:t>Second Outline Level</a:t>
             </a:r>
-            <a:endParaRPr b="0" lang="en-IN" sz="1600" strike="noStrike" u="none">
+            <a:endParaRPr b="0" lang="en-IN" sz="1400" strike="noStrike" u="none">
               <a:solidFill>
                 <a:srgbClr val="000000"/>
               </a:solidFill>
@@ -5079,7 +1272,7 @@
               <a:buChar char=""/>
             </a:pPr>
             <a:r>
-              <a:rPr b="0" lang="en-IN" sz="1600" strike="noStrike" u="none">
+              <a:rPr b="0" lang="en-IN" sz="1400" strike="noStrike" u="none">
                 <a:solidFill>
                   <a:srgbClr val="000000"/>
                 </a:solidFill>
@@ -5088,7 +1281,7 @@
               </a:rPr>
               <a:t>Third Outline Level</a:t>
             </a:r>
-            <a:endParaRPr b="0" lang="en-IN" sz="1600" strike="noStrike" u="none">
+            <a:endParaRPr b="0" lang="en-IN" sz="1400" strike="noStrike" u="none">
               <a:solidFill>
                 <a:srgbClr val="000000"/>
               </a:solidFill>
@@ -5109,7 +1302,7 @@
               <a:buChar char=""/>
             </a:pPr>
             <a:r>
-              <a:rPr b="0" lang="en-IN" sz="1600" strike="noStrike" u="none">
+              <a:rPr b="0" lang="en-IN" sz="1400" strike="noStrike" u="none">
                 <a:solidFill>
                   <a:srgbClr val="000000"/>
                 </a:solidFill>
@@ -5118,7 +1311,7 @@
               </a:rPr>
               <a:t>Fourth Outline Level</a:t>
             </a:r>
-            <a:endParaRPr b="0" lang="en-IN" sz="1600" strike="noStrike" u="none">
+            <a:endParaRPr b="0" lang="en-IN" sz="1400" strike="noStrike" u="none">
               <a:solidFill>
                 <a:srgbClr val="000000"/>
               </a:solidFill>
@@ -5139,7 +1332,7 @@
               <a:buChar char=""/>
             </a:pPr>
             <a:r>
-              <a:rPr b="0" lang="en-IN" sz="1600" strike="noStrike" u="none">
+              <a:rPr b="0" lang="en-IN" sz="2000" strike="noStrike" u="none">
                 <a:solidFill>
                   <a:srgbClr val="000000"/>
                 </a:solidFill>
@@ -5148,7 +1341,7 @@
               </a:rPr>
               <a:t>Fifth Outline Level</a:t>
             </a:r>
-            <a:endParaRPr b="0" lang="en-IN" sz="1600" strike="noStrike" u="none">
+            <a:endParaRPr b="0" lang="en-IN" sz="2000" strike="noStrike" u="none">
               <a:solidFill>
                 <a:srgbClr val="000000"/>
               </a:solidFill>
@@ -5169,7 +1362,7 @@
               <a:buChar char=""/>
             </a:pPr>
             <a:r>
-              <a:rPr b="0" lang="en-IN" sz="1600" strike="noStrike" u="none">
+              <a:rPr b="0" lang="en-IN" sz="2000" strike="noStrike" u="none">
                 <a:solidFill>
                   <a:srgbClr val="000000"/>
                 </a:solidFill>
@@ -5178,7 +1371,7 @@
               </a:rPr>
               <a:t>Sixth Outline Level</a:t>
             </a:r>
-            <a:endParaRPr b="0" lang="en-IN" sz="1600" strike="noStrike" u="none">
+            <a:endParaRPr b="0" lang="en-IN" sz="2000" strike="noStrike" u="none">
               <a:solidFill>
                 <a:srgbClr val="000000"/>
               </a:solidFill>
@@ -5199,7 +1392,7 @@
               <a:buChar char=""/>
             </a:pPr>
             <a:r>
-              <a:rPr b="0" lang="en-IN" sz="1600" strike="noStrike" u="none">
+              <a:rPr b="0" lang="en-IN" sz="2000" strike="noStrike" u="none">
                 <a:solidFill>
                   <a:srgbClr val="000000"/>
                 </a:solidFill>
@@ -5208,7 +1401,7 @@
               </a:rPr>
               <a:t>Seventh Outline Level</a:t>
             </a:r>
-            <a:endParaRPr b="0" lang="en-IN" sz="1600" strike="noStrike" u="none">
+            <a:endParaRPr b="0" lang="en-IN" sz="2000" strike="noStrike" u="none">
               <a:solidFill>
                 <a:srgbClr val="000000"/>
               </a:solidFill>
@@ -5220,7 +1413,7 @@
       </p:sp>
       <p:sp>
         <p:nvSpPr>
-          <p:cNvPr id="70" name="PlaceHolder 4"/>
+          <p:cNvPr id="62" name="PlaceHolder 4"/>
           <p:cNvSpPr>
             <a:spLocks noGrp="1"/>
           </p:cNvSpPr>
@@ -5283,7 +1476,7 @@
       </p:sp>
       <p:sp>
         <p:nvSpPr>
-          <p:cNvPr id="71" name="PlaceHolder 5"/>
+          <p:cNvPr id="63" name="PlaceHolder 5"/>
           <p:cNvSpPr>
             <a:spLocks noGrp="1"/>
           </p:cNvSpPr>
@@ -5346,7 +1539,7 @@
       </p:sp>
       <p:sp>
         <p:nvSpPr>
-          <p:cNvPr id="72" name="PlaceHolder 6"/>
+          <p:cNvPr id="64" name="PlaceHolder 6"/>
           <p:cNvSpPr>
             <a:spLocks noGrp="1"/>
           </p:cNvSpPr>
@@ -5400,7 +1593,7 @@
                 <a:tab algn="l" pos="0"/>
               </a:tabLst>
             </a:pPr>
-            <a:fld id="{3E627857-2697-4E5F-A8B2-2FDD4E290532}" type="slidenum">
+            <a:fld id="{6249FFB9-8C74-4A2A-A386-0E127A5B0F50}" type="slidenum">
               <a:rPr b="0" lang="en-IN" sz="1200" strike="noStrike" u="none">
                 <a:solidFill>
                   <a:srgbClr val="888888"/>
@@ -5423,10 +1616,8 @@
       </p:sp>
     </p:spTree>
   </p:cSld>
-  <p:clrMap bg1="lt1" tx1="dk1" bg2="dk2" tx2="lt2" accent1="accent1" accent2="accent2" accent3="accent3" accent4="accent4" accent5="accent5" accent6="accent6" hlink="hlink" folHlink="folHlink"/>
-  <p:sldLayoutIdLst>
-    <p:sldLayoutId id="2147483670" r:id="rId3"/>
-  </p:sldLayoutIdLst>
+  <p:clrMap bg1="lt1" tx1="dk1" bg2="lt2" tx2="dk2" accent1="accent1" accent2="accent2" accent3="accent3" accent4="accent4" accent5="accent5" accent6="accent6" hlink="hlink" folHlink="folHlink"/>
+  <p:sldLayoutIdLst/>
 </p:sldMaster>
 </file>
 
@@ -5456,7 +1647,7 @@
       </p:grpSpPr>
       <p:pic>
         <p:nvPicPr>
-          <p:cNvPr id="73" name="Google Shape;15;p12" descr=""/>
+          <p:cNvPr id="65" name="Google Shape;15;p12" descr=""/>
           <p:cNvPicPr/>
           <p:nvPr/>
         </p:nvPicPr>
@@ -5479,7 +1670,7 @@
       </p:pic>
       <p:sp>
         <p:nvSpPr>
-          <p:cNvPr id="74" name="PlaceHolder 1"/>
+          <p:cNvPr id="66" name="PlaceHolder 1"/>
           <p:cNvSpPr>
             <a:spLocks noGrp="1"/>
           </p:cNvSpPr>
@@ -5501,15 +1692,15 @@
           </a:ln>
         </p:spPr>
         <p:txBody>
-          <a:bodyPr lIns="91440" rIns="91440" tIns="45720" bIns="45720" anchor="b">
-            <a:normAutofit/>
+          <a:bodyPr lIns="0" rIns="0" tIns="0" bIns="0" anchor="ctr">
+            <a:noAutofit/>
           </a:bodyPr>
           <a:p>
             <a:pPr indent="0">
               <a:buNone/>
             </a:pPr>
             <a:r>
-              <a:rPr b="0" lang="en-IN" sz="3200" strike="noStrike" u="none">
+              <a:rPr b="0" lang="en-IN" sz="1400" strike="noStrike" u="none">
                 <a:solidFill>
                   <a:srgbClr val="000000"/>
                 </a:solidFill>
@@ -5518,7 +1709,7 @@
               </a:rPr>
               <a:t>Click to edit the title text format</a:t>
             </a:r>
-            <a:endParaRPr b="0" lang="en-IN" sz="3200" strike="noStrike" u="none">
+            <a:endParaRPr b="0" lang="en-IN" sz="1400" strike="noStrike" u="none">
               <a:solidFill>
                 <a:srgbClr val="000000"/>
               </a:solidFill>
@@ -5530,7 +1721,7 @@
       </p:sp>
       <p:sp>
         <p:nvSpPr>
-          <p:cNvPr id="75" name="PlaceHolder 2"/>
+          <p:cNvPr id="67" name="PlaceHolder 2"/>
           <p:cNvSpPr>
             <a:spLocks noGrp="1"/>
           </p:cNvSpPr>
@@ -5552,7 +1743,7 @@
           </a:ln>
         </p:spPr>
         <p:txBody>
-          <a:bodyPr lIns="90000" rIns="90000" tIns="45000" bIns="45000" anchor="t">
+          <a:bodyPr lIns="0" rIns="0" tIns="0" bIns="0" anchor="t">
             <a:normAutofit/>
           </a:bodyPr>
           <a:p>
@@ -5568,7 +1759,7 @@
               <a:buChar char=""/>
             </a:pPr>
             <a:r>
-              <a:rPr b="0" lang="en-IN" sz="1800" strike="noStrike" u="none">
+              <a:rPr b="0" lang="en-IN" sz="1400" strike="noStrike" u="none">
                 <a:solidFill>
                   <a:srgbClr val="000000"/>
                 </a:solidFill>
@@ -5577,7 +1768,7 @@
               </a:rPr>
               <a:t>Click to edit the outline text format</a:t>
             </a:r>
-            <a:endParaRPr b="0" lang="en-IN" sz="1800" strike="noStrike" u="none">
+            <a:endParaRPr b="0" lang="en-IN" sz="1400" strike="noStrike" u="none">
               <a:solidFill>
                 <a:srgbClr val="000000"/>
               </a:solidFill>
@@ -5598,7 +1789,7 @@
               <a:buChar char=""/>
             </a:pPr>
             <a:r>
-              <a:rPr b="0" lang="en-IN" sz="1800" strike="noStrike" u="none">
+              <a:rPr b="0" lang="en-IN" sz="1400" strike="noStrike" u="none">
                 <a:solidFill>
                   <a:srgbClr val="000000"/>
                 </a:solidFill>
@@ -5607,7 +1798,7 @@
               </a:rPr>
               <a:t>Second Outline Level</a:t>
             </a:r>
-            <a:endParaRPr b="0" lang="en-IN" sz="1800" strike="noStrike" u="none">
+            <a:endParaRPr b="0" lang="en-IN" sz="1400" strike="noStrike" u="none">
               <a:solidFill>
                 <a:srgbClr val="000000"/>
               </a:solidFill>
@@ -5628,7 +1819,7 @@
               <a:buChar char=""/>
             </a:pPr>
             <a:r>
-              <a:rPr b="0" lang="en-IN" sz="1800" strike="noStrike" u="none">
+              <a:rPr b="0" lang="en-IN" sz="1400" strike="noStrike" u="none">
                 <a:solidFill>
                   <a:srgbClr val="000000"/>
                 </a:solidFill>
@@ -5637,7 +1828,7 @@
               </a:rPr>
               <a:t>Third Outline Level</a:t>
             </a:r>
-            <a:endParaRPr b="0" lang="en-IN" sz="1800" strike="noStrike" u="none">
+            <a:endParaRPr b="0" lang="en-IN" sz="1400" strike="noStrike" u="none">
               <a:solidFill>
                 <a:srgbClr val="000000"/>
               </a:solidFill>
@@ -5658,7 +1849,7 @@
               <a:buChar char=""/>
             </a:pPr>
             <a:r>
-              <a:rPr b="0" lang="en-IN" sz="1800" strike="noStrike" u="none">
+              <a:rPr b="0" lang="en-IN" sz="1400" strike="noStrike" u="none">
                 <a:solidFill>
                   <a:srgbClr val="000000"/>
                 </a:solidFill>
@@ -5667,7 +1858,7 @@
               </a:rPr>
               <a:t>Fourth Outline Level</a:t>
             </a:r>
-            <a:endParaRPr b="0" lang="en-IN" sz="1800" strike="noStrike" u="none">
+            <a:endParaRPr b="0" lang="en-IN" sz="1400" strike="noStrike" u="none">
               <a:solidFill>
                 <a:srgbClr val="000000"/>
               </a:solidFill>
@@ -5688,7 +1879,7 @@
               <a:buChar char=""/>
             </a:pPr>
             <a:r>
-              <a:rPr b="0" lang="en-IN" sz="1800" strike="noStrike" u="none">
+              <a:rPr b="0" lang="en-IN" sz="2000" strike="noStrike" u="none">
                 <a:solidFill>
                   <a:srgbClr val="000000"/>
                 </a:solidFill>
@@ -5697,7 +1888,7 @@
               </a:rPr>
               <a:t>Fifth Outline Level</a:t>
             </a:r>
-            <a:endParaRPr b="0" lang="en-IN" sz="1800" strike="noStrike" u="none">
+            <a:endParaRPr b="0" lang="en-IN" sz="2000" strike="noStrike" u="none">
               <a:solidFill>
                 <a:srgbClr val="000000"/>
               </a:solidFill>
@@ -5718,7 +1909,7 @@
               <a:buChar char=""/>
             </a:pPr>
             <a:r>
-              <a:rPr b="0" lang="en-IN" sz="1800" strike="noStrike" u="none">
+              <a:rPr b="0" lang="en-IN" sz="2000" strike="noStrike" u="none">
                 <a:solidFill>
                   <a:srgbClr val="000000"/>
                 </a:solidFill>
@@ -5727,7 +1918,7 @@
               </a:rPr>
               <a:t>Sixth Outline Level</a:t>
             </a:r>
-            <a:endParaRPr b="0" lang="en-IN" sz="1800" strike="noStrike" u="none">
+            <a:endParaRPr b="0" lang="en-IN" sz="2000" strike="noStrike" u="none">
               <a:solidFill>
                 <a:srgbClr val="000000"/>
               </a:solidFill>
@@ -5748,7 +1939,7 @@
               <a:buChar char=""/>
             </a:pPr>
             <a:r>
-              <a:rPr b="0" lang="en-IN" sz="1800" strike="noStrike" u="none">
+              <a:rPr b="0" lang="en-IN" sz="2000" strike="noStrike" u="none">
                 <a:solidFill>
                   <a:srgbClr val="000000"/>
                 </a:solidFill>
@@ -5757,7 +1948,7 @@
               </a:rPr>
               <a:t>Seventh Outline Level</a:t>
             </a:r>
-            <a:endParaRPr b="0" lang="en-IN" sz="1800" strike="noStrike" u="none">
+            <a:endParaRPr b="0" lang="en-IN" sz="2000" strike="noStrike" u="none">
               <a:solidFill>
                 <a:srgbClr val="000000"/>
               </a:solidFill>
@@ -5769,7 +1960,7 @@
       </p:sp>
       <p:sp>
         <p:nvSpPr>
-          <p:cNvPr id="76" name="PlaceHolder 3"/>
+          <p:cNvPr id="68" name="PlaceHolder 3"/>
           <p:cNvSpPr>
             <a:spLocks noGrp="1"/>
           </p:cNvSpPr>
@@ -5791,7 +1982,7 @@
           </a:ln>
         </p:spPr>
         <p:txBody>
-          <a:bodyPr lIns="91440" rIns="91440" tIns="45720" bIns="45720" anchor="t">
+          <a:bodyPr lIns="0" rIns="0" tIns="0" bIns="0" anchor="t">
             <a:normAutofit/>
           </a:bodyPr>
           <a:p>
@@ -5807,7 +1998,7 @@
               <a:buChar char=""/>
             </a:pPr>
             <a:r>
-              <a:rPr b="0" lang="en-IN" sz="1600" strike="noStrike" u="none">
+              <a:rPr b="0" lang="en-IN" sz="1400" strike="noStrike" u="none">
                 <a:solidFill>
                   <a:srgbClr val="000000"/>
                 </a:solidFill>
@@ -5816,7 +2007,7 @@
               </a:rPr>
               <a:t>Click to edit the outline text format</a:t>
             </a:r>
-            <a:endParaRPr b="0" lang="en-IN" sz="1600" strike="noStrike" u="none">
+            <a:endParaRPr b="0" lang="en-IN" sz="1400" strike="noStrike" u="none">
               <a:solidFill>
                 <a:srgbClr val="000000"/>
               </a:solidFill>
@@ -5837,7 +2028,7 @@
               <a:buChar char=""/>
             </a:pPr>
             <a:r>
-              <a:rPr b="0" lang="en-IN" sz="1600" strike="noStrike" u="none">
+              <a:rPr b="0" lang="en-IN" sz="1400" strike="noStrike" u="none">
                 <a:solidFill>
                   <a:srgbClr val="000000"/>
                 </a:solidFill>
@@ -5846,7 +2037,7 @@
               </a:rPr>
               <a:t>Second Outline Level</a:t>
             </a:r>
-            <a:endParaRPr b="0" lang="en-IN" sz="1600" strike="noStrike" u="none">
+            <a:endParaRPr b="0" lang="en-IN" sz="1400" strike="noStrike" u="none">
               <a:solidFill>
                 <a:srgbClr val="000000"/>
               </a:solidFill>
@@ -5867,7 +2058,7 @@
               <a:buChar char=""/>
             </a:pPr>
             <a:r>
-              <a:rPr b="0" lang="en-IN" sz="1600" strike="noStrike" u="none">
+              <a:rPr b="0" lang="en-IN" sz="1400" strike="noStrike" u="none">
                 <a:solidFill>
                   <a:srgbClr val="000000"/>
                 </a:solidFill>
@@ -5876,7 +2067,7 @@
               </a:rPr>
               <a:t>Third Outline Level</a:t>
             </a:r>
-            <a:endParaRPr b="0" lang="en-IN" sz="1600" strike="noStrike" u="none">
+            <a:endParaRPr b="0" lang="en-IN" sz="1400" strike="noStrike" u="none">
               <a:solidFill>
                 <a:srgbClr val="000000"/>
               </a:solidFill>
@@ -5897,7 +2088,7 @@
               <a:buChar char=""/>
             </a:pPr>
             <a:r>
-              <a:rPr b="0" lang="en-IN" sz="1600" strike="noStrike" u="none">
+              <a:rPr b="0" lang="en-IN" sz="1400" strike="noStrike" u="none">
                 <a:solidFill>
                   <a:srgbClr val="000000"/>
                 </a:solidFill>
@@ -5906,7 +2097,7 @@
               </a:rPr>
               <a:t>Fourth Outline Level</a:t>
             </a:r>
-            <a:endParaRPr b="0" lang="en-IN" sz="1600" strike="noStrike" u="none">
+            <a:endParaRPr b="0" lang="en-IN" sz="1400" strike="noStrike" u="none">
               <a:solidFill>
                 <a:srgbClr val="000000"/>
               </a:solidFill>
@@ -5927,7 +2118,7 @@
               <a:buChar char=""/>
             </a:pPr>
             <a:r>
-              <a:rPr b="0" lang="en-IN" sz="1600" strike="noStrike" u="none">
+              <a:rPr b="0" lang="en-IN" sz="2000" strike="noStrike" u="none">
                 <a:solidFill>
                   <a:srgbClr val="000000"/>
                 </a:solidFill>
@@ -5936,7 +2127,7 @@
               </a:rPr>
               <a:t>Fifth Outline Level</a:t>
             </a:r>
-            <a:endParaRPr b="0" lang="en-IN" sz="1600" strike="noStrike" u="none">
+            <a:endParaRPr b="0" lang="en-IN" sz="2000" strike="noStrike" u="none">
               <a:solidFill>
                 <a:srgbClr val="000000"/>
               </a:solidFill>
@@ -5957,7 +2148,7 @@
               <a:buChar char=""/>
             </a:pPr>
             <a:r>
-              <a:rPr b="0" lang="en-IN" sz="1600" strike="noStrike" u="none">
+              <a:rPr b="0" lang="en-IN" sz="2000" strike="noStrike" u="none">
                 <a:solidFill>
                   <a:srgbClr val="000000"/>
                 </a:solidFill>
@@ -5966,7 +2157,7 @@
               </a:rPr>
               <a:t>Sixth Outline Level</a:t>
             </a:r>
-            <a:endParaRPr b="0" lang="en-IN" sz="1600" strike="noStrike" u="none">
+            <a:endParaRPr b="0" lang="en-IN" sz="2000" strike="noStrike" u="none">
               <a:solidFill>
                 <a:srgbClr val="000000"/>
               </a:solidFill>
@@ -5987,7 +2178,7 @@
               <a:buChar char=""/>
             </a:pPr>
             <a:r>
-              <a:rPr b="0" lang="en-IN" sz="1600" strike="noStrike" u="none">
+              <a:rPr b="0" lang="en-IN" sz="2000" strike="noStrike" u="none">
                 <a:solidFill>
                   <a:srgbClr val="000000"/>
                 </a:solidFill>
@@ -5996,7 +2187,7 @@
               </a:rPr>
               <a:t>Seventh Outline Level</a:t>
             </a:r>
-            <a:endParaRPr b="0" lang="en-IN" sz="1600" strike="noStrike" u="none">
+            <a:endParaRPr b="0" lang="en-IN" sz="2000" strike="noStrike" u="none">
               <a:solidFill>
                 <a:srgbClr val="000000"/>
               </a:solidFill>
@@ -6008,7 +2199,7 @@
       </p:sp>
       <p:sp>
         <p:nvSpPr>
-          <p:cNvPr id="77" name="PlaceHolder 4"/>
+          <p:cNvPr id="69" name="PlaceHolder 4"/>
           <p:cNvSpPr>
             <a:spLocks noGrp="1"/>
           </p:cNvSpPr>
@@ -6071,7 +2262,7 @@
       </p:sp>
       <p:sp>
         <p:nvSpPr>
-          <p:cNvPr id="78" name="PlaceHolder 5"/>
+          <p:cNvPr id="70" name="PlaceHolder 5"/>
           <p:cNvSpPr>
             <a:spLocks noGrp="1"/>
           </p:cNvSpPr>
@@ -6134,7 +2325,7 @@
       </p:sp>
       <p:sp>
         <p:nvSpPr>
-          <p:cNvPr id="79" name="PlaceHolder 6"/>
+          <p:cNvPr id="71" name="PlaceHolder 6"/>
           <p:cNvSpPr>
             <a:spLocks noGrp="1"/>
           </p:cNvSpPr>
@@ -6188,7 +2379,7 @@
                 <a:tab algn="l" pos="0"/>
               </a:tabLst>
             </a:pPr>
-            <a:fld id="{AF10A9FC-B9ED-4166-85F9-7CC78BA938CD}" type="slidenum">
+            <a:fld id="{CFECFA38-1036-4B0E-8E24-113F5B9BDF19}" type="slidenum">
               <a:rPr b="0" lang="en-IN" sz="1200" strike="noStrike" u="none">
                 <a:solidFill>
                   <a:srgbClr val="888888"/>
@@ -6211,10 +2402,8 @@
       </p:sp>
     </p:spTree>
   </p:cSld>
-  <p:clrMap bg1="lt1" tx1="dk1" bg2="dk2" tx2="lt2" accent1="accent1" accent2="accent2" accent3="accent3" accent4="accent4" accent5="accent5" accent6="accent6" hlink="hlink" folHlink="folHlink"/>
-  <p:sldLayoutIdLst>
-    <p:sldLayoutId id="2147483672" r:id="rId3"/>
-  </p:sldLayoutIdLst>
+  <p:clrMap bg1="lt1" tx1="dk1" bg2="lt2" tx2="dk2" accent1="accent1" accent2="accent2" accent3="accent3" accent4="accent4" accent5="accent5" accent6="accent6" hlink="hlink" folHlink="folHlink"/>
+  <p:sldLayoutIdLst/>
 </p:sldMaster>
 </file>
 
@@ -6289,15 +2478,15 @@
           </a:ln>
         </p:spPr>
         <p:txBody>
-          <a:bodyPr lIns="91440" rIns="91440" tIns="45720" bIns="45720" anchor="ctr">
-            <a:normAutofit/>
+          <a:bodyPr lIns="0" rIns="0" tIns="0" bIns="0" anchor="ctr">
+            <a:noAutofit/>
           </a:bodyPr>
           <a:p>
             <a:pPr indent="0">
               <a:buNone/>
             </a:pPr>
             <a:r>
-              <a:rPr b="0" lang="en-IN" sz="4400" strike="noStrike" u="none">
+              <a:rPr b="0" lang="en-IN" sz="1400" strike="noStrike" u="none">
                 <a:solidFill>
                   <a:srgbClr val="000000"/>
                 </a:solidFill>
@@ -6306,7 +2495,7 @@
               </a:rPr>
               <a:t>Click to edit the title text format</a:t>
             </a:r>
-            <a:endParaRPr b="0" lang="en-IN" sz="4400" strike="noStrike" u="none">
+            <a:endParaRPr b="0" lang="en-IN" sz="1400" strike="noStrike" u="none">
               <a:solidFill>
                 <a:srgbClr val="000000"/>
               </a:solidFill>
@@ -6340,7 +2529,7 @@
           </a:ln>
         </p:spPr>
         <p:txBody>
-          <a:bodyPr lIns="91440" rIns="91440" tIns="45720" bIns="45720" anchor="t">
+          <a:bodyPr lIns="0" rIns="0" tIns="0" bIns="0" anchor="t">
             <a:normAutofit/>
           </a:bodyPr>
           <a:p>
@@ -6356,7 +2545,7 @@
               <a:buChar char=""/>
             </a:pPr>
             <a:r>
-              <a:rPr b="0" lang="en-IN" sz="2800" strike="noStrike" u="none">
+              <a:rPr b="0" lang="en-IN" sz="1400" strike="noStrike" u="none">
                 <a:solidFill>
                   <a:srgbClr val="000000"/>
                 </a:solidFill>
@@ -6365,7 +2554,7 @@
               </a:rPr>
               <a:t>Click to edit the outline text format</a:t>
             </a:r>
-            <a:endParaRPr b="0" lang="en-IN" sz="2800" strike="noStrike" u="none">
+            <a:endParaRPr b="0" lang="en-IN" sz="1400" strike="noStrike" u="none">
               <a:solidFill>
                 <a:srgbClr val="000000"/>
               </a:solidFill>
@@ -6386,7 +2575,7 @@
               <a:buChar char=""/>
             </a:pPr>
             <a:r>
-              <a:rPr b="0" lang="en-IN" sz="2800" strike="noStrike" u="none">
+              <a:rPr b="0" lang="en-IN" sz="1400" strike="noStrike" u="none">
                 <a:solidFill>
                   <a:srgbClr val="000000"/>
                 </a:solidFill>
@@ -6395,7 +2584,7 @@
               </a:rPr>
               <a:t>Second Outline Level</a:t>
             </a:r>
-            <a:endParaRPr b="0" lang="en-IN" sz="2800" strike="noStrike" u="none">
+            <a:endParaRPr b="0" lang="en-IN" sz="1400" strike="noStrike" u="none">
               <a:solidFill>
                 <a:srgbClr val="000000"/>
               </a:solidFill>
@@ -6416,7 +2605,7 @@
               <a:buChar char=""/>
             </a:pPr>
             <a:r>
-              <a:rPr b="0" lang="en-IN" sz="2800" strike="noStrike" u="none">
+              <a:rPr b="0" lang="en-IN" sz="1400" strike="noStrike" u="none">
                 <a:solidFill>
                   <a:srgbClr val="000000"/>
                 </a:solidFill>
@@ -6425,7 +2614,7 @@
               </a:rPr>
               <a:t>Third Outline Level</a:t>
             </a:r>
-            <a:endParaRPr b="0" lang="en-IN" sz="2800" strike="noStrike" u="none">
+            <a:endParaRPr b="0" lang="en-IN" sz="1400" strike="noStrike" u="none">
               <a:solidFill>
                 <a:srgbClr val="000000"/>
               </a:solidFill>
@@ -6446,7 +2635,7 @@
               <a:buChar char=""/>
             </a:pPr>
             <a:r>
-              <a:rPr b="0" lang="en-IN" sz="2800" strike="noStrike" u="none">
+              <a:rPr b="0" lang="en-IN" sz="1400" strike="noStrike" u="none">
                 <a:solidFill>
                   <a:srgbClr val="000000"/>
                 </a:solidFill>
@@ -6455,7 +2644,7 @@
               </a:rPr>
               <a:t>Fourth Outline Level</a:t>
             </a:r>
-            <a:endParaRPr b="0" lang="en-IN" sz="2800" strike="noStrike" u="none">
+            <a:endParaRPr b="0" lang="en-IN" sz="1400" strike="noStrike" u="none">
               <a:solidFill>
                 <a:srgbClr val="000000"/>
               </a:solidFill>
@@ -6476,7 +2665,7 @@
               <a:buChar char=""/>
             </a:pPr>
             <a:r>
-              <a:rPr b="0" lang="en-IN" sz="2800" strike="noStrike" u="none">
+              <a:rPr b="0" lang="en-IN" sz="2000" strike="noStrike" u="none">
                 <a:solidFill>
                   <a:srgbClr val="000000"/>
                 </a:solidFill>
@@ -6485,7 +2674,7 @@
               </a:rPr>
               <a:t>Fifth Outline Level</a:t>
             </a:r>
-            <a:endParaRPr b="0" lang="en-IN" sz="2800" strike="noStrike" u="none">
+            <a:endParaRPr b="0" lang="en-IN" sz="2000" strike="noStrike" u="none">
               <a:solidFill>
                 <a:srgbClr val="000000"/>
               </a:solidFill>
@@ -6506,7 +2695,7 @@
               <a:buChar char=""/>
             </a:pPr>
             <a:r>
-              <a:rPr b="0" lang="en-IN" sz="2800" strike="noStrike" u="none">
+              <a:rPr b="0" lang="en-IN" sz="2000" strike="noStrike" u="none">
                 <a:solidFill>
                   <a:srgbClr val="000000"/>
                 </a:solidFill>
@@ -6515,7 +2704,7 @@
               </a:rPr>
               <a:t>Sixth Outline Level</a:t>
             </a:r>
-            <a:endParaRPr b="0" lang="en-IN" sz="2800" strike="noStrike" u="none">
+            <a:endParaRPr b="0" lang="en-IN" sz="2000" strike="noStrike" u="none">
               <a:solidFill>
                 <a:srgbClr val="000000"/>
               </a:solidFill>
@@ -6536,7 +2725,7 @@
               <a:buChar char=""/>
             </a:pPr>
             <a:r>
-              <a:rPr b="0" lang="en-IN" sz="2800" strike="noStrike" u="none">
+              <a:rPr b="0" lang="en-IN" sz="2000" strike="noStrike" u="none">
                 <a:solidFill>
                   <a:srgbClr val="000000"/>
                 </a:solidFill>
@@ -6545,7 +2734,7 @@
               </a:rPr>
               <a:t>Seventh Outline Level</a:t>
             </a:r>
-            <a:endParaRPr b="0" lang="en-IN" sz="2800" strike="noStrike" u="none">
+            <a:endParaRPr b="0" lang="en-IN" sz="2000" strike="noStrike" u="none">
               <a:solidFill>
                 <a:srgbClr val="000000"/>
               </a:solidFill>
@@ -6737,7 +2926,7 @@
                 <a:tab algn="l" pos="0"/>
               </a:tabLst>
             </a:pPr>
-            <a:fld id="{82913584-6459-4DAB-84E3-11B2ACC92418}" type="slidenum">
+            <a:fld id="{EBA7381B-2BD5-4761-80A7-844AC29B2049}" type="slidenum">
               <a:rPr b="0" lang="en-IN" sz="1200" strike="noStrike" u="none">
                 <a:solidFill>
                   <a:srgbClr val="888888"/>
@@ -6760,10 +2949,8 @@
       </p:sp>
     </p:spTree>
   </p:cSld>
-  <p:clrMap bg1="lt1" tx1="dk1" bg2="dk2" tx2="lt2" accent1="accent1" accent2="accent2" accent3="accent3" accent4="accent4" accent5="accent5" accent6="accent6" hlink="hlink" folHlink="folHlink"/>
-  <p:sldLayoutIdLst>
-    <p:sldLayoutId id="2147483651" r:id="rId3"/>
-  </p:sldLayoutIdLst>
+  <p:clrMap bg1="lt1" tx1="dk1" bg2="lt2" tx2="dk2" accent1="accent1" accent2="accent2" accent3="accent3" accent4="accent4" accent5="accent5" accent6="accent6" hlink="hlink" folHlink="folHlink"/>
+  <p:sldLayoutIdLst/>
 </p:sldMaster>
 </file>
 
@@ -6838,15 +3025,15 @@
           </a:ln>
         </p:spPr>
         <p:txBody>
-          <a:bodyPr lIns="91440" rIns="91440" tIns="45720" bIns="45720" anchor="ctr">
-            <a:normAutofit/>
+          <a:bodyPr lIns="0" rIns="0" tIns="0" bIns="0" anchor="ctr">
+            <a:noAutofit/>
           </a:bodyPr>
           <a:p>
             <a:pPr indent="0">
               <a:buNone/>
             </a:pPr>
             <a:r>
-              <a:rPr b="0" lang="en-IN" sz="4400" strike="noStrike" u="none">
+              <a:rPr b="0" lang="en-IN" sz="1400" strike="noStrike" u="none">
                 <a:solidFill>
                   <a:srgbClr val="000000"/>
                 </a:solidFill>
@@ -6855,7 +3042,7 @@
               </a:rPr>
               <a:t>Click to edit the title text format</a:t>
             </a:r>
-            <a:endParaRPr b="0" lang="en-IN" sz="4400" strike="noStrike" u="none">
+            <a:endParaRPr b="0" lang="en-IN" sz="1400" strike="noStrike" u="none">
               <a:solidFill>
                 <a:srgbClr val="000000"/>
               </a:solidFill>
@@ -6889,7 +3076,7 @@
           </a:ln>
         </p:spPr>
         <p:txBody>
-          <a:bodyPr lIns="91440" rIns="91440" tIns="45720" bIns="45720" anchor="t">
+          <a:bodyPr lIns="0" rIns="0" tIns="0" bIns="0" anchor="t">
             <a:normAutofit/>
           </a:bodyPr>
           <a:p>
@@ -6905,7 +3092,7 @@
               <a:buChar char=""/>
             </a:pPr>
             <a:r>
-              <a:rPr b="0" lang="en-IN" sz="2800" strike="noStrike" u="none">
+              <a:rPr b="0" lang="en-IN" sz="1400" strike="noStrike" u="none">
                 <a:solidFill>
                   <a:srgbClr val="000000"/>
                 </a:solidFill>
@@ -6914,7 +3101,7 @@
               </a:rPr>
               <a:t>Click to edit the outline text format</a:t>
             </a:r>
-            <a:endParaRPr b="0" lang="en-IN" sz="2800" strike="noStrike" u="none">
+            <a:endParaRPr b="0" lang="en-IN" sz="1400" strike="noStrike" u="none">
               <a:solidFill>
                 <a:srgbClr val="000000"/>
               </a:solidFill>
@@ -6935,7 +3122,7 @@
               <a:buChar char=""/>
             </a:pPr>
             <a:r>
-              <a:rPr b="0" lang="en-IN" sz="2800" strike="noStrike" u="none">
+              <a:rPr b="0" lang="en-IN" sz="1400" strike="noStrike" u="none">
                 <a:solidFill>
                   <a:srgbClr val="000000"/>
                 </a:solidFill>
@@ -6944,7 +3131,7 @@
               </a:rPr>
               <a:t>Second Outline Level</a:t>
             </a:r>
-            <a:endParaRPr b="0" lang="en-IN" sz="2800" strike="noStrike" u="none">
+            <a:endParaRPr b="0" lang="en-IN" sz="1400" strike="noStrike" u="none">
               <a:solidFill>
                 <a:srgbClr val="000000"/>
               </a:solidFill>
@@ -6965,7 +3152,7 @@
               <a:buChar char=""/>
             </a:pPr>
             <a:r>
-              <a:rPr b="0" lang="en-IN" sz="2800" strike="noStrike" u="none">
+              <a:rPr b="0" lang="en-IN" sz="1400" strike="noStrike" u="none">
                 <a:solidFill>
                   <a:srgbClr val="000000"/>
                 </a:solidFill>
@@ -6974,7 +3161,7 @@
               </a:rPr>
               <a:t>Third Outline Level</a:t>
             </a:r>
-            <a:endParaRPr b="0" lang="en-IN" sz="2800" strike="noStrike" u="none">
+            <a:endParaRPr b="0" lang="en-IN" sz="1400" strike="noStrike" u="none">
               <a:solidFill>
                 <a:srgbClr val="000000"/>
               </a:solidFill>
@@ -6995,7 +3182,7 @@
               <a:buChar char=""/>
             </a:pPr>
             <a:r>
-              <a:rPr b="0" lang="en-IN" sz="2800" strike="noStrike" u="none">
+              <a:rPr b="0" lang="en-IN" sz="1400" strike="noStrike" u="none">
                 <a:solidFill>
                   <a:srgbClr val="000000"/>
                 </a:solidFill>
@@ -7004,7 +3191,7 @@
               </a:rPr>
               <a:t>Fourth Outline Level</a:t>
             </a:r>
-            <a:endParaRPr b="0" lang="en-IN" sz="2800" strike="noStrike" u="none">
+            <a:endParaRPr b="0" lang="en-IN" sz="1400" strike="noStrike" u="none">
               <a:solidFill>
                 <a:srgbClr val="000000"/>
               </a:solidFill>
@@ -7025,7 +3212,7 @@
               <a:buChar char=""/>
             </a:pPr>
             <a:r>
-              <a:rPr b="0" lang="en-IN" sz="2800" strike="noStrike" u="none">
+              <a:rPr b="0" lang="en-IN" sz="2000" strike="noStrike" u="none">
                 <a:solidFill>
                   <a:srgbClr val="000000"/>
                 </a:solidFill>
@@ -7034,7 +3221,7 @@
               </a:rPr>
               <a:t>Fifth Outline Level</a:t>
             </a:r>
-            <a:endParaRPr b="0" lang="en-IN" sz="2800" strike="noStrike" u="none">
+            <a:endParaRPr b="0" lang="en-IN" sz="2000" strike="noStrike" u="none">
               <a:solidFill>
                 <a:srgbClr val="000000"/>
               </a:solidFill>
@@ -7055,7 +3242,7 @@
               <a:buChar char=""/>
             </a:pPr>
             <a:r>
-              <a:rPr b="0" lang="en-IN" sz="2800" strike="noStrike" u="none">
+              <a:rPr b="0" lang="en-IN" sz="2000" strike="noStrike" u="none">
                 <a:solidFill>
                   <a:srgbClr val="000000"/>
                 </a:solidFill>
@@ -7064,7 +3251,7 @@
               </a:rPr>
               <a:t>Sixth Outline Level</a:t>
             </a:r>
-            <a:endParaRPr b="0" lang="en-IN" sz="2800" strike="noStrike" u="none">
+            <a:endParaRPr b="0" lang="en-IN" sz="2000" strike="noStrike" u="none">
               <a:solidFill>
                 <a:srgbClr val="000000"/>
               </a:solidFill>
@@ -7085,7 +3272,7 @@
               <a:buChar char=""/>
             </a:pPr>
             <a:r>
-              <a:rPr b="0" lang="en-IN" sz="2800" strike="noStrike" u="none">
+              <a:rPr b="0" lang="en-IN" sz="2000" strike="noStrike" u="none">
                 <a:solidFill>
                   <a:srgbClr val="000000"/>
                 </a:solidFill>
@@ -7094,7 +3281,7 @@
               </a:rPr>
               <a:t>Seventh Outline Level</a:t>
             </a:r>
-            <a:endParaRPr b="0" lang="en-IN" sz="2800" strike="noStrike" u="none">
+            <a:endParaRPr b="0" lang="en-IN" sz="2000" strike="noStrike" u="none">
               <a:solidFill>
                 <a:srgbClr val="000000"/>
               </a:solidFill>
@@ -7286,7 +3473,7 @@
                 <a:tab algn="l" pos="0"/>
               </a:tabLst>
             </a:pPr>
-            <a:fld id="{51167849-B835-4607-9D95-426338EB32A3}" type="slidenum">
+            <a:fld id="{AD102FAB-8D5E-4AC0-8BC1-B9E3EED3B9FD}" type="slidenum">
               <a:rPr b="0" lang="en-IN" sz="1200" strike="noStrike" u="none">
                 <a:solidFill>
                   <a:srgbClr val="888888"/>
@@ -7309,10 +3496,8 @@
       </p:sp>
     </p:spTree>
   </p:cSld>
-  <p:clrMap bg1="lt1" tx1="dk1" bg2="dk2" tx2="lt2" accent1="accent1" accent2="accent2" accent3="accent3" accent4="accent4" accent5="accent5" accent6="accent6" hlink="hlink" folHlink="folHlink"/>
-  <p:sldLayoutIdLst>
-    <p:sldLayoutId id="2147483653" r:id="rId3"/>
-  </p:sldLayoutIdLst>
+  <p:clrMap bg1="lt1" tx1="dk1" bg2="lt2" tx2="dk2" accent1="accent1" accent2="accent2" accent3="accent3" accent4="accent4" accent5="accent5" accent6="accent6" hlink="hlink" folHlink="folHlink"/>
+  <p:sldLayoutIdLst/>
 </p:sldMaster>
 </file>
 
@@ -7414,7 +3599,7 @@
                 <a:uFillTx/>
                 <a:latin typeface="Times New Roman"/>
               </a:rPr>
-              <a:t> </a:t>
+              <a:t>&lt;date/time&gt;</a:t>
             </a:r>
             <a:endParaRPr b="0" lang="en-IN" sz="1400" strike="noStrike" u="none">
               <a:solidFill>
@@ -7477,7 +3662,7 @@
                 <a:uFillTx/>
                 <a:latin typeface="Times New Roman"/>
               </a:rPr>
-              <a:t> </a:t>
+              <a:t>&lt;footer&gt;</a:t>
             </a:r>
             <a:endParaRPr b="0" lang="en-IN" sz="1400" strike="noStrike" u="none">
               <a:solidFill>
@@ -7545,7 +3730,7 @@
                 <a:tab algn="l" pos="0"/>
               </a:tabLst>
             </a:pPr>
-            <a:fld id="{5FAE6F31-FF92-4644-8376-C5E3315E4733}" type="slidenum">
+            <a:fld id="{2070EC22-A0DB-49A7-A0EA-6AA9C08CA61F}" type="slidenum">
               <a:rPr b="0" lang="en-IN" sz="1200" strike="noStrike" u="none">
                 <a:solidFill>
                   <a:srgbClr val="888888"/>
@@ -7554,7 +3739,7 @@
                 <a:latin typeface="Calibri"/>
                 <a:ea typeface="Calibri"/>
               </a:rPr>
-              <a:t>1</a:t>
+              <a:t>&lt;number&gt;</a:t>
             </a:fld>
             <a:endParaRPr b="0" lang="en-IN" sz="1200" strike="noStrike" u="none">
               <a:solidFill>
@@ -7858,12 +4043,9 @@
       </p:sp>
     </p:spTree>
   </p:cSld>
-  <p:clrMap bg1="lt1" tx1="dk1" bg2="dk2" tx2="lt2" accent1="accent1" accent2="accent2" accent3="accent3" accent4="accent4" accent5="accent5" accent6="accent6" hlink="hlink" folHlink="folHlink"/>
+  <p:clrMap bg1="lt1" tx1="dk1" bg2="lt2" tx2="dk2" accent1="accent1" accent2="accent2" accent3="accent3" accent4="accent4" accent5="accent5" accent6="accent6" hlink="hlink" folHlink="folHlink"/>
   <p:sldLayoutIdLst>
-    <p:sldLayoutId id="2147483655" r:id="rId3"/>
-    <p:sldLayoutId id="2147483656" r:id="rId4"/>
-    <p:sldLayoutId id="2147483657" r:id="rId5"/>
-    <p:sldLayoutId id="2147483658" r:id="rId6"/>
+    <p:sldLayoutId id="2147483653" r:id="rId3"/>
   </p:sldLayoutIdLst>
 </p:sldMaster>
 </file>
@@ -7894,7 +4076,7 @@
       </p:grpSpPr>
       <p:pic>
         <p:nvPicPr>
-          <p:cNvPr id="28" name="Google Shape;15;p12" descr=""/>
+          <p:cNvPr id="26" name="Google Shape;15;p12" descr=""/>
           <p:cNvPicPr/>
           <p:nvPr/>
         </p:nvPicPr>
@@ -7917,7 +4099,7 @@
       </p:pic>
       <p:sp>
         <p:nvSpPr>
-          <p:cNvPr id="29" name="PlaceHolder 1"/>
+          <p:cNvPr id="27" name="PlaceHolder 1"/>
           <p:cNvSpPr>
             <a:spLocks noGrp="1"/>
           </p:cNvSpPr>
@@ -7939,15 +4121,15 @@
           </a:ln>
         </p:spPr>
         <p:txBody>
-          <a:bodyPr lIns="91440" rIns="91440" tIns="45720" bIns="45720" anchor="b">
-            <a:normAutofit/>
+          <a:bodyPr lIns="0" rIns="0" tIns="0" bIns="0" anchor="ctr">
+            <a:noAutofit/>
           </a:bodyPr>
           <a:p>
             <a:pPr indent="0">
               <a:buNone/>
             </a:pPr>
             <a:r>
-              <a:rPr b="0" lang="en-IN" sz="6000" strike="noStrike" u="none">
+              <a:rPr b="0" lang="en-IN" sz="1400" strike="noStrike" u="none">
                 <a:solidFill>
                   <a:srgbClr val="000000"/>
                 </a:solidFill>
@@ -7956,7 +4138,7 @@
               </a:rPr>
               <a:t>Click to edit the title text format</a:t>
             </a:r>
-            <a:endParaRPr b="0" lang="en-IN" sz="6000" strike="noStrike" u="none">
+            <a:endParaRPr b="0" lang="en-IN" sz="1400" strike="noStrike" u="none">
               <a:solidFill>
                 <a:srgbClr val="000000"/>
               </a:solidFill>
@@ -7968,7 +4150,7 @@
       </p:sp>
       <p:sp>
         <p:nvSpPr>
-          <p:cNvPr id="30" name="PlaceHolder 2"/>
+          <p:cNvPr id="28" name="PlaceHolder 2"/>
           <p:cNvSpPr>
             <a:spLocks noGrp="1"/>
           </p:cNvSpPr>
@@ -8031,7 +4213,7 @@
       </p:sp>
       <p:sp>
         <p:nvSpPr>
-          <p:cNvPr id="31" name="PlaceHolder 3"/>
+          <p:cNvPr id="29" name="PlaceHolder 3"/>
           <p:cNvSpPr>
             <a:spLocks noGrp="1"/>
           </p:cNvSpPr>
@@ -8094,7 +4276,7 @@
       </p:sp>
       <p:sp>
         <p:nvSpPr>
-          <p:cNvPr id="32" name="PlaceHolder 4"/>
+          <p:cNvPr id="30" name="PlaceHolder 4"/>
           <p:cNvSpPr>
             <a:spLocks noGrp="1"/>
           </p:cNvSpPr>
@@ -8148,7 +4330,7 @@
                 <a:tab algn="l" pos="0"/>
               </a:tabLst>
             </a:pPr>
-            <a:fld id="{54FC9893-D595-4B45-A866-3D643F14248B}" type="slidenum">
+            <a:fld id="{56B37C39-0FB3-4DD6-AA92-558095E9DF40}" type="slidenum">
               <a:rPr b="0" lang="en-IN" sz="1200" strike="noStrike" u="none">
                 <a:solidFill>
                   <a:srgbClr val="888888"/>
@@ -8171,10 +4353,8 @@
       </p:sp>
     </p:spTree>
   </p:cSld>
-  <p:clrMap bg1="lt1" tx1="dk1" bg2="dk2" tx2="lt2" accent1="accent1" accent2="accent2" accent3="accent3" accent4="accent4" accent5="accent5" accent6="accent6" hlink="hlink" folHlink="folHlink"/>
-  <p:sldLayoutIdLst>
-    <p:sldLayoutId id="2147483660" r:id="rId3"/>
-  </p:sldLayoutIdLst>
+  <p:clrMap bg1="lt1" tx1="dk1" bg2="lt2" tx2="dk2" accent1="accent1" accent2="accent2" accent3="accent3" accent4="accent4" accent5="accent5" accent6="accent6" hlink="hlink" folHlink="folHlink"/>
+  <p:sldLayoutIdLst/>
 </p:sldMaster>
 </file>
 
@@ -8204,7 +4384,7 @@
       </p:grpSpPr>
       <p:pic>
         <p:nvPicPr>
-          <p:cNvPr id="35" name="Google Shape;15;p12" descr=""/>
+          <p:cNvPr id="31" name="Google Shape;15;p12" descr=""/>
           <p:cNvPicPr/>
           <p:nvPr/>
         </p:nvPicPr>
@@ -8227,7 +4407,7 @@
       </p:pic>
       <p:sp>
         <p:nvSpPr>
-          <p:cNvPr id="36" name="PlaceHolder 1"/>
+          <p:cNvPr id="32" name="PlaceHolder 1"/>
           <p:cNvSpPr>
             <a:spLocks noGrp="1"/>
           </p:cNvSpPr>
@@ -8249,15 +4429,15 @@
           </a:ln>
         </p:spPr>
         <p:txBody>
-          <a:bodyPr lIns="91440" rIns="91440" tIns="45720" bIns="45720" anchor="b">
-            <a:normAutofit/>
+          <a:bodyPr lIns="0" rIns="0" tIns="0" bIns="0" anchor="ctr">
+            <a:noAutofit/>
           </a:bodyPr>
           <a:p>
             <a:pPr indent="0">
               <a:buNone/>
             </a:pPr>
             <a:r>
-              <a:rPr b="0" lang="en-IN" sz="6000" strike="noStrike" u="none">
+              <a:rPr b="0" lang="en-IN" sz="1400" strike="noStrike" u="none">
                 <a:solidFill>
                   <a:srgbClr val="000000"/>
                 </a:solidFill>
@@ -8266,7 +4446,7 @@
               </a:rPr>
               <a:t>Click to edit the title text format</a:t>
             </a:r>
-            <a:endParaRPr b="0" lang="en-IN" sz="6000" strike="noStrike" u="none">
+            <a:endParaRPr b="0" lang="en-IN" sz="1400" strike="noStrike" u="none">
               <a:solidFill>
                 <a:srgbClr val="000000"/>
               </a:solidFill>
@@ -8278,7 +4458,7 @@
       </p:sp>
       <p:sp>
         <p:nvSpPr>
-          <p:cNvPr id="37" name="PlaceHolder 2"/>
+          <p:cNvPr id="33" name="PlaceHolder 2"/>
           <p:cNvSpPr>
             <a:spLocks noGrp="1"/>
           </p:cNvSpPr>
@@ -8300,8 +4480,8 @@
           </a:ln>
         </p:spPr>
         <p:txBody>
-          <a:bodyPr lIns="91440" rIns="91440" tIns="45720" bIns="45720" anchor="t">
-            <a:normAutofit fontScale="47500" lnSpcReduction="19999"/>
+          <a:bodyPr lIns="0" rIns="0" tIns="0" bIns="0" anchor="t">
+            <a:normAutofit fontScale="85000" lnSpcReduction="19999"/>
           </a:bodyPr>
           <a:p>
             <a:pPr marL="432000" indent="-324000">
@@ -8316,7 +4496,7 @@
               <a:buChar char=""/>
             </a:pPr>
             <a:r>
-              <a:rPr b="0" lang="en-IN" sz="2400" strike="noStrike" u="none">
+              <a:rPr b="0" lang="en-IN" sz="1400" strike="noStrike" u="none">
                 <a:solidFill>
                   <a:srgbClr val="000000"/>
                 </a:solidFill>
@@ -8325,7 +4505,7 @@
               </a:rPr>
               <a:t>Click to edit the outline text format</a:t>
             </a:r>
-            <a:endParaRPr b="0" lang="en-IN" sz="2400" strike="noStrike" u="none">
+            <a:endParaRPr b="0" lang="en-IN" sz="1400" strike="noStrike" u="none">
               <a:solidFill>
                 <a:srgbClr val="000000"/>
               </a:solidFill>
@@ -8346,7 +4526,7 @@
               <a:buChar char=""/>
             </a:pPr>
             <a:r>
-              <a:rPr b="0" lang="en-IN" sz="2400" strike="noStrike" u="none">
+              <a:rPr b="0" lang="en-IN" sz="1400" strike="noStrike" u="none">
                 <a:solidFill>
                   <a:srgbClr val="000000"/>
                 </a:solidFill>
@@ -8355,7 +4535,7 @@
               </a:rPr>
               <a:t>Second Outline Level</a:t>
             </a:r>
-            <a:endParaRPr b="0" lang="en-IN" sz="2400" strike="noStrike" u="none">
+            <a:endParaRPr b="0" lang="en-IN" sz="1400" strike="noStrike" u="none">
               <a:solidFill>
                 <a:srgbClr val="000000"/>
               </a:solidFill>
@@ -8376,7 +4556,7 @@
               <a:buChar char=""/>
             </a:pPr>
             <a:r>
-              <a:rPr b="0" lang="en-IN" sz="2400" strike="noStrike" u="none">
+              <a:rPr b="0" lang="en-IN" sz="1400" strike="noStrike" u="none">
                 <a:solidFill>
                   <a:srgbClr val="000000"/>
                 </a:solidFill>
@@ -8385,7 +4565,7 @@
               </a:rPr>
               <a:t>Third Outline Level</a:t>
             </a:r>
-            <a:endParaRPr b="0" lang="en-IN" sz="2400" strike="noStrike" u="none">
+            <a:endParaRPr b="0" lang="en-IN" sz="1400" strike="noStrike" u="none">
               <a:solidFill>
                 <a:srgbClr val="000000"/>
               </a:solidFill>
@@ -8406,7 +4586,7 @@
               <a:buChar char=""/>
             </a:pPr>
             <a:r>
-              <a:rPr b="0" lang="en-IN" sz="2400" strike="noStrike" u="none">
+              <a:rPr b="0" lang="en-IN" sz="1400" strike="noStrike" u="none">
                 <a:solidFill>
                   <a:srgbClr val="000000"/>
                 </a:solidFill>
@@ -8415,7 +4595,7 @@
               </a:rPr>
               <a:t>Fourth Outline Level</a:t>
             </a:r>
-            <a:endParaRPr b="0" lang="en-IN" sz="2400" strike="noStrike" u="none">
+            <a:endParaRPr b="0" lang="en-IN" sz="1400" strike="noStrike" u="none">
               <a:solidFill>
                 <a:srgbClr val="000000"/>
               </a:solidFill>
@@ -8436,7 +4616,7 @@
               <a:buChar char=""/>
             </a:pPr>
             <a:r>
-              <a:rPr b="0" lang="en-IN" sz="2400" strike="noStrike" u="none">
+              <a:rPr b="0" lang="en-IN" sz="2000" strike="noStrike" u="none">
                 <a:solidFill>
                   <a:srgbClr val="000000"/>
                 </a:solidFill>
@@ -8445,7 +4625,7 @@
               </a:rPr>
               <a:t>Fifth Outline Level</a:t>
             </a:r>
-            <a:endParaRPr b="0" lang="en-IN" sz="2400" strike="noStrike" u="none">
+            <a:endParaRPr b="0" lang="en-IN" sz="2000" strike="noStrike" u="none">
               <a:solidFill>
                 <a:srgbClr val="000000"/>
               </a:solidFill>
@@ -8466,7 +4646,7 @@
               <a:buChar char=""/>
             </a:pPr>
             <a:r>
-              <a:rPr b="0" lang="en-IN" sz="2400" strike="noStrike" u="none">
+              <a:rPr b="0" lang="en-IN" sz="2000" strike="noStrike" u="none">
                 <a:solidFill>
                   <a:srgbClr val="000000"/>
                 </a:solidFill>
@@ -8475,7 +4655,7 @@
               </a:rPr>
               <a:t>Sixth Outline Level</a:t>
             </a:r>
-            <a:endParaRPr b="0" lang="en-IN" sz="2400" strike="noStrike" u="none">
+            <a:endParaRPr b="0" lang="en-IN" sz="2000" strike="noStrike" u="none">
               <a:solidFill>
                 <a:srgbClr val="000000"/>
               </a:solidFill>
@@ -8496,7 +4676,7 @@
               <a:buChar char=""/>
             </a:pPr>
             <a:r>
-              <a:rPr b="0" lang="en-IN" sz="2400" strike="noStrike" u="none">
+              <a:rPr b="0" lang="en-IN" sz="2000" strike="noStrike" u="none">
                 <a:solidFill>
                   <a:srgbClr val="000000"/>
                 </a:solidFill>
@@ -8505,7 +4685,7 @@
               </a:rPr>
               <a:t>Seventh Outline Level</a:t>
             </a:r>
-            <a:endParaRPr b="0" lang="en-IN" sz="2400" strike="noStrike" u="none">
+            <a:endParaRPr b="0" lang="en-IN" sz="2000" strike="noStrike" u="none">
               <a:solidFill>
                 <a:srgbClr val="000000"/>
               </a:solidFill>
@@ -8517,7 +4697,7 @@
       </p:sp>
       <p:sp>
         <p:nvSpPr>
-          <p:cNvPr id="38" name="PlaceHolder 3"/>
+          <p:cNvPr id="34" name="PlaceHolder 3"/>
           <p:cNvSpPr>
             <a:spLocks noGrp="1"/>
           </p:cNvSpPr>
@@ -8580,7 +4760,7 @@
       </p:sp>
       <p:sp>
         <p:nvSpPr>
-          <p:cNvPr id="39" name="PlaceHolder 4"/>
+          <p:cNvPr id="35" name="PlaceHolder 4"/>
           <p:cNvSpPr>
             <a:spLocks noGrp="1"/>
           </p:cNvSpPr>
@@ -8643,7 +4823,7 @@
       </p:sp>
       <p:sp>
         <p:nvSpPr>
-          <p:cNvPr id="40" name="PlaceHolder 5"/>
+          <p:cNvPr id="36" name="PlaceHolder 5"/>
           <p:cNvSpPr>
             <a:spLocks noGrp="1"/>
           </p:cNvSpPr>
@@ -8697,7 +4877,7 @@
                 <a:tab algn="l" pos="0"/>
               </a:tabLst>
             </a:pPr>
-            <a:fld id="{B44CD2A5-1569-4C5B-8DDB-54475423B163}" type="slidenum">
+            <a:fld id="{322404E7-F182-4DBC-A85A-847D269E51F4}" type="slidenum">
               <a:rPr b="0" lang="en-IN" sz="1200" strike="noStrike" u="none">
                 <a:solidFill>
                   <a:srgbClr val="888888"/>
@@ -8720,10 +4900,8 @@
       </p:sp>
     </p:spTree>
   </p:cSld>
-  <p:clrMap bg1="lt1" tx1="dk1" bg2="dk2" tx2="lt2" accent1="accent1" accent2="accent2" accent3="accent3" accent4="accent4" accent5="accent5" accent6="accent6" hlink="hlink" folHlink="folHlink"/>
-  <p:sldLayoutIdLst>
-    <p:sldLayoutId id="2147483662" r:id="rId3"/>
-  </p:sldLayoutIdLst>
+  <p:clrMap bg1="lt1" tx1="dk1" bg2="lt2" tx2="dk2" accent1="accent1" accent2="accent2" accent3="accent3" accent4="accent4" accent5="accent5" accent6="accent6" hlink="hlink" folHlink="folHlink"/>
+  <p:sldLayoutIdLst/>
 </p:sldMaster>
 </file>
 
@@ -8753,7 +4931,7 @@
       </p:grpSpPr>
       <p:pic>
         <p:nvPicPr>
-          <p:cNvPr id="41" name="Google Shape;15;p12" descr=""/>
+          <p:cNvPr id="37" name="Google Shape;15;p12" descr=""/>
           <p:cNvPicPr/>
           <p:nvPr/>
         </p:nvPicPr>
@@ -8776,7 +4954,7 @@
       </p:pic>
       <p:sp>
         <p:nvSpPr>
-          <p:cNvPr id="42" name="PlaceHolder 1"/>
+          <p:cNvPr id="38" name="PlaceHolder 1"/>
           <p:cNvSpPr>
             <a:spLocks noGrp="1"/>
           </p:cNvSpPr>
@@ -8798,15 +4976,15 @@
           </a:ln>
         </p:spPr>
         <p:txBody>
-          <a:bodyPr lIns="91440" rIns="91440" tIns="45720" bIns="45720" anchor="ctr">
-            <a:normAutofit/>
+          <a:bodyPr lIns="0" rIns="0" tIns="0" bIns="0" anchor="ctr">
+            <a:noAutofit/>
           </a:bodyPr>
           <a:p>
             <a:pPr indent="0">
               <a:buNone/>
             </a:pPr>
             <a:r>
-              <a:rPr b="0" lang="en-IN" sz="4400" strike="noStrike" u="none">
+              <a:rPr b="0" lang="en-IN" sz="1400" strike="noStrike" u="none">
                 <a:solidFill>
                   <a:srgbClr val="000000"/>
                 </a:solidFill>
@@ -8815,7 +4993,7 @@
               </a:rPr>
               <a:t>Click to edit the title text format</a:t>
             </a:r>
-            <a:endParaRPr b="0" lang="en-IN" sz="4400" strike="noStrike" u="none">
+            <a:endParaRPr b="0" lang="en-IN" sz="1400" strike="noStrike" u="none">
               <a:solidFill>
                 <a:srgbClr val="000000"/>
               </a:solidFill>
@@ -8827,7 +5005,7 @@
       </p:sp>
       <p:sp>
         <p:nvSpPr>
-          <p:cNvPr id="43" name="PlaceHolder 2"/>
+          <p:cNvPr id="39" name="PlaceHolder 2"/>
           <p:cNvSpPr>
             <a:spLocks noGrp="1"/>
           </p:cNvSpPr>
@@ -8849,8 +5027,8 @@
           </a:ln>
         </p:spPr>
         <p:txBody>
-          <a:bodyPr lIns="91440" rIns="91440" tIns="45720" bIns="45720" anchor="t">
-            <a:normAutofit fontScale="92500" lnSpcReduction="9999"/>
+          <a:bodyPr lIns="0" rIns="0" tIns="0" bIns="0" anchor="t">
+            <a:normAutofit/>
           </a:bodyPr>
           <a:p>
             <a:pPr marL="432000" indent="-324000">
@@ -8865,7 +5043,7 @@
               <a:buChar char=""/>
             </a:pPr>
             <a:r>
-              <a:rPr b="0" lang="en-IN" sz="2800" strike="noStrike" u="none">
+              <a:rPr b="0" lang="en-IN" sz="1400" strike="noStrike" u="none">
                 <a:solidFill>
                   <a:srgbClr val="000000"/>
                 </a:solidFill>
@@ -8874,7 +5052,7 @@
               </a:rPr>
               <a:t>Click to edit the outline text format</a:t>
             </a:r>
-            <a:endParaRPr b="0" lang="en-IN" sz="2800" strike="noStrike" u="none">
+            <a:endParaRPr b="0" lang="en-IN" sz="1400" strike="noStrike" u="none">
               <a:solidFill>
                 <a:srgbClr val="000000"/>
               </a:solidFill>
@@ -8895,7 +5073,7 @@
               <a:buChar char=""/>
             </a:pPr>
             <a:r>
-              <a:rPr b="0" lang="en-IN" sz="2800" strike="noStrike" u="none">
+              <a:rPr b="0" lang="en-IN" sz="1400" strike="noStrike" u="none">
                 <a:solidFill>
                   <a:srgbClr val="000000"/>
                 </a:solidFill>
@@ -8904,7 +5082,7 @@
               </a:rPr>
               <a:t>Second Outline Level</a:t>
             </a:r>
-            <a:endParaRPr b="0" lang="en-IN" sz="2800" strike="noStrike" u="none">
+            <a:endParaRPr b="0" lang="en-IN" sz="1400" strike="noStrike" u="none">
               <a:solidFill>
                 <a:srgbClr val="000000"/>
               </a:solidFill>
@@ -8925,7 +5103,7 @@
               <a:buChar char=""/>
             </a:pPr>
             <a:r>
-              <a:rPr b="0" lang="en-IN" sz="2800" strike="noStrike" u="none">
+              <a:rPr b="0" lang="en-IN" sz="1400" strike="noStrike" u="none">
                 <a:solidFill>
                   <a:srgbClr val="000000"/>
                 </a:solidFill>
@@ -8934,7 +5112,7 @@
               </a:rPr>
               <a:t>Third Outline Level</a:t>
             </a:r>
-            <a:endParaRPr b="0" lang="en-IN" sz="2800" strike="noStrike" u="none">
+            <a:endParaRPr b="0" lang="en-IN" sz="1400" strike="noStrike" u="none">
               <a:solidFill>
                 <a:srgbClr val="000000"/>
               </a:solidFill>
@@ -8955,7 +5133,7 @@
               <a:buChar char=""/>
             </a:pPr>
             <a:r>
-              <a:rPr b="0" lang="en-IN" sz="2800" strike="noStrike" u="none">
+              <a:rPr b="0" lang="en-IN" sz="1400" strike="noStrike" u="none">
                 <a:solidFill>
                   <a:srgbClr val="000000"/>
                 </a:solidFill>
@@ -8964,7 +5142,7 @@
               </a:rPr>
               <a:t>Fourth Outline Level</a:t>
             </a:r>
-            <a:endParaRPr b="0" lang="en-IN" sz="2800" strike="noStrike" u="none">
+            <a:endParaRPr b="0" lang="en-IN" sz="1400" strike="noStrike" u="none">
               <a:solidFill>
                 <a:srgbClr val="000000"/>
               </a:solidFill>
@@ -8985,7 +5163,7 @@
               <a:buChar char=""/>
             </a:pPr>
             <a:r>
-              <a:rPr b="0" lang="en-IN" sz="2800" strike="noStrike" u="none">
+              <a:rPr b="0" lang="en-IN" sz="2000" strike="noStrike" u="none">
                 <a:solidFill>
                   <a:srgbClr val="000000"/>
                 </a:solidFill>
@@ -8994,7 +5172,7 @@
               </a:rPr>
               <a:t>Fifth Outline Level</a:t>
             </a:r>
-            <a:endParaRPr b="0" lang="en-IN" sz="2800" strike="noStrike" u="none">
+            <a:endParaRPr b="0" lang="en-IN" sz="2000" strike="noStrike" u="none">
               <a:solidFill>
                 <a:srgbClr val="000000"/>
               </a:solidFill>
@@ -9015,7 +5193,7 @@
               <a:buChar char=""/>
             </a:pPr>
             <a:r>
-              <a:rPr b="0" lang="en-IN" sz="2800" strike="noStrike" u="none">
+              <a:rPr b="0" lang="en-IN" sz="2000" strike="noStrike" u="none">
                 <a:solidFill>
                   <a:srgbClr val="000000"/>
                 </a:solidFill>
@@ -9024,7 +5202,7 @@
               </a:rPr>
               <a:t>Sixth Outline Level</a:t>
             </a:r>
-            <a:endParaRPr b="0" lang="en-IN" sz="2800" strike="noStrike" u="none">
+            <a:endParaRPr b="0" lang="en-IN" sz="2000" strike="noStrike" u="none">
               <a:solidFill>
                 <a:srgbClr val="000000"/>
               </a:solidFill>
@@ -9045,7 +5223,7 @@
               <a:buChar char=""/>
             </a:pPr>
             <a:r>
-              <a:rPr b="0" lang="en-IN" sz="2800" strike="noStrike" u="none">
+              <a:rPr b="0" lang="en-IN" sz="2000" strike="noStrike" u="none">
                 <a:solidFill>
                   <a:srgbClr val="000000"/>
                 </a:solidFill>
@@ -9054,7 +5232,7 @@
               </a:rPr>
               <a:t>Seventh Outline Level</a:t>
             </a:r>
-            <a:endParaRPr b="0" lang="en-IN" sz="2800" strike="noStrike" u="none">
+            <a:endParaRPr b="0" lang="en-IN" sz="2000" strike="noStrike" u="none">
               <a:solidFill>
                 <a:srgbClr val="000000"/>
               </a:solidFill>
@@ -9066,7 +5244,7 @@
       </p:sp>
       <p:sp>
         <p:nvSpPr>
-          <p:cNvPr id="44" name="PlaceHolder 3"/>
+          <p:cNvPr id="40" name="PlaceHolder 3"/>
           <p:cNvSpPr>
             <a:spLocks noGrp="1"/>
           </p:cNvSpPr>
@@ -9088,8 +5266,8 @@
           </a:ln>
         </p:spPr>
         <p:txBody>
-          <a:bodyPr lIns="91440" rIns="91440" tIns="45720" bIns="45720" anchor="t">
-            <a:normAutofit fontScale="92500" lnSpcReduction="9999"/>
+          <a:bodyPr lIns="0" rIns="0" tIns="0" bIns="0" anchor="t">
+            <a:normAutofit/>
           </a:bodyPr>
           <a:p>
             <a:pPr marL="432000" indent="-324000">
@@ -9104,7 +5282,7 @@
               <a:buChar char=""/>
             </a:pPr>
             <a:r>
-              <a:rPr b="0" lang="en-IN" sz="2800" strike="noStrike" u="none">
+              <a:rPr b="0" lang="en-IN" sz="1400" strike="noStrike" u="none">
                 <a:solidFill>
                   <a:srgbClr val="000000"/>
                 </a:solidFill>
@@ -9113,7 +5291,7 @@
               </a:rPr>
               <a:t>Click to edit the outline text format</a:t>
             </a:r>
-            <a:endParaRPr b="0" lang="en-IN" sz="2800" strike="noStrike" u="none">
+            <a:endParaRPr b="0" lang="en-IN" sz="1400" strike="noStrike" u="none">
               <a:solidFill>
                 <a:srgbClr val="000000"/>
               </a:solidFill>
@@ -9134,7 +5312,7 @@
               <a:buChar char=""/>
             </a:pPr>
             <a:r>
-              <a:rPr b="0" lang="en-IN" sz="2800" strike="noStrike" u="none">
+              <a:rPr b="0" lang="en-IN" sz="1400" strike="noStrike" u="none">
                 <a:solidFill>
                   <a:srgbClr val="000000"/>
                 </a:solidFill>
@@ -9143,7 +5321,7 @@
               </a:rPr>
               <a:t>Second Outline Level</a:t>
             </a:r>
-            <a:endParaRPr b="0" lang="en-IN" sz="2800" strike="noStrike" u="none">
+            <a:endParaRPr b="0" lang="en-IN" sz="1400" strike="noStrike" u="none">
               <a:solidFill>
                 <a:srgbClr val="000000"/>
               </a:solidFill>
@@ -9164,7 +5342,7 @@
               <a:buChar char=""/>
             </a:pPr>
             <a:r>
-              <a:rPr b="0" lang="en-IN" sz="2800" strike="noStrike" u="none">
+              <a:rPr b="0" lang="en-IN" sz="1400" strike="noStrike" u="none">
                 <a:solidFill>
                   <a:srgbClr val="000000"/>
                 </a:solidFill>
@@ -9173,7 +5351,7 @@
               </a:rPr>
               <a:t>Third Outline Level</a:t>
             </a:r>
-            <a:endParaRPr b="0" lang="en-IN" sz="2800" strike="noStrike" u="none">
+            <a:endParaRPr b="0" lang="en-IN" sz="1400" strike="noStrike" u="none">
               <a:solidFill>
                 <a:srgbClr val="000000"/>
               </a:solidFill>
@@ -9194,7 +5372,7 @@
               <a:buChar char=""/>
             </a:pPr>
             <a:r>
-              <a:rPr b="0" lang="en-IN" sz="2800" strike="noStrike" u="none">
+              <a:rPr b="0" lang="en-IN" sz="1400" strike="noStrike" u="none">
                 <a:solidFill>
                   <a:srgbClr val="000000"/>
                 </a:solidFill>
@@ -9203,7 +5381,7 @@
               </a:rPr>
               <a:t>Fourth Outline Level</a:t>
             </a:r>
-            <a:endParaRPr b="0" lang="en-IN" sz="2800" strike="noStrike" u="none">
+            <a:endParaRPr b="0" lang="en-IN" sz="1400" strike="noStrike" u="none">
               <a:solidFill>
                 <a:srgbClr val="000000"/>
               </a:solidFill>
@@ -9224,7 +5402,7 @@
               <a:buChar char=""/>
             </a:pPr>
             <a:r>
-              <a:rPr b="0" lang="en-IN" sz="2800" strike="noStrike" u="none">
+              <a:rPr b="0" lang="en-IN" sz="2000" strike="noStrike" u="none">
                 <a:solidFill>
                   <a:srgbClr val="000000"/>
                 </a:solidFill>
@@ -9233,7 +5411,7 @@
               </a:rPr>
               <a:t>Fifth Outline Level</a:t>
             </a:r>
-            <a:endParaRPr b="0" lang="en-IN" sz="2800" strike="noStrike" u="none">
+            <a:endParaRPr b="0" lang="en-IN" sz="2000" strike="noStrike" u="none">
               <a:solidFill>
                 <a:srgbClr val="000000"/>
               </a:solidFill>
@@ -9254,7 +5432,7 @@
               <a:buChar char=""/>
             </a:pPr>
             <a:r>
-              <a:rPr b="0" lang="en-IN" sz="2800" strike="noStrike" u="none">
+              <a:rPr b="0" lang="en-IN" sz="2000" strike="noStrike" u="none">
                 <a:solidFill>
                   <a:srgbClr val="000000"/>
                 </a:solidFill>
@@ -9263,7 +5441,7 @@
               </a:rPr>
               <a:t>Sixth Outline Level</a:t>
             </a:r>
-            <a:endParaRPr b="0" lang="en-IN" sz="2800" strike="noStrike" u="none">
+            <a:endParaRPr b="0" lang="en-IN" sz="2000" strike="noStrike" u="none">
               <a:solidFill>
                 <a:srgbClr val="000000"/>
               </a:solidFill>
@@ -9284,7 +5462,7 @@
               <a:buChar char=""/>
             </a:pPr>
             <a:r>
-              <a:rPr b="0" lang="en-IN" sz="2800" strike="noStrike" u="none">
+              <a:rPr b="0" lang="en-IN" sz="2000" strike="noStrike" u="none">
                 <a:solidFill>
                   <a:srgbClr val="000000"/>
                 </a:solidFill>
@@ -9293,7 +5471,7 @@
               </a:rPr>
               <a:t>Seventh Outline Level</a:t>
             </a:r>
-            <a:endParaRPr b="0" lang="en-IN" sz="2800" strike="noStrike" u="none">
+            <a:endParaRPr b="0" lang="en-IN" sz="2000" strike="noStrike" u="none">
               <a:solidFill>
                 <a:srgbClr val="000000"/>
               </a:solidFill>
@@ -9305,7 +5483,7 @@
       </p:sp>
       <p:sp>
         <p:nvSpPr>
-          <p:cNvPr id="45" name="PlaceHolder 4"/>
+          <p:cNvPr id="41" name="PlaceHolder 4"/>
           <p:cNvSpPr>
             <a:spLocks noGrp="1"/>
           </p:cNvSpPr>
@@ -9368,7 +5546,7 @@
       </p:sp>
       <p:sp>
         <p:nvSpPr>
-          <p:cNvPr id="46" name="PlaceHolder 5"/>
+          <p:cNvPr id="42" name="PlaceHolder 5"/>
           <p:cNvSpPr>
             <a:spLocks noGrp="1"/>
           </p:cNvSpPr>
@@ -9431,7 +5609,7 @@
       </p:sp>
       <p:sp>
         <p:nvSpPr>
-          <p:cNvPr id="47" name="PlaceHolder 6"/>
+          <p:cNvPr id="43" name="PlaceHolder 6"/>
           <p:cNvSpPr>
             <a:spLocks noGrp="1"/>
           </p:cNvSpPr>
@@ -9485,7 +5663,7 @@
                 <a:tab algn="l" pos="0"/>
               </a:tabLst>
             </a:pPr>
-            <a:fld id="{CCD20573-1B3E-4E17-8ADD-2C6CFE84F954}" type="slidenum">
+            <a:fld id="{ED75EFC6-5BB1-4033-8E24-31DE4AF9756C}" type="slidenum">
               <a:rPr b="0" lang="en-IN" sz="1200" strike="noStrike" u="none">
                 <a:solidFill>
                   <a:srgbClr val="888888"/>
@@ -9508,10 +5686,8 @@
       </p:sp>
     </p:spTree>
   </p:cSld>
-  <p:clrMap bg1="lt1" tx1="dk1" bg2="dk2" tx2="lt2" accent1="accent1" accent2="accent2" accent3="accent3" accent4="accent4" accent5="accent5" accent6="accent6" hlink="hlink" folHlink="folHlink"/>
-  <p:sldLayoutIdLst>
-    <p:sldLayoutId id="2147483664" r:id="rId3"/>
-  </p:sldLayoutIdLst>
+  <p:clrMap bg1="lt1" tx1="dk1" bg2="lt2" tx2="dk2" accent1="accent1" accent2="accent2" accent3="accent3" accent4="accent4" accent5="accent5" accent6="accent6" hlink="hlink" folHlink="folHlink"/>
+  <p:sldLayoutIdLst/>
 </p:sldMaster>
 </file>
 
@@ -9541,7 +5717,7 @@
       </p:grpSpPr>
       <p:pic>
         <p:nvPicPr>
-          <p:cNvPr id="51" name="Google Shape;15;p12" descr=""/>
+          <p:cNvPr id="44" name="Google Shape;15;p12" descr=""/>
           <p:cNvPicPr/>
           <p:nvPr/>
         </p:nvPicPr>
@@ -9564,7 +5740,7 @@
       </p:pic>
       <p:sp>
         <p:nvSpPr>
-          <p:cNvPr id="52" name="PlaceHolder 1"/>
+          <p:cNvPr id="45" name="PlaceHolder 1"/>
           <p:cNvSpPr>
             <a:spLocks noGrp="1"/>
           </p:cNvSpPr>
@@ -9586,15 +5762,15 @@
           </a:ln>
         </p:spPr>
         <p:txBody>
-          <a:bodyPr lIns="91440" rIns="91440" tIns="45720" bIns="45720" anchor="ctr">
-            <a:normAutofit/>
+          <a:bodyPr lIns="0" rIns="0" tIns="0" bIns="0" anchor="ctr">
+            <a:noAutofit/>
           </a:bodyPr>
           <a:p>
             <a:pPr indent="0">
               <a:buNone/>
             </a:pPr>
             <a:r>
-              <a:rPr b="0" lang="en-IN" sz="4400" strike="noStrike" u="none">
+              <a:rPr b="0" lang="en-IN" sz="1400" strike="noStrike" u="none">
                 <a:solidFill>
                   <a:srgbClr val="000000"/>
                 </a:solidFill>
@@ -9603,7 +5779,7 @@
               </a:rPr>
               <a:t>Click to edit the title text format</a:t>
             </a:r>
-            <a:endParaRPr b="0" lang="en-IN" sz="4400" strike="noStrike" u="none">
+            <a:endParaRPr b="0" lang="en-IN" sz="1400" strike="noStrike" u="none">
               <a:solidFill>
                 <a:srgbClr val="000000"/>
               </a:solidFill>
@@ -9615,7 +5791,7 @@
       </p:sp>
       <p:sp>
         <p:nvSpPr>
-          <p:cNvPr id="53" name="PlaceHolder 2"/>
+          <p:cNvPr id="46" name="PlaceHolder 2"/>
           <p:cNvSpPr>
             <a:spLocks noGrp="1"/>
           </p:cNvSpPr>
@@ -9637,8 +5813,8 @@
           </a:ln>
         </p:spPr>
         <p:txBody>
-          <a:bodyPr lIns="91440" rIns="91440" tIns="45720" bIns="45720" anchor="b">
-            <a:normAutofit fontScale="25000" lnSpcReduction="19999"/>
+          <a:bodyPr lIns="0" rIns="0" tIns="0" bIns="0" anchor="t">
+            <a:normAutofit fontScale="32500" lnSpcReduction="19999"/>
           </a:bodyPr>
           <a:p>
             <a:pPr marL="432000" indent="-324000">
@@ -9653,7 +5829,7 @@
               <a:buChar char=""/>
             </a:pPr>
             <a:r>
-              <a:rPr b="0" lang="en-IN" sz="2400" strike="noStrike" u="none">
+              <a:rPr b="0" lang="en-IN" sz="1400" strike="noStrike" u="none">
                 <a:solidFill>
                   <a:srgbClr val="000000"/>
                 </a:solidFill>
@@ -9662,7 +5838,7 @@
               </a:rPr>
               <a:t>Click to edit the outline text format</a:t>
             </a:r>
-            <a:endParaRPr b="0" lang="en-IN" sz="2400" strike="noStrike" u="none">
+            <a:endParaRPr b="0" lang="en-IN" sz="1400" strike="noStrike" u="none">
               <a:solidFill>
                 <a:srgbClr val="000000"/>
               </a:solidFill>
@@ -9683,7 +5859,7 @@
               <a:buChar char=""/>
             </a:pPr>
             <a:r>
-              <a:rPr b="0" lang="en-IN" sz="2400" strike="noStrike" u="none">
+              <a:rPr b="0" lang="en-IN" sz="1400" strike="noStrike" u="none">
                 <a:solidFill>
                   <a:srgbClr val="000000"/>
                 </a:solidFill>
@@ -9692,7 +5868,7 @@
               </a:rPr>
               <a:t>Second Outline Level</a:t>
             </a:r>
-            <a:endParaRPr b="0" lang="en-IN" sz="2400" strike="noStrike" u="none">
+            <a:endParaRPr b="0" lang="en-IN" sz="1400" strike="noStrike" u="none">
               <a:solidFill>
                 <a:srgbClr val="000000"/>
               </a:solidFill>
@@ -9713,7 +5889,7 @@
               <a:buChar char=""/>
             </a:pPr>
             <a:r>
-              <a:rPr b="0" lang="en-IN" sz="2400" strike="noStrike" u="none">
+              <a:rPr b="0" lang="en-IN" sz="1400" strike="noStrike" u="none">
                 <a:solidFill>
                   <a:srgbClr val="000000"/>
                 </a:solidFill>
@@ -9722,7 +5898,7 @@
               </a:rPr>
               <a:t>Third Outline Level</a:t>
             </a:r>
-            <a:endParaRPr b="0" lang="en-IN" sz="2400" strike="noStrike" u="none">
+            <a:endParaRPr b="0" lang="en-IN" sz="1400" strike="noStrike" u="none">
               <a:solidFill>
                 <a:srgbClr val="000000"/>
               </a:solidFill>
@@ -9743,7 +5919,7 @@
               <a:buChar char=""/>
             </a:pPr>
             <a:r>
-              <a:rPr b="0" lang="en-IN" sz="2400" strike="noStrike" u="none">
+              <a:rPr b="0" lang="en-IN" sz="1400" strike="noStrike" u="none">
                 <a:solidFill>
                   <a:srgbClr val="000000"/>
                 </a:solidFill>
@@ -9752,7 +5928,7 @@
               </a:rPr>
               <a:t>Fourth Outline Level</a:t>
             </a:r>
-            <a:endParaRPr b="0" lang="en-IN" sz="2400" strike="noStrike" u="none">
+            <a:endParaRPr b="0" lang="en-IN" sz="1400" strike="noStrike" u="none">
               <a:solidFill>
                 <a:srgbClr val="000000"/>
               </a:solidFill>
@@ -9773,7 +5949,7 @@
               <a:buChar char=""/>
             </a:pPr>
             <a:r>
-              <a:rPr b="0" lang="en-IN" sz="2400" strike="noStrike" u="none">
+              <a:rPr b="0" lang="en-IN" sz="2000" strike="noStrike" u="none">
                 <a:solidFill>
                   <a:srgbClr val="000000"/>
                 </a:solidFill>
@@ -9782,7 +5958,7 @@
               </a:rPr>
               <a:t>Fifth Outline Level</a:t>
             </a:r>
-            <a:endParaRPr b="0" lang="en-IN" sz="2400" strike="noStrike" u="none">
+            <a:endParaRPr b="0" lang="en-IN" sz="2000" strike="noStrike" u="none">
               <a:solidFill>
                 <a:srgbClr val="000000"/>
               </a:solidFill>
@@ -9803,7 +5979,7 @@
               <a:buChar char=""/>
             </a:pPr>
             <a:r>
-              <a:rPr b="0" lang="en-IN" sz="2400" strike="noStrike" u="none">
+              <a:rPr b="0" lang="en-IN" sz="2000" strike="noStrike" u="none">
                 <a:solidFill>
                   <a:srgbClr val="000000"/>
                 </a:solidFill>
@@ -9812,7 +5988,7 @@
               </a:rPr>
               <a:t>Sixth Outline Level</a:t>
             </a:r>
-            <a:endParaRPr b="0" lang="en-IN" sz="2400" strike="noStrike" u="none">
+            <a:endParaRPr b="0" lang="en-IN" sz="2000" strike="noStrike" u="none">
               <a:solidFill>
                 <a:srgbClr val="000000"/>
               </a:solidFill>
@@ -9833,7 +6009,7 @@
               <a:buChar char=""/>
             </a:pPr>
             <a:r>
-              <a:rPr b="0" lang="en-IN" sz="2400" strike="noStrike" u="none">
+              <a:rPr b="0" lang="en-IN" sz="2000" strike="noStrike" u="none">
                 <a:solidFill>
                   <a:srgbClr val="000000"/>
                 </a:solidFill>
@@ -9842,7 +6018,7 @@
               </a:rPr>
               <a:t>Seventh Outline Level</a:t>
             </a:r>
-            <a:endParaRPr b="0" lang="en-IN" sz="2400" strike="noStrike" u="none">
+            <a:endParaRPr b="0" lang="en-IN" sz="2000" strike="noStrike" u="none">
               <a:solidFill>
                 <a:srgbClr val="000000"/>
               </a:solidFill>
@@ -9854,7 +6030,7 @@
       </p:sp>
       <p:sp>
         <p:nvSpPr>
-          <p:cNvPr id="54" name="PlaceHolder 3"/>
+          <p:cNvPr id="47" name="PlaceHolder 3"/>
           <p:cNvSpPr>
             <a:spLocks noGrp="1"/>
           </p:cNvSpPr>
@@ -9876,8 +6052,8 @@
           </a:ln>
         </p:spPr>
         <p:txBody>
-          <a:bodyPr lIns="91440" rIns="91440" tIns="45720" bIns="45720" anchor="t">
-            <a:normAutofit fontScale="92500" lnSpcReduction="19999"/>
+          <a:bodyPr lIns="0" rIns="0" tIns="0" bIns="0" anchor="t">
+            <a:normAutofit/>
           </a:bodyPr>
           <a:p>
             <a:pPr marL="432000" indent="-324000">
@@ -9892,7 +6068,7 @@
               <a:buChar char=""/>
             </a:pPr>
             <a:r>
-              <a:rPr b="0" lang="en-IN" sz="2800" strike="noStrike" u="none">
+              <a:rPr b="0" lang="en-IN" sz="1400" strike="noStrike" u="none">
                 <a:solidFill>
                   <a:srgbClr val="000000"/>
                 </a:solidFill>
@@ -9901,7 +6077,7 @@
               </a:rPr>
               <a:t>Click to edit the outline text format</a:t>
             </a:r>
-            <a:endParaRPr b="0" lang="en-IN" sz="2800" strike="noStrike" u="none">
+            <a:endParaRPr b="0" lang="en-IN" sz="1400" strike="noStrike" u="none">
               <a:solidFill>
                 <a:srgbClr val="000000"/>
               </a:solidFill>
@@ -9922,7 +6098,7 @@
               <a:buChar char=""/>
             </a:pPr>
             <a:r>
-              <a:rPr b="0" lang="en-IN" sz="2800" strike="noStrike" u="none">
+              <a:rPr b="0" lang="en-IN" sz="1400" strike="noStrike" u="none">
                 <a:solidFill>
                   <a:srgbClr val="000000"/>
                 </a:solidFill>
@@ -9931,7 +6107,7 @@
               </a:rPr>
               <a:t>Second Outline Level</a:t>
             </a:r>
-            <a:endParaRPr b="0" lang="en-IN" sz="2800" strike="noStrike" u="none">
+            <a:endParaRPr b="0" lang="en-IN" sz="1400" strike="noStrike" u="none">
               <a:solidFill>
                 <a:srgbClr val="000000"/>
               </a:solidFill>
@@ -9952,7 +6128,7 @@
               <a:buChar char=""/>
             </a:pPr>
             <a:r>
-              <a:rPr b="0" lang="en-IN" sz="2800" strike="noStrike" u="none">
+              <a:rPr b="0" lang="en-IN" sz="1400" strike="noStrike" u="none">
                 <a:solidFill>
                   <a:srgbClr val="000000"/>
                 </a:solidFill>
@@ -9961,7 +6137,7 @@
               </a:rPr>
               <a:t>Third Outline Level</a:t>
             </a:r>
-            <a:endParaRPr b="0" lang="en-IN" sz="2800" strike="noStrike" u="none">
+            <a:endParaRPr b="0" lang="en-IN" sz="1400" strike="noStrike" u="none">
               <a:solidFill>
                 <a:srgbClr val="000000"/>
               </a:solidFill>
@@ -9982,7 +6158,7 @@
               <a:buChar char=""/>
             </a:pPr>
             <a:r>
-              <a:rPr b="0" lang="en-IN" sz="2800" strike="noStrike" u="none">
+              <a:rPr b="0" lang="en-IN" sz="1400" strike="noStrike" u="none">
                 <a:solidFill>
                   <a:srgbClr val="000000"/>
                 </a:solidFill>
@@ -9991,7 +6167,7 @@
               </a:rPr>
               <a:t>Fourth Outline Level</a:t>
             </a:r>
-            <a:endParaRPr b="0" lang="en-IN" sz="2800" strike="noStrike" u="none">
+            <a:endParaRPr b="0" lang="en-IN" sz="1400" strike="noStrike" u="none">
               <a:solidFill>
                 <a:srgbClr val="000000"/>
               </a:solidFill>
@@ -10012,7 +6188,7 @@
               <a:buChar char=""/>
             </a:pPr>
             <a:r>
-              <a:rPr b="0" lang="en-IN" sz="2800" strike="noStrike" u="none">
+              <a:rPr b="0" lang="en-IN" sz="2000" strike="noStrike" u="none">
                 <a:solidFill>
                   <a:srgbClr val="000000"/>
                 </a:solidFill>
@@ -10021,7 +6197,7 @@
               </a:rPr>
               <a:t>Fifth Outline Level</a:t>
             </a:r>
-            <a:endParaRPr b="0" lang="en-IN" sz="2800" strike="noStrike" u="none">
+            <a:endParaRPr b="0" lang="en-IN" sz="2000" strike="noStrike" u="none">
               <a:solidFill>
                 <a:srgbClr val="000000"/>
               </a:solidFill>
@@ -10042,7 +6218,7 @@
               <a:buChar char=""/>
             </a:pPr>
             <a:r>
-              <a:rPr b="0" lang="en-IN" sz="2800" strike="noStrike" u="none">
+              <a:rPr b="0" lang="en-IN" sz="2000" strike="noStrike" u="none">
                 <a:solidFill>
                   <a:srgbClr val="000000"/>
                 </a:solidFill>
@@ -10051,7 +6227,7 @@
               </a:rPr>
               <a:t>Sixth Outline Level</a:t>
             </a:r>
-            <a:endParaRPr b="0" lang="en-IN" sz="2800" strike="noStrike" u="none">
+            <a:endParaRPr b="0" lang="en-IN" sz="2000" strike="noStrike" u="none">
               <a:solidFill>
                 <a:srgbClr val="000000"/>
               </a:solidFill>
@@ -10072,7 +6248,7 @@
               <a:buChar char=""/>
             </a:pPr>
             <a:r>
-              <a:rPr b="0" lang="en-IN" sz="2800" strike="noStrike" u="none">
+              <a:rPr b="0" lang="en-IN" sz="2000" strike="noStrike" u="none">
                 <a:solidFill>
                   <a:srgbClr val="000000"/>
                 </a:solidFill>
@@ -10081,7 +6257,7 @@
               </a:rPr>
               <a:t>Seventh Outline Level</a:t>
             </a:r>
-            <a:endParaRPr b="0" lang="en-IN" sz="2800" strike="noStrike" u="none">
+            <a:endParaRPr b="0" lang="en-IN" sz="2000" strike="noStrike" u="none">
               <a:solidFill>
                 <a:srgbClr val="000000"/>
               </a:solidFill>
@@ -10093,7 +6269,7 @@
       </p:sp>
       <p:sp>
         <p:nvSpPr>
-          <p:cNvPr id="55" name="PlaceHolder 4"/>
+          <p:cNvPr id="48" name="PlaceHolder 4"/>
           <p:cNvSpPr>
             <a:spLocks noGrp="1"/>
           </p:cNvSpPr>
@@ -10115,8 +6291,8 @@
           </a:ln>
         </p:spPr>
         <p:txBody>
-          <a:bodyPr lIns="91440" rIns="91440" tIns="45720" bIns="45720" anchor="b">
-            <a:normAutofit fontScale="25000" lnSpcReduction="19999"/>
+          <a:bodyPr lIns="0" rIns="0" tIns="0" bIns="0" anchor="t">
+            <a:normAutofit fontScale="32500" lnSpcReduction="19999"/>
           </a:bodyPr>
           <a:p>
             <a:pPr marL="432000" indent="-324000">
@@ -10131,7 +6307,7 @@
               <a:buChar char=""/>
             </a:pPr>
             <a:r>
-              <a:rPr b="0" lang="en-IN" sz="2400" strike="noStrike" u="none">
+              <a:rPr b="0" lang="en-IN" sz="1400" strike="noStrike" u="none">
                 <a:solidFill>
                   <a:srgbClr val="000000"/>
                 </a:solidFill>
@@ -10140,7 +6316,7 @@
               </a:rPr>
               <a:t>Click to edit the outline text format</a:t>
             </a:r>
-            <a:endParaRPr b="0" lang="en-IN" sz="2400" strike="noStrike" u="none">
+            <a:endParaRPr b="0" lang="en-IN" sz="1400" strike="noStrike" u="none">
               <a:solidFill>
                 <a:srgbClr val="000000"/>
               </a:solidFill>
@@ -10161,7 +6337,7 @@
               <a:buChar char=""/>
             </a:pPr>
             <a:r>
-              <a:rPr b="0" lang="en-IN" sz="2400" strike="noStrike" u="none">
+              <a:rPr b="0" lang="en-IN" sz="1400" strike="noStrike" u="none">
                 <a:solidFill>
                   <a:srgbClr val="000000"/>
                 </a:solidFill>
@@ -10170,7 +6346,7 @@
               </a:rPr>
               <a:t>Second Outline Level</a:t>
             </a:r>
-            <a:endParaRPr b="0" lang="en-IN" sz="2400" strike="noStrike" u="none">
+            <a:endParaRPr b="0" lang="en-IN" sz="1400" strike="noStrike" u="none">
               <a:solidFill>
                 <a:srgbClr val="000000"/>
               </a:solidFill>
@@ -10191,7 +6367,7 @@
               <a:buChar char=""/>
             </a:pPr>
             <a:r>
-              <a:rPr b="0" lang="en-IN" sz="2400" strike="noStrike" u="none">
+              <a:rPr b="0" lang="en-IN" sz="1400" strike="noStrike" u="none">
                 <a:solidFill>
                   <a:srgbClr val="000000"/>
                 </a:solidFill>
@@ -10200,7 +6376,7 @@
               </a:rPr>
               <a:t>Third Outline Level</a:t>
             </a:r>
-            <a:endParaRPr b="0" lang="en-IN" sz="2400" strike="noStrike" u="none">
+            <a:endParaRPr b="0" lang="en-IN" sz="1400" strike="noStrike" u="none">
               <a:solidFill>
                 <a:srgbClr val="000000"/>
               </a:solidFill>
@@ -10221,7 +6397,7 @@
               <a:buChar char=""/>
             </a:pPr>
             <a:r>
-              <a:rPr b="0" lang="en-IN" sz="2400" strike="noStrike" u="none">
+              <a:rPr b="0" lang="en-IN" sz="1400" strike="noStrike" u="none">
                 <a:solidFill>
                   <a:srgbClr val="000000"/>
                 </a:solidFill>
@@ -10230,7 +6406,7 @@
               </a:rPr>
               <a:t>Fourth Outline Level</a:t>
             </a:r>
-            <a:endParaRPr b="0" lang="en-IN" sz="2400" strike="noStrike" u="none">
+            <a:endParaRPr b="0" lang="en-IN" sz="1400" strike="noStrike" u="none">
               <a:solidFill>
                 <a:srgbClr val="000000"/>
               </a:solidFill>
@@ -10251,7 +6427,7 @@
               <a:buChar char=""/>
             </a:pPr>
             <a:r>
-              <a:rPr b="0" lang="en-IN" sz="2400" strike="noStrike" u="none">
+              <a:rPr b="0" lang="en-IN" sz="2000" strike="noStrike" u="none">
                 <a:solidFill>
                   <a:srgbClr val="000000"/>
                 </a:solidFill>
@@ -10260,7 +6436,7 @@
               </a:rPr>
               <a:t>Fifth Outline Level</a:t>
             </a:r>
-            <a:endParaRPr b="0" lang="en-IN" sz="2400" strike="noStrike" u="none">
+            <a:endParaRPr b="0" lang="en-IN" sz="2000" strike="noStrike" u="none">
               <a:solidFill>
                 <a:srgbClr val="000000"/>
               </a:solidFill>
@@ -10281,7 +6457,7 @@
               <a:buChar char=""/>
             </a:pPr>
             <a:r>
-              <a:rPr b="0" lang="en-IN" sz="2400" strike="noStrike" u="none">
+              <a:rPr b="0" lang="en-IN" sz="2000" strike="noStrike" u="none">
                 <a:solidFill>
                   <a:srgbClr val="000000"/>
                 </a:solidFill>
@@ -10290,7 +6466,7 @@
               </a:rPr>
               <a:t>Sixth Outline Level</a:t>
             </a:r>
-            <a:endParaRPr b="0" lang="en-IN" sz="2400" strike="noStrike" u="none">
+            <a:endParaRPr b="0" lang="en-IN" sz="2000" strike="noStrike" u="none">
               <a:solidFill>
                 <a:srgbClr val="000000"/>
               </a:solidFill>
@@ -10311,7 +6487,7 @@
               <a:buChar char=""/>
             </a:pPr>
             <a:r>
-              <a:rPr b="0" lang="en-IN" sz="2400" strike="noStrike" u="none">
+              <a:rPr b="0" lang="en-IN" sz="2000" strike="noStrike" u="none">
                 <a:solidFill>
                   <a:srgbClr val="000000"/>
                 </a:solidFill>
@@ -10320,7 +6496,7 @@
               </a:rPr>
               <a:t>Seventh Outline Level</a:t>
             </a:r>
-            <a:endParaRPr b="0" lang="en-IN" sz="2400" strike="noStrike" u="none">
+            <a:endParaRPr b="0" lang="en-IN" sz="2000" strike="noStrike" u="none">
               <a:solidFill>
                 <a:srgbClr val="000000"/>
               </a:solidFill>
@@ -10332,7 +6508,7 @@
       </p:sp>
       <p:sp>
         <p:nvSpPr>
-          <p:cNvPr id="56" name="PlaceHolder 5"/>
+          <p:cNvPr id="49" name="PlaceHolder 5"/>
           <p:cNvSpPr>
             <a:spLocks noGrp="1"/>
           </p:cNvSpPr>
@@ -10354,8 +6530,8 @@
           </a:ln>
         </p:spPr>
         <p:txBody>
-          <a:bodyPr lIns="91440" rIns="91440" tIns="45720" bIns="45720" anchor="t">
-            <a:normAutofit fontScale="92500" lnSpcReduction="19999"/>
+          <a:bodyPr lIns="0" rIns="0" tIns="0" bIns="0" anchor="t">
+            <a:normAutofit/>
           </a:bodyPr>
           <a:p>
             <a:pPr marL="432000" indent="-324000">
@@ -10370,7 +6546,7 @@
               <a:buChar char=""/>
             </a:pPr>
             <a:r>
-              <a:rPr b="0" lang="en-IN" sz="2800" strike="noStrike" u="none">
+              <a:rPr b="0" lang="en-IN" sz="1400" strike="noStrike" u="none">
                 <a:solidFill>
                   <a:srgbClr val="000000"/>
                 </a:solidFill>
@@ -10379,7 +6555,7 @@
               </a:rPr>
               <a:t>Click to edit the outline text format</a:t>
             </a:r>
-            <a:endParaRPr b="0" lang="en-IN" sz="2800" strike="noStrike" u="none">
+            <a:endParaRPr b="0" lang="en-IN" sz="1400" strike="noStrike" u="none">
               <a:solidFill>
                 <a:srgbClr val="000000"/>
               </a:solidFill>
@@ -10400,7 +6576,7 @@
               <a:buChar char=""/>
             </a:pPr>
             <a:r>
-              <a:rPr b="0" lang="en-IN" sz="2800" strike="noStrike" u="none">
+              <a:rPr b="0" lang="en-IN" sz="1400" strike="noStrike" u="none">
                 <a:solidFill>
                   <a:srgbClr val="000000"/>
                 </a:solidFill>
@@ -10409,7 +6585,7 @@
               </a:rPr>
               <a:t>Second Outline Level</a:t>
             </a:r>
-            <a:endParaRPr b="0" lang="en-IN" sz="2800" strike="noStrike" u="none">
+            <a:endParaRPr b="0" lang="en-IN" sz="1400" strike="noStrike" u="none">
               <a:solidFill>
                 <a:srgbClr val="000000"/>
               </a:solidFill>
@@ -10430,7 +6606,7 @@
               <a:buChar char=""/>
             </a:pPr>
             <a:r>
-              <a:rPr b="0" lang="en-IN" sz="2800" strike="noStrike" u="none">
+              <a:rPr b="0" lang="en-IN" sz="1400" strike="noStrike" u="none">
                 <a:solidFill>
                   <a:srgbClr val="000000"/>
                 </a:solidFill>
@@ -10439,7 +6615,7 @@
               </a:rPr>
               <a:t>Third Outline Level</a:t>
             </a:r>
-            <a:endParaRPr b="0" lang="en-IN" sz="2800" strike="noStrike" u="none">
+            <a:endParaRPr b="0" lang="en-IN" sz="1400" strike="noStrike" u="none">
               <a:solidFill>
                 <a:srgbClr val="000000"/>
               </a:solidFill>
@@ -10460,7 +6636,7 @@
               <a:buChar char=""/>
             </a:pPr>
             <a:r>
-              <a:rPr b="0" lang="en-IN" sz="2800" strike="noStrike" u="none">
+              <a:rPr b="0" lang="en-IN" sz="1400" strike="noStrike" u="none">
                 <a:solidFill>
                   <a:srgbClr val="000000"/>
                 </a:solidFill>
@@ -10469,7 +6645,7 @@
               </a:rPr>
               <a:t>Fourth Outline Level</a:t>
             </a:r>
-            <a:endParaRPr b="0" lang="en-IN" sz="2800" strike="noStrike" u="none">
+            <a:endParaRPr b="0" lang="en-IN" sz="1400" strike="noStrike" u="none">
               <a:solidFill>
                 <a:srgbClr val="000000"/>
               </a:solidFill>
@@ -10490,7 +6666,7 @@
               <a:buChar char=""/>
             </a:pPr>
             <a:r>
-              <a:rPr b="0" lang="en-IN" sz="2800" strike="noStrike" u="none">
+              <a:rPr b="0" lang="en-IN" sz="2000" strike="noStrike" u="none">
                 <a:solidFill>
                   <a:srgbClr val="000000"/>
                 </a:solidFill>
@@ -10499,7 +6675,7 @@
               </a:rPr>
               <a:t>Fifth Outline Level</a:t>
             </a:r>
-            <a:endParaRPr b="0" lang="en-IN" sz="2800" strike="noStrike" u="none">
+            <a:endParaRPr b="0" lang="en-IN" sz="2000" strike="noStrike" u="none">
               <a:solidFill>
                 <a:srgbClr val="000000"/>
               </a:solidFill>
@@ -10520,7 +6696,7 @@
               <a:buChar char=""/>
             </a:pPr>
             <a:r>
-              <a:rPr b="0" lang="en-IN" sz="2800" strike="noStrike" u="none">
+              <a:rPr b="0" lang="en-IN" sz="2000" strike="noStrike" u="none">
                 <a:solidFill>
                   <a:srgbClr val="000000"/>
                 </a:solidFill>
@@ -10529,7 +6705,7 @@
               </a:rPr>
               <a:t>Sixth Outline Level</a:t>
             </a:r>
-            <a:endParaRPr b="0" lang="en-IN" sz="2800" strike="noStrike" u="none">
+            <a:endParaRPr b="0" lang="en-IN" sz="2000" strike="noStrike" u="none">
               <a:solidFill>
                 <a:srgbClr val="000000"/>
               </a:solidFill>
@@ -10550,7 +6726,7 @@
               <a:buChar char=""/>
             </a:pPr>
             <a:r>
-              <a:rPr b="0" lang="en-IN" sz="2800" strike="noStrike" u="none">
+              <a:rPr b="0" lang="en-IN" sz="2000" strike="noStrike" u="none">
                 <a:solidFill>
                   <a:srgbClr val="000000"/>
                 </a:solidFill>
@@ -10559,7 +6735,7 @@
               </a:rPr>
               <a:t>Seventh Outline Level</a:t>
             </a:r>
-            <a:endParaRPr b="0" lang="en-IN" sz="2800" strike="noStrike" u="none">
+            <a:endParaRPr b="0" lang="en-IN" sz="2000" strike="noStrike" u="none">
               <a:solidFill>
                 <a:srgbClr val="000000"/>
               </a:solidFill>
@@ -10571,7 +6747,7 @@
       </p:sp>
       <p:sp>
         <p:nvSpPr>
-          <p:cNvPr id="57" name="PlaceHolder 6"/>
+          <p:cNvPr id="50" name="PlaceHolder 6"/>
           <p:cNvSpPr>
             <a:spLocks noGrp="1"/>
           </p:cNvSpPr>
@@ -10634,7 +6810,7 @@
       </p:sp>
       <p:sp>
         <p:nvSpPr>
-          <p:cNvPr id="58" name="PlaceHolder 7"/>
+          <p:cNvPr id="51" name="PlaceHolder 7"/>
           <p:cNvSpPr>
             <a:spLocks noGrp="1"/>
           </p:cNvSpPr>
@@ -10697,7 +6873,7 @@
       </p:sp>
       <p:sp>
         <p:nvSpPr>
-          <p:cNvPr id="59" name="PlaceHolder 8"/>
+          <p:cNvPr id="52" name="PlaceHolder 8"/>
           <p:cNvSpPr>
             <a:spLocks noGrp="1"/>
           </p:cNvSpPr>
@@ -10751,7 +6927,7 @@
                 <a:tab algn="l" pos="0"/>
               </a:tabLst>
             </a:pPr>
-            <a:fld id="{5EA68BFE-E552-49BD-83E0-AE4AA3BDA6FA}" type="slidenum">
+            <a:fld id="{704B9724-2BFE-4B29-AABB-C525D60BEE4D}" type="slidenum">
               <a:rPr b="0" lang="en-IN" sz="1200" strike="noStrike" u="none">
                 <a:solidFill>
                   <a:srgbClr val="888888"/>
@@ -10774,10 +6950,8 @@
       </p:sp>
     </p:spTree>
   </p:cSld>
-  <p:clrMap bg1="lt1" tx1="dk1" bg2="dk2" tx2="lt2" accent1="accent1" accent2="accent2" accent3="accent3" accent4="accent4" accent5="accent5" accent6="accent6" hlink="hlink" folHlink="folHlink"/>
-  <p:sldLayoutIdLst>
-    <p:sldLayoutId id="2147483666" r:id="rId3"/>
-  </p:sldLayoutIdLst>
+  <p:clrMap bg1="lt1" tx1="dk1" bg2="lt2" tx2="dk2" accent1="accent1" accent2="accent2" accent3="accent3" accent4="accent4" accent5="accent5" accent6="accent6" hlink="hlink" folHlink="folHlink"/>
+  <p:sldLayoutIdLst/>
 </p:sldMaster>
 </file>
 
@@ -10807,7 +6981,7 @@
       </p:grpSpPr>
       <p:pic>
         <p:nvPicPr>
-          <p:cNvPr id="60" name="Google Shape;15;p12" descr=""/>
+          <p:cNvPr id="53" name="Google Shape;15;p12" descr=""/>
           <p:cNvPicPr/>
           <p:nvPr/>
         </p:nvPicPr>
@@ -10830,7 +7004,7 @@
       </p:pic>
       <p:sp>
         <p:nvSpPr>
-          <p:cNvPr id="61" name="PlaceHolder 1"/>
+          <p:cNvPr id="54" name="PlaceHolder 1"/>
           <p:cNvSpPr>
             <a:spLocks noGrp="1"/>
           </p:cNvSpPr>
@@ -10852,15 +7026,15 @@
           </a:ln>
         </p:spPr>
         <p:txBody>
-          <a:bodyPr lIns="91440" rIns="91440" tIns="45720" bIns="45720" anchor="ctr">
-            <a:normAutofit/>
+          <a:bodyPr lIns="0" rIns="0" tIns="0" bIns="0" anchor="ctr">
+            <a:noAutofit/>
           </a:bodyPr>
           <a:p>
             <a:pPr indent="0">
               <a:buNone/>
             </a:pPr>
             <a:r>
-              <a:rPr b="0" lang="en-IN" sz="4400" strike="noStrike" u="none">
+              <a:rPr b="0" lang="en-IN" sz="1400" strike="noStrike" u="none">
                 <a:solidFill>
                   <a:srgbClr val="000000"/>
                 </a:solidFill>
@@ -10869,7 +7043,7 @@
               </a:rPr>
               <a:t>Click to edit the title text format</a:t>
             </a:r>
-            <a:endParaRPr b="0" lang="en-IN" sz="4400" strike="noStrike" u="none">
+            <a:endParaRPr b="0" lang="en-IN" sz="1400" strike="noStrike" u="none">
               <a:solidFill>
                 <a:srgbClr val="000000"/>
               </a:solidFill>
@@ -10881,7 +7055,7 @@
       </p:sp>
       <p:sp>
         <p:nvSpPr>
-          <p:cNvPr id="62" name="PlaceHolder 2"/>
+          <p:cNvPr id="55" name="PlaceHolder 2"/>
           <p:cNvSpPr>
             <a:spLocks noGrp="1"/>
           </p:cNvSpPr>
@@ -10944,7 +7118,7 @@
       </p:sp>
       <p:sp>
         <p:nvSpPr>
-          <p:cNvPr id="63" name="PlaceHolder 3"/>
+          <p:cNvPr id="56" name="PlaceHolder 3"/>
           <p:cNvSpPr>
             <a:spLocks noGrp="1"/>
           </p:cNvSpPr>
@@ -11007,7 +7181,7 @@
       </p:sp>
       <p:sp>
         <p:nvSpPr>
-          <p:cNvPr id="64" name="PlaceHolder 4"/>
+          <p:cNvPr id="57" name="PlaceHolder 4"/>
           <p:cNvSpPr>
             <a:spLocks noGrp="1"/>
           </p:cNvSpPr>
@@ -11061,7 +7235,7 @@
                 <a:tab algn="l" pos="0"/>
               </a:tabLst>
             </a:pPr>
-            <a:fld id="{9D007E6F-1672-465F-A555-41340877D24A}" type="slidenum">
+            <a:fld id="{B1FDB9AD-86A0-404B-AF95-6447AC5FCBE1}" type="slidenum">
               <a:rPr b="0" lang="en-IN" sz="1200" strike="noStrike" u="none">
                 <a:solidFill>
                   <a:srgbClr val="888888"/>
@@ -11084,10 +7258,8 @@
       </p:sp>
     </p:spTree>
   </p:cSld>
-  <p:clrMap bg1="lt1" tx1="dk1" bg2="dk2" tx2="lt2" accent1="accent1" accent2="accent2" accent3="accent3" accent4="accent4" accent5="accent5" accent6="accent6" hlink="hlink" folHlink="folHlink"/>
-  <p:sldLayoutIdLst>
-    <p:sldLayoutId id="2147483668" r:id="rId3"/>
-  </p:sldLayoutIdLst>
+  <p:clrMap bg1="lt1" tx1="dk1" bg2="lt2" tx2="dk2" accent1="accent1" accent2="accent2" accent3="accent3" accent4="accent4" accent5="accent5" accent6="accent6" hlink="hlink" folHlink="folHlink"/>
+  <p:sldLayoutIdLst/>
 </p:sldMaster>
 </file>
 
@@ -11110,7 +7282,7 @@
       </p:grpSpPr>
       <p:sp>
         <p:nvSpPr>
-          <p:cNvPr id="80" name="PlaceHolder 1"/>
+          <p:cNvPr id="72" name="PlaceHolder 1"/>
           <p:cNvSpPr>
             <a:spLocks noGrp="1"/>
           </p:cNvSpPr>
@@ -11168,7 +7340,7 @@
       </p:sp>
       <p:sp>
         <p:nvSpPr>
-          <p:cNvPr id="81" name="PlaceHolder 2"/>
+          <p:cNvPr id="73" name="PlaceHolder 2"/>
           <p:cNvSpPr>
             <a:spLocks noGrp="1"/>
           </p:cNvSpPr>
@@ -11230,7 +7402,7 @@
       </p:sp>
       <p:sp>
         <p:nvSpPr>
-          <p:cNvPr id="82" name="Google Shape;91;p1"/>
+          <p:cNvPr id="74" name="Google Shape;91;p1"/>
           <p:cNvSpPr/>
           <p:nvPr/>
         </p:nvSpPr>
@@ -11286,14 +7458,14 @@
       </p:sp>
       <p:sp>
         <p:nvSpPr>
-          <p:cNvPr id="83" name="Google Shape;92;p1"/>
+          <p:cNvPr id="75" name="Google Shape;92;p1"/>
           <p:cNvSpPr/>
           <p:nvPr/>
         </p:nvSpPr>
         <p:spPr>
           <a:xfrm>
             <a:off x="151560" y="6390720"/>
-            <a:ext cx="9615960" cy="456840"/>
+            <a:ext cx="9615960" cy="457560"/>
           </a:xfrm>
           <a:prstGeom prst="rect">
             <a:avLst/>
@@ -11362,7 +7534,7 @@
       </p:sp>
       <p:pic>
         <p:nvPicPr>
-          <p:cNvPr id="84" name="Google Shape;93;p1" descr=""/>
+          <p:cNvPr id="76" name="Google Shape;93;p1" descr=""/>
           <p:cNvPicPr/>
           <p:nvPr/>
         </p:nvPicPr>
@@ -11415,7 +7587,7 @@
       </p:grpSpPr>
       <p:sp>
         <p:nvSpPr>
-          <p:cNvPr id="123" name="PlaceHolder 1"/>
+          <p:cNvPr id="120" name="PlaceHolder 1"/>
           <p:cNvSpPr>
             <a:spLocks noGrp="1"/>
           </p:cNvSpPr>
@@ -11473,7 +7645,7 @@
       </p:sp>
       <p:sp>
         <p:nvSpPr>
-          <p:cNvPr id="124" name="PlaceHolder 2"/>
+          <p:cNvPr id="121" name="PlaceHolder 2"/>
           <p:cNvSpPr>
             <a:spLocks noGrp="1"/>
           </p:cNvSpPr>
@@ -11711,7 +7883,7 @@
       </p:sp>
       <p:pic>
         <p:nvPicPr>
-          <p:cNvPr id="125" name="Google Shape;160;p7" descr=""/>
+          <p:cNvPr id="122" name="Google Shape;160;p7" descr=""/>
           <p:cNvPicPr/>
           <p:nvPr/>
         </p:nvPicPr>
@@ -11764,7 +7936,7 @@
       </p:grpSpPr>
       <p:sp>
         <p:nvSpPr>
-          <p:cNvPr id="126" name="PlaceHolder 1"/>
+          <p:cNvPr id="123" name="PlaceHolder 1"/>
           <p:cNvSpPr>
             <a:spLocks noGrp="1"/>
           </p:cNvSpPr>
@@ -11822,7 +7994,7 @@
       </p:sp>
       <p:sp>
         <p:nvSpPr>
-          <p:cNvPr id="127" name="PlaceHolder 2"/>
+          <p:cNvPr id="124" name="PlaceHolder 2"/>
           <p:cNvSpPr>
             <a:spLocks noGrp="1"/>
           </p:cNvSpPr>
@@ -12013,7 +8185,7 @@
       </p:sp>
       <p:pic>
         <p:nvPicPr>
-          <p:cNvPr id="128" name="Google Shape;167;p8" descr=""/>
+          <p:cNvPr id="125" name="Google Shape;167;p8" descr=""/>
           <p:cNvPicPr/>
           <p:nvPr/>
         </p:nvPicPr>
@@ -12066,7 +8238,7 @@
       </p:grpSpPr>
       <p:sp>
         <p:nvSpPr>
-          <p:cNvPr id="129" name="PlaceHolder 1"/>
+          <p:cNvPr id="126" name="PlaceHolder 1"/>
           <p:cNvSpPr>
             <a:spLocks noGrp="1"/>
           </p:cNvSpPr>
@@ -12124,7 +8296,7 @@
       </p:sp>
       <p:sp>
         <p:nvSpPr>
-          <p:cNvPr id="130" name="PlaceHolder 2"/>
+          <p:cNvPr id="127" name="PlaceHolder 2"/>
           <p:cNvSpPr>
             <a:spLocks noGrp="1"/>
           </p:cNvSpPr>
@@ -12345,7 +8517,7 @@
       </p:grpSpPr>
       <p:sp>
         <p:nvSpPr>
-          <p:cNvPr id="131" name="PlaceHolder 1"/>
+          <p:cNvPr id="128" name="PlaceHolder 1"/>
           <p:cNvSpPr>
             <a:spLocks noGrp="1"/>
           </p:cNvSpPr>
@@ -12403,7 +8575,7 @@
       </p:sp>
       <p:sp>
         <p:nvSpPr>
-          <p:cNvPr id="132" name="PlaceHolder 2"/>
+          <p:cNvPr id="129" name="PlaceHolder 2"/>
           <p:cNvSpPr>
             <a:spLocks noGrp="1"/>
           </p:cNvSpPr>
@@ -12533,7 +8705,7 @@
       </p:sp>
       <p:pic>
         <p:nvPicPr>
-          <p:cNvPr id="133" name="Google Shape;180;p10" descr=""/>
+          <p:cNvPr id="130" name="Google Shape;180;p10" descr=""/>
           <p:cNvPicPr/>
           <p:nvPr/>
         </p:nvPicPr>
@@ -12586,7 +8758,7 @@
       </p:grpSpPr>
       <p:sp>
         <p:nvSpPr>
-          <p:cNvPr id="134" name="PlaceHolder 1"/>
+          <p:cNvPr id="131" name="PlaceHolder 1"/>
           <p:cNvSpPr>
             <a:spLocks noGrp="1"/>
           </p:cNvSpPr>
@@ -12640,7 +8812,7 @@
                 <a:tab algn="l" pos="0"/>
               </a:tabLst>
             </a:pPr>
-            <a:fld id="{E9555790-612C-4295-9CE8-B0A66573FBA4}" type="slidenum">
+            <a:fld id="{532739B3-C160-4366-8F1B-69B65F4498EF}" type="slidenum">
               <a:rPr b="0" lang="en-IN" sz="1200" strike="noStrike" u="none">
                 <a:solidFill>
                   <a:srgbClr val="888888"/>
@@ -12663,7 +8835,7 @@
       </p:sp>
       <p:pic>
         <p:nvPicPr>
-          <p:cNvPr id="135" name="Google Shape;186;p11" descr="Image"/>
+          <p:cNvPr id="132" name="Google Shape;186;p11" descr="Image"/>
           <p:cNvPicPr/>
           <p:nvPr/>
         </p:nvPicPr>
@@ -12686,7 +8858,7 @@
       </p:pic>
       <p:pic>
         <p:nvPicPr>
-          <p:cNvPr id="136" name="Google Shape;187;p11" descr="Image"/>
+          <p:cNvPr id="133" name="Google Shape;187;p11" descr="Image"/>
           <p:cNvPicPr/>
           <p:nvPr/>
         </p:nvPicPr>
@@ -12709,7 +8881,7 @@
       </p:pic>
       <p:pic>
         <p:nvPicPr>
-          <p:cNvPr id="137" name="Google Shape;188;p11" descr="iit delhi logo.png"/>
+          <p:cNvPr id="134" name="Google Shape;188;p11" descr="iit delhi logo.png"/>
           <p:cNvPicPr/>
           <p:nvPr/>
         </p:nvPicPr>
@@ -12732,7 +8904,7 @@
       </p:pic>
       <p:sp>
         <p:nvSpPr>
-          <p:cNvPr id="138" name="Google Shape;189;p11"/>
+          <p:cNvPr id="135" name="Google Shape;189;p11"/>
           <p:cNvSpPr/>
           <p:nvPr/>
         </p:nvSpPr>
@@ -12791,13 +8963,13 @@
       </p:sp>
       <p:graphicFrame>
         <p:nvGraphicFramePr>
-          <p:cNvPr id="139" name="Google Shape;190;p11"/>
+          <p:cNvPr id="136" name="Google Shape;190;p11"/>
           <p:cNvGraphicFramePr/>
           <p:nvPr/>
         </p:nvGraphicFramePr>
         <p:xfrm>
           <a:off x="659520" y="1799280"/>
-          <a:ext cx="10863360" cy="4062600"/>
+          <a:ext cx="10863000" cy="4061160"/>
         </p:xfrm>
         <a:graphic>
           <a:graphicData uri="http://schemas.openxmlformats.org/drawingml/2006/table">
@@ -15139,7 +11311,7 @@
       </p:grpSpPr>
       <p:sp>
         <p:nvSpPr>
-          <p:cNvPr id="85" name="PlaceHolder 1"/>
+          <p:cNvPr id="77" name="PlaceHolder 1"/>
           <p:cNvSpPr>
             <a:spLocks noGrp="1"/>
           </p:cNvSpPr>
@@ -15194,7 +11366,7 @@
       </p:sp>
       <p:sp>
         <p:nvSpPr>
-          <p:cNvPr id="86" name="PlaceHolder 2"/>
+          <p:cNvPr id="78" name="PlaceHolder 2"/>
           <p:cNvSpPr>
             <a:spLocks noGrp="1"/>
           </p:cNvSpPr>
@@ -15418,7 +11590,7 @@
       </p:grpSpPr>
       <p:sp>
         <p:nvSpPr>
-          <p:cNvPr id="87" name="PlaceHolder 1"/>
+          <p:cNvPr id="79" name="PlaceHolder 1"/>
           <p:cNvSpPr>
             <a:spLocks noGrp="1"/>
           </p:cNvSpPr>
@@ -15476,7 +11648,7 @@
       </p:sp>
       <p:sp>
         <p:nvSpPr>
-          <p:cNvPr id="88" name="PlaceHolder 2"/>
+          <p:cNvPr id="80" name="PlaceHolder 2"/>
           <p:cNvSpPr>
             <a:spLocks noGrp="1"/>
           </p:cNvSpPr>
@@ -15850,7 +12022,7 @@
       </p:sp>
       <p:pic>
         <p:nvPicPr>
-          <p:cNvPr id="89" name="Google Shape;100;p2" descr=""/>
+          <p:cNvPr id="81" name="Google Shape;100;p2" descr=""/>
           <p:cNvPicPr/>
           <p:nvPr/>
         </p:nvPicPr>
@@ -15890,7 +12062,7 @@
     <p:bg>
       <p:bgPr>
         <a:solidFill>
-          <a:schemeClr val="lt1"/>
+          <a:srgbClr val="ffffff"/>
         </a:solidFill>
       </p:bgPr>
     </p:bg>
@@ -15910,7 +12082,7 @@
       </p:grpSpPr>
       <p:sp useBgFill="1">
         <p:nvSpPr>
-          <p:cNvPr id="90" name="Rectangle 126">
+          <p:cNvPr id="82" name="Rectangle 126">
             <a:extLst>
               <a:ext uri="{C183D7F6-B498-43B3-948B-1728B52AA6E4}">
                 <adec:decorative xmlns:adec="http://schemas.microsoft.com/office/drawing/2017/decorative" val="1"/>
@@ -15928,22 +12100,14 @@
           <a:prstGeom prst="rect">
             <a:avLst/>
           </a:prstGeom>
-          <a:ln w="12700">
+          <a:ln w="12600">
             <a:noFill/>
           </a:ln>
         </p:spPr>
         <p:style>
-          <a:lnRef idx="2">
-            <a:schemeClr val="accent1">
-              <a:shade val="50000"/>
-            </a:schemeClr>
-          </a:lnRef>
-          <a:fillRef idx="1">
-            <a:schemeClr val="accent1"/>
-          </a:fillRef>
-          <a:effectRef idx="0">
-            <a:schemeClr val="accent1"/>
-          </a:effectRef>
+          <a:lnRef idx="0"/>
+          <a:fillRef idx="0"/>
+          <a:effectRef idx="0"/>
           <a:fontRef idx="minor"/>
         </p:style>
         <p:txBody>
@@ -15951,11 +12115,6 @@
             <a:noAutofit/>
           </a:bodyPr>
           <a:p>
-            <a:pPr algn="ctr">
-              <a:lnSpc>
-                <a:spcPct val="100000"/>
-              </a:lnSpc>
-            </a:pPr>
             <a:endParaRPr b="0" lang="en-US" sz="1400" strike="noStrike" u="none">
               <a:solidFill>
                 <a:schemeClr val="lt1"/>
@@ -15969,7 +12128,7 @@
       </p:sp>
       <p:sp>
         <p:nvSpPr>
-          <p:cNvPr id="91" name="Rectangle 128">
+          <p:cNvPr id="83" name="Rectangle 128">
             <a:extLst>
               <a:ext uri="{C183D7F6-B498-43B3-948B-1728B52AA6E4}">
                 <adec:decorative xmlns:adec="http://schemas.microsoft.com/office/drawing/2017/decorative" val="1"/>
@@ -15981,7 +12140,7 @@
         </p:nvSpPr>
         <p:spPr>
           <a:xfrm flipH="1" rot="5400000">
-            <a:off x="-1410840" y="1410480"/>
+            <a:off x="-1411560" y="1410480"/>
             <a:ext cx="6857640" cy="4037400"/>
           </a:xfrm>
           <a:prstGeom prst="rect">
@@ -15998,22 +12157,14 @@
             </a:gsLst>
             <a:lin ang="13200000"/>
           </a:gradFill>
-          <a:ln>
+          <a:ln w="25560">
             <a:noFill/>
           </a:ln>
         </p:spPr>
         <p:style>
-          <a:lnRef idx="2">
-            <a:schemeClr val="accent1">
-              <a:shade val="50000"/>
-            </a:schemeClr>
-          </a:lnRef>
-          <a:fillRef idx="1">
-            <a:schemeClr val="accent1"/>
-          </a:fillRef>
-          <a:effectRef idx="0">
-            <a:schemeClr val="accent1"/>
-          </a:effectRef>
+          <a:lnRef idx="0"/>
+          <a:fillRef idx="0"/>
+          <a:effectRef idx="0"/>
           <a:fontRef idx="minor"/>
         </p:style>
         <p:txBody>
@@ -16021,11 +12172,6 @@
             <a:noAutofit/>
           </a:bodyPr>
           <a:p>
-            <a:pPr algn="ctr">
-              <a:lnSpc>
-                <a:spcPct val="100000"/>
-              </a:lnSpc>
-            </a:pPr>
             <a:endParaRPr b="0" lang="en-US" sz="1400" strike="noStrike" u="none">
               <a:solidFill>
                 <a:schemeClr val="lt1"/>
@@ -16039,7 +12185,7 @@
       </p:sp>
       <p:sp>
         <p:nvSpPr>
-          <p:cNvPr id="92" name="Rectangle 130">
+          <p:cNvPr id="84" name="Rectangle 130">
             <a:extLst>
               <a:ext uri="{C183D7F6-B498-43B3-948B-1728B52AA6E4}">
                 <adec:decorative xmlns:adec="http://schemas.microsoft.com/office/drawing/2017/decorative" val="1"/>
@@ -16051,7 +12197,7 @@
         </p:nvSpPr>
         <p:spPr>
           <a:xfrm flipH="1" rot="5400000">
-            <a:off x="-1410840" y="1420560"/>
+            <a:off x="-1411560" y="1420560"/>
             <a:ext cx="6857640" cy="4037400"/>
           </a:xfrm>
           <a:prstGeom prst="rect">
@@ -16072,22 +12218,14 @@
             </a:gsLst>
             <a:lin ang="14400000"/>
           </a:gradFill>
-          <a:ln>
+          <a:ln w="25560">
             <a:noFill/>
           </a:ln>
         </p:spPr>
         <p:style>
-          <a:lnRef idx="2">
-            <a:schemeClr val="accent1">
-              <a:shade val="50000"/>
-            </a:schemeClr>
-          </a:lnRef>
-          <a:fillRef idx="1">
-            <a:schemeClr val="accent1"/>
-          </a:fillRef>
-          <a:effectRef idx="0">
-            <a:schemeClr val="accent1"/>
-          </a:effectRef>
+          <a:lnRef idx="0"/>
+          <a:fillRef idx="0"/>
+          <a:effectRef idx="0"/>
           <a:fontRef idx="minor"/>
         </p:style>
         <p:txBody>
@@ -16095,11 +12233,6 @@
             <a:noAutofit/>
           </a:bodyPr>
           <a:p>
-            <a:pPr algn="ctr">
-              <a:lnSpc>
-                <a:spcPct val="100000"/>
-              </a:lnSpc>
-            </a:pPr>
             <a:endParaRPr b="0" lang="en-US" sz="1400" strike="noStrike" u="none">
               <a:solidFill>
                 <a:schemeClr val="lt1"/>
@@ -16113,7 +12246,7 @@
       </p:sp>
       <p:sp>
         <p:nvSpPr>
-          <p:cNvPr id="93" name="Rectangle 132">
+          <p:cNvPr id="85" name="Rectangle 132">
             <a:extLst>
               <a:ext uri="{C183D7F6-B498-43B3-948B-1728B52AA6E4}">
                 <adec:decorative xmlns:adec="http://schemas.microsoft.com/office/drawing/2017/decorative" val="1"/>
@@ -16125,7 +12258,7 @@
         </p:nvSpPr>
         <p:spPr>
           <a:xfrm flipH="1" rot="5400000">
-            <a:off x="766800" y="3588480"/>
+            <a:off x="766080" y="3588480"/>
             <a:ext cx="2501640" cy="4037400"/>
           </a:xfrm>
           <a:prstGeom prst="rect">
@@ -16146,22 +12279,14 @@
             </a:gsLst>
             <a:lin ang="8400000"/>
           </a:gradFill>
-          <a:ln>
+          <a:ln w="25560">
             <a:noFill/>
           </a:ln>
         </p:spPr>
         <p:style>
-          <a:lnRef idx="2">
-            <a:schemeClr val="accent1">
-              <a:shade val="50000"/>
-            </a:schemeClr>
-          </a:lnRef>
-          <a:fillRef idx="1">
-            <a:schemeClr val="accent1"/>
-          </a:fillRef>
-          <a:effectRef idx="0">
-            <a:schemeClr val="accent1"/>
-          </a:effectRef>
+          <a:lnRef idx="0"/>
+          <a:fillRef idx="0"/>
+          <a:effectRef idx="0"/>
           <a:fontRef idx="minor"/>
         </p:style>
         <p:txBody>
@@ -16169,11 +12294,6 @@
             <a:noAutofit/>
           </a:bodyPr>
           <a:p>
-            <a:pPr algn="ctr">
-              <a:lnSpc>
-                <a:spcPct val="100000"/>
-              </a:lnSpc>
-            </a:pPr>
             <a:endParaRPr b="0" lang="en-US" sz="1400" strike="noStrike" u="none">
               <a:solidFill>
                 <a:schemeClr val="lt1"/>
@@ -16187,7 +12307,7 @@
       </p:sp>
       <p:sp>
         <p:nvSpPr>
-          <p:cNvPr id="94" name="Freeform: Shape 134">
+          <p:cNvPr id="86" name="Freeform: Shape 134">
             <a:extLst>
               <a:ext uri="{C183D7F6-B498-43B3-948B-1728B52AA6E4}">
                 <adec:decorative xmlns:adec="http://schemas.microsoft.com/office/drawing/2017/decorative" val="1"/>
@@ -16270,22 +12390,14 @@
             </a:gsLst>
             <a:lin ang="834000"/>
           </a:gradFill>
-          <a:ln>
+          <a:ln w="25560">
             <a:noFill/>
           </a:ln>
         </p:spPr>
         <p:style>
-          <a:lnRef idx="2">
-            <a:schemeClr val="accent1">
-              <a:shade val="50000"/>
-            </a:schemeClr>
-          </a:lnRef>
-          <a:fillRef idx="1">
-            <a:schemeClr val="accent1"/>
-          </a:fillRef>
-          <a:effectRef idx="0">
-            <a:schemeClr val="accent1"/>
-          </a:effectRef>
+          <a:lnRef idx="0"/>
+          <a:fillRef idx="0"/>
+          <a:effectRef idx="0"/>
           <a:fontRef idx="minor"/>
         </p:style>
         <p:txBody>
@@ -16293,11 +12405,6 @@
             <a:noAutofit/>
           </a:bodyPr>
           <a:p>
-            <a:pPr algn="ctr">
-              <a:lnSpc>
-                <a:spcPct val="100000"/>
-              </a:lnSpc>
-            </a:pPr>
             <a:endParaRPr b="0" lang="en-US" sz="1400" strike="noStrike" u="none">
               <a:solidFill>
                 <a:schemeClr val="lt1"/>
@@ -16311,7 +12418,7 @@
       </p:sp>
       <p:sp>
         <p:nvSpPr>
-          <p:cNvPr id="95" name="Rectangle 136">
+          <p:cNvPr id="87" name="Rectangle 136">
             <a:extLst>
               <a:ext uri="{C183D7F6-B498-43B3-948B-1728B52AA6E4}">
                 <adec:decorative xmlns:adec="http://schemas.microsoft.com/office/drawing/2017/decorative" val="1"/>
@@ -16323,7 +12430,7 @@
         </p:nvSpPr>
         <p:spPr>
           <a:xfrm flipH="1" rot="5400000">
-            <a:off x="-1410840" y="1410480"/>
+            <a:off x="-1488600" y="1410120"/>
             <a:ext cx="6857640" cy="4037400"/>
           </a:xfrm>
           <a:prstGeom prst="rect">
@@ -16344,22 +12451,14 @@
             </a:gsLst>
             <a:lin ang="9000000"/>
           </a:gradFill>
-          <a:ln>
+          <a:ln w="25560">
             <a:noFill/>
           </a:ln>
         </p:spPr>
         <p:style>
-          <a:lnRef idx="2">
-            <a:schemeClr val="accent1">
-              <a:shade val="50000"/>
-            </a:schemeClr>
-          </a:lnRef>
-          <a:fillRef idx="1">
-            <a:schemeClr val="accent1"/>
-          </a:fillRef>
-          <a:effectRef idx="0">
-            <a:schemeClr val="accent1"/>
-          </a:effectRef>
+          <a:lnRef idx="0"/>
+          <a:fillRef idx="0"/>
+          <a:effectRef idx="0"/>
           <a:fontRef idx="minor"/>
         </p:style>
         <p:txBody>
@@ -16367,11 +12466,6 @@
             <a:noAutofit/>
           </a:bodyPr>
           <a:p>
-            <a:pPr algn="ctr">
-              <a:lnSpc>
-                <a:spcPct val="100000"/>
-              </a:lnSpc>
-            </a:pPr>
             <a:endParaRPr b="0" lang="en-US" sz="1400" strike="noStrike" u="none">
               <a:solidFill>
                 <a:schemeClr val="lt1"/>
@@ -16385,7 +12479,7 @@
       </p:sp>
       <p:sp>
         <p:nvSpPr>
-          <p:cNvPr id="96" name="PlaceHolder 1"/>
+          <p:cNvPr id="88" name="PlaceHolder 1"/>
           <p:cNvSpPr>
             <a:spLocks noGrp="1"/>
           </p:cNvSpPr>
@@ -16395,7 +12489,7 @@
         </p:nvSpPr>
         <p:spPr>
           <a:xfrm>
-            <a:off x="586440" y="1683720"/>
+            <a:off x="586440" y="1692720"/>
             <a:ext cx="3115080" cy="2396160"/>
           </a:xfrm>
           <a:prstGeom prst="rect">
@@ -16408,17 +12502,23 @@
         </p:spPr>
         <p:txBody>
           <a:bodyPr lIns="91440" rIns="91440" tIns="45720" bIns="45720" anchor="b">
-            <a:normAutofit/>
+            <a:normAutofit fontScale="25000" lnSpcReduction="19999"/>
           </a:bodyPr>
           <a:p>
-            <a:pPr indent="0" algn="r">
+            <a:pPr indent="0">
               <a:lnSpc>
                 <a:spcPct val="90000"/>
               </a:lnSpc>
+              <a:spcBef>
+                <a:spcPts val="1191"/>
+              </a:spcBef>
+              <a:spcAft>
+                <a:spcPts val="992"/>
+              </a:spcAft>
               <a:buNone/>
             </a:pPr>
             <a:r>
-              <a:rPr b="1" lang="en-IN" sz="3100" strike="noStrike" u="none">
+              <a:rPr b="1" lang="en-IN" sz="6600" strike="noStrike" u="none">
                 <a:solidFill>
                   <a:srgbClr val="ffffff"/>
                 </a:solidFill>
@@ -16426,9 +12526,35 @@
                 <a:latin typeface="Calibri"/>
                 <a:ea typeface="Calibri"/>
               </a:rPr>
-              <a:t>Novelty of this technology over other available options in the market</a:t>
-            </a:r>
-            <a:endParaRPr b="0" lang="en-IN" sz="3100" strike="noStrike" u="none">
+              <a:t>SLM-first and source-grounded: Lighter, lower-cost, and more reliable than generic LLM-only tools, with future offline deployment potential.</a:t>
+            </a:r>
+            <a:br>
+              <a:rPr sz="6600"/>
+            </a:br>
+            <a:br>
+              <a:rPr sz="6600"/>
+            </a:br>
+            <a:br>
+              <a:rPr sz="6600"/>
+            </a:br>
+            <a:r>
+              <a:rPr b="1" lang="en-IN" sz="6600" strike="noStrike" u="none">
+                <a:solidFill>
+                  <a:srgbClr val="ffffff"/>
+                </a:solidFill>
+                <a:uFillTx/>
+                <a:latin typeface="Calibri"/>
+                <a:ea typeface="Calibri"/>
+              </a:rPr>
+              <a:t>Feedback-driven intelligence: Learns from validated farmer feedback to deliver more personalized advice and actionable field insights over time.</a:t>
+            </a:r>
+            <a:br>
+              <a:rPr sz="1000"/>
+            </a:br>
+            <a:br>
+              <a:rPr sz="1000"/>
+            </a:br>
+            <a:endParaRPr b="0" lang="en-IN" sz="6600" strike="noStrike" u="none">
               <a:solidFill>
                 <a:srgbClr val="000000"/>
               </a:solidFill>
@@ -16440,7 +12566,7 @@
       </p:sp>
       <p:pic>
         <p:nvPicPr>
-          <p:cNvPr id="97" name="Google Shape;121;p3" descr=""/>
+          <p:cNvPr id="89" name="Google Shape;121;p3" descr=""/>
           <p:cNvPicPr/>
           <p:nvPr/>
         </p:nvPicPr>
@@ -16461,37 +12587,313 @@
           </a:ln>
         </p:spPr>
       </p:pic>
-      <p:graphicFrame>
-        <p:nvGraphicFramePr>
-          <p:cNvPr id="1" name="Diagram1"/>
-          <p:cNvGraphicFramePr/>
-          <p:nvPr>
-            <p:extLst>
-              <p:ext uri="{D42A27DB-BD31-4B8C-83A1-F6EECF244321}">
-                <p14:modId xmlns:p14="http://schemas.microsoft.com/office/powerpoint/2010/main" val="1448799301"/>
-              </p:ext>
-            </p:extLst>
-          </p:nvPr>
-        </p:nvGraphicFramePr>
-        <p:xfrm>
-          <a:off x="4905000" y="750600"/>
-          <a:ext cx="6666480" cy="5453640"/>
-        </p:xfrm>
-        <a:graphic>
-          <a:graphicData uri="http://schemas.openxmlformats.org/drawingml/2006/diagram">
-            <dgm:relIds xmlns:dgm="http://schemas.openxmlformats.org/drawingml/2006/diagram" xmlns:r="http://schemas.openxmlformats.org/officeDocument/2006/relationships" r:dm="rId2" r:lo="rId3" r:qs="rId4" r:cs="rId5"/>
-          </a:graphicData>
-        </a:graphic>
-      </p:graphicFrame>
+      <p:grpSp>
+        <p:nvGrpSpPr>
+          <p:cNvPr id="90" name="Google Shape;120;p3"/>
+          <p:cNvGrpSpPr/>
+          <p:nvPr/>
+        </p:nvGrpSpPr>
+        <p:grpSpPr>
+          <a:xfrm>
+            <a:off x="4905000" y="750600"/>
+            <a:ext cx="6666480" cy="5453640"/>
+            <a:chOff x="4905000" y="750600"/>
+            <a:chExt cx="6666480" cy="5453640"/>
+          </a:xfrm>
+        </p:grpSpPr>
+        <p:sp>
+          <p:nvSpPr>
+            <p:cNvPr id="91" name=""/>
+            <p:cNvSpPr/>
+            <p:nvPr/>
+          </p:nvSpPr>
+          <p:spPr>
+            <a:xfrm>
+              <a:off x="4905000" y="750600"/>
+              <a:ext cx="6666480" cy="5453640"/>
+            </a:xfrm>
+            <a:prstGeom prst="rect">
+              <a:avLst/>
+            </a:prstGeom>
+            <a:noFill/>
+            <a:ln w="0">
+              <a:noFill/>
+            </a:ln>
+          </p:spPr>
+          <p:style>
+            <a:lnRef idx="0"/>
+            <a:fillRef idx="0"/>
+            <a:effectRef idx="0"/>
+            <a:fontRef idx="minor"/>
+          </p:style>
+          <p:txBody>
+            <a:bodyPr lIns="90000" rIns="90000" tIns="45000" bIns="45000" anchor="t">
+              <a:noAutofit/>
+            </a:bodyPr>
+            <a:p>
+              <a:endParaRPr b="0" lang="en-IN" sz="1800" strike="noStrike" u="none">
+                <a:solidFill>
+                  <a:srgbClr val="000000"/>
+                </a:solidFill>
+                <a:uFillTx/>
+                <a:latin typeface="Arial"/>
+              </a:endParaRPr>
+            </a:p>
+          </p:txBody>
+        </p:sp>
+        <p:sp>
+          <p:nvSpPr>
+            <p:cNvPr id="92" name=""/>
+            <p:cNvSpPr/>
+            <p:nvPr/>
+          </p:nvSpPr>
+          <p:spPr>
+            <a:xfrm>
+              <a:off x="4905000" y="754560"/>
+              <a:ext cx="6666480" cy="1751400"/>
+            </a:xfrm>
+            <a:prstGeom prst="roundRect">
+              <a:avLst>
+                <a:gd name="adj" fmla="val 16667"/>
+              </a:avLst>
+            </a:prstGeom>
+            <a:gradFill rotWithShape="0">
+              <a:gsLst>
+                <a:gs pos="0">
+                  <a:srgbClr val="499be6"/>
+                </a:gs>
+                <a:gs pos="100000">
+                  <a:srgbClr val="b0d0ff"/>
+                </a:gs>
+              </a:gsLst>
+              <a:lin ang="16200000"/>
+            </a:gradFill>
+            <a:ln w="0">
+              <a:noFill/>
+            </a:ln>
+            <a:effectLst>
+              <a:outerShdw dist="23040" dir="5400000" blurRad="39960" rotWithShape="0">
+                <a:srgbClr val="000000">
+                  <a:alpha val="35000"/>
+                </a:srgbClr>
+              </a:outerShdw>
+            </a:effectLst>
+          </p:spPr>
+          <p:style>
+            <a:lnRef idx="0"/>
+            <a:fillRef idx="0"/>
+            <a:effectRef idx="0"/>
+            <a:fontRef idx="minor"/>
+          </p:style>
+          <p:txBody>
+            <a:bodyPr numCol="1" spcCol="1440" lIns="125640" rIns="125640" tIns="125640" bIns="125640" anchor="ctr">
+              <a:noAutofit/>
+            </a:bodyPr>
+            <a:p>
+              <a:pPr defTabSz="1467000">
+                <a:lnSpc>
+                  <a:spcPct val="90000"/>
+                </a:lnSpc>
+                <a:spcAft>
+                  <a:spcPts val="1154"/>
+                </a:spcAft>
+                <a:tabLst>
+                  <a:tab algn="l" pos="0"/>
+                </a:tabLst>
+              </a:pPr>
+              <a:r>
+                <a:rPr b="0" lang="en-IN" sz="3300" strike="noStrike" u="none">
+                  <a:solidFill>
+                    <a:schemeClr val="lt1"/>
+                  </a:solidFill>
+                  <a:uFillTx/>
+                  <a:latin typeface="Arial"/>
+                  <a:ea typeface="Arial"/>
+                </a:rPr>
+                <a:t>Details of technology/prototype with Video</a:t>
+              </a:r>
+              <a:endParaRPr b="0" lang="en-IN" sz="3300" strike="noStrike" u="none">
+                <a:solidFill>
+                  <a:srgbClr val="000000"/>
+                </a:solidFill>
+                <a:uFillTx/>
+                <a:latin typeface="Arial"/>
+              </a:endParaRPr>
+            </a:p>
+          </p:txBody>
+        </p:sp>
+        <p:sp>
+          <p:nvSpPr>
+            <p:cNvPr id="93" name=""/>
+            <p:cNvSpPr/>
+            <p:nvPr/>
+          </p:nvSpPr>
+          <p:spPr>
+            <a:xfrm>
+              <a:off x="4905000" y="2601360"/>
+              <a:ext cx="6666480" cy="1751400"/>
+            </a:xfrm>
+            <a:prstGeom prst="roundRect">
+              <a:avLst>
+                <a:gd name="adj" fmla="val 16667"/>
+              </a:avLst>
+            </a:prstGeom>
+            <a:gradFill rotWithShape="0">
+              <a:gsLst>
+                <a:gs pos="0">
+                  <a:srgbClr val="3ad68d"/>
+                </a:gs>
+                <a:gs pos="100000">
+                  <a:srgbClr val="a6ffcc"/>
+                </a:gs>
+              </a:gsLst>
+              <a:lin ang="16200000"/>
+            </a:gradFill>
+            <a:ln w="0">
+              <a:noFill/>
+            </a:ln>
+            <a:effectLst>
+              <a:outerShdw dist="23040" dir="5400000" blurRad="39960" rotWithShape="0">
+                <a:srgbClr val="000000">
+                  <a:alpha val="35000"/>
+                </a:srgbClr>
+              </a:outerShdw>
+            </a:effectLst>
+          </p:spPr>
+          <p:style>
+            <a:lnRef idx="0"/>
+            <a:fillRef idx="0"/>
+            <a:effectRef idx="0"/>
+            <a:fontRef idx="minor"/>
+          </p:style>
+          <p:txBody>
+            <a:bodyPr numCol="1" spcCol="1440" lIns="125640" rIns="125640" tIns="125640" bIns="125640" anchor="ctr">
+              <a:noAutofit/>
+            </a:bodyPr>
+            <a:p>
+              <a:pPr defTabSz="1467000">
+                <a:lnSpc>
+                  <a:spcPct val="90000"/>
+                </a:lnSpc>
+                <a:spcAft>
+                  <a:spcPts val="1154"/>
+                </a:spcAft>
+                <a:tabLst>
+                  <a:tab algn="l" pos="0"/>
+                </a:tabLst>
+              </a:pPr>
+              <a:r>
+                <a:rPr b="0" lang="en-IN" sz="3300" strike="noStrike" u="none">
+                  <a:solidFill>
+                    <a:schemeClr val="lt1"/>
+                  </a:solidFill>
+                  <a:uFillTx/>
+                  <a:latin typeface="Arial"/>
+                  <a:ea typeface="Arial"/>
+                </a:rPr>
+                <a:t>Comparison with existing such technologies/patents/prototypes</a:t>
+              </a:r>
+              <a:endParaRPr b="0" lang="en-IN" sz="3300" strike="noStrike" u="none">
+                <a:solidFill>
+                  <a:srgbClr val="000000"/>
+                </a:solidFill>
+                <a:uFillTx/>
+                <a:latin typeface="Arial"/>
+              </a:endParaRPr>
+            </a:p>
+          </p:txBody>
+        </p:sp>
+        <p:sp>
+          <p:nvSpPr>
+            <p:cNvPr id="94" name=""/>
+            <p:cNvSpPr/>
+            <p:nvPr/>
+          </p:nvSpPr>
+          <p:spPr>
+            <a:xfrm>
+              <a:off x="4905000" y="4448520"/>
+              <a:ext cx="6666480" cy="1751400"/>
+            </a:xfrm>
+            <a:prstGeom prst="roundRect">
+              <a:avLst>
+                <a:gd name="adj" fmla="val 16667"/>
+              </a:avLst>
+            </a:prstGeom>
+            <a:gradFill rotWithShape="0">
+              <a:gsLst>
+                <a:gs pos="0">
+                  <a:srgbClr val="6cbb38"/>
+                </a:gs>
+                <a:gs pos="100000">
+                  <a:srgbClr val="bafd9e"/>
+                </a:gs>
+              </a:gsLst>
+              <a:lin ang="16200000"/>
+            </a:gradFill>
+            <a:ln w="0">
+              <a:noFill/>
+            </a:ln>
+            <a:effectLst>
+              <a:outerShdw dist="23040" dir="5400000" blurRad="39960" rotWithShape="0">
+                <a:srgbClr val="000000">
+                  <a:alpha val="35000"/>
+                </a:srgbClr>
+              </a:outerShdw>
+            </a:effectLst>
+          </p:spPr>
+          <p:style>
+            <a:lnRef idx="0"/>
+            <a:fillRef idx="0"/>
+            <a:effectRef idx="0"/>
+            <a:fontRef idx="minor"/>
+          </p:style>
+          <p:txBody>
+            <a:bodyPr numCol="1" spcCol="1440" lIns="125640" rIns="125640" tIns="125640" bIns="125640" anchor="ctr">
+              <a:noAutofit/>
+            </a:bodyPr>
+            <a:p>
+              <a:pPr defTabSz="1467000">
+                <a:lnSpc>
+                  <a:spcPct val="90000"/>
+                </a:lnSpc>
+                <a:spcAft>
+                  <a:spcPts val="1154"/>
+                </a:spcAft>
+                <a:tabLst>
+                  <a:tab algn="l" pos="0"/>
+                </a:tabLst>
+              </a:pPr>
+              <a:r>
+                <a:rPr b="0" lang="en-IN" sz="3300" strike="noStrike" u="none">
+                  <a:solidFill>
+                    <a:schemeClr val="lt1"/>
+                  </a:solidFill>
+                  <a:uFillTx/>
+                  <a:latin typeface="Arial"/>
+                  <a:ea typeface="Arial"/>
+                </a:rPr>
+                <a:t>Environmental impact/Sustainability of the technology</a:t>
+              </a:r>
+              <a:endParaRPr b="0" lang="en-IN" sz="3300" strike="noStrike" u="none">
+                <a:solidFill>
+                  <a:srgbClr val="000000"/>
+                </a:solidFill>
+                <a:uFillTx/>
+                <a:latin typeface="Arial"/>
+              </a:endParaRPr>
+            </a:p>
+          </p:txBody>
+        </p:sp>
+      </p:grpSp>
       <p:sp>
         <p:nvSpPr>
-          <p:cNvPr id="98" name="TextBox 137"/>
+          <p:cNvPr id="95" name="TextBox 137"/>
           <p:cNvSpPr/>
           <p:nvPr/>
         </p:nvSpPr>
         <p:spPr>
           <a:xfrm>
-            <a:off x="731520" y="1554480"/>
+            <a:off x="700560" y="1256040"/>
             <a:ext cx="10606680" cy="2832840"/>
           </a:xfrm>
           <a:prstGeom prst="rect">
@@ -16513,123 +12915,7 @@
             <a:spAutoFit/>
           </a:bodyPr>
           <a:p>
-            <a:pPr>
-              <a:lnSpc>
-                <a:spcPct val="100000"/>
-              </a:lnSpc>
-            </a:pPr>
-            <a:r>
-              <a:rPr b="0" lang="en-IN" sz="1800" strike="noStrike" u="none">
-                <a:solidFill>
-                  <a:srgbClr val="000000"/>
-                </a:solidFill>
-                <a:uFillTx/>
-                <a:latin typeface="Arial"/>
-                <a:ea typeface="Arial"/>
-              </a:rPr>
-              <a:t>1. SLM-first architecture: lighter, lower-cost, and suitable for future offline or edge deployment in low-connectivity rural settings.</a:t>
-            </a:r>
-            <a:endParaRPr b="0" lang="en-IN" sz="1800" strike="noStrike" u="none">
-              <a:solidFill>
-                <a:srgbClr val="000000"/>
-              </a:solidFill>
-              <a:uFillTx/>
-              <a:latin typeface="Arial"/>
-            </a:endParaRPr>
-          </a:p>
-          <a:p>
-            <a:pPr>
-              <a:lnSpc>
-                <a:spcPct val="100000"/>
-              </a:lnSpc>
-            </a:pPr>
-            <a:r>
-              <a:rPr b="0" lang="en-IN" sz="1800" strike="noStrike" u="none">
-                <a:solidFill>
-                  <a:srgbClr val="000000"/>
-                </a:solidFill>
-                <a:uFillTx/>
-                <a:latin typeface="Arial"/>
-                <a:ea typeface="Arial"/>
-              </a:rPr>
-              <a:t>2. Source-grounded intelligence: combines official reports, live weather, mandi prices, crop guides, and structured advisory instead of relying on generic text generation.</a:t>
-            </a:r>
-            <a:endParaRPr b="0" lang="en-IN" sz="1800" strike="noStrike" u="none">
-              <a:solidFill>
-                <a:srgbClr val="000000"/>
-              </a:solidFill>
-              <a:uFillTx/>
-              <a:latin typeface="Arial"/>
-            </a:endParaRPr>
-          </a:p>
-          <a:p>
-            <a:pPr>
-              <a:lnSpc>
-                <a:spcPct val="100000"/>
-              </a:lnSpc>
-            </a:pPr>
-            <a:r>
-              <a:rPr b="0" lang="en-IN" sz="1800" strike="noStrike" u="none">
-                <a:solidFill>
-                  <a:srgbClr val="000000"/>
-                </a:solidFill>
-                <a:uFillTx/>
-                <a:latin typeface="Arial"/>
-                <a:ea typeface="Arial"/>
-              </a:rPr>
-              <a:t>3. Safe feedback learning loop: farmer corrections are stored, mapped to facts, validated against sources/vector evidence, and only then reused to improve recommendations.</a:t>
-            </a:r>
-            <a:endParaRPr b="0" lang="en-IN" sz="1800" strike="noStrike" u="none">
-              <a:solidFill>
-                <a:srgbClr val="000000"/>
-              </a:solidFill>
-              <a:uFillTx/>
-              <a:latin typeface="Arial"/>
-            </a:endParaRPr>
-          </a:p>
-          <a:p>
-            <a:pPr>
-              <a:lnSpc>
-                <a:spcPct val="100000"/>
-              </a:lnSpc>
-            </a:pPr>
-            <a:r>
-              <a:rPr b="0" lang="en-IN" sz="1800" strike="noStrike" u="none">
-                <a:solidFill>
-                  <a:srgbClr val="000000"/>
-                </a:solidFill>
-                <a:uFillTx/>
-                <a:latin typeface="Arial"/>
-                <a:ea typeface="Arial"/>
-              </a:rPr>
-              <a:t>4. Context-aware advisory: remembers crop, season, district, and prior questions for more relevant follow-up support.</a:t>
-            </a:r>
-            <a:endParaRPr b="0" lang="en-IN" sz="1800" strike="noStrike" u="none">
-              <a:solidFill>
-                <a:srgbClr val="000000"/>
-              </a:solidFill>
-              <a:uFillTx/>
-              <a:latin typeface="Arial"/>
-            </a:endParaRPr>
-          </a:p>
-          <a:p>
-            <a:pPr>
-              <a:lnSpc>
-                <a:spcPct val="100000"/>
-              </a:lnSpc>
-            </a:pPr>
-            <a:r>
-              <a:rPr b="0" lang="en-IN" sz="1800" strike="noStrike" u="none">
-                <a:solidFill>
-                  <a:srgbClr val="000000"/>
-                </a:solidFill>
-                <a:uFillTx/>
-                <a:latin typeface="Arial"/>
-                <a:ea typeface="Arial"/>
-              </a:rPr>
-              <a:t>5. Commercial insight layer: feedback and field demand can be analyzed for fertilizer, chemical, insurance, and agri-market stakeholders.</a:t>
-            </a:r>
-            <a:endParaRPr b="0" lang="en-IN" sz="1800" strike="noStrike" u="none">
+            <a:endParaRPr b="0" lang="en-IN" sz="1400" strike="noStrike" u="none">
               <a:solidFill>
                 <a:srgbClr val="000000"/>
               </a:solidFill>
@@ -16671,7 +12957,7 @@
       </p:grpSpPr>
       <p:sp>
         <p:nvSpPr>
-          <p:cNvPr id="99" name="PlaceHolder 1"/>
+          <p:cNvPr id="96" name="PlaceHolder 1"/>
           <p:cNvSpPr>
             <a:spLocks noGrp="1"/>
           </p:cNvSpPr>
@@ -16725,7 +13011,7 @@
                 <a:tab algn="l" pos="0"/>
               </a:tabLst>
             </a:pPr>
-            <a:fld id="{7D01F5C0-26D3-4E9A-9D05-96F62614F5B5}" type="slidenum">
+            <a:fld id="{C4B4556B-FEDC-40F2-AB55-83A7C7EB4568}" type="slidenum">
               <a:rPr b="0" lang="en-IN" sz="1200" strike="noStrike" u="none">
                 <a:solidFill>
                   <a:srgbClr val="888888"/>
@@ -16748,7 +13034,7 @@
       </p:sp>
       <p:pic>
         <p:nvPicPr>
-          <p:cNvPr id="100" name="Google Shape;127;g2b5da1ecdad_1_20" descr="Image"/>
+          <p:cNvPr id="97" name="Google Shape;127;g2b5da1ecdad_1_20" descr="Image"/>
           <p:cNvPicPr/>
           <p:nvPr/>
         </p:nvPicPr>
@@ -16771,7 +13057,7 @@
       </p:pic>
       <p:pic>
         <p:nvPicPr>
-          <p:cNvPr id="101" name="Google Shape;128;g2b5da1ecdad_1_20" descr="Image"/>
+          <p:cNvPr id="98" name="Google Shape;128;g2b5da1ecdad_1_20" descr="Image"/>
           <p:cNvPicPr/>
           <p:nvPr/>
         </p:nvPicPr>
@@ -16794,7 +13080,7 @@
       </p:pic>
       <p:sp>
         <p:nvSpPr>
-          <p:cNvPr id="102" name="Google Shape;129;g2b5da1ecdad_1_20"/>
+          <p:cNvPr id="99" name="Google Shape;129;g2b5da1ecdad_1_20"/>
           <p:cNvSpPr/>
           <p:nvPr/>
         </p:nvSpPr>
@@ -16853,7 +13139,7 @@
       </p:sp>
       <p:pic>
         <p:nvPicPr>
-          <p:cNvPr id="103" name="Google Shape;130;g2b5da1ecdad_1_20" descr=""/>
+          <p:cNvPr id="100" name="Google Shape;130;g2b5da1ecdad_1_20" descr=""/>
           <p:cNvPicPr/>
           <p:nvPr/>
         </p:nvPicPr>
@@ -16876,14 +13162,14 @@
       </p:pic>
       <p:sp>
         <p:nvSpPr>
-          <p:cNvPr id="104" name="TextBox 130"/>
+          <p:cNvPr id="101" name="TextBox 130"/>
           <p:cNvSpPr/>
           <p:nvPr/>
         </p:nvSpPr>
         <p:spPr>
           <a:xfrm>
             <a:off x="1097280" y="1645920"/>
-            <a:ext cx="9875160" cy="2529000"/>
+            <a:ext cx="9875160" cy="2529720"/>
           </a:xfrm>
           <a:prstGeom prst="rect">
             <a:avLst/>
@@ -17037,7 +13323,7 @@
       </p:grpSpPr>
       <p:sp>
         <p:nvSpPr>
-          <p:cNvPr id="105" name="PlaceHolder 1"/>
+          <p:cNvPr id="102" name="PlaceHolder 1"/>
           <p:cNvSpPr>
             <a:spLocks noGrp="1"/>
           </p:cNvSpPr>
@@ -17095,7 +13381,7 @@
       </p:sp>
       <p:sp>
         <p:nvSpPr>
-          <p:cNvPr id="106" name="PlaceHolder 2"/>
+          <p:cNvPr id="103" name="PlaceHolder 2"/>
           <p:cNvSpPr>
             <a:spLocks noGrp="1"/>
           </p:cNvSpPr>
@@ -17286,7 +13572,7 @@
       </p:sp>
       <p:pic>
         <p:nvPicPr>
-          <p:cNvPr id="107" name="Google Shape;137;p4" descr=""/>
+          <p:cNvPr id="104" name="Google Shape;137;p4" descr=""/>
           <p:cNvPicPr/>
           <p:nvPr/>
         </p:nvPicPr>
@@ -17339,7 +13625,7 @@
       </p:grpSpPr>
       <p:sp>
         <p:nvSpPr>
-          <p:cNvPr id="108" name="PlaceHolder 1"/>
+          <p:cNvPr id="105" name="PlaceHolder 1"/>
           <p:cNvSpPr>
             <a:spLocks noGrp="1"/>
           </p:cNvSpPr>
@@ -17397,7 +13683,7 @@
       </p:sp>
       <p:sp>
         <p:nvSpPr>
-          <p:cNvPr id="109" name="PlaceHolder 2"/>
+          <p:cNvPr id="106" name="PlaceHolder 2"/>
           <p:cNvSpPr>
             <a:spLocks noGrp="1"/>
           </p:cNvSpPr>
@@ -17599,7 +13885,7 @@
       </p:sp>
       <p:pic>
         <p:nvPicPr>
-          <p:cNvPr id="110" name="Google Shape;153;p6" descr=""/>
+          <p:cNvPr id="107" name="Google Shape;153;p6" descr=""/>
           <p:cNvPicPr/>
           <p:nvPr/>
         </p:nvPicPr>
@@ -17639,7 +13925,7 @@
     <p:bg>
       <p:bgPr>
         <a:solidFill>
-          <a:schemeClr val="lt1"/>
+          <a:srgbClr val="ffffff"/>
         </a:solidFill>
       </p:bgPr>
     </p:bg>
@@ -17659,7 +13945,7 @@
       </p:grpSpPr>
       <p:sp useBgFill="1">
         <p:nvSpPr>
-          <p:cNvPr id="111" name="Rectangle 118">
+          <p:cNvPr id="108" name="Rectangle 118">
             <a:extLst>
               <a:ext uri="{C183D7F6-B498-43B3-948B-1728B52AA6E4}">
                 <adec:decorative xmlns:adec="http://schemas.microsoft.com/office/drawing/2017/decorative" val="1"/>
@@ -17677,22 +13963,14 @@
           <a:prstGeom prst="rect">
             <a:avLst/>
           </a:prstGeom>
-          <a:ln w="12700">
+          <a:ln w="12600">
             <a:noFill/>
           </a:ln>
         </p:spPr>
         <p:style>
-          <a:lnRef idx="2">
-            <a:schemeClr val="accent1">
-              <a:shade val="50000"/>
-            </a:schemeClr>
-          </a:lnRef>
-          <a:fillRef idx="1">
-            <a:schemeClr val="accent1"/>
-          </a:fillRef>
-          <a:effectRef idx="0">
-            <a:schemeClr val="accent1"/>
-          </a:effectRef>
+          <a:lnRef idx="0"/>
+          <a:fillRef idx="0"/>
+          <a:effectRef idx="0"/>
           <a:fontRef idx="minor"/>
         </p:style>
         <p:txBody>
@@ -17700,11 +13978,6 @@
             <a:noAutofit/>
           </a:bodyPr>
           <a:p>
-            <a:pPr algn="ctr">
-              <a:lnSpc>
-                <a:spcPct val="100000"/>
-              </a:lnSpc>
-            </a:pPr>
             <a:endParaRPr b="0" lang="en-US" sz="1400" strike="noStrike" u="none">
               <a:solidFill>
                 <a:schemeClr val="lt1"/>
@@ -17718,7 +13991,7 @@
       </p:sp>
       <p:sp>
         <p:nvSpPr>
-          <p:cNvPr id="112" name="Rectangle 120">
+          <p:cNvPr id="109" name="Rectangle 120">
             <a:extLst>
               <a:ext uri="{C183D7F6-B498-43B3-948B-1728B52AA6E4}">
                 <adec:decorative xmlns:adec="http://schemas.microsoft.com/office/drawing/2017/decorative" val="1"/>
@@ -17730,7 +14003,7 @@
         </p:nvSpPr>
         <p:spPr>
           <a:xfrm flipH="1" rot="5400000">
-            <a:off x="-639360" y="639720"/>
+            <a:off x="-640080" y="639720"/>
             <a:ext cx="6857640" cy="5578920"/>
           </a:xfrm>
           <a:prstGeom prst="rect">
@@ -17747,22 +14020,14 @@
             </a:gsLst>
             <a:lin ang="13200000"/>
           </a:gradFill>
-          <a:ln>
+          <a:ln w="25560">
             <a:noFill/>
           </a:ln>
         </p:spPr>
         <p:style>
-          <a:lnRef idx="2">
-            <a:schemeClr val="accent1">
-              <a:shade val="50000"/>
-            </a:schemeClr>
-          </a:lnRef>
-          <a:fillRef idx="1">
-            <a:schemeClr val="accent1"/>
-          </a:fillRef>
-          <a:effectRef idx="0">
-            <a:schemeClr val="accent1"/>
-          </a:effectRef>
+          <a:lnRef idx="0"/>
+          <a:fillRef idx="0"/>
+          <a:effectRef idx="0"/>
           <a:fontRef idx="minor"/>
         </p:style>
         <p:txBody>
@@ -17873,7 +14138,7 @@
       </p:sp>
       <p:sp>
         <p:nvSpPr>
-          <p:cNvPr id="113" name="Rectangle 122">
+          <p:cNvPr id="110" name="Rectangle 122">
             <a:extLst>
               <a:ext uri="{C183D7F6-B498-43B3-948B-1728B52AA6E4}">
                 <adec:decorative xmlns:adec="http://schemas.microsoft.com/office/drawing/2017/decorative" val="1"/>
@@ -17906,22 +14171,14 @@
             </a:gsLst>
             <a:lin ang="14400000"/>
           </a:gradFill>
-          <a:ln>
+          <a:ln w="25560">
             <a:noFill/>
           </a:ln>
         </p:spPr>
         <p:style>
-          <a:lnRef idx="2">
-            <a:schemeClr val="accent1">
-              <a:shade val="50000"/>
-            </a:schemeClr>
-          </a:lnRef>
-          <a:fillRef idx="1">
-            <a:schemeClr val="accent1"/>
-          </a:fillRef>
-          <a:effectRef idx="0">
-            <a:schemeClr val="accent1"/>
-          </a:effectRef>
+          <a:lnRef idx="0"/>
+          <a:fillRef idx="0"/>
+          <a:effectRef idx="0"/>
           <a:fontRef idx="minor"/>
         </p:style>
         <p:txBody>
@@ -17929,11 +14186,6 @@
             <a:noAutofit/>
           </a:bodyPr>
           <a:p>
-            <a:pPr algn="ctr">
-              <a:lnSpc>
-                <a:spcPct val="100000"/>
-              </a:lnSpc>
-            </a:pPr>
             <a:endParaRPr b="0" lang="en-US" sz="1400" strike="noStrike" u="none">
               <a:solidFill>
                 <a:schemeClr val="lt1"/>
@@ -17947,7 +14199,7 @@
       </p:sp>
       <p:sp>
         <p:nvSpPr>
-          <p:cNvPr id="114" name="Rectangle 124">
+          <p:cNvPr id="111" name="Rectangle 124">
             <a:extLst>
               <a:ext uri="{C183D7F6-B498-43B3-948B-1728B52AA6E4}">
                 <adec:decorative xmlns:adec="http://schemas.microsoft.com/office/drawing/2017/decorative" val="1"/>
@@ -17980,22 +14232,14 @@
             </a:gsLst>
             <a:lin ang="8400000"/>
           </a:gradFill>
-          <a:ln>
+          <a:ln w="25560">
             <a:noFill/>
           </a:ln>
         </p:spPr>
         <p:style>
-          <a:lnRef idx="2">
-            <a:schemeClr val="accent1">
-              <a:shade val="50000"/>
-            </a:schemeClr>
-          </a:lnRef>
-          <a:fillRef idx="1">
-            <a:schemeClr val="accent1"/>
-          </a:fillRef>
-          <a:effectRef idx="0">
-            <a:schemeClr val="accent1"/>
-          </a:effectRef>
+          <a:lnRef idx="0"/>
+          <a:fillRef idx="0"/>
+          <a:effectRef idx="0"/>
           <a:fontRef idx="minor"/>
         </p:style>
         <p:txBody>
@@ -18003,11 +14247,6 @@
             <a:noAutofit/>
           </a:bodyPr>
           <a:p>
-            <a:pPr algn="ctr">
-              <a:lnSpc>
-                <a:spcPct val="100000"/>
-              </a:lnSpc>
-            </a:pPr>
             <a:endParaRPr b="0" lang="en-US" sz="1400" strike="noStrike" u="none">
               <a:solidFill>
                 <a:schemeClr val="lt1"/>
@@ -18021,7 +14260,7 @@
       </p:sp>
       <p:sp>
         <p:nvSpPr>
-          <p:cNvPr id="115" name="Rectangle 126">
+          <p:cNvPr id="112" name="Rectangle 126">
             <a:extLst>
               <a:ext uri="{C183D7F6-B498-43B3-948B-1728B52AA6E4}">
                 <adec:decorative xmlns:adec="http://schemas.microsoft.com/office/drawing/2017/decorative" val="1"/>
@@ -18033,7 +14272,7 @@
         </p:nvSpPr>
         <p:spPr>
           <a:xfrm flipH="1" rot="5400000">
-            <a:off x="-425880" y="853200"/>
+            <a:off x="-426600" y="853200"/>
             <a:ext cx="6857640" cy="5151960"/>
           </a:xfrm>
           <a:prstGeom prst="rect">
@@ -18054,22 +14293,14 @@
             </a:gsLst>
             <a:lin ang="8400000"/>
           </a:gradFill>
-          <a:ln>
+          <a:ln w="25560">
             <a:noFill/>
           </a:ln>
         </p:spPr>
         <p:style>
-          <a:lnRef idx="2">
-            <a:schemeClr val="accent1">
-              <a:shade val="50000"/>
-            </a:schemeClr>
-          </a:lnRef>
-          <a:fillRef idx="1">
-            <a:schemeClr val="accent1"/>
-          </a:fillRef>
-          <a:effectRef idx="0">
-            <a:schemeClr val="accent1"/>
-          </a:effectRef>
+          <a:lnRef idx="0"/>
+          <a:fillRef idx="0"/>
+          <a:effectRef idx="0"/>
           <a:fontRef idx="minor"/>
         </p:style>
         <p:txBody>
@@ -18077,11 +14308,6 @@
             <a:noAutofit/>
           </a:bodyPr>
           <a:p>
-            <a:pPr algn="ctr">
-              <a:lnSpc>
-                <a:spcPct val="100000"/>
-              </a:lnSpc>
-            </a:pPr>
             <a:endParaRPr b="0" lang="en-US" sz="1400" strike="noStrike" u="none">
               <a:solidFill>
                 <a:schemeClr val="lt1"/>
@@ -18095,7 +14321,7 @@
       </p:sp>
       <p:sp>
         <p:nvSpPr>
-          <p:cNvPr id="116" name="Oval 128">
+          <p:cNvPr id="113" name="Oval 128">
             <a:extLst>
               <a:ext uri="{C183D7F6-B498-43B3-948B-1728B52AA6E4}">
                 <adec:decorative xmlns:adec="http://schemas.microsoft.com/office/drawing/2017/decorative" val="1"/>
@@ -18128,22 +14354,14 @@
             </a:gsLst>
             <a:lin ang="1896000"/>
           </a:gradFill>
-          <a:ln>
+          <a:ln w="25560">
             <a:noFill/>
           </a:ln>
         </p:spPr>
         <p:style>
-          <a:lnRef idx="2">
-            <a:schemeClr val="accent1">
-              <a:shade val="50000"/>
-            </a:schemeClr>
-          </a:lnRef>
-          <a:fillRef idx="1">
-            <a:schemeClr val="accent1"/>
-          </a:fillRef>
-          <a:effectRef idx="0">
-            <a:schemeClr val="accent1"/>
-          </a:effectRef>
+          <a:lnRef idx="0"/>
+          <a:fillRef idx="0"/>
+          <a:effectRef idx="0"/>
           <a:fontRef idx="minor"/>
         </p:style>
         <p:txBody>
@@ -18151,11 +14369,6 @@
             <a:noAutofit/>
           </a:bodyPr>
           <a:p>
-            <a:pPr algn="ctr">
-              <a:lnSpc>
-                <a:spcPct val="100000"/>
-              </a:lnSpc>
-            </a:pPr>
             <a:endParaRPr b="0" lang="en-US" sz="1400" strike="noStrike" u="none">
               <a:solidFill>
                 <a:schemeClr val="lt1"/>
@@ -18169,7 +14382,7 @@
       </p:sp>
       <p:sp>
         <p:nvSpPr>
-          <p:cNvPr id="117" name="PlaceHolder 1"/>
+          <p:cNvPr id="114" name="PlaceHolder 1"/>
           <p:cNvSpPr>
             <a:spLocks noGrp="1"/>
           </p:cNvSpPr>
@@ -18227,7 +14440,7 @@
       </p:sp>
       <p:sp>
         <p:nvSpPr>
-          <p:cNvPr id="118" name="PlaceHolder 2"/>
+          <p:cNvPr id="115" name="PlaceHolder 2"/>
           <p:cNvSpPr>
             <a:spLocks noGrp="1"/>
           </p:cNvSpPr>
@@ -18328,7 +14541,7 @@
       </p:sp>
       <p:pic>
         <p:nvPicPr>
-          <p:cNvPr id="119" name="Google Shape;114;g36f0d695c8d_0_0" descr=""/>
+          <p:cNvPr id="116" name="Google Shape;114;g36f0d695c8d_0_0" descr=""/>
           <p:cNvPicPr/>
           <p:nvPr/>
         </p:nvPicPr>
@@ -18381,7 +14594,7 @@
       </p:grpSpPr>
       <p:sp>
         <p:nvSpPr>
-          <p:cNvPr id="120" name="PlaceHolder 1"/>
+          <p:cNvPr id="117" name="PlaceHolder 1"/>
           <p:cNvSpPr>
             <a:spLocks noGrp="1"/>
           </p:cNvSpPr>
@@ -18439,7 +14652,7 @@
       </p:sp>
       <p:sp>
         <p:nvSpPr>
-          <p:cNvPr id="121" name="PlaceHolder 2"/>
+          <p:cNvPr id="118" name="PlaceHolder 2"/>
           <p:cNvSpPr>
             <a:spLocks noGrp="1"/>
           </p:cNvSpPr>
@@ -18569,7 +14782,7 @@
       </p:sp>
       <p:pic>
         <p:nvPicPr>
-          <p:cNvPr id="122" name="Google Shape;107;g31831269629_1_1" descr=""/>
+          <p:cNvPr id="119" name="Google Shape;107;g31831269629_1_1" descr=""/>
           <p:cNvPicPr/>
           <p:nvPr/>
         </p:nvPicPr>
@@ -18647,13 +14860,13 @@
     <a:fontScheme name="Office">
       <a:majorFont>
         <a:latin typeface="Arial" pitchFamily="0" charset="1"/>
-        <a:ea typeface=""/>
-        <a:cs typeface=""/>
+        <a:ea typeface="DejaVu Sans" pitchFamily="0" charset="1"/>
+        <a:cs typeface="DejaVu Sans" pitchFamily="0" charset="1"/>
       </a:majorFont>
       <a:minorFont>
         <a:latin typeface="Arial" pitchFamily="0" charset="1"/>
-        <a:ea typeface=""/>
-        <a:cs typeface=""/>
+        <a:ea typeface="DejaVu Sans" pitchFamily="0" charset="1"/>
+        <a:cs typeface="DejaVu Sans" pitchFamily="0" charset="1"/>
       </a:minorFont>
     </a:fontScheme>
     <a:fmtScheme>
@@ -18661,55 +14874,25 @@
         <a:solidFill>
           <a:schemeClr val="phClr"/>
         </a:solidFill>
-        <a:gradFill>
-          <a:gsLst>
-            <a:gs pos="0">
-              <a:schemeClr val="phClr">
-                <a:tint val="50000"/>
-              </a:schemeClr>
-            </a:gs>
-            <a:gs pos="35000">
-              <a:schemeClr val="phClr">
-                <a:tint val="37000"/>
-              </a:schemeClr>
-            </a:gs>
-            <a:gs pos="100000">
-              <a:schemeClr val="phClr">
-                <a:tint val="15000"/>
-              </a:schemeClr>
-            </a:gs>
-          </a:gsLst>
-          <a:lin ang="16200000" scaled="1"/>
-          <a:tileRect l="0" t="0" r="0" b="0"/>
-        </a:gradFill>
-        <a:gradFill>
-          <a:gsLst>
-            <a:gs pos="0">
-              <a:schemeClr val="phClr">
-                <a:tint val="100000"/>
-                <a:shade val="100000"/>
-              </a:schemeClr>
-            </a:gs>
-            <a:gs pos="100000">
-              <a:schemeClr val="phClr">
-                <a:tint val="50000"/>
-                <a:shade val="100000"/>
-              </a:schemeClr>
-            </a:gs>
-          </a:gsLst>
-          <a:lin ang="16200000" scaled="0"/>
-          <a:tileRect l="0" t="0" r="0" b="0"/>
-        </a:gradFill>
+        <a:solidFill>
+          <a:schemeClr val="phClr"/>
+        </a:solidFill>
+        <a:solidFill>
+          <a:schemeClr val="phClr"/>
+        </a:solidFill>
       </a:fillStyleLst>
       <a:lnStyleLst>
-        <a:ln w="9525" cap="flat" cmpd="sng" algn="ctr">
+        <a:ln w="6350" cap="flat" cmpd="sng" algn="ctr">
           <a:prstDash val="solid"/>
+          <a:miter/>
         </a:ln>
-        <a:ln w="25400" cap="flat" cmpd="sng" algn="ctr">
+        <a:ln w="6350" cap="flat" cmpd="sng" algn="ctr">
           <a:prstDash val="solid"/>
+          <a:miter/>
         </a:ln>
-        <a:ln w="38100" cap="flat" cmpd="sng" algn="ctr">
+        <a:ln w="6350" cap="flat" cmpd="sng" algn="ctr">
           <a:prstDash val="solid"/>
+          <a:miter/>
         </a:ln>
       </a:lnStyleLst>
       <a:effectStyleLst>
@@ -18727,48 +14910,12 @@
         <a:solidFill>
           <a:schemeClr val="phClr"/>
         </a:solidFill>
-        <a:gradFill>
-          <a:gsLst>
-            <a:gs pos="0">
-              <a:schemeClr val="phClr">
-                <a:tint val="40000"/>
-              </a:schemeClr>
-            </a:gs>
-            <a:gs pos="40000">
-              <a:schemeClr val="phClr">
-                <a:tint val="45000"/>
-                <a:shade val="99000"/>
-              </a:schemeClr>
-            </a:gs>
-            <a:gs pos="100000">
-              <a:schemeClr val="phClr">
-                <a:shade val="20000"/>
-              </a:schemeClr>
-            </a:gs>
-          </a:gsLst>
-          <a:path path="circle">
-            <a:fillToRect l="50000" t="-80000" r="50000" b="180000"/>
-          </a:path>
-          <a:tileRect l="0" t="0" r="0" b="0"/>
-        </a:gradFill>
-        <a:gradFill>
-          <a:gsLst>
-            <a:gs pos="0">
-              <a:schemeClr val="phClr">
-                <a:tint val="80000"/>
-              </a:schemeClr>
-            </a:gs>
-            <a:gs pos="100000">
-              <a:schemeClr val="phClr">
-                <a:shade val="30000"/>
-              </a:schemeClr>
-            </a:gs>
-          </a:gsLst>
-          <a:path path="circle">
-            <a:fillToRect l="50000" t="50000" r="50000" b="50000"/>
-          </a:path>
-          <a:tileRect l="0" t="0" r="0" b="0"/>
-        </a:gradFill>
+        <a:solidFill>
+          <a:schemeClr val="phClr"/>
+        </a:solidFill>
+        <a:solidFill>
+          <a:schemeClr val="phClr"/>
+        </a:solidFill>
       </a:bgFillStyleLst>
     </a:fmtScheme>
   </a:themeElements>
@@ -18819,13 +14966,13 @@
     <a:fontScheme name="Office">
       <a:majorFont>
         <a:latin typeface="Arial" pitchFamily="0" charset="1"/>
-        <a:ea typeface=""/>
-        <a:cs typeface=""/>
+        <a:ea typeface="DejaVu Sans" pitchFamily="0" charset="1"/>
+        <a:cs typeface="DejaVu Sans" pitchFamily="0" charset="1"/>
       </a:majorFont>
       <a:minorFont>
         <a:latin typeface="Arial" pitchFamily="0" charset="1"/>
-        <a:ea typeface=""/>
-        <a:cs typeface=""/>
+        <a:ea typeface="DejaVu Sans" pitchFamily="0" charset="1"/>
+        <a:cs typeface="DejaVu Sans" pitchFamily="0" charset="1"/>
       </a:minorFont>
     </a:fontScheme>
     <a:fmtScheme>
@@ -18833,55 +14980,25 @@
         <a:solidFill>
           <a:schemeClr val="phClr"/>
         </a:solidFill>
-        <a:gradFill>
-          <a:gsLst>
-            <a:gs pos="0">
-              <a:schemeClr val="phClr">
-                <a:tint val="50000"/>
-              </a:schemeClr>
-            </a:gs>
-            <a:gs pos="35000">
-              <a:schemeClr val="phClr">
-                <a:tint val="37000"/>
-              </a:schemeClr>
-            </a:gs>
-            <a:gs pos="100000">
-              <a:schemeClr val="phClr">
-                <a:tint val="15000"/>
-              </a:schemeClr>
-            </a:gs>
-          </a:gsLst>
-          <a:lin ang="16200000" scaled="1"/>
-          <a:tileRect l="0" t="0" r="0" b="0"/>
-        </a:gradFill>
-        <a:gradFill>
-          <a:gsLst>
-            <a:gs pos="0">
-              <a:schemeClr val="phClr">
-                <a:tint val="100000"/>
-                <a:shade val="100000"/>
-              </a:schemeClr>
-            </a:gs>
-            <a:gs pos="100000">
-              <a:schemeClr val="phClr">
-                <a:tint val="50000"/>
-                <a:shade val="100000"/>
-              </a:schemeClr>
-            </a:gs>
-          </a:gsLst>
-          <a:lin ang="16200000" scaled="0"/>
-          <a:tileRect l="0" t="0" r="0" b="0"/>
-        </a:gradFill>
+        <a:solidFill>
+          <a:schemeClr val="phClr"/>
+        </a:solidFill>
+        <a:solidFill>
+          <a:schemeClr val="phClr"/>
+        </a:solidFill>
       </a:fillStyleLst>
       <a:lnStyleLst>
-        <a:ln w="9525" cap="flat" cmpd="sng" algn="ctr">
+        <a:ln w="6350" cap="flat" cmpd="sng" algn="ctr">
           <a:prstDash val="solid"/>
+          <a:miter/>
         </a:ln>
-        <a:ln w="25400" cap="flat" cmpd="sng" algn="ctr">
+        <a:ln w="6350" cap="flat" cmpd="sng" algn="ctr">
           <a:prstDash val="solid"/>
+          <a:miter/>
         </a:ln>
-        <a:ln w="38100" cap="flat" cmpd="sng" algn="ctr">
+        <a:ln w="6350" cap="flat" cmpd="sng" algn="ctr">
           <a:prstDash val="solid"/>
+          <a:miter/>
         </a:ln>
       </a:lnStyleLst>
       <a:effectStyleLst>
@@ -18899,48 +15016,12 @@
         <a:solidFill>
           <a:schemeClr val="phClr"/>
         </a:solidFill>
-        <a:gradFill>
-          <a:gsLst>
-            <a:gs pos="0">
-              <a:schemeClr val="phClr">
-                <a:tint val="40000"/>
-              </a:schemeClr>
-            </a:gs>
-            <a:gs pos="40000">
-              <a:schemeClr val="phClr">
-                <a:tint val="45000"/>
-                <a:shade val="99000"/>
-              </a:schemeClr>
-            </a:gs>
-            <a:gs pos="100000">
-              <a:schemeClr val="phClr">
-                <a:shade val="20000"/>
-              </a:schemeClr>
-            </a:gs>
-          </a:gsLst>
-          <a:path path="circle">
-            <a:fillToRect l="50000" t="-80000" r="50000" b="180000"/>
-          </a:path>
-          <a:tileRect l="0" t="0" r="0" b="0"/>
-        </a:gradFill>
-        <a:gradFill>
-          <a:gsLst>
-            <a:gs pos="0">
-              <a:schemeClr val="phClr">
-                <a:tint val="80000"/>
-              </a:schemeClr>
-            </a:gs>
-            <a:gs pos="100000">
-              <a:schemeClr val="phClr">
-                <a:shade val="30000"/>
-              </a:schemeClr>
-            </a:gs>
-          </a:gsLst>
-          <a:path path="circle">
-            <a:fillToRect l="50000" t="50000" r="50000" b="50000"/>
-          </a:path>
-          <a:tileRect l="0" t="0" r="0" b="0"/>
-        </a:gradFill>
+        <a:solidFill>
+          <a:schemeClr val="phClr"/>
+        </a:solidFill>
+        <a:solidFill>
+          <a:schemeClr val="phClr"/>
+        </a:solidFill>
       </a:bgFillStyleLst>
     </a:fmtScheme>
   </a:themeElements>
@@ -18991,13 +15072,13 @@
     <a:fontScheme name="Office">
       <a:majorFont>
         <a:latin typeface="Arial" pitchFamily="0" charset="1"/>
-        <a:ea typeface=""/>
-        <a:cs typeface=""/>
+        <a:ea typeface="DejaVu Sans" pitchFamily="0" charset="1"/>
+        <a:cs typeface="DejaVu Sans" pitchFamily="0" charset="1"/>
       </a:majorFont>
       <a:minorFont>
         <a:latin typeface="Arial" pitchFamily="0" charset="1"/>
-        <a:ea typeface=""/>
-        <a:cs typeface=""/>
+        <a:ea typeface="DejaVu Sans" pitchFamily="0" charset="1"/>
+        <a:cs typeface="DejaVu Sans" pitchFamily="0" charset="1"/>
       </a:minorFont>
     </a:fontScheme>
     <a:fmtScheme>
@@ -19005,55 +15086,25 @@
         <a:solidFill>
           <a:schemeClr val="phClr"/>
         </a:solidFill>
-        <a:gradFill>
-          <a:gsLst>
-            <a:gs pos="0">
-              <a:schemeClr val="phClr">
-                <a:tint val="50000"/>
-              </a:schemeClr>
-            </a:gs>
-            <a:gs pos="35000">
-              <a:schemeClr val="phClr">
-                <a:tint val="37000"/>
-              </a:schemeClr>
-            </a:gs>
-            <a:gs pos="100000">
-              <a:schemeClr val="phClr">
-                <a:tint val="15000"/>
-              </a:schemeClr>
-            </a:gs>
-          </a:gsLst>
-          <a:lin ang="16200000" scaled="1"/>
-          <a:tileRect l="0" t="0" r="0" b="0"/>
-        </a:gradFill>
-        <a:gradFill>
-          <a:gsLst>
-            <a:gs pos="0">
-              <a:schemeClr val="phClr">
-                <a:tint val="100000"/>
-                <a:shade val="100000"/>
-              </a:schemeClr>
-            </a:gs>
-            <a:gs pos="100000">
-              <a:schemeClr val="phClr">
-                <a:tint val="50000"/>
-                <a:shade val="100000"/>
-              </a:schemeClr>
-            </a:gs>
-          </a:gsLst>
-          <a:lin ang="16200000" scaled="0"/>
-          <a:tileRect l="0" t="0" r="0" b="0"/>
-        </a:gradFill>
+        <a:solidFill>
+          <a:schemeClr val="phClr"/>
+        </a:solidFill>
+        <a:solidFill>
+          <a:schemeClr val="phClr"/>
+        </a:solidFill>
       </a:fillStyleLst>
       <a:lnStyleLst>
-        <a:ln w="9525" cap="flat" cmpd="sng" algn="ctr">
+        <a:ln w="6350" cap="flat" cmpd="sng" algn="ctr">
           <a:prstDash val="solid"/>
+          <a:miter/>
         </a:ln>
-        <a:ln w="25400" cap="flat" cmpd="sng" algn="ctr">
+        <a:ln w="6350" cap="flat" cmpd="sng" algn="ctr">
           <a:prstDash val="solid"/>
+          <a:miter/>
         </a:ln>
-        <a:ln w="38100" cap="flat" cmpd="sng" algn="ctr">
+        <a:ln w="6350" cap="flat" cmpd="sng" algn="ctr">
           <a:prstDash val="solid"/>
+          <a:miter/>
         </a:ln>
       </a:lnStyleLst>
       <a:effectStyleLst>
@@ -19071,48 +15122,12 @@
         <a:solidFill>
           <a:schemeClr val="phClr"/>
         </a:solidFill>
-        <a:gradFill>
-          <a:gsLst>
-            <a:gs pos="0">
-              <a:schemeClr val="phClr">
-                <a:tint val="40000"/>
-              </a:schemeClr>
-            </a:gs>
-            <a:gs pos="40000">
-              <a:schemeClr val="phClr">
-                <a:tint val="45000"/>
-                <a:shade val="99000"/>
-              </a:schemeClr>
-            </a:gs>
-            <a:gs pos="100000">
-              <a:schemeClr val="phClr">
-                <a:shade val="20000"/>
-              </a:schemeClr>
-            </a:gs>
-          </a:gsLst>
-          <a:path path="circle">
-            <a:fillToRect l="50000" t="-80000" r="50000" b="180000"/>
-          </a:path>
-          <a:tileRect l="0" t="0" r="0" b="0"/>
-        </a:gradFill>
-        <a:gradFill>
-          <a:gsLst>
-            <a:gs pos="0">
-              <a:schemeClr val="phClr">
-                <a:tint val="80000"/>
-              </a:schemeClr>
-            </a:gs>
-            <a:gs pos="100000">
-              <a:schemeClr val="phClr">
-                <a:shade val="30000"/>
-              </a:schemeClr>
-            </a:gs>
-          </a:gsLst>
-          <a:path path="circle">
-            <a:fillToRect l="50000" t="50000" r="50000" b="50000"/>
-          </a:path>
-          <a:tileRect l="0" t="0" r="0" b="0"/>
-        </a:gradFill>
+        <a:solidFill>
+          <a:schemeClr val="phClr"/>
+        </a:solidFill>
+        <a:solidFill>
+          <a:schemeClr val="phClr"/>
+        </a:solidFill>
       </a:bgFillStyleLst>
     </a:fmtScheme>
   </a:themeElements>
@@ -19163,13 +15178,13 @@
     <a:fontScheme name="Office">
       <a:majorFont>
         <a:latin typeface="Arial" pitchFamily="0" charset="1"/>
-        <a:ea typeface=""/>
-        <a:cs typeface=""/>
+        <a:ea typeface="DejaVu Sans" pitchFamily="0" charset="1"/>
+        <a:cs typeface="DejaVu Sans" pitchFamily="0" charset="1"/>
       </a:majorFont>
       <a:minorFont>
         <a:latin typeface="Arial" pitchFamily="0" charset="1"/>
-        <a:ea typeface=""/>
-        <a:cs typeface=""/>
+        <a:ea typeface="DejaVu Sans" pitchFamily="0" charset="1"/>
+        <a:cs typeface="DejaVu Sans" pitchFamily="0" charset="1"/>
       </a:minorFont>
     </a:fontScheme>
     <a:fmtScheme>
@@ -19177,55 +15192,25 @@
         <a:solidFill>
           <a:schemeClr val="phClr"/>
         </a:solidFill>
-        <a:gradFill>
-          <a:gsLst>
-            <a:gs pos="0">
-              <a:schemeClr val="phClr">
-                <a:tint val="50000"/>
-              </a:schemeClr>
-            </a:gs>
-            <a:gs pos="35000">
-              <a:schemeClr val="phClr">
-                <a:tint val="37000"/>
-              </a:schemeClr>
-            </a:gs>
-            <a:gs pos="100000">
-              <a:schemeClr val="phClr">
-                <a:tint val="15000"/>
-              </a:schemeClr>
-            </a:gs>
-          </a:gsLst>
-          <a:lin ang="16200000" scaled="1"/>
-          <a:tileRect l="0" t="0" r="0" b="0"/>
-        </a:gradFill>
-        <a:gradFill>
-          <a:gsLst>
-            <a:gs pos="0">
-              <a:schemeClr val="phClr">
-                <a:tint val="100000"/>
-                <a:shade val="100000"/>
-              </a:schemeClr>
-            </a:gs>
-            <a:gs pos="100000">
-              <a:schemeClr val="phClr">
-                <a:tint val="50000"/>
-                <a:shade val="100000"/>
-              </a:schemeClr>
-            </a:gs>
-          </a:gsLst>
-          <a:lin ang="16200000" scaled="0"/>
-          <a:tileRect l="0" t="0" r="0" b="0"/>
-        </a:gradFill>
+        <a:solidFill>
+          <a:schemeClr val="phClr"/>
+        </a:solidFill>
+        <a:solidFill>
+          <a:schemeClr val="phClr"/>
+        </a:solidFill>
       </a:fillStyleLst>
       <a:lnStyleLst>
-        <a:ln w="9525" cap="flat" cmpd="sng" algn="ctr">
+        <a:ln w="6350" cap="flat" cmpd="sng" algn="ctr">
           <a:prstDash val="solid"/>
+          <a:miter/>
         </a:ln>
-        <a:ln w="25400" cap="flat" cmpd="sng" algn="ctr">
+        <a:ln w="6350" cap="flat" cmpd="sng" algn="ctr">
           <a:prstDash val="solid"/>
+          <a:miter/>
         </a:ln>
-        <a:ln w="38100" cap="flat" cmpd="sng" algn="ctr">
+        <a:ln w="6350" cap="flat" cmpd="sng" algn="ctr">
           <a:prstDash val="solid"/>
+          <a:miter/>
         </a:ln>
       </a:lnStyleLst>
       <a:effectStyleLst>
@@ -19243,48 +15228,12 @@
         <a:solidFill>
           <a:schemeClr val="phClr"/>
         </a:solidFill>
-        <a:gradFill>
-          <a:gsLst>
-            <a:gs pos="0">
-              <a:schemeClr val="phClr">
-                <a:tint val="40000"/>
-              </a:schemeClr>
-            </a:gs>
-            <a:gs pos="40000">
-              <a:schemeClr val="phClr">
-                <a:tint val="45000"/>
-                <a:shade val="99000"/>
-              </a:schemeClr>
-            </a:gs>
-            <a:gs pos="100000">
-              <a:schemeClr val="phClr">
-                <a:shade val="20000"/>
-              </a:schemeClr>
-            </a:gs>
-          </a:gsLst>
-          <a:path path="circle">
-            <a:fillToRect l="50000" t="-80000" r="50000" b="180000"/>
-          </a:path>
-          <a:tileRect l="0" t="0" r="0" b="0"/>
-        </a:gradFill>
-        <a:gradFill>
-          <a:gsLst>
-            <a:gs pos="0">
-              <a:schemeClr val="phClr">
-                <a:tint val="80000"/>
-              </a:schemeClr>
-            </a:gs>
-            <a:gs pos="100000">
-              <a:schemeClr val="phClr">
-                <a:shade val="30000"/>
-              </a:schemeClr>
-            </a:gs>
-          </a:gsLst>
-          <a:path path="circle">
-            <a:fillToRect l="50000" t="50000" r="50000" b="50000"/>
-          </a:path>
-          <a:tileRect l="0" t="0" r="0" b="0"/>
-        </a:gradFill>
+        <a:solidFill>
+          <a:schemeClr val="phClr"/>
+        </a:solidFill>
+        <a:solidFill>
+          <a:schemeClr val="phClr"/>
+        </a:solidFill>
       </a:bgFillStyleLst>
     </a:fmtScheme>
   </a:themeElements>
@@ -19335,13 +15284,13 @@
     <a:fontScheme name="Office">
       <a:majorFont>
         <a:latin typeface="Arial" pitchFamily="0" charset="1"/>
-        <a:ea typeface=""/>
-        <a:cs typeface=""/>
+        <a:ea typeface="DejaVu Sans" pitchFamily="0" charset="1"/>
+        <a:cs typeface="DejaVu Sans" pitchFamily="0" charset="1"/>
       </a:majorFont>
       <a:minorFont>
         <a:latin typeface="Arial" pitchFamily="0" charset="1"/>
-        <a:ea typeface=""/>
-        <a:cs typeface=""/>
+        <a:ea typeface="DejaVu Sans" pitchFamily="0" charset="1"/>
+        <a:cs typeface="DejaVu Sans" pitchFamily="0" charset="1"/>
       </a:minorFont>
     </a:fontScheme>
     <a:fmtScheme>
@@ -19349,55 +15298,25 @@
         <a:solidFill>
           <a:schemeClr val="phClr"/>
         </a:solidFill>
-        <a:gradFill>
-          <a:gsLst>
-            <a:gs pos="0">
-              <a:schemeClr val="phClr">
-                <a:tint val="50000"/>
-              </a:schemeClr>
-            </a:gs>
-            <a:gs pos="35000">
-              <a:schemeClr val="phClr">
-                <a:tint val="37000"/>
-              </a:schemeClr>
-            </a:gs>
-            <a:gs pos="100000">
-              <a:schemeClr val="phClr">
-                <a:tint val="15000"/>
-              </a:schemeClr>
-            </a:gs>
-          </a:gsLst>
-          <a:lin ang="16200000" scaled="1"/>
-          <a:tileRect l="0" t="0" r="0" b="0"/>
-        </a:gradFill>
-        <a:gradFill>
-          <a:gsLst>
-            <a:gs pos="0">
-              <a:schemeClr val="phClr">
-                <a:tint val="100000"/>
-                <a:shade val="100000"/>
-              </a:schemeClr>
-            </a:gs>
-            <a:gs pos="100000">
-              <a:schemeClr val="phClr">
-                <a:tint val="50000"/>
-                <a:shade val="100000"/>
-              </a:schemeClr>
-            </a:gs>
-          </a:gsLst>
-          <a:lin ang="16200000" scaled="0"/>
-          <a:tileRect l="0" t="0" r="0" b="0"/>
-        </a:gradFill>
+        <a:solidFill>
+          <a:schemeClr val="phClr"/>
+        </a:solidFill>
+        <a:solidFill>
+          <a:schemeClr val="phClr"/>
+        </a:solidFill>
       </a:fillStyleLst>
       <a:lnStyleLst>
-        <a:ln w="9525" cap="flat" cmpd="sng" algn="ctr">
+        <a:ln w="6350" cap="flat" cmpd="sng" algn="ctr">
           <a:prstDash val="solid"/>
+          <a:miter/>
         </a:ln>
-        <a:ln w="25400" cap="flat" cmpd="sng" algn="ctr">
+        <a:ln w="6350" cap="flat" cmpd="sng" algn="ctr">
           <a:prstDash val="solid"/>
+          <a:miter/>
         </a:ln>
-        <a:ln w="38100" cap="flat" cmpd="sng" algn="ctr">
+        <a:ln w="6350" cap="flat" cmpd="sng" algn="ctr">
           <a:prstDash val="solid"/>
+          <a:miter/>
         </a:ln>
       </a:lnStyleLst>
       <a:effectStyleLst>
@@ -19415,48 +15334,12 @@
         <a:solidFill>
           <a:schemeClr val="phClr"/>
         </a:solidFill>
-        <a:gradFill>
-          <a:gsLst>
-            <a:gs pos="0">
-              <a:schemeClr val="phClr">
-                <a:tint val="40000"/>
-              </a:schemeClr>
-            </a:gs>
-            <a:gs pos="40000">
-              <a:schemeClr val="phClr">
-                <a:tint val="45000"/>
-                <a:shade val="99000"/>
-              </a:schemeClr>
-            </a:gs>
-            <a:gs pos="100000">
-              <a:schemeClr val="phClr">
-                <a:shade val="20000"/>
-              </a:schemeClr>
-            </a:gs>
-          </a:gsLst>
-          <a:path path="circle">
-            <a:fillToRect l="50000" t="-80000" r="50000" b="180000"/>
-          </a:path>
-          <a:tileRect l="0" t="0" r="0" b="0"/>
-        </a:gradFill>
-        <a:gradFill>
-          <a:gsLst>
-            <a:gs pos="0">
-              <a:schemeClr val="phClr">
-                <a:tint val="80000"/>
-              </a:schemeClr>
-            </a:gs>
-            <a:gs pos="100000">
-              <a:schemeClr val="phClr">
-                <a:shade val="30000"/>
-              </a:schemeClr>
-            </a:gs>
-          </a:gsLst>
-          <a:path path="circle">
-            <a:fillToRect l="50000" t="50000" r="50000" b="50000"/>
-          </a:path>
-          <a:tileRect l="0" t="0" r="0" b="0"/>
-        </a:gradFill>
+        <a:solidFill>
+          <a:schemeClr val="phClr"/>
+        </a:solidFill>
+        <a:solidFill>
+          <a:schemeClr val="phClr"/>
+        </a:solidFill>
       </a:bgFillStyleLst>
     </a:fmtScheme>
   </a:themeElements>
@@ -19507,13 +15390,13 @@
     <a:fontScheme name="Office">
       <a:majorFont>
         <a:latin typeface="Arial" pitchFamily="0" charset="1"/>
-        <a:ea typeface=""/>
-        <a:cs typeface=""/>
+        <a:ea typeface="DejaVu Sans" pitchFamily="0" charset="1"/>
+        <a:cs typeface="DejaVu Sans" pitchFamily="0" charset="1"/>
       </a:majorFont>
       <a:minorFont>
         <a:latin typeface="Arial" pitchFamily="0" charset="1"/>
-        <a:ea typeface=""/>
-        <a:cs typeface=""/>
+        <a:ea typeface="DejaVu Sans" pitchFamily="0" charset="1"/>
+        <a:cs typeface="DejaVu Sans" pitchFamily="0" charset="1"/>
       </a:minorFont>
     </a:fontScheme>
     <a:fmtScheme>
@@ -19521,55 +15404,25 @@
         <a:solidFill>
           <a:schemeClr val="phClr"/>
         </a:solidFill>
-        <a:gradFill>
-          <a:gsLst>
-            <a:gs pos="0">
-              <a:schemeClr val="phClr">
-                <a:tint val="50000"/>
-              </a:schemeClr>
-            </a:gs>
-            <a:gs pos="35000">
-              <a:schemeClr val="phClr">
-                <a:tint val="37000"/>
-              </a:schemeClr>
-            </a:gs>
-            <a:gs pos="100000">
-              <a:schemeClr val="phClr">
-                <a:tint val="15000"/>
-              </a:schemeClr>
-            </a:gs>
-          </a:gsLst>
-          <a:lin ang="16200000" scaled="1"/>
-          <a:tileRect l="0" t="0" r="0" b="0"/>
-        </a:gradFill>
-        <a:gradFill>
-          <a:gsLst>
-            <a:gs pos="0">
-              <a:schemeClr val="phClr">
-                <a:tint val="100000"/>
-                <a:shade val="100000"/>
-              </a:schemeClr>
-            </a:gs>
-            <a:gs pos="100000">
-              <a:schemeClr val="phClr">
-                <a:tint val="50000"/>
-                <a:shade val="100000"/>
-              </a:schemeClr>
-            </a:gs>
-          </a:gsLst>
-          <a:lin ang="16200000" scaled="0"/>
-          <a:tileRect l="0" t="0" r="0" b="0"/>
-        </a:gradFill>
+        <a:solidFill>
+          <a:schemeClr val="phClr"/>
+        </a:solidFill>
+        <a:solidFill>
+          <a:schemeClr val="phClr"/>
+        </a:solidFill>
       </a:fillStyleLst>
       <a:lnStyleLst>
-        <a:ln w="9525" cap="flat" cmpd="sng" algn="ctr">
+        <a:ln w="6350" cap="flat" cmpd="sng" algn="ctr">
           <a:prstDash val="solid"/>
+          <a:miter/>
         </a:ln>
-        <a:ln w="25400" cap="flat" cmpd="sng" algn="ctr">
+        <a:ln w="6350" cap="flat" cmpd="sng" algn="ctr">
           <a:prstDash val="solid"/>
+          <a:miter/>
         </a:ln>
-        <a:ln w="38100" cap="flat" cmpd="sng" algn="ctr">
+        <a:ln w="6350" cap="flat" cmpd="sng" algn="ctr">
           <a:prstDash val="solid"/>
+          <a:miter/>
         </a:ln>
       </a:lnStyleLst>
       <a:effectStyleLst>
@@ -19587,48 +15440,12 @@
         <a:solidFill>
           <a:schemeClr val="phClr"/>
         </a:solidFill>
-        <a:gradFill>
-          <a:gsLst>
-            <a:gs pos="0">
-              <a:schemeClr val="phClr">
-                <a:tint val="40000"/>
-              </a:schemeClr>
-            </a:gs>
-            <a:gs pos="40000">
-              <a:schemeClr val="phClr">
-                <a:tint val="45000"/>
-                <a:shade val="99000"/>
-              </a:schemeClr>
-            </a:gs>
-            <a:gs pos="100000">
-              <a:schemeClr val="phClr">
-                <a:shade val="20000"/>
-              </a:schemeClr>
-            </a:gs>
-          </a:gsLst>
-          <a:path path="circle">
-            <a:fillToRect l="50000" t="-80000" r="50000" b="180000"/>
-          </a:path>
-          <a:tileRect l="0" t="0" r="0" b="0"/>
-        </a:gradFill>
-        <a:gradFill>
-          <a:gsLst>
-            <a:gs pos="0">
-              <a:schemeClr val="phClr">
-                <a:tint val="80000"/>
-              </a:schemeClr>
-            </a:gs>
-            <a:gs pos="100000">
-              <a:schemeClr val="phClr">
-                <a:shade val="30000"/>
-              </a:schemeClr>
-            </a:gs>
-          </a:gsLst>
-          <a:path path="circle">
-            <a:fillToRect l="50000" t="50000" r="50000" b="50000"/>
-          </a:path>
-          <a:tileRect l="0" t="0" r="0" b="0"/>
-        </a:gradFill>
+        <a:solidFill>
+          <a:schemeClr val="phClr"/>
+        </a:solidFill>
+        <a:solidFill>
+          <a:schemeClr val="phClr"/>
+        </a:solidFill>
       </a:bgFillStyleLst>
     </a:fmtScheme>
   </a:themeElements>
@@ -19679,13 +15496,13 @@
     <a:fontScheme name="Office">
       <a:majorFont>
         <a:latin typeface="Arial" pitchFamily="0" charset="1"/>
-        <a:ea typeface=""/>
-        <a:cs typeface=""/>
+        <a:ea typeface="DejaVu Sans" pitchFamily="0" charset="1"/>
+        <a:cs typeface="DejaVu Sans" pitchFamily="0" charset="1"/>
       </a:majorFont>
       <a:minorFont>
         <a:latin typeface="Arial" pitchFamily="0" charset="1"/>
-        <a:ea typeface=""/>
-        <a:cs typeface=""/>
+        <a:ea typeface="DejaVu Sans" pitchFamily="0" charset="1"/>
+        <a:cs typeface="DejaVu Sans" pitchFamily="0" charset="1"/>
       </a:minorFont>
     </a:fontScheme>
     <a:fmtScheme>
@@ -19693,55 +15510,25 @@
         <a:solidFill>
           <a:schemeClr val="phClr"/>
         </a:solidFill>
-        <a:gradFill>
-          <a:gsLst>
-            <a:gs pos="0">
-              <a:schemeClr val="phClr">
-                <a:tint val="50000"/>
-              </a:schemeClr>
-            </a:gs>
-            <a:gs pos="35000">
-              <a:schemeClr val="phClr">
-                <a:tint val="37000"/>
-              </a:schemeClr>
-            </a:gs>
-            <a:gs pos="100000">
-              <a:schemeClr val="phClr">
-                <a:tint val="15000"/>
-              </a:schemeClr>
-            </a:gs>
-          </a:gsLst>
-          <a:lin ang="16200000" scaled="1"/>
-          <a:tileRect l="0" t="0" r="0" b="0"/>
-        </a:gradFill>
-        <a:gradFill>
-          <a:gsLst>
-            <a:gs pos="0">
-              <a:schemeClr val="phClr">
-                <a:tint val="100000"/>
-                <a:shade val="100000"/>
-              </a:schemeClr>
-            </a:gs>
-            <a:gs pos="100000">
-              <a:schemeClr val="phClr">
-                <a:tint val="50000"/>
-                <a:shade val="100000"/>
-              </a:schemeClr>
-            </a:gs>
-          </a:gsLst>
-          <a:lin ang="16200000" scaled="0"/>
-          <a:tileRect l="0" t="0" r="0" b="0"/>
-        </a:gradFill>
+        <a:solidFill>
+          <a:schemeClr val="phClr"/>
+        </a:solidFill>
+        <a:solidFill>
+          <a:schemeClr val="phClr"/>
+        </a:solidFill>
       </a:fillStyleLst>
       <a:lnStyleLst>
-        <a:ln w="9525" cap="flat" cmpd="sng" algn="ctr">
+        <a:ln w="6350" cap="flat" cmpd="sng" algn="ctr">
           <a:prstDash val="solid"/>
+          <a:miter/>
         </a:ln>
-        <a:ln w="25400" cap="flat" cmpd="sng" algn="ctr">
+        <a:ln w="6350" cap="flat" cmpd="sng" algn="ctr">
           <a:prstDash val="solid"/>
+          <a:miter/>
         </a:ln>
-        <a:ln w="38100" cap="flat" cmpd="sng" algn="ctr">
+        <a:ln w="6350" cap="flat" cmpd="sng" algn="ctr">
           <a:prstDash val="solid"/>
+          <a:miter/>
         </a:ln>
       </a:lnStyleLst>
       <a:effectStyleLst>
@@ -19759,48 +15546,12 @@
         <a:solidFill>
           <a:schemeClr val="phClr"/>
         </a:solidFill>
-        <a:gradFill>
-          <a:gsLst>
-            <a:gs pos="0">
-              <a:schemeClr val="phClr">
-                <a:tint val="40000"/>
-              </a:schemeClr>
-            </a:gs>
-            <a:gs pos="40000">
-              <a:schemeClr val="phClr">
-                <a:tint val="45000"/>
-                <a:shade val="99000"/>
-              </a:schemeClr>
-            </a:gs>
-            <a:gs pos="100000">
-              <a:schemeClr val="phClr">
-                <a:shade val="20000"/>
-              </a:schemeClr>
-            </a:gs>
-          </a:gsLst>
-          <a:path path="circle">
-            <a:fillToRect l="50000" t="-80000" r="50000" b="180000"/>
-          </a:path>
-          <a:tileRect l="0" t="0" r="0" b="0"/>
-        </a:gradFill>
-        <a:gradFill>
-          <a:gsLst>
-            <a:gs pos="0">
-              <a:schemeClr val="phClr">
-                <a:tint val="80000"/>
-              </a:schemeClr>
-            </a:gs>
-            <a:gs pos="100000">
-              <a:schemeClr val="phClr">
-                <a:shade val="30000"/>
-              </a:schemeClr>
-            </a:gs>
-          </a:gsLst>
-          <a:path path="circle">
-            <a:fillToRect l="50000" t="50000" r="50000" b="50000"/>
-          </a:path>
-          <a:tileRect l="0" t="0" r="0" b="0"/>
-        </a:gradFill>
+        <a:solidFill>
+          <a:schemeClr val="phClr"/>
+        </a:solidFill>
+        <a:solidFill>
+          <a:schemeClr val="phClr"/>
+        </a:solidFill>
       </a:bgFillStyleLst>
     </a:fmtScheme>
   </a:themeElements>
@@ -19851,13 +15602,13 @@
     <a:fontScheme name="Office">
       <a:majorFont>
         <a:latin typeface="Arial" pitchFamily="0" charset="1"/>
-        <a:ea typeface=""/>
-        <a:cs typeface=""/>
+        <a:ea typeface="DejaVu Sans" pitchFamily="0" charset="1"/>
+        <a:cs typeface="DejaVu Sans" pitchFamily="0" charset="1"/>
       </a:majorFont>
       <a:minorFont>
         <a:latin typeface="Arial" pitchFamily="0" charset="1"/>
-        <a:ea typeface=""/>
-        <a:cs typeface=""/>
+        <a:ea typeface="DejaVu Sans" pitchFamily="0" charset="1"/>
+        <a:cs typeface="DejaVu Sans" pitchFamily="0" charset="1"/>
       </a:minorFont>
     </a:fontScheme>
     <a:fmtScheme>
@@ -19865,55 +15616,25 @@
         <a:solidFill>
           <a:schemeClr val="phClr"/>
         </a:solidFill>
-        <a:gradFill>
-          <a:gsLst>
-            <a:gs pos="0">
-              <a:schemeClr val="phClr">
-                <a:tint val="50000"/>
-              </a:schemeClr>
-            </a:gs>
-            <a:gs pos="35000">
-              <a:schemeClr val="phClr">
-                <a:tint val="37000"/>
-              </a:schemeClr>
-            </a:gs>
-            <a:gs pos="100000">
-              <a:schemeClr val="phClr">
-                <a:tint val="15000"/>
-              </a:schemeClr>
-            </a:gs>
-          </a:gsLst>
-          <a:lin ang="16200000" scaled="1"/>
-          <a:tileRect l="0" t="0" r="0" b="0"/>
-        </a:gradFill>
-        <a:gradFill>
-          <a:gsLst>
-            <a:gs pos="0">
-              <a:schemeClr val="phClr">
-                <a:tint val="100000"/>
-                <a:shade val="100000"/>
-              </a:schemeClr>
-            </a:gs>
-            <a:gs pos="100000">
-              <a:schemeClr val="phClr">
-                <a:tint val="50000"/>
-                <a:shade val="100000"/>
-              </a:schemeClr>
-            </a:gs>
-          </a:gsLst>
-          <a:lin ang="16200000" scaled="0"/>
-          <a:tileRect l="0" t="0" r="0" b="0"/>
-        </a:gradFill>
+        <a:solidFill>
+          <a:schemeClr val="phClr"/>
+        </a:solidFill>
+        <a:solidFill>
+          <a:schemeClr val="phClr"/>
+        </a:solidFill>
       </a:fillStyleLst>
       <a:lnStyleLst>
-        <a:ln w="9525" cap="flat" cmpd="sng" algn="ctr">
+        <a:ln w="6350" cap="flat" cmpd="sng" algn="ctr">
           <a:prstDash val="solid"/>
+          <a:miter/>
         </a:ln>
-        <a:ln w="25400" cap="flat" cmpd="sng" algn="ctr">
+        <a:ln w="6350" cap="flat" cmpd="sng" algn="ctr">
           <a:prstDash val="solid"/>
+          <a:miter/>
         </a:ln>
-        <a:ln w="38100" cap="flat" cmpd="sng" algn="ctr">
+        <a:ln w="6350" cap="flat" cmpd="sng" algn="ctr">
           <a:prstDash val="solid"/>
+          <a:miter/>
         </a:ln>
       </a:lnStyleLst>
       <a:effectStyleLst>
@@ -19931,48 +15652,12 @@
         <a:solidFill>
           <a:schemeClr val="phClr"/>
         </a:solidFill>
-        <a:gradFill>
-          <a:gsLst>
-            <a:gs pos="0">
-              <a:schemeClr val="phClr">
-                <a:tint val="40000"/>
-              </a:schemeClr>
-            </a:gs>
-            <a:gs pos="40000">
-              <a:schemeClr val="phClr">
-                <a:tint val="45000"/>
-                <a:shade val="99000"/>
-              </a:schemeClr>
-            </a:gs>
-            <a:gs pos="100000">
-              <a:schemeClr val="phClr">
-                <a:shade val="20000"/>
-              </a:schemeClr>
-            </a:gs>
-          </a:gsLst>
-          <a:path path="circle">
-            <a:fillToRect l="50000" t="-80000" r="50000" b="180000"/>
-          </a:path>
-          <a:tileRect l="0" t="0" r="0" b="0"/>
-        </a:gradFill>
-        <a:gradFill>
-          <a:gsLst>
-            <a:gs pos="0">
-              <a:schemeClr val="phClr">
-                <a:tint val="80000"/>
-              </a:schemeClr>
-            </a:gs>
-            <a:gs pos="100000">
-              <a:schemeClr val="phClr">
-                <a:shade val="30000"/>
-              </a:schemeClr>
-            </a:gs>
-          </a:gsLst>
-          <a:path path="circle">
-            <a:fillToRect l="50000" t="50000" r="50000" b="50000"/>
-          </a:path>
-          <a:tileRect l="0" t="0" r="0" b="0"/>
-        </a:gradFill>
+        <a:solidFill>
+          <a:schemeClr val="phClr"/>
+        </a:solidFill>
+        <a:solidFill>
+          <a:schemeClr val="phClr"/>
+        </a:solidFill>
       </a:bgFillStyleLst>
     </a:fmtScheme>
   </a:themeElements>
@@ -20023,13 +15708,13 @@
     <a:fontScheme name="Office">
       <a:majorFont>
         <a:latin typeface="Arial" pitchFamily="0" charset="1"/>
-        <a:ea typeface=""/>
-        <a:cs typeface=""/>
+        <a:ea typeface="DejaVu Sans" pitchFamily="0" charset="1"/>
+        <a:cs typeface="DejaVu Sans" pitchFamily="0" charset="1"/>
       </a:majorFont>
       <a:minorFont>
         <a:latin typeface="Arial" pitchFamily="0" charset="1"/>
-        <a:ea typeface=""/>
-        <a:cs typeface=""/>
+        <a:ea typeface="DejaVu Sans" pitchFamily="0" charset="1"/>
+        <a:cs typeface="DejaVu Sans" pitchFamily="0" charset="1"/>
       </a:minorFont>
     </a:fontScheme>
     <a:fmtScheme>
@@ -20037,55 +15722,25 @@
         <a:solidFill>
           <a:schemeClr val="phClr"/>
         </a:solidFill>
-        <a:gradFill>
-          <a:gsLst>
-            <a:gs pos="0">
-              <a:schemeClr val="phClr">
-                <a:tint val="50000"/>
-              </a:schemeClr>
-            </a:gs>
-            <a:gs pos="35000">
-              <a:schemeClr val="phClr">
-                <a:tint val="37000"/>
-              </a:schemeClr>
-            </a:gs>
-            <a:gs pos="100000">
-              <a:schemeClr val="phClr">
-                <a:tint val="15000"/>
-              </a:schemeClr>
-            </a:gs>
-          </a:gsLst>
-          <a:lin ang="16200000" scaled="1"/>
-          <a:tileRect l="0" t="0" r="0" b="0"/>
-        </a:gradFill>
-        <a:gradFill>
-          <a:gsLst>
-            <a:gs pos="0">
-              <a:schemeClr val="phClr">
-                <a:tint val="100000"/>
-                <a:shade val="100000"/>
-              </a:schemeClr>
-            </a:gs>
-            <a:gs pos="100000">
-              <a:schemeClr val="phClr">
-                <a:tint val="50000"/>
-                <a:shade val="100000"/>
-              </a:schemeClr>
-            </a:gs>
-          </a:gsLst>
-          <a:lin ang="16200000" scaled="0"/>
-          <a:tileRect l="0" t="0" r="0" b="0"/>
-        </a:gradFill>
+        <a:solidFill>
+          <a:schemeClr val="phClr"/>
+        </a:solidFill>
+        <a:solidFill>
+          <a:schemeClr val="phClr"/>
+        </a:solidFill>
       </a:fillStyleLst>
       <a:lnStyleLst>
-        <a:ln w="9525" cap="flat" cmpd="sng" algn="ctr">
+        <a:ln w="6350" cap="flat" cmpd="sng" algn="ctr">
           <a:prstDash val="solid"/>
+          <a:miter/>
         </a:ln>
-        <a:ln w="25400" cap="flat" cmpd="sng" algn="ctr">
+        <a:ln w="6350" cap="flat" cmpd="sng" algn="ctr">
           <a:prstDash val="solid"/>
+          <a:miter/>
         </a:ln>
-        <a:ln w="38100" cap="flat" cmpd="sng" algn="ctr">
+        <a:ln w="6350" cap="flat" cmpd="sng" algn="ctr">
           <a:prstDash val="solid"/>
+          <a:miter/>
         </a:ln>
       </a:lnStyleLst>
       <a:effectStyleLst>
@@ -20103,48 +15758,12 @@
         <a:solidFill>
           <a:schemeClr val="phClr"/>
         </a:solidFill>
-        <a:gradFill>
-          <a:gsLst>
-            <a:gs pos="0">
-              <a:schemeClr val="phClr">
-                <a:tint val="40000"/>
-              </a:schemeClr>
-            </a:gs>
-            <a:gs pos="40000">
-              <a:schemeClr val="phClr">
-                <a:tint val="45000"/>
-                <a:shade val="99000"/>
-              </a:schemeClr>
-            </a:gs>
-            <a:gs pos="100000">
-              <a:schemeClr val="phClr">
-                <a:shade val="20000"/>
-              </a:schemeClr>
-            </a:gs>
-          </a:gsLst>
-          <a:path path="circle">
-            <a:fillToRect l="50000" t="-80000" r="50000" b="180000"/>
-          </a:path>
-          <a:tileRect l="0" t="0" r="0" b="0"/>
-        </a:gradFill>
-        <a:gradFill>
-          <a:gsLst>
-            <a:gs pos="0">
-              <a:schemeClr val="phClr">
-                <a:tint val="80000"/>
-              </a:schemeClr>
-            </a:gs>
-            <a:gs pos="100000">
-              <a:schemeClr val="phClr">
-                <a:shade val="30000"/>
-              </a:schemeClr>
-            </a:gs>
-          </a:gsLst>
-          <a:path path="circle">
-            <a:fillToRect l="50000" t="50000" r="50000" b="50000"/>
-          </a:path>
-          <a:tileRect l="0" t="0" r="0" b="0"/>
-        </a:gradFill>
+        <a:solidFill>
+          <a:schemeClr val="phClr"/>
+        </a:solidFill>
+        <a:solidFill>
+          <a:schemeClr val="phClr"/>
+        </a:solidFill>
       </a:bgFillStyleLst>
     </a:fmtScheme>
   </a:themeElements>
@@ -20195,13 +15814,13 @@
     <a:fontScheme name="Office">
       <a:majorFont>
         <a:latin typeface="Arial" pitchFamily="0" charset="1"/>
-        <a:ea typeface=""/>
-        <a:cs typeface=""/>
+        <a:ea typeface="DejaVu Sans" pitchFamily="0" charset="1"/>
+        <a:cs typeface="DejaVu Sans" pitchFamily="0" charset="1"/>
       </a:majorFont>
       <a:minorFont>
         <a:latin typeface="Arial" pitchFamily="0" charset="1"/>
-        <a:ea typeface=""/>
-        <a:cs typeface=""/>
+        <a:ea typeface="DejaVu Sans" pitchFamily="0" charset="1"/>
+        <a:cs typeface="DejaVu Sans" pitchFamily="0" charset="1"/>
       </a:minorFont>
     </a:fontScheme>
     <a:fmtScheme>
@@ -20209,55 +15828,25 @@
         <a:solidFill>
           <a:schemeClr val="phClr"/>
         </a:solidFill>
-        <a:gradFill>
-          <a:gsLst>
-            <a:gs pos="0">
-              <a:schemeClr val="phClr">
-                <a:tint val="50000"/>
-              </a:schemeClr>
-            </a:gs>
-            <a:gs pos="35000">
-              <a:schemeClr val="phClr">
-                <a:tint val="37000"/>
-              </a:schemeClr>
-            </a:gs>
-            <a:gs pos="100000">
-              <a:schemeClr val="phClr">
-                <a:tint val="15000"/>
-              </a:schemeClr>
-            </a:gs>
-          </a:gsLst>
-          <a:lin ang="16200000" scaled="1"/>
-          <a:tileRect l="0" t="0" r="0" b="0"/>
-        </a:gradFill>
-        <a:gradFill>
-          <a:gsLst>
-            <a:gs pos="0">
-              <a:schemeClr val="phClr">
-                <a:tint val="100000"/>
-                <a:shade val="100000"/>
-              </a:schemeClr>
-            </a:gs>
-            <a:gs pos="100000">
-              <a:schemeClr val="phClr">
-                <a:tint val="50000"/>
-                <a:shade val="100000"/>
-              </a:schemeClr>
-            </a:gs>
-          </a:gsLst>
-          <a:lin ang="16200000" scaled="0"/>
-          <a:tileRect l="0" t="0" r="0" b="0"/>
-        </a:gradFill>
+        <a:solidFill>
+          <a:schemeClr val="phClr"/>
+        </a:solidFill>
+        <a:solidFill>
+          <a:schemeClr val="phClr"/>
+        </a:solidFill>
       </a:fillStyleLst>
       <a:lnStyleLst>
-        <a:ln w="9525" cap="flat" cmpd="sng" algn="ctr">
+        <a:ln w="6350" cap="flat" cmpd="sng" algn="ctr">
           <a:prstDash val="solid"/>
+          <a:miter/>
         </a:ln>
-        <a:ln w="25400" cap="flat" cmpd="sng" algn="ctr">
+        <a:ln w="6350" cap="flat" cmpd="sng" algn="ctr">
           <a:prstDash val="solid"/>
+          <a:miter/>
         </a:ln>
-        <a:ln w="38100" cap="flat" cmpd="sng" algn="ctr">
+        <a:ln w="6350" cap="flat" cmpd="sng" algn="ctr">
           <a:prstDash val="solid"/>
+          <a:miter/>
         </a:ln>
       </a:lnStyleLst>
       <a:effectStyleLst>
@@ -20275,48 +15864,12 @@
         <a:solidFill>
           <a:schemeClr val="phClr"/>
         </a:solidFill>
-        <a:gradFill>
-          <a:gsLst>
-            <a:gs pos="0">
-              <a:schemeClr val="phClr">
-                <a:tint val="40000"/>
-              </a:schemeClr>
-            </a:gs>
-            <a:gs pos="40000">
-              <a:schemeClr val="phClr">
-                <a:tint val="45000"/>
-                <a:shade val="99000"/>
-              </a:schemeClr>
-            </a:gs>
-            <a:gs pos="100000">
-              <a:schemeClr val="phClr">
-                <a:shade val="20000"/>
-              </a:schemeClr>
-            </a:gs>
-          </a:gsLst>
-          <a:path path="circle">
-            <a:fillToRect l="50000" t="-80000" r="50000" b="180000"/>
-          </a:path>
-          <a:tileRect l="0" t="0" r="0" b="0"/>
-        </a:gradFill>
-        <a:gradFill>
-          <a:gsLst>
-            <a:gs pos="0">
-              <a:schemeClr val="phClr">
-                <a:tint val="80000"/>
-              </a:schemeClr>
-            </a:gs>
-            <a:gs pos="100000">
-              <a:schemeClr val="phClr">
-                <a:shade val="30000"/>
-              </a:schemeClr>
-            </a:gs>
-          </a:gsLst>
-          <a:path path="circle">
-            <a:fillToRect l="50000" t="50000" r="50000" b="50000"/>
-          </a:path>
-          <a:tileRect l="0" t="0" r="0" b="0"/>
-        </a:gradFill>
+        <a:solidFill>
+          <a:schemeClr val="phClr"/>
+        </a:solidFill>
+        <a:solidFill>
+          <a:schemeClr val="phClr"/>
+        </a:solidFill>
       </a:bgFillStyleLst>
     </a:fmtScheme>
   </a:themeElements>
@@ -20367,13 +15920,13 @@
     <a:fontScheme name="Office">
       <a:majorFont>
         <a:latin typeface="Arial" pitchFamily="0" charset="1"/>
-        <a:ea typeface=""/>
-        <a:cs typeface=""/>
+        <a:ea typeface="DejaVu Sans" pitchFamily="0" charset="1"/>
+        <a:cs typeface="DejaVu Sans" pitchFamily="0" charset="1"/>
       </a:majorFont>
       <a:minorFont>
         <a:latin typeface="Arial" pitchFamily="0" charset="1"/>
-        <a:ea typeface=""/>
-        <a:cs typeface=""/>
+        <a:ea typeface="DejaVu Sans" pitchFamily="0" charset="1"/>
+        <a:cs typeface="DejaVu Sans" pitchFamily="0" charset="1"/>
       </a:minorFont>
     </a:fontScheme>
     <a:fmtScheme>
@@ -20381,55 +15934,25 @@
         <a:solidFill>
           <a:schemeClr val="phClr"/>
         </a:solidFill>
-        <a:gradFill>
-          <a:gsLst>
-            <a:gs pos="0">
-              <a:schemeClr val="phClr">
-                <a:tint val="50000"/>
-              </a:schemeClr>
-            </a:gs>
-            <a:gs pos="35000">
-              <a:schemeClr val="phClr">
-                <a:tint val="37000"/>
-              </a:schemeClr>
-            </a:gs>
-            <a:gs pos="100000">
-              <a:schemeClr val="phClr">
-                <a:tint val="15000"/>
-              </a:schemeClr>
-            </a:gs>
-          </a:gsLst>
-          <a:lin ang="16200000" scaled="1"/>
-          <a:tileRect l="0" t="0" r="0" b="0"/>
-        </a:gradFill>
-        <a:gradFill>
-          <a:gsLst>
-            <a:gs pos="0">
-              <a:schemeClr val="phClr">
-                <a:tint val="100000"/>
-                <a:shade val="100000"/>
-              </a:schemeClr>
-            </a:gs>
-            <a:gs pos="100000">
-              <a:schemeClr val="phClr">
-                <a:tint val="50000"/>
-                <a:shade val="100000"/>
-              </a:schemeClr>
-            </a:gs>
-          </a:gsLst>
-          <a:lin ang="16200000" scaled="0"/>
-          <a:tileRect l="0" t="0" r="0" b="0"/>
-        </a:gradFill>
+        <a:solidFill>
+          <a:schemeClr val="phClr"/>
+        </a:solidFill>
+        <a:solidFill>
+          <a:schemeClr val="phClr"/>
+        </a:solidFill>
       </a:fillStyleLst>
       <a:lnStyleLst>
-        <a:ln w="9525" cap="flat" cmpd="sng" algn="ctr">
+        <a:ln w="6350" cap="flat" cmpd="sng" algn="ctr">
           <a:prstDash val="solid"/>
+          <a:miter/>
         </a:ln>
-        <a:ln w="25400" cap="flat" cmpd="sng" algn="ctr">
+        <a:ln w="6350" cap="flat" cmpd="sng" algn="ctr">
           <a:prstDash val="solid"/>
+          <a:miter/>
         </a:ln>
-        <a:ln w="38100" cap="flat" cmpd="sng" algn="ctr">
+        <a:ln w="6350" cap="flat" cmpd="sng" algn="ctr">
           <a:prstDash val="solid"/>
+          <a:miter/>
         </a:ln>
       </a:lnStyleLst>
       <a:effectStyleLst>
@@ -20447,48 +15970,12 @@
         <a:solidFill>
           <a:schemeClr val="phClr"/>
         </a:solidFill>
-        <a:gradFill>
-          <a:gsLst>
-            <a:gs pos="0">
-              <a:schemeClr val="phClr">
-                <a:tint val="40000"/>
-              </a:schemeClr>
-            </a:gs>
-            <a:gs pos="40000">
-              <a:schemeClr val="phClr">
-                <a:tint val="45000"/>
-                <a:shade val="99000"/>
-              </a:schemeClr>
-            </a:gs>
-            <a:gs pos="100000">
-              <a:schemeClr val="phClr">
-                <a:shade val="20000"/>
-              </a:schemeClr>
-            </a:gs>
-          </a:gsLst>
-          <a:path path="circle">
-            <a:fillToRect l="50000" t="-80000" r="50000" b="180000"/>
-          </a:path>
-          <a:tileRect l="0" t="0" r="0" b="0"/>
-        </a:gradFill>
-        <a:gradFill>
-          <a:gsLst>
-            <a:gs pos="0">
-              <a:schemeClr val="phClr">
-                <a:tint val="80000"/>
-              </a:schemeClr>
-            </a:gs>
-            <a:gs pos="100000">
-              <a:schemeClr val="phClr">
-                <a:shade val="30000"/>
-              </a:schemeClr>
-            </a:gs>
-          </a:gsLst>
-          <a:path path="circle">
-            <a:fillToRect l="50000" t="50000" r="50000" b="50000"/>
-          </a:path>
-          <a:tileRect l="0" t="0" r="0" b="0"/>
-        </a:gradFill>
+        <a:solidFill>
+          <a:schemeClr val="phClr"/>
+        </a:solidFill>
+        <a:solidFill>
+          <a:schemeClr val="phClr"/>
+        </a:solidFill>
       </a:bgFillStyleLst>
     </a:fmtScheme>
   </a:themeElements>
